--- a/보고서/PPT/결과보고서_6조(벽돌깨기게임).pptx
+++ b/보고서/PPT/결과보고서_6조(벽돌깨기게임).pptx
@@ -9,14 +9,15 @@
     <p:sldId id="291" r:id="rId3"/>
     <p:sldId id="294" r:id="rId4"/>
     <p:sldId id="333" r:id="rId5"/>
-    <p:sldId id="335" r:id="rId6"/>
-    <p:sldId id="336" r:id="rId7"/>
-    <p:sldId id="338" r:id="rId8"/>
-    <p:sldId id="340" r:id="rId9"/>
-    <p:sldId id="337" r:id="rId10"/>
-    <p:sldId id="339" r:id="rId11"/>
-    <p:sldId id="341" r:id="rId12"/>
-    <p:sldId id="303" r:id="rId13"/>
+    <p:sldId id="342" r:id="rId6"/>
+    <p:sldId id="335" r:id="rId7"/>
+    <p:sldId id="336" r:id="rId8"/>
+    <p:sldId id="338" r:id="rId9"/>
+    <p:sldId id="340" r:id="rId10"/>
+    <p:sldId id="337" r:id="rId11"/>
+    <p:sldId id="339" r:id="rId12"/>
+    <p:sldId id="341" r:id="rId13"/>
+    <p:sldId id="303" r:id="rId14"/>
   </p:sldIdLst>
   <p:sldSz cx="12192000" cy="6858000"/>
   <p:notesSz cx="6858000" cy="9144000"/>
@@ -5612,6 +5613,887 @@
                   <a:latin typeface="맑은 고딕" panose="020B0503020000020004" pitchFamily="50" charset="-127"/>
                   <a:ea typeface="맑은 고딕" panose="020B0503020000020004" pitchFamily="50" charset="-127"/>
                 </a:rPr>
+                <a:t>아이템</a:t>
+              </a:r>
+              <a:r>
+                <a:rPr lang="en-US" altLang="ko-KR" sz="2800" b="1" dirty="0">
+                  <a:ln>
+                    <a:solidFill>
+                      <a:schemeClr val="accent1">
+                        <a:shade val="15000"/>
+                        <a:alpha val="0"/>
+                      </a:schemeClr>
+                    </a:solidFill>
+                  </a:ln>
+                  <a:solidFill>
+                    <a:schemeClr val="tx1">
+                      <a:lumMod val="75000"/>
+                      <a:lumOff val="25000"/>
+                    </a:schemeClr>
+                  </a:solidFill>
+                  <a:latin typeface="맑은 고딕" panose="020B0503020000020004" pitchFamily="50" charset="-127"/>
+                  <a:ea typeface="맑은 고딕" panose="020B0503020000020004" pitchFamily="50" charset="-127"/>
+                </a:rPr>
+                <a:t>)</a:t>
+              </a:r>
+              <a:endParaRPr lang="ko-KR" altLang="en-US" sz="2800" b="1" dirty="0">
+                <a:ln>
+                  <a:solidFill>
+                    <a:schemeClr val="accent1">
+                      <a:shade val="15000"/>
+                      <a:alpha val="0"/>
+                    </a:schemeClr>
+                  </a:solidFill>
+                </a:ln>
+                <a:solidFill>
+                  <a:schemeClr val="tx1">
+                    <a:lumMod val="75000"/>
+                    <a:lumOff val="25000"/>
+                  </a:schemeClr>
+                </a:solidFill>
+                <a:latin typeface="맑은 고딕" panose="020B0503020000020004" pitchFamily="50" charset="-127"/>
+                <a:ea typeface="맑은 고딕" panose="020B0503020000020004" pitchFamily="50" charset="-127"/>
+              </a:endParaRPr>
+            </a:p>
+          </p:txBody>
+        </p:sp>
+        <p:sp>
+          <p:nvSpPr>
+            <p:cNvPr id="25" name="TextBox 24">
+              <a:extLst>
+                <a:ext uri="{FF2B5EF4-FFF2-40B4-BE49-F238E27FC236}">
+                  <a16:creationId xmlns:a16="http://schemas.microsoft.com/office/drawing/2014/main" id="{093CAA92-4EAE-8A8B-E8EE-0F5B51065B1A}"/>
+                </a:ext>
+              </a:extLst>
+            </p:cNvPr>
+            <p:cNvSpPr txBox="1"/>
+            <p:nvPr/>
+          </p:nvSpPr>
+          <p:spPr>
+            <a:xfrm>
+              <a:off x="376102" y="333243"/>
+              <a:ext cx="1266679" cy="830997"/>
+            </a:xfrm>
+            <a:prstGeom prst="rect">
+              <a:avLst/>
+            </a:prstGeom>
+            <a:noFill/>
+          </p:spPr>
+          <p:txBody>
+            <a:bodyPr wrap="square" tIns="0" bIns="0">
+              <a:spAutoFit/>
+            </a:bodyPr>
+            <a:lstStyle/>
+            <a:p>
+              <a:pPr eaLnBrk="1" fontAlgn="auto" latinLnBrk="1" hangingPunct="1">
+                <a:spcBef>
+                  <a:spcPts val="0"/>
+                </a:spcBef>
+                <a:spcAft>
+                  <a:spcPts val="0"/>
+                </a:spcAft>
+                <a:defRPr/>
+              </a:pPr>
+              <a:r>
+                <a:rPr lang="en-US" altLang="ko-KR" sz="5400" dirty="0">
+                  <a:ln>
+                    <a:solidFill>
+                      <a:schemeClr val="accent1">
+                        <a:shade val="15000"/>
+                        <a:alpha val="0"/>
+                      </a:schemeClr>
+                    </a:solidFill>
+                  </a:ln>
+                  <a:solidFill>
+                    <a:srgbClr val="3378C8"/>
+                  </a:solidFill>
+                  <a:latin typeface="세방고딕 Bold" panose="00000800000000000000" pitchFamily="2" charset="-127"/>
+                  <a:ea typeface="세방고딕 Bold" panose="00000800000000000000" pitchFamily="2" charset="-127"/>
+                </a:rPr>
+                <a:t>01</a:t>
+              </a:r>
+              <a:endParaRPr lang="ko-KR" altLang="en-US" sz="4400" b="1" dirty="0">
+                <a:ln>
+                  <a:solidFill>
+                    <a:schemeClr val="accent1">
+                      <a:shade val="15000"/>
+                      <a:alpha val="0"/>
+                    </a:schemeClr>
+                  </a:solidFill>
+                </a:ln>
+                <a:solidFill>
+                  <a:srgbClr val="3378C8"/>
+                </a:solidFill>
+                <a:latin typeface="세방고딕 Regular" panose="00000500000000000000" pitchFamily="2" charset="-127"/>
+                <a:ea typeface="세방고딕 Regular" panose="00000500000000000000" pitchFamily="2" charset="-127"/>
+              </a:endParaRPr>
+            </a:p>
+          </p:txBody>
+        </p:sp>
+      </p:grpSp>
+      <p:pic>
+        <p:nvPicPr>
+          <p:cNvPr id="26" name="그림 25">
+            <a:extLst>
+              <a:ext uri="{FF2B5EF4-FFF2-40B4-BE49-F238E27FC236}">
+                <a16:creationId xmlns:a16="http://schemas.microsoft.com/office/drawing/2014/main" id="{FE80A41B-F61E-4713-97AE-0B084B8425AD}"/>
+              </a:ext>
+            </a:extLst>
+          </p:cNvPr>
+          <p:cNvPicPr>
+            <a:picLocks noChangeAspect="1"/>
+          </p:cNvPicPr>
+          <p:nvPr/>
+        </p:nvPicPr>
+        <p:blipFill rotWithShape="1">
+          <a:blip r:embed="rId2" cstate="print">
+            <a:duotone>
+              <a:schemeClr val="accent5">
+                <a:shade val="45000"/>
+                <a:satMod val="135000"/>
+              </a:schemeClr>
+              <a:prstClr val="white"/>
+            </a:duotone>
+            <a:alphaModFix amt="27000"/>
+            <a:extLst>
+              <a:ext uri="{28A0092B-C50C-407E-A947-70E740481C1C}">
+                <a14:useLocalDpi xmlns:a14="http://schemas.microsoft.com/office/drawing/2010/main"/>
+              </a:ext>
+            </a:extLst>
+          </a:blip>
+          <a:srcRect/>
+          <a:stretch/>
+        </p:blipFill>
+        <p:spPr>
+          <a:xfrm rot="10800000" flipV="1">
+            <a:off x="-1" y="1673336"/>
+            <a:ext cx="12192000" cy="233580"/>
+          </a:xfrm>
+          <a:prstGeom prst="rect">
+            <a:avLst/>
+          </a:prstGeom>
+        </p:spPr>
+      </p:pic>
+      <p:sp>
+        <p:nvSpPr>
+          <p:cNvPr id="31" name="TextBox 30">
+            <a:extLst>
+              <a:ext uri="{FF2B5EF4-FFF2-40B4-BE49-F238E27FC236}">
+                <a16:creationId xmlns:a16="http://schemas.microsoft.com/office/drawing/2014/main" id="{F3F47CD5-B807-B83F-61E9-F4274413B9B9}"/>
+              </a:ext>
+            </a:extLst>
+          </p:cNvPr>
+          <p:cNvSpPr txBox="1"/>
+          <p:nvPr/>
+        </p:nvSpPr>
+        <p:spPr>
+          <a:xfrm>
+            <a:off x="0" y="0"/>
+            <a:ext cx="12192000" cy="114300"/>
+          </a:xfrm>
+          <a:prstGeom prst="rect">
+            <a:avLst/>
+          </a:prstGeom>
+          <a:solidFill>
+            <a:srgbClr val="FFD85C"/>
+          </a:solidFill>
+          <a:effectLst/>
+        </p:spPr>
+        <p:txBody>
+          <a:bodyPr wrap="square" rtlCol="0" anchor="ctr">
+            <a:noAutofit/>
+          </a:bodyPr>
+          <a:lstStyle/>
+          <a:p>
+            <a:pPr algn="ctr"/>
+            <a:endParaRPr lang="ko-KR" altLang="en-US" sz="1600" b="1" spc="600" dirty="0">
+              <a:ln>
+                <a:solidFill>
+                  <a:schemeClr val="accent1">
+                    <a:shade val="15000"/>
+                    <a:alpha val="0"/>
+                  </a:schemeClr>
+                </a:solidFill>
+              </a:ln>
+              <a:solidFill>
+                <a:srgbClr val="3378C8"/>
+              </a:solidFill>
+              <a:latin typeface="세방고딕 Regular" panose="00000500000000000000" pitchFamily="2" charset="-127"/>
+              <a:ea typeface="세방고딕 Regular" panose="00000500000000000000" pitchFamily="2" charset="-127"/>
+            </a:endParaRPr>
+          </a:p>
+        </p:txBody>
+      </p:sp>
+      <p:sp>
+        <p:nvSpPr>
+          <p:cNvPr id="32" name="TextBox 31">
+            <a:extLst>
+              <a:ext uri="{FF2B5EF4-FFF2-40B4-BE49-F238E27FC236}">
+                <a16:creationId xmlns:a16="http://schemas.microsoft.com/office/drawing/2014/main" id="{33D5EC40-66CF-4031-0B6C-BB0FF72B95AC}"/>
+              </a:ext>
+            </a:extLst>
+          </p:cNvPr>
+          <p:cNvSpPr txBox="1"/>
+          <p:nvPr/>
+        </p:nvSpPr>
+        <p:spPr>
+          <a:xfrm>
+            <a:off x="0" y="0"/>
+            <a:ext cx="1336675" cy="114300"/>
+          </a:xfrm>
+          <a:prstGeom prst="rect">
+            <a:avLst/>
+          </a:prstGeom>
+          <a:solidFill>
+            <a:srgbClr val="3378C8"/>
+          </a:solidFill>
+          <a:effectLst/>
+        </p:spPr>
+        <p:txBody>
+          <a:bodyPr wrap="square" rtlCol="0" anchor="ctr">
+            <a:noAutofit/>
+          </a:bodyPr>
+          <a:lstStyle/>
+          <a:p>
+            <a:pPr algn="ctr"/>
+            <a:endParaRPr lang="ko-KR" altLang="en-US" sz="1600" b="1" spc="600" dirty="0">
+              <a:ln>
+                <a:solidFill>
+                  <a:schemeClr val="accent1">
+                    <a:shade val="15000"/>
+                    <a:alpha val="0"/>
+                  </a:schemeClr>
+                </a:solidFill>
+              </a:ln>
+              <a:solidFill>
+                <a:srgbClr val="3378C8"/>
+              </a:solidFill>
+              <a:latin typeface="세방고딕 Regular" panose="00000500000000000000" pitchFamily="2" charset="-127"/>
+              <a:ea typeface="세방고딕 Regular" panose="00000500000000000000" pitchFamily="2" charset="-127"/>
+            </a:endParaRPr>
+          </a:p>
+        </p:txBody>
+      </p:sp>
+      <p:pic>
+        <p:nvPicPr>
+          <p:cNvPr id="38" name="그래픽 37">
+            <a:extLst>
+              <a:ext uri="{FF2B5EF4-FFF2-40B4-BE49-F238E27FC236}">
+                <a16:creationId xmlns:a16="http://schemas.microsoft.com/office/drawing/2014/main" id="{52169E4C-2799-F656-9DE1-1585D60362A7}"/>
+              </a:ext>
+            </a:extLst>
+          </p:cNvPr>
+          <p:cNvPicPr>
+            <a:picLocks noChangeAspect="1"/>
+          </p:cNvPicPr>
+          <p:nvPr/>
+        </p:nvPicPr>
+        <p:blipFill rotWithShape="1">
+          <a:blip r:embed="rId3">
+            <a:extLst>
+              <a:ext uri="{96DAC541-7B7A-43D3-8B79-37D633B846F1}">
+                <asvg:svgBlip xmlns:asvg="http://schemas.microsoft.com/office/drawing/2016/SVG/main" r:embed="rId4"/>
+              </a:ext>
+            </a:extLst>
+          </a:blip>
+          <a:srcRect l="34974"/>
+          <a:stretch/>
+        </p:blipFill>
+        <p:spPr>
+          <a:xfrm rot="14660350">
+            <a:off x="1714" y="5530566"/>
+            <a:ext cx="1452422" cy="917364"/>
+          </a:xfrm>
+          <a:prstGeom prst="rect">
+            <a:avLst/>
+          </a:prstGeom>
+        </p:spPr>
+      </p:pic>
+      <p:pic>
+        <p:nvPicPr>
+          <p:cNvPr id="5" name="그래픽 4">
+            <a:extLst>
+              <a:ext uri="{FF2B5EF4-FFF2-40B4-BE49-F238E27FC236}">
+                <a16:creationId xmlns:a16="http://schemas.microsoft.com/office/drawing/2014/main" id="{F78E59B9-5F04-49C5-1722-52369FFA7F3C}"/>
+              </a:ext>
+            </a:extLst>
+          </p:cNvPr>
+          <p:cNvPicPr>
+            <a:picLocks noChangeAspect="1"/>
+          </p:cNvPicPr>
+          <p:nvPr/>
+        </p:nvPicPr>
+        <p:blipFill rotWithShape="1">
+          <a:blip r:embed="rId5">
+            <a:extLst>
+              <a:ext uri="{96DAC541-7B7A-43D3-8B79-37D633B846F1}">
+                <asvg:svgBlip xmlns:asvg="http://schemas.microsoft.com/office/drawing/2016/SVG/main" r:embed="rId6"/>
+              </a:ext>
+            </a:extLst>
+          </a:blip>
+          <a:srcRect l="45412"/>
+          <a:stretch/>
+        </p:blipFill>
+        <p:spPr>
+          <a:xfrm>
+            <a:off x="-1" y="3018378"/>
+            <a:ext cx="2914927" cy="2847758"/>
+          </a:xfrm>
+          <a:prstGeom prst="rect">
+            <a:avLst/>
+          </a:prstGeom>
+        </p:spPr>
+      </p:pic>
+      <p:pic>
+        <p:nvPicPr>
+          <p:cNvPr id="7" name="그래픽 6">
+            <a:extLst>
+              <a:ext uri="{FF2B5EF4-FFF2-40B4-BE49-F238E27FC236}">
+                <a16:creationId xmlns:a16="http://schemas.microsoft.com/office/drawing/2014/main" id="{83FBC032-B6AF-A79B-5B30-F603859AE362}"/>
+              </a:ext>
+            </a:extLst>
+          </p:cNvPr>
+          <p:cNvPicPr>
+            <a:picLocks noChangeAspect="1"/>
+          </p:cNvPicPr>
+          <p:nvPr/>
+        </p:nvPicPr>
+        <p:blipFill>
+          <a:blip r:embed="rId7">
+            <a:extLst>
+              <a:ext uri="{96DAC541-7B7A-43D3-8B79-37D633B846F1}">
+                <asvg:svgBlip xmlns:asvg="http://schemas.microsoft.com/office/drawing/2016/SVG/main" r:embed="rId8"/>
+              </a:ext>
+            </a:extLst>
+          </a:blip>
+          <a:stretch>
+            <a:fillRect/>
+          </a:stretch>
+        </p:blipFill>
+        <p:spPr>
+          <a:xfrm>
+            <a:off x="0" y="6328534"/>
+            <a:ext cx="12192000" cy="529466"/>
+          </a:xfrm>
+          <a:prstGeom prst="rect">
+            <a:avLst/>
+          </a:prstGeom>
+        </p:spPr>
+      </p:pic>
+      <p:pic>
+        <p:nvPicPr>
+          <p:cNvPr id="3" name="그림 2">
+            <a:extLst>
+              <a:ext uri="{FF2B5EF4-FFF2-40B4-BE49-F238E27FC236}">
+                <a16:creationId xmlns:a16="http://schemas.microsoft.com/office/drawing/2014/main" id="{42910119-75C6-E73C-D0BE-AAE4A83EA0A8}"/>
+              </a:ext>
+            </a:extLst>
+          </p:cNvPr>
+          <p:cNvPicPr>
+            <a:picLocks noChangeAspect="1"/>
+          </p:cNvPicPr>
+          <p:nvPr/>
+        </p:nvPicPr>
+        <p:blipFill>
+          <a:blip r:embed="rId9"/>
+          <a:stretch>
+            <a:fillRect/>
+          </a:stretch>
+        </p:blipFill>
+        <p:spPr>
+          <a:xfrm>
+            <a:off x="294412" y="2030653"/>
+            <a:ext cx="3781953" cy="3940559"/>
+          </a:xfrm>
+          <a:prstGeom prst="rect">
+            <a:avLst/>
+          </a:prstGeom>
+        </p:spPr>
+      </p:pic>
+      <p:pic>
+        <p:nvPicPr>
+          <p:cNvPr id="6" name="그림 5">
+            <a:extLst>
+              <a:ext uri="{FF2B5EF4-FFF2-40B4-BE49-F238E27FC236}">
+                <a16:creationId xmlns:a16="http://schemas.microsoft.com/office/drawing/2014/main" id="{A72DDFB0-7B14-6441-98CD-B2987DCF1783}"/>
+              </a:ext>
+            </a:extLst>
+          </p:cNvPr>
+          <p:cNvPicPr>
+            <a:picLocks noChangeAspect="1"/>
+          </p:cNvPicPr>
+          <p:nvPr/>
+        </p:nvPicPr>
+        <p:blipFill>
+          <a:blip r:embed="rId10"/>
+          <a:stretch>
+            <a:fillRect/>
+          </a:stretch>
+        </p:blipFill>
+        <p:spPr>
+          <a:xfrm>
+            <a:off x="7989303" y="1906917"/>
+            <a:ext cx="4124901" cy="4082371"/>
+          </a:xfrm>
+          <a:prstGeom prst="rect">
+            <a:avLst/>
+          </a:prstGeom>
+        </p:spPr>
+      </p:pic>
+      <p:cxnSp>
+        <p:nvCxnSpPr>
+          <p:cNvPr id="9" name="연결선: 꺾임 8">
+            <a:extLst>
+              <a:ext uri="{FF2B5EF4-FFF2-40B4-BE49-F238E27FC236}">
+                <a16:creationId xmlns:a16="http://schemas.microsoft.com/office/drawing/2014/main" id="{ADC02F6F-FAC8-572A-B8CD-977DE4CD2C9B}"/>
+              </a:ext>
+            </a:extLst>
+          </p:cNvPr>
+          <p:cNvCxnSpPr>
+            <a:cxnSpLocks/>
+          </p:cNvCxnSpPr>
+          <p:nvPr/>
+        </p:nvCxnSpPr>
+        <p:spPr>
+          <a:xfrm rot="16200000" flipH="1">
+            <a:off x="3754328" y="2171353"/>
+            <a:ext cx="4605549" cy="3708809"/>
+          </a:xfrm>
+          <a:prstGeom prst="bentConnector3">
+            <a:avLst>
+              <a:gd name="adj1" fmla="val 50000"/>
+            </a:avLst>
+          </a:prstGeom>
+        </p:spPr>
+        <p:style>
+          <a:lnRef idx="1">
+            <a:schemeClr val="accent1"/>
+          </a:lnRef>
+          <a:fillRef idx="0">
+            <a:schemeClr val="accent1"/>
+          </a:fillRef>
+          <a:effectRef idx="0">
+            <a:schemeClr val="accent1"/>
+          </a:effectRef>
+          <a:fontRef idx="minor">
+            <a:schemeClr val="tx1"/>
+          </a:fontRef>
+        </p:style>
+      </p:cxnSp>
+      <p:sp>
+        <p:nvSpPr>
+          <p:cNvPr id="13" name="TextBox 12">
+            <a:extLst>
+              <a:ext uri="{FF2B5EF4-FFF2-40B4-BE49-F238E27FC236}">
+                <a16:creationId xmlns:a16="http://schemas.microsoft.com/office/drawing/2014/main" id="{F180433A-CF02-72FE-2C0D-A068955B117E}"/>
+              </a:ext>
+            </a:extLst>
+          </p:cNvPr>
+          <p:cNvSpPr txBox="1"/>
+          <p:nvPr/>
+        </p:nvSpPr>
+        <p:spPr>
+          <a:xfrm>
+            <a:off x="4582845" y="4317061"/>
+            <a:ext cx="3176013" cy="646331"/>
+          </a:xfrm>
+          <a:prstGeom prst="rect">
+            <a:avLst/>
+          </a:prstGeom>
+          <a:noFill/>
+        </p:spPr>
+        <p:txBody>
+          <a:bodyPr wrap="square" rtlCol="0">
+            <a:spAutoFit/>
+          </a:bodyPr>
+          <a:lstStyle/>
+          <a:p>
+            <a:r>
+              <a:rPr lang="ko-KR" altLang="en-US" dirty="0">
+                <a:solidFill>
+                  <a:srgbClr val="FF0000"/>
+                </a:solidFill>
+              </a:rPr>
+              <a:t>빨간색</a:t>
+            </a:r>
+            <a:r>
+              <a:rPr lang="en-US" altLang="ko-KR" dirty="0"/>
+              <a:t>: </a:t>
+            </a:r>
+            <a:r>
+              <a:rPr lang="ko-KR" altLang="en-US" dirty="0"/>
+              <a:t>받침대로 아이템과 충돌발생시 </a:t>
+            </a:r>
+            <a:r>
+              <a:rPr lang="en-US" altLang="ko-KR" dirty="0"/>
+              <a:t>Life</a:t>
+            </a:r>
+            <a:r>
+              <a:rPr lang="ko-KR" altLang="en-US" dirty="0"/>
+              <a:t>를 </a:t>
+            </a:r>
+            <a:r>
+              <a:rPr lang="en-US" altLang="ko-KR" dirty="0"/>
+              <a:t>1 </a:t>
+            </a:r>
+            <a:r>
+              <a:rPr lang="ko-KR" altLang="en-US" dirty="0"/>
+              <a:t>회복</a:t>
+            </a:r>
+          </a:p>
+        </p:txBody>
+      </p:sp>
+      <p:sp>
+        <p:nvSpPr>
+          <p:cNvPr id="14" name="TextBox 13">
+            <a:extLst>
+              <a:ext uri="{FF2B5EF4-FFF2-40B4-BE49-F238E27FC236}">
+                <a16:creationId xmlns:a16="http://schemas.microsoft.com/office/drawing/2014/main" id="{3C42EB31-E1F7-78FE-286E-59AA218088E6}"/>
+              </a:ext>
+            </a:extLst>
+          </p:cNvPr>
+          <p:cNvSpPr txBox="1"/>
+          <p:nvPr/>
+        </p:nvSpPr>
+        <p:spPr>
+          <a:xfrm>
+            <a:off x="4595077" y="2881523"/>
+            <a:ext cx="3176013" cy="923330"/>
+          </a:xfrm>
+          <a:prstGeom prst="rect">
+            <a:avLst/>
+          </a:prstGeom>
+          <a:noFill/>
+        </p:spPr>
+        <p:txBody>
+          <a:bodyPr wrap="square" rtlCol="0">
+            <a:spAutoFit/>
+          </a:bodyPr>
+          <a:lstStyle/>
+          <a:p>
+            <a:r>
+              <a:rPr lang="ko-KR" altLang="en-US" dirty="0">
+                <a:solidFill>
+                  <a:srgbClr val="00B0F0"/>
+                </a:solidFill>
+              </a:rPr>
+              <a:t>파란색</a:t>
+            </a:r>
+            <a:r>
+              <a:rPr lang="en-US" altLang="ko-KR" dirty="0"/>
+              <a:t>: </a:t>
+            </a:r>
+            <a:r>
+              <a:rPr lang="ko-KR" altLang="en-US" dirty="0"/>
+              <a:t>받침대로 아이템과 충돌발생시 공의 위치를 초기상태로</a:t>
+            </a:r>
+          </a:p>
+        </p:txBody>
+      </p:sp>
+      <p:sp>
+        <p:nvSpPr>
+          <p:cNvPr id="8" name="TextBox 7">
+            <a:extLst>
+              <a:ext uri="{FF2B5EF4-FFF2-40B4-BE49-F238E27FC236}">
+                <a16:creationId xmlns:a16="http://schemas.microsoft.com/office/drawing/2014/main" id="{2293372F-A805-3A02-3107-F6F66FC95146}"/>
+              </a:ext>
+            </a:extLst>
+          </p:cNvPr>
+          <p:cNvSpPr txBox="1"/>
+          <p:nvPr/>
+        </p:nvSpPr>
+        <p:spPr>
+          <a:xfrm>
+            <a:off x="2732474" y="6364040"/>
+            <a:ext cx="7184251" cy="369332"/>
+          </a:xfrm>
+          <a:prstGeom prst="rect">
+            <a:avLst/>
+          </a:prstGeom>
+          <a:noFill/>
+        </p:spPr>
+        <p:txBody>
+          <a:bodyPr wrap="square" rtlCol="0">
+            <a:spAutoFit/>
+          </a:bodyPr>
+          <a:lstStyle/>
+          <a:p>
+            <a:r>
+              <a:rPr lang="ko-KR" altLang="en-US" dirty="0"/>
+              <a:t>벽돌이 파괴될 때 일정확률로 랜덤의 아이템을 습득할 수 있음</a:t>
+            </a:r>
+          </a:p>
+        </p:txBody>
+      </p:sp>
+    </p:spTree>
+    <p:extLst>
+      <p:ext uri="{BB962C8B-B14F-4D97-AF65-F5344CB8AC3E}">
+        <p14:creationId xmlns:p14="http://schemas.microsoft.com/office/powerpoint/2010/main" val="376960664"/>
+      </p:ext>
+    </p:extLst>
+  </p:cSld>
+  <p:clrMapOvr>
+    <a:masterClrMapping/>
+  </p:clrMapOvr>
+</p:sld>
+</file>
+
+<file path=ppt/slides/slide11.xml><?xml version="1.0" encoding="utf-8"?>
+<p:sld xmlns:a="http://schemas.openxmlformats.org/drawingml/2006/main" xmlns:r="http://schemas.openxmlformats.org/officeDocument/2006/relationships" xmlns:p="http://schemas.openxmlformats.org/presentationml/2006/main">
+  <p:cSld>
+    <p:spTree>
+      <p:nvGrpSpPr>
+        <p:cNvPr id="1" name=""/>
+        <p:cNvGrpSpPr/>
+        <p:nvPr/>
+      </p:nvGrpSpPr>
+      <p:grpSpPr>
+        <a:xfrm>
+          <a:off x="0" y="0"/>
+          <a:ext cx="0" cy="0"/>
+          <a:chOff x="0" y="0"/>
+          <a:chExt cx="0" cy="0"/>
+        </a:xfrm>
+      </p:grpSpPr>
+      <p:sp>
+        <p:nvSpPr>
+          <p:cNvPr id="18" name="사각형: 둥근 한쪽 모서리 17">
+            <a:extLst>
+              <a:ext uri="{FF2B5EF4-FFF2-40B4-BE49-F238E27FC236}">
+                <a16:creationId xmlns:a16="http://schemas.microsoft.com/office/drawing/2014/main" id="{2EAF6D58-084F-2DED-DF2E-AAB0DF464557}"/>
+              </a:ext>
+            </a:extLst>
+          </p:cNvPr>
+          <p:cNvSpPr/>
+          <p:nvPr/>
+        </p:nvSpPr>
+        <p:spPr>
+          <a:xfrm flipH="1" flipV="1">
+            <a:off x="174170" y="70719"/>
+            <a:ext cx="12017829" cy="1221051"/>
+          </a:xfrm>
+          <a:prstGeom prst="round1Rect">
+            <a:avLst>
+              <a:gd name="adj" fmla="val 23799"/>
+            </a:avLst>
+          </a:prstGeom>
+          <a:solidFill>
+            <a:schemeClr val="bg1">
+              <a:lumMod val="95000"/>
+              <a:alpha val="50000"/>
+            </a:schemeClr>
+          </a:solidFill>
+          <a:ln w="10818" cap="flat">
+            <a:noFill/>
+            <a:prstDash val="solid"/>
+            <a:miter/>
+          </a:ln>
+        </p:spPr>
+        <p:style>
+          <a:lnRef idx="2">
+            <a:schemeClr val="accent1">
+              <a:shade val="15000"/>
+            </a:schemeClr>
+          </a:lnRef>
+          <a:fillRef idx="1">
+            <a:schemeClr val="accent1"/>
+          </a:fillRef>
+          <a:effectRef idx="0">
+            <a:schemeClr val="accent1"/>
+          </a:effectRef>
+          <a:fontRef idx="minor">
+            <a:schemeClr val="lt1"/>
+          </a:fontRef>
+        </p:style>
+        <p:txBody>
+          <a:bodyPr rtlCol="0" anchor="ctr"/>
+          <a:lstStyle/>
+          <a:p>
+            <a:pPr algn="ctr"/>
+            <a:endParaRPr lang="ko-KR" altLang="en-US"/>
+          </a:p>
+        </p:txBody>
+      </p:sp>
+      <p:grpSp>
+        <p:nvGrpSpPr>
+          <p:cNvPr id="20" name="그룹 19">
+            <a:extLst>
+              <a:ext uri="{FF2B5EF4-FFF2-40B4-BE49-F238E27FC236}">
+                <a16:creationId xmlns:a16="http://schemas.microsoft.com/office/drawing/2014/main" id="{739452E3-2013-66BF-2EBE-F0EC960C4077}"/>
+              </a:ext>
+            </a:extLst>
+          </p:cNvPr>
+          <p:cNvGrpSpPr/>
+          <p:nvPr/>
+        </p:nvGrpSpPr>
+        <p:grpSpPr>
+          <a:xfrm>
+            <a:off x="376102" y="333243"/>
+            <a:ext cx="5948498" cy="830997"/>
+            <a:chOff x="376102" y="333243"/>
+            <a:chExt cx="5948498" cy="830997"/>
+          </a:xfrm>
+        </p:grpSpPr>
+        <p:sp>
+          <p:nvSpPr>
+            <p:cNvPr id="22" name="TextBox 21">
+              <a:extLst>
+                <a:ext uri="{FF2B5EF4-FFF2-40B4-BE49-F238E27FC236}">
+                  <a16:creationId xmlns:a16="http://schemas.microsoft.com/office/drawing/2014/main" id="{92519771-A232-D9CF-4769-EBFF2F8CFBB1}"/>
+                </a:ext>
+              </a:extLst>
+            </p:cNvPr>
+            <p:cNvSpPr txBox="1"/>
+            <p:nvPr/>
+          </p:nvSpPr>
+          <p:spPr>
+            <a:xfrm>
+              <a:off x="1461721" y="366114"/>
+              <a:ext cx="2252213" cy="276999"/>
+            </a:xfrm>
+            <a:prstGeom prst="rect">
+              <a:avLst/>
+            </a:prstGeom>
+            <a:noFill/>
+          </p:spPr>
+          <p:txBody>
+            <a:bodyPr wrap="square">
+              <a:spAutoFit/>
+            </a:bodyPr>
+            <a:lstStyle/>
+            <a:p>
+              <a:r>
+                <a:rPr lang="en-US" altLang="ko-KR" sz="1200" b="1" dirty="0">
+                  <a:ln>
+                    <a:solidFill>
+                      <a:schemeClr val="accent1">
+                        <a:shade val="15000"/>
+                        <a:alpha val="0"/>
+                      </a:schemeClr>
+                    </a:solidFill>
+                  </a:ln>
+                  <a:solidFill>
+                    <a:srgbClr val="3378C8">
+                      <a:alpha val="50000"/>
+                    </a:srgbClr>
+                  </a:solidFill>
+                  <a:latin typeface="맑은 고딕" panose="020B0503020000020004" pitchFamily="50" charset="-127"/>
+                  <a:ea typeface="맑은 고딕" panose="020B0503020000020004" pitchFamily="50" charset="-127"/>
+                </a:rPr>
+                <a:t>K-Digital Training</a:t>
+              </a:r>
+              <a:endParaRPr lang="ko-KR" altLang="en-US" sz="1200" b="1" dirty="0">
+                <a:ln>
+                  <a:solidFill>
+                    <a:schemeClr val="accent1">
+                      <a:shade val="15000"/>
+                      <a:alpha val="0"/>
+                    </a:schemeClr>
+                  </a:solidFill>
+                </a:ln>
+                <a:solidFill>
+                  <a:srgbClr val="3378C8">
+                    <a:alpha val="50000"/>
+                  </a:srgbClr>
+                </a:solidFill>
+                <a:latin typeface="맑은 고딕" panose="020B0503020000020004" pitchFamily="50" charset="-127"/>
+                <a:ea typeface="맑은 고딕" panose="020B0503020000020004" pitchFamily="50" charset="-127"/>
+              </a:endParaRPr>
+            </a:p>
+          </p:txBody>
+        </p:sp>
+        <p:sp>
+          <p:nvSpPr>
+            <p:cNvPr id="23" name="TextBox 22">
+              <a:extLst>
+                <a:ext uri="{FF2B5EF4-FFF2-40B4-BE49-F238E27FC236}">
+                  <a16:creationId xmlns:a16="http://schemas.microsoft.com/office/drawing/2014/main" id="{EE109AB5-00CA-F0E8-7FD9-645FB6E912A9}"/>
+                </a:ext>
+              </a:extLst>
+            </p:cNvPr>
+            <p:cNvSpPr txBox="1"/>
+            <p:nvPr/>
+          </p:nvSpPr>
+          <p:spPr>
+            <a:xfrm>
+              <a:off x="1461721" y="585057"/>
+              <a:ext cx="4862879" cy="523220"/>
+            </a:xfrm>
+            <a:prstGeom prst="rect">
+              <a:avLst/>
+            </a:prstGeom>
+            <a:noFill/>
+          </p:spPr>
+          <p:txBody>
+            <a:bodyPr wrap="square">
+              <a:spAutoFit/>
+            </a:bodyPr>
+            <a:lstStyle/>
+            <a:p>
+              <a:pPr>
+                <a:defRPr/>
+              </a:pPr>
+              <a:r>
+                <a:rPr lang="ko-KR" altLang="en-US" sz="2800" b="1" dirty="0">
+                  <a:ln>
+                    <a:solidFill>
+                      <a:schemeClr val="accent1">
+                        <a:shade val="15000"/>
+                        <a:alpha val="0"/>
+                      </a:schemeClr>
+                    </a:solidFill>
+                  </a:ln>
+                  <a:solidFill>
+                    <a:schemeClr val="tx1">
+                      <a:lumMod val="75000"/>
+                      <a:lumOff val="25000"/>
+                    </a:schemeClr>
+                  </a:solidFill>
+                  <a:latin typeface="맑은 고딕" panose="020B0503020000020004" pitchFamily="50" charset="-127"/>
+                  <a:ea typeface="맑은 고딕" panose="020B0503020000020004" pitchFamily="50" charset="-127"/>
+                </a:rPr>
+                <a:t>프로젝트 결과화면</a:t>
+              </a:r>
+              <a:r>
+                <a:rPr lang="en-US" altLang="ko-KR" sz="2800" b="1" dirty="0">
+                  <a:ln>
+                    <a:solidFill>
+                      <a:schemeClr val="accent1">
+                        <a:shade val="15000"/>
+                        <a:alpha val="0"/>
+                      </a:schemeClr>
+                    </a:solidFill>
+                  </a:ln>
+                  <a:solidFill>
+                    <a:schemeClr val="tx1">
+                      <a:lumMod val="75000"/>
+                      <a:lumOff val="25000"/>
+                    </a:schemeClr>
+                  </a:solidFill>
+                  <a:latin typeface="맑은 고딕" panose="020B0503020000020004" pitchFamily="50" charset="-127"/>
+                  <a:ea typeface="맑은 고딕" panose="020B0503020000020004" pitchFamily="50" charset="-127"/>
+                </a:rPr>
+                <a:t>(</a:t>
+              </a:r>
+              <a:r>
+                <a:rPr lang="ko-KR" altLang="en-US" sz="2800" b="1" dirty="0">
+                  <a:ln>
+                    <a:solidFill>
+                      <a:schemeClr val="accent1">
+                        <a:shade val="15000"/>
+                        <a:alpha val="0"/>
+                      </a:schemeClr>
+                    </a:solidFill>
+                  </a:ln>
+                  <a:solidFill>
+                    <a:schemeClr val="tx1">
+                      <a:lumMod val="75000"/>
+                      <a:lumOff val="25000"/>
+                    </a:schemeClr>
+                  </a:solidFill>
+                  <a:latin typeface="맑은 고딕" panose="020B0503020000020004" pitchFamily="50" charset="-127"/>
+                  <a:ea typeface="맑은 고딕" panose="020B0503020000020004" pitchFamily="50" charset="-127"/>
+                </a:rPr>
                 <a:t>옵션 </a:t>
               </a:r>
               <a:r>
@@ -6264,7 +7146,7 @@
 </p:sld>
 </file>
 
-<file path=ppt/slides/slide11.xml><?xml version="1.0" encoding="utf-8"?>
+<file path=ppt/slides/slide12.xml><?xml version="1.0" encoding="utf-8"?>
 <p:sld xmlns:a="http://schemas.openxmlformats.org/drawingml/2006/main" xmlns:r="http://schemas.openxmlformats.org/officeDocument/2006/relationships" xmlns:p="http://schemas.openxmlformats.org/presentationml/2006/main">
   <p:cSld>
     <p:spTree>
@@ -7104,7 +7986,7 @@
 </p:sld>
 </file>
 
-<file path=ppt/slides/slide12.xml><?xml version="1.0" encoding="utf-8"?>
+<file path=ppt/slides/slide13.xml><?xml version="1.0" encoding="utf-8"?>
 <p:sld xmlns:a="http://schemas.openxmlformats.org/drawingml/2006/main" xmlns:r="http://schemas.openxmlformats.org/officeDocument/2006/relationships" xmlns:p="http://schemas.openxmlformats.org/presentationml/2006/main">
   <p:cSld>
     <p:spTree>
@@ -13711,13 +14593,13 @@
           <p:nvPr>
             <p:extLst>
               <p:ext uri="{D42A27DB-BD31-4B8C-83A1-F6EECF244321}">
-                <p14:modId xmlns:p14="http://schemas.microsoft.com/office/powerpoint/2010/main" val="1770507223"/>
+                <p14:modId xmlns:p14="http://schemas.microsoft.com/office/powerpoint/2010/main" val="1391236373"/>
               </p:ext>
             </p:extLst>
           </p:nvPr>
         </p:nvGraphicFramePr>
         <p:xfrm>
-          <a:off x="524528" y="2528900"/>
+          <a:off x="464193" y="2502904"/>
           <a:ext cx="11218265" cy="3666223"/>
         </p:xfrm>
         <a:graphic>
@@ -14982,86 +15864,6 @@
                         <a:tabLst/>
                         <a:defRPr/>
                       </a:pPr>
-                      <a:r>
-                        <a:rPr lang="ko-KR" altLang="en-US" sz="1600" b="1" i="0" kern="1200" noProof="0" dirty="0">
-                          <a:ln>
-                            <a:solidFill>
-                              <a:schemeClr val="bg1">
-                                <a:alpha val="0"/>
-                              </a:schemeClr>
-                            </a:solidFill>
-                          </a:ln>
-                          <a:solidFill>
-                            <a:schemeClr val="bg2">
-                              <a:lumMod val="25000"/>
-                            </a:schemeClr>
-                          </a:solidFill>
-                          <a:latin typeface="맑은 고딕" panose="020B0503020000020004" pitchFamily="50" charset="-127"/>
-                          <a:ea typeface="맑은 고딕" panose="020B0503020000020004" pitchFamily="50" charset="-127"/>
-                          <a:cs typeface="+mn-cs"/>
-                        </a:rPr>
-                        <a:t>김경훈</a:t>
-                      </a:r>
-                      <a:r>
-                        <a:rPr lang="en-US" altLang="ko-KR" sz="1600" b="1" i="0" kern="1200" noProof="0" dirty="0">
-                          <a:ln>
-                            <a:solidFill>
-                              <a:schemeClr val="bg1">
-                                <a:alpha val="0"/>
-                              </a:schemeClr>
-                            </a:solidFill>
-                          </a:ln>
-                          <a:solidFill>
-                            <a:schemeClr val="bg2">
-                              <a:lumMod val="25000"/>
-                            </a:schemeClr>
-                          </a:solidFill>
-                          <a:latin typeface="맑은 고딕" panose="020B0503020000020004" pitchFamily="50" charset="-127"/>
-                          <a:ea typeface="맑은 고딕" panose="020B0503020000020004" pitchFamily="50" charset="-127"/>
-                          <a:cs typeface="+mn-cs"/>
-                        </a:rPr>
-                        <a:t>(</a:t>
-                      </a:r>
-                      <a:r>
-                        <a:rPr lang="ko-KR" altLang="en-US" sz="1600" b="1" i="0" kern="1200" noProof="0" dirty="0">
-                          <a:ln>
-                            <a:solidFill>
-                              <a:schemeClr val="bg1">
-                                <a:alpha val="0"/>
-                              </a:schemeClr>
-                            </a:solidFill>
-                          </a:ln>
-                          <a:solidFill>
-                            <a:schemeClr val="bg2">
-                              <a:lumMod val="25000"/>
-                            </a:schemeClr>
-                          </a:solidFill>
-                          <a:latin typeface="맑은 고딕" panose="020B0503020000020004" pitchFamily="50" charset="-127"/>
-                          <a:ea typeface="맑은 고딕" panose="020B0503020000020004" pitchFamily="50" charset="-127"/>
-                          <a:cs typeface="+mn-cs"/>
-                        </a:rPr>
-                        <a:t>강사</a:t>
-                      </a:r>
-                      <a:r>
-                        <a:rPr lang="en-US" altLang="ko-KR" sz="1600" b="1" i="0" kern="1200" noProof="0" dirty="0">
-                          <a:ln>
-                            <a:solidFill>
-                              <a:schemeClr val="bg1">
-                                <a:alpha val="0"/>
-                              </a:schemeClr>
-                            </a:solidFill>
-                          </a:ln>
-                          <a:solidFill>
-                            <a:schemeClr val="bg2">
-                              <a:lumMod val="25000"/>
-                            </a:schemeClr>
-                          </a:solidFill>
-                          <a:latin typeface="맑은 고딕" panose="020B0503020000020004" pitchFamily="50" charset="-127"/>
-                          <a:ea typeface="맑은 고딕" panose="020B0503020000020004" pitchFamily="50" charset="-127"/>
-                          <a:cs typeface="+mn-cs"/>
-                        </a:rPr>
-                        <a:t>)</a:t>
-                      </a:r>
                       <a:endParaRPr lang="ko-KR" altLang="en-US" sz="1600" b="1" i="0" kern="1200" noProof="0" dirty="0">
                         <a:ln>
                           <a:solidFill>
@@ -15162,26 +15964,23 @@
                         <a:tabLst/>
                         <a:defRPr/>
                       </a:pPr>
-                      <a:r>
-                        <a:rPr lang="ko-KR" altLang="en-US" sz="1600" b="1" i="0" kern="1200" noProof="0" dirty="0">
-                          <a:ln>
-                            <a:solidFill>
-                              <a:schemeClr val="bg1">
-                                <a:alpha val="0"/>
-                              </a:schemeClr>
-                            </a:solidFill>
-                          </a:ln>
+                      <a:endParaRPr lang="ko-KR" altLang="en-US" sz="1600" b="1" i="0" kern="1200" noProof="0" dirty="0">
+                        <a:ln>
                           <a:solidFill>
-                            <a:schemeClr val="bg2">
-                              <a:lumMod val="25000"/>
+                            <a:schemeClr val="bg1">
+                              <a:alpha val="0"/>
                             </a:schemeClr>
                           </a:solidFill>
-                          <a:latin typeface="맑은 고딕" panose="020B0503020000020004" pitchFamily="50" charset="-127"/>
-                          <a:ea typeface="맑은 고딕" panose="020B0503020000020004" pitchFamily="50" charset="-127"/>
-                          <a:cs typeface="+mn-cs"/>
-                        </a:rPr>
-                        <a:t>멘토</a:t>
-                      </a:r>
+                        </a:ln>
+                        <a:solidFill>
+                          <a:schemeClr val="bg2">
+                            <a:lumMod val="25000"/>
+                          </a:schemeClr>
+                        </a:solidFill>
+                        <a:latin typeface="맑은 고딕" panose="020B0503020000020004" pitchFamily="50" charset="-127"/>
+                        <a:ea typeface="맑은 고딕" panose="020B0503020000020004" pitchFamily="50" charset="-127"/>
+                        <a:cs typeface="+mn-cs"/>
+                      </a:endParaRPr>
                     </a:p>
                   </a:txBody>
                   <a:tcPr marT="45741" marB="45741" anchor="ctr">
@@ -15413,7 +16212,7 @@
         </p:blipFill>
         <p:spPr>
           <a:xfrm>
-            <a:off x="9804453" y="5933673"/>
+            <a:off x="9398832" y="5934268"/>
             <a:ext cx="109959" cy="109959"/>
           </a:xfrm>
           <a:prstGeom prst="rect">
@@ -16395,284 +17194,6 @@
           </p:spPr>
         </p:pic>
       </p:grpSp>
-      <p:grpSp>
-        <p:nvGrpSpPr>
-          <p:cNvPr id="25" name="그룹 24">
-            <a:extLst>
-              <a:ext uri="{FF2B5EF4-FFF2-40B4-BE49-F238E27FC236}">
-                <a16:creationId xmlns:a16="http://schemas.microsoft.com/office/drawing/2014/main" id="{10C0E3E7-9FDB-37CF-3936-26B9B88D8B94}"/>
-              </a:ext>
-            </a:extLst>
-          </p:cNvPr>
-          <p:cNvGrpSpPr/>
-          <p:nvPr/>
-        </p:nvGrpSpPr>
-        <p:grpSpPr>
-          <a:xfrm>
-            <a:off x="4525872" y="5618281"/>
-            <a:ext cx="4226492" cy="358636"/>
-            <a:chOff x="4525872" y="5811259"/>
-            <a:chExt cx="4226492" cy="358636"/>
-          </a:xfrm>
-        </p:grpSpPr>
-        <p:sp>
-          <p:nvSpPr>
-            <p:cNvPr id="171" name="사각형: 둥근 모서리 170">
-              <a:extLst>
-                <a:ext uri="{FF2B5EF4-FFF2-40B4-BE49-F238E27FC236}">
-                  <a16:creationId xmlns:a16="http://schemas.microsoft.com/office/drawing/2014/main" id="{19D2DE3A-159C-0678-7722-8165D6D67C45}"/>
-                </a:ext>
-              </a:extLst>
-            </p:cNvPr>
-            <p:cNvSpPr/>
-            <p:nvPr/>
-          </p:nvSpPr>
-          <p:spPr>
-            <a:xfrm>
-              <a:off x="4525872" y="5811259"/>
-              <a:ext cx="3226312" cy="358636"/>
-            </a:xfrm>
-            <a:prstGeom prst="roundRect">
-              <a:avLst>
-                <a:gd name="adj" fmla="val 50000"/>
-              </a:avLst>
-            </a:prstGeom>
-            <a:solidFill>
-              <a:schemeClr val="bg1">
-                <a:lumMod val="95000"/>
-              </a:schemeClr>
-            </a:solidFill>
-            <a:ln>
-              <a:noFill/>
-            </a:ln>
-          </p:spPr>
-          <p:style>
-            <a:lnRef idx="2">
-              <a:schemeClr val="accent1">
-                <a:shade val="50000"/>
-              </a:schemeClr>
-            </a:lnRef>
-            <a:fillRef idx="1">
-              <a:schemeClr val="accent1"/>
-            </a:fillRef>
-            <a:effectRef idx="0">
-              <a:schemeClr val="accent1"/>
-            </a:effectRef>
-            <a:fontRef idx="minor">
-              <a:schemeClr val="lt1"/>
-            </a:fontRef>
-          </p:style>
-          <p:txBody>
-            <a:bodyPr rtlCol="0" anchor="ctr"/>
-            <a:lstStyle/>
-            <a:p>
-              <a:pPr algn="ctr"/>
-              <a:endParaRPr lang="ko-KR" altLang="en-US" sz="1600" dirty="0">
-                <a:latin typeface="세방고딕 Regular" panose="00000500000000000000" pitchFamily="2" charset="-127"/>
-                <a:ea typeface="세방고딕 Regular" panose="00000500000000000000" pitchFamily="2" charset="-127"/>
-              </a:endParaRPr>
-            </a:p>
-          </p:txBody>
-        </p:sp>
-        <p:sp>
-          <p:nvSpPr>
-            <p:cNvPr id="172" name="타원 171">
-              <a:extLst>
-                <a:ext uri="{FF2B5EF4-FFF2-40B4-BE49-F238E27FC236}">
-                  <a16:creationId xmlns:a16="http://schemas.microsoft.com/office/drawing/2014/main" id="{61E2BFB1-E502-EFDF-F184-F6517E943CFC}"/>
-                </a:ext>
-              </a:extLst>
-            </p:cNvPr>
-            <p:cNvSpPr/>
-            <p:nvPr/>
-          </p:nvSpPr>
-          <p:spPr>
-            <a:xfrm>
-              <a:off x="4525872" y="5811259"/>
-              <a:ext cx="358635" cy="358635"/>
-            </a:xfrm>
-            <a:prstGeom prst="ellipse">
-              <a:avLst/>
-            </a:prstGeom>
-            <a:solidFill>
-              <a:srgbClr val="3378C8"/>
-            </a:solidFill>
-            <a:ln>
-              <a:noFill/>
-            </a:ln>
-          </p:spPr>
-          <p:style>
-            <a:lnRef idx="2">
-              <a:schemeClr val="accent1">
-                <a:shade val="50000"/>
-              </a:schemeClr>
-            </a:lnRef>
-            <a:fillRef idx="1">
-              <a:schemeClr val="accent1"/>
-            </a:fillRef>
-            <a:effectRef idx="0">
-              <a:schemeClr val="accent1"/>
-            </a:effectRef>
-            <a:fontRef idx="minor">
-              <a:schemeClr val="lt1"/>
-            </a:fontRef>
-          </p:style>
-          <p:txBody>
-            <a:bodyPr rtlCol="0" anchor="ctr"/>
-            <a:lstStyle/>
-            <a:p>
-              <a:pPr algn="ctr"/>
-              <a:endParaRPr lang="ko-KR" altLang="en-US" dirty="0">
-                <a:latin typeface="세방고딕 Regular" panose="00000500000000000000" pitchFamily="2" charset="-127"/>
-                <a:ea typeface="세방고딕 Regular" panose="00000500000000000000" pitchFamily="2" charset="-127"/>
-              </a:endParaRPr>
-            </a:p>
-          </p:txBody>
-        </p:sp>
-        <p:sp>
-          <p:nvSpPr>
-            <p:cNvPr id="176" name="TextBox 175">
-              <a:extLst>
-                <a:ext uri="{FF2B5EF4-FFF2-40B4-BE49-F238E27FC236}">
-                  <a16:creationId xmlns:a16="http://schemas.microsoft.com/office/drawing/2014/main" id="{9317FFBC-1EEA-B2D2-BB82-A575356B1646}"/>
-                </a:ext>
-              </a:extLst>
-            </p:cNvPr>
-            <p:cNvSpPr txBox="1"/>
-            <p:nvPr/>
-          </p:nvSpPr>
-          <p:spPr>
-            <a:xfrm>
-              <a:off x="4898656" y="5852537"/>
-              <a:ext cx="3853708" cy="276999"/>
-            </a:xfrm>
-            <a:prstGeom prst="rect">
-              <a:avLst/>
-            </a:prstGeom>
-            <a:noFill/>
-          </p:spPr>
-          <p:txBody>
-            <a:bodyPr wrap="square">
-              <a:spAutoFit/>
-            </a:bodyPr>
-            <a:lstStyle/>
-            <a:p>
-              <a:pPr>
-                <a:defRPr/>
-              </a:pPr>
-              <a:r>
-                <a:rPr lang="ko-KR" altLang="en-US" sz="1200" b="1" dirty="0">
-                  <a:ln>
-                    <a:solidFill>
-                      <a:schemeClr val="bg1">
-                        <a:alpha val="0"/>
-                      </a:schemeClr>
-                    </a:solidFill>
-                  </a:ln>
-                  <a:solidFill>
-                    <a:schemeClr val="bg2">
-                      <a:lumMod val="25000"/>
-                    </a:schemeClr>
-                  </a:solidFill>
-                  <a:latin typeface="맑은 고딕" panose="020B0503020000020004" pitchFamily="50" charset="-127"/>
-                  <a:ea typeface="맑은 고딕" panose="020B0503020000020004" pitchFamily="50" charset="-127"/>
-                </a:rPr>
-                <a:t>주제 선정 피드백</a:t>
-              </a:r>
-              <a:r>
-                <a:rPr lang="en-US" altLang="ko-KR" sz="1200" b="1" dirty="0">
-                  <a:ln>
-                    <a:solidFill>
-                      <a:schemeClr val="bg1">
-                        <a:alpha val="0"/>
-                      </a:schemeClr>
-                    </a:solidFill>
-                  </a:ln>
-                  <a:solidFill>
-                    <a:schemeClr val="bg2">
-                      <a:lumMod val="25000"/>
-                    </a:schemeClr>
-                  </a:solidFill>
-                  <a:latin typeface="맑은 고딕" panose="020B0503020000020004" pitchFamily="50" charset="-127"/>
-                  <a:ea typeface="맑은 고딕" panose="020B0503020000020004" pitchFamily="50" charset="-127"/>
-                </a:rPr>
-                <a:t>, </a:t>
-              </a:r>
-              <a:r>
-                <a:rPr lang="ko-KR" altLang="en-US" sz="1200" b="1" dirty="0">
-                  <a:ln>
-                    <a:solidFill>
-                      <a:schemeClr val="bg1">
-                        <a:alpha val="0"/>
-                      </a:schemeClr>
-                    </a:solidFill>
-                  </a:ln>
-                  <a:solidFill>
-                    <a:schemeClr val="bg2">
-                      <a:lumMod val="25000"/>
-                    </a:schemeClr>
-                  </a:solidFill>
-                  <a:latin typeface="맑은 고딕" panose="020B0503020000020004" pitchFamily="50" charset="-127"/>
-                  <a:ea typeface="맑은 고딕" panose="020B0503020000020004" pitchFamily="50" charset="-127"/>
-                </a:rPr>
-                <a:t>프로젝트 질의응답</a:t>
-              </a:r>
-              <a:endParaRPr lang="en-US" altLang="ko-KR" sz="1200" b="1" dirty="0">
-                <a:ln>
-                  <a:solidFill>
-                    <a:schemeClr val="bg1">
-                      <a:alpha val="0"/>
-                    </a:schemeClr>
-                  </a:solidFill>
-                </a:ln>
-                <a:solidFill>
-                  <a:schemeClr val="bg2">
-                    <a:lumMod val="25000"/>
-                  </a:schemeClr>
-                </a:solidFill>
-                <a:latin typeface="맑은 고딕" panose="020B0503020000020004" pitchFamily="50" charset="-127"/>
-                <a:ea typeface="맑은 고딕" panose="020B0503020000020004" pitchFamily="50" charset="-127"/>
-              </a:endParaRPr>
-            </a:p>
-          </p:txBody>
-        </p:sp>
-        <p:pic>
-          <p:nvPicPr>
-            <p:cNvPr id="188" name="그래픽 187">
-              <a:extLst>
-                <a:ext uri="{FF2B5EF4-FFF2-40B4-BE49-F238E27FC236}">
-                  <a16:creationId xmlns:a16="http://schemas.microsoft.com/office/drawing/2014/main" id="{0B218DBD-C891-ACA9-3D98-24305179C3F0}"/>
-                </a:ext>
-              </a:extLst>
-            </p:cNvPr>
-            <p:cNvPicPr>
-              <a:picLocks noChangeAspect="1"/>
-            </p:cNvPicPr>
-            <p:nvPr/>
-          </p:nvPicPr>
-          <p:blipFill>
-            <a:blip r:embed="rId14">
-              <a:extLst>
-                <a:ext uri="{96DAC541-7B7A-43D3-8B79-37D633B846F1}">
-                  <asvg:svgBlip xmlns:asvg="http://schemas.microsoft.com/office/drawing/2016/SVG/main" r:embed="rId15"/>
-                </a:ext>
-              </a:extLst>
-            </a:blip>
-            <a:stretch>
-              <a:fillRect/>
-            </a:stretch>
-          </p:blipFill>
-          <p:spPr>
-            <a:xfrm>
-              <a:off x="4606764" y="5897394"/>
-              <a:ext cx="186838" cy="182946"/>
-            </a:xfrm>
-            <a:prstGeom prst="rect">
-              <a:avLst/>
-            </a:prstGeom>
-          </p:spPr>
-        </p:pic>
-      </p:grpSp>
       <p:pic>
         <p:nvPicPr>
           <p:cNvPr id="132" name="그래픽 131">
@@ -16688,10 +17209,10 @@
           <p:nvPr/>
         </p:nvPicPr>
         <p:blipFill>
-          <a:blip r:embed="rId16">
+          <a:blip r:embed="rId14">
             <a:extLst>
               <a:ext uri="{96DAC541-7B7A-43D3-8B79-37D633B846F1}">
-                <asvg:svgBlip xmlns:asvg="http://schemas.microsoft.com/office/drawing/2016/SVG/main" r:embed="rId17"/>
+                <asvg:svgBlip xmlns:asvg="http://schemas.microsoft.com/office/drawing/2016/SVG/main" r:embed="rId15"/>
               </a:ext>
             </a:extLst>
           </a:blip>
@@ -16782,10 +17303,10 @@
           <p:nvPr/>
         </p:nvPicPr>
         <p:blipFill>
-          <a:blip r:embed="rId18">
+          <a:blip r:embed="rId16">
             <a:extLst>
               <a:ext uri="{96DAC541-7B7A-43D3-8B79-37D633B846F1}">
-                <asvg:svgBlip xmlns:asvg="http://schemas.microsoft.com/office/drawing/2016/SVG/main" r:embed="rId19"/>
+                <asvg:svgBlip xmlns:asvg="http://schemas.microsoft.com/office/drawing/2016/SVG/main" r:embed="rId17"/>
               </a:ext>
             </a:extLst>
           </a:blip>
@@ -17094,7 +17615,7 @@
           <p:nvPr/>
         </p:nvPicPr>
         <p:blipFill rotWithShape="1">
-          <a:blip r:embed="rId20" cstate="print">
+          <a:blip r:embed="rId18" cstate="print">
             <a:duotone>
               <a:schemeClr val="accent5">
                 <a:shade val="45000"/>
@@ -17376,6 +17897,1171 @@
 </file>
 
 <file path=ppt/slides/slide5.xml><?xml version="1.0" encoding="utf-8"?>
+<p:sld xmlns:a="http://schemas.openxmlformats.org/drawingml/2006/main" xmlns:r="http://schemas.openxmlformats.org/officeDocument/2006/relationships" xmlns:p="http://schemas.openxmlformats.org/presentationml/2006/main">
+  <p:cSld>
+    <p:spTree>
+      <p:nvGrpSpPr>
+        <p:cNvPr id="1" name=""/>
+        <p:cNvGrpSpPr/>
+        <p:nvPr/>
+      </p:nvGrpSpPr>
+      <p:grpSpPr>
+        <a:xfrm>
+          <a:off x="0" y="0"/>
+          <a:ext cx="0" cy="0"/>
+          <a:chOff x="0" y="0"/>
+          <a:chExt cx="0" cy="0"/>
+        </a:xfrm>
+      </p:grpSpPr>
+      <p:sp>
+        <p:nvSpPr>
+          <p:cNvPr id="39" name="사각형: 둥근 한쪽 모서리 38">
+            <a:extLst>
+              <a:ext uri="{FF2B5EF4-FFF2-40B4-BE49-F238E27FC236}">
+                <a16:creationId xmlns:a16="http://schemas.microsoft.com/office/drawing/2014/main" id="{5EADE06A-9DBC-11A8-5DF5-38CF63ECD050}"/>
+              </a:ext>
+            </a:extLst>
+          </p:cNvPr>
+          <p:cNvSpPr/>
+          <p:nvPr/>
+        </p:nvSpPr>
+        <p:spPr>
+          <a:xfrm flipH="1" flipV="1">
+            <a:off x="174169" y="70718"/>
+            <a:ext cx="12017829" cy="923257"/>
+          </a:xfrm>
+          <a:prstGeom prst="round1Rect">
+            <a:avLst>
+              <a:gd name="adj" fmla="val 23799"/>
+            </a:avLst>
+          </a:prstGeom>
+          <a:solidFill>
+            <a:schemeClr val="bg1">
+              <a:lumMod val="95000"/>
+              <a:alpha val="50000"/>
+            </a:schemeClr>
+          </a:solidFill>
+          <a:ln w="10818" cap="flat">
+            <a:noFill/>
+            <a:prstDash val="solid"/>
+            <a:miter/>
+          </a:ln>
+        </p:spPr>
+        <p:style>
+          <a:lnRef idx="2">
+            <a:schemeClr val="accent1">
+              <a:shade val="15000"/>
+            </a:schemeClr>
+          </a:lnRef>
+          <a:fillRef idx="1">
+            <a:schemeClr val="accent1"/>
+          </a:fillRef>
+          <a:effectRef idx="0">
+            <a:schemeClr val="accent1"/>
+          </a:effectRef>
+          <a:fontRef idx="minor">
+            <a:schemeClr val="lt1"/>
+          </a:fontRef>
+        </p:style>
+        <p:txBody>
+          <a:bodyPr rtlCol="0" anchor="ctr"/>
+          <a:lstStyle/>
+          <a:p>
+            <a:pPr algn="ctr"/>
+            <a:endParaRPr lang="ko-KR" altLang="en-US"/>
+          </a:p>
+        </p:txBody>
+      </p:sp>
+      <p:grpSp>
+        <p:nvGrpSpPr>
+          <p:cNvPr id="3" name="그룹 2">
+            <a:extLst>
+              <a:ext uri="{FF2B5EF4-FFF2-40B4-BE49-F238E27FC236}">
+                <a16:creationId xmlns:a16="http://schemas.microsoft.com/office/drawing/2014/main" id="{83D39D92-E66A-0690-755F-95170021E213}"/>
+              </a:ext>
+            </a:extLst>
+          </p:cNvPr>
+          <p:cNvGrpSpPr/>
+          <p:nvPr/>
+        </p:nvGrpSpPr>
+        <p:grpSpPr>
+          <a:xfrm>
+            <a:off x="371364" y="206484"/>
+            <a:ext cx="6048672" cy="787491"/>
+            <a:chOff x="376102" y="333243"/>
+            <a:chExt cx="5948498" cy="830997"/>
+          </a:xfrm>
+        </p:grpSpPr>
+        <p:sp>
+          <p:nvSpPr>
+            <p:cNvPr id="27" name="TextBox 26">
+              <a:extLst>
+                <a:ext uri="{FF2B5EF4-FFF2-40B4-BE49-F238E27FC236}">
+                  <a16:creationId xmlns:a16="http://schemas.microsoft.com/office/drawing/2014/main" id="{B3B4124F-4D0D-30C0-E721-EE580D127CC8}"/>
+                </a:ext>
+              </a:extLst>
+            </p:cNvPr>
+            <p:cNvSpPr txBox="1"/>
+            <p:nvPr/>
+          </p:nvSpPr>
+          <p:spPr>
+            <a:xfrm>
+              <a:off x="1461721" y="366114"/>
+              <a:ext cx="2252213" cy="276999"/>
+            </a:xfrm>
+            <a:prstGeom prst="rect">
+              <a:avLst/>
+            </a:prstGeom>
+            <a:noFill/>
+          </p:spPr>
+          <p:txBody>
+            <a:bodyPr wrap="square">
+              <a:spAutoFit/>
+            </a:bodyPr>
+            <a:lstStyle/>
+            <a:p>
+              <a:r>
+                <a:rPr lang="en-US" altLang="ko-KR" sz="1200" b="1" dirty="0">
+                  <a:ln>
+                    <a:solidFill>
+                      <a:schemeClr val="accent1">
+                        <a:shade val="15000"/>
+                        <a:alpha val="0"/>
+                      </a:schemeClr>
+                    </a:solidFill>
+                  </a:ln>
+                  <a:solidFill>
+                    <a:srgbClr val="3378C8">
+                      <a:alpha val="50000"/>
+                    </a:srgbClr>
+                  </a:solidFill>
+                  <a:latin typeface="맑은 고딕" panose="020B0503020000020004" pitchFamily="50" charset="-127"/>
+                  <a:ea typeface="맑은 고딕" panose="020B0503020000020004" pitchFamily="50" charset="-127"/>
+                </a:rPr>
+                <a:t>K-Digital Training</a:t>
+              </a:r>
+              <a:endParaRPr lang="ko-KR" altLang="en-US" sz="1200" b="1" dirty="0">
+                <a:ln>
+                  <a:solidFill>
+                    <a:schemeClr val="accent1">
+                      <a:shade val="15000"/>
+                      <a:alpha val="0"/>
+                    </a:schemeClr>
+                  </a:solidFill>
+                </a:ln>
+                <a:solidFill>
+                  <a:srgbClr val="3378C8">
+                    <a:alpha val="50000"/>
+                  </a:srgbClr>
+                </a:solidFill>
+                <a:latin typeface="맑은 고딕" panose="020B0503020000020004" pitchFamily="50" charset="-127"/>
+                <a:ea typeface="맑은 고딕" panose="020B0503020000020004" pitchFamily="50" charset="-127"/>
+              </a:endParaRPr>
+            </a:p>
+          </p:txBody>
+        </p:sp>
+        <p:sp>
+          <p:nvSpPr>
+            <p:cNvPr id="11" name="TextBox 10">
+              <a:extLst>
+                <a:ext uri="{FF2B5EF4-FFF2-40B4-BE49-F238E27FC236}">
+                  <a16:creationId xmlns:a16="http://schemas.microsoft.com/office/drawing/2014/main" id="{6C8DE4B1-0C6D-133C-80D8-F6968CBF60AC}"/>
+                </a:ext>
+              </a:extLst>
+            </p:cNvPr>
+            <p:cNvSpPr txBox="1"/>
+            <p:nvPr/>
+          </p:nvSpPr>
+          <p:spPr>
+            <a:xfrm>
+              <a:off x="1461721" y="585057"/>
+              <a:ext cx="4862879" cy="552126"/>
+            </a:xfrm>
+            <a:prstGeom prst="rect">
+              <a:avLst/>
+            </a:prstGeom>
+            <a:noFill/>
+          </p:spPr>
+          <p:txBody>
+            <a:bodyPr wrap="square">
+              <a:spAutoFit/>
+            </a:bodyPr>
+            <a:lstStyle/>
+            <a:p>
+              <a:pPr>
+                <a:defRPr/>
+              </a:pPr>
+              <a:r>
+                <a:rPr lang="ko-KR" altLang="en-US" sz="2800" b="1" dirty="0">
+                  <a:ln>
+                    <a:solidFill>
+                      <a:schemeClr val="accent1">
+                        <a:shade val="15000"/>
+                        <a:alpha val="0"/>
+                      </a:schemeClr>
+                    </a:solidFill>
+                  </a:ln>
+                  <a:solidFill>
+                    <a:schemeClr val="tx1">
+                      <a:lumMod val="75000"/>
+                      <a:lumOff val="25000"/>
+                    </a:schemeClr>
+                  </a:solidFill>
+                  <a:latin typeface="맑은 고딕" panose="020B0503020000020004" pitchFamily="50" charset="-127"/>
+                  <a:ea typeface="맑은 고딕" panose="020B0503020000020004" pitchFamily="50" charset="-127"/>
+                </a:rPr>
+                <a:t>순서도</a:t>
+              </a:r>
+            </a:p>
+          </p:txBody>
+        </p:sp>
+        <p:sp>
+          <p:nvSpPr>
+            <p:cNvPr id="13" name="TextBox 12">
+              <a:extLst>
+                <a:ext uri="{FF2B5EF4-FFF2-40B4-BE49-F238E27FC236}">
+                  <a16:creationId xmlns:a16="http://schemas.microsoft.com/office/drawing/2014/main" id="{E0E94AA3-A994-6AB2-870F-88DA16811E4D}"/>
+                </a:ext>
+              </a:extLst>
+            </p:cNvPr>
+            <p:cNvSpPr txBox="1"/>
+            <p:nvPr/>
+          </p:nvSpPr>
+          <p:spPr>
+            <a:xfrm>
+              <a:off x="376102" y="333243"/>
+              <a:ext cx="1266679" cy="830997"/>
+            </a:xfrm>
+            <a:prstGeom prst="rect">
+              <a:avLst/>
+            </a:prstGeom>
+            <a:noFill/>
+          </p:spPr>
+          <p:txBody>
+            <a:bodyPr wrap="square" tIns="0" bIns="0">
+              <a:spAutoFit/>
+            </a:bodyPr>
+            <a:lstStyle/>
+            <a:p>
+              <a:pPr eaLnBrk="1" fontAlgn="auto" latinLnBrk="1" hangingPunct="1">
+                <a:spcBef>
+                  <a:spcPts val="0"/>
+                </a:spcBef>
+                <a:spcAft>
+                  <a:spcPts val="0"/>
+                </a:spcAft>
+                <a:defRPr/>
+              </a:pPr>
+              <a:r>
+                <a:rPr lang="en-US" altLang="ko-KR" sz="5400" dirty="0">
+                  <a:ln>
+                    <a:solidFill>
+                      <a:schemeClr val="accent1">
+                        <a:shade val="15000"/>
+                        <a:alpha val="0"/>
+                      </a:schemeClr>
+                    </a:solidFill>
+                  </a:ln>
+                  <a:solidFill>
+                    <a:srgbClr val="3378C8"/>
+                  </a:solidFill>
+                  <a:latin typeface="세방고딕 Bold" panose="00000800000000000000" pitchFamily="2" charset="-127"/>
+                  <a:ea typeface="세방고딕 Bold" panose="00000800000000000000" pitchFamily="2" charset="-127"/>
+                </a:rPr>
+                <a:t>02</a:t>
+              </a:r>
+              <a:endParaRPr lang="ko-KR" altLang="en-US" sz="4400" b="1" dirty="0">
+                <a:ln>
+                  <a:solidFill>
+                    <a:schemeClr val="accent1">
+                      <a:shade val="15000"/>
+                      <a:alpha val="0"/>
+                    </a:schemeClr>
+                  </a:solidFill>
+                </a:ln>
+                <a:solidFill>
+                  <a:srgbClr val="3378C8"/>
+                </a:solidFill>
+                <a:latin typeface="세방고딕 Regular" panose="00000500000000000000" pitchFamily="2" charset="-127"/>
+                <a:ea typeface="세방고딕 Regular" panose="00000500000000000000" pitchFamily="2" charset="-127"/>
+              </a:endParaRPr>
+            </a:p>
+          </p:txBody>
+        </p:sp>
+      </p:grpSp>
+      <p:sp>
+        <p:nvSpPr>
+          <p:cNvPr id="2" name="TextBox 1">
+            <a:extLst>
+              <a:ext uri="{FF2B5EF4-FFF2-40B4-BE49-F238E27FC236}">
+                <a16:creationId xmlns:a16="http://schemas.microsoft.com/office/drawing/2014/main" id="{D2C2358E-3B03-27B5-CA0C-4BF0B1CDFADB}"/>
+              </a:ext>
+            </a:extLst>
+          </p:cNvPr>
+          <p:cNvSpPr txBox="1"/>
+          <p:nvPr/>
+        </p:nvSpPr>
+        <p:spPr>
+          <a:xfrm>
+            <a:off x="0" y="0"/>
+            <a:ext cx="12192000" cy="114300"/>
+          </a:xfrm>
+          <a:prstGeom prst="rect">
+            <a:avLst/>
+          </a:prstGeom>
+          <a:solidFill>
+            <a:srgbClr val="FFD85C"/>
+          </a:solidFill>
+          <a:effectLst/>
+        </p:spPr>
+        <p:txBody>
+          <a:bodyPr wrap="square" rtlCol="0" anchor="ctr">
+            <a:noAutofit/>
+          </a:bodyPr>
+          <a:lstStyle/>
+          <a:p>
+            <a:pPr algn="ctr"/>
+            <a:endParaRPr lang="ko-KR" altLang="en-US" sz="1600" b="1" spc="600" dirty="0">
+              <a:ln>
+                <a:solidFill>
+                  <a:schemeClr val="accent1">
+                    <a:shade val="15000"/>
+                    <a:alpha val="0"/>
+                  </a:schemeClr>
+                </a:solidFill>
+              </a:ln>
+              <a:solidFill>
+                <a:srgbClr val="3378C8"/>
+              </a:solidFill>
+              <a:latin typeface="세방고딕 Regular" panose="00000500000000000000" pitchFamily="2" charset="-127"/>
+              <a:ea typeface="세방고딕 Regular" panose="00000500000000000000" pitchFamily="2" charset="-127"/>
+            </a:endParaRPr>
+          </a:p>
+        </p:txBody>
+      </p:sp>
+      <p:sp>
+        <p:nvSpPr>
+          <p:cNvPr id="4" name="TextBox 3">
+            <a:extLst>
+              <a:ext uri="{FF2B5EF4-FFF2-40B4-BE49-F238E27FC236}">
+                <a16:creationId xmlns:a16="http://schemas.microsoft.com/office/drawing/2014/main" id="{487E27BB-6406-EC3A-3BF4-56C8615BDA14}"/>
+              </a:ext>
+            </a:extLst>
+          </p:cNvPr>
+          <p:cNvSpPr txBox="1"/>
+          <p:nvPr/>
+        </p:nvSpPr>
+        <p:spPr>
+          <a:xfrm>
+            <a:off x="0" y="0"/>
+            <a:ext cx="1336675" cy="114300"/>
+          </a:xfrm>
+          <a:prstGeom prst="rect">
+            <a:avLst/>
+          </a:prstGeom>
+          <a:solidFill>
+            <a:srgbClr val="3378C8"/>
+          </a:solidFill>
+          <a:effectLst/>
+        </p:spPr>
+        <p:txBody>
+          <a:bodyPr wrap="square" rtlCol="0" anchor="ctr">
+            <a:noAutofit/>
+          </a:bodyPr>
+          <a:lstStyle/>
+          <a:p>
+            <a:pPr algn="ctr"/>
+            <a:endParaRPr lang="ko-KR" altLang="en-US" sz="1600" b="1" spc="600" dirty="0">
+              <a:ln>
+                <a:solidFill>
+                  <a:schemeClr val="accent1">
+                    <a:shade val="15000"/>
+                    <a:alpha val="0"/>
+                  </a:schemeClr>
+                </a:solidFill>
+              </a:ln>
+              <a:solidFill>
+                <a:srgbClr val="3378C8"/>
+              </a:solidFill>
+              <a:latin typeface="세방고딕 Regular" panose="00000500000000000000" pitchFamily="2" charset="-127"/>
+              <a:ea typeface="세방고딕 Regular" panose="00000500000000000000" pitchFamily="2" charset="-127"/>
+            </a:endParaRPr>
+          </a:p>
+        </p:txBody>
+      </p:sp>
+      <p:pic>
+        <p:nvPicPr>
+          <p:cNvPr id="99" name="그래픽 98">
+            <a:extLst>
+              <a:ext uri="{FF2B5EF4-FFF2-40B4-BE49-F238E27FC236}">
+                <a16:creationId xmlns:a16="http://schemas.microsoft.com/office/drawing/2014/main" id="{5B63BFCA-250A-8794-3EEE-3E4B309735E8}"/>
+              </a:ext>
+            </a:extLst>
+          </p:cNvPr>
+          <p:cNvPicPr>
+            <a:picLocks noChangeAspect="1"/>
+          </p:cNvPicPr>
+          <p:nvPr/>
+        </p:nvPicPr>
+        <p:blipFill rotWithShape="1">
+          <a:blip r:embed="rId2">
+            <a:extLst>
+              <a:ext uri="{96DAC541-7B7A-43D3-8B79-37D633B846F1}">
+                <asvg:svgBlip xmlns:asvg="http://schemas.microsoft.com/office/drawing/2016/SVG/main" r:embed="rId3"/>
+              </a:ext>
+            </a:extLst>
+          </a:blip>
+          <a:srcRect l="34974"/>
+          <a:stretch/>
+        </p:blipFill>
+        <p:spPr>
+          <a:xfrm rot="14660350">
+            <a:off x="1714" y="5530566"/>
+            <a:ext cx="1452422" cy="917364"/>
+          </a:xfrm>
+          <a:prstGeom prst="rect">
+            <a:avLst/>
+          </a:prstGeom>
+        </p:spPr>
+      </p:pic>
+      <p:pic>
+        <p:nvPicPr>
+          <p:cNvPr id="52" name="그림 51">
+            <a:extLst>
+              <a:ext uri="{FF2B5EF4-FFF2-40B4-BE49-F238E27FC236}">
+                <a16:creationId xmlns:a16="http://schemas.microsoft.com/office/drawing/2014/main" id="{FE80A41B-F61E-4713-97AE-0B084B8425AD}"/>
+              </a:ext>
+            </a:extLst>
+          </p:cNvPr>
+          <p:cNvPicPr>
+            <a:picLocks noChangeAspect="1"/>
+          </p:cNvPicPr>
+          <p:nvPr/>
+        </p:nvPicPr>
+        <p:blipFill rotWithShape="1">
+          <a:blip r:embed="rId4" cstate="print">
+            <a:duotone>
+              <a:schemeClr val="accent5">
+                <a:shade val="45000"/>
+                <a:satMod val="135000"/>
+              </a:schemeClr>
+              <a:prstClr val="white"/>
+            </a:duotone>
+            <a:alphaModFix amt="27000"/>
+            <a:extLst>
+              <a:ext uri="{28A0092B-C50C-407E-A947-70E740481C1C}">
+                <a14:useLocalDpi xmlns:a14="http://schemas.microsoft.com/office/drawing/2010/main"/>
+              </a:ext>
+            </a:extLst>
+          </a:blip>
+          <a:srcRect/>
+          <a:stretch/>
+        </p:blipFill>
+        <p:spPr>
+          <a:xfrm rot="10800000" flipV="1">
+            <a:off x="87083" y="1208000"/>
+            <a:ext cx="12192000" cy="233580"/>
+          </a:xfrm>
+          <a:prstGeom prst="rect">
+            <a:avLst/>
+          </a:prstGeom>
+        </p:spPr>
+      </p:pic>
+      <p:sp>
+        <p:nvSpPr>
+          <p:cNvPr id="17" name="사각형: 둥근 모서리 16">
+            <a:extLst>
+              <a:ext uri="{FF2B5EF4-FFF2-40B4-BE49-F238E27FC236}">
+                <a16:creationId xmlns:a16="http://schemas.microsoft.com/office/drawing/2014/main" id="{B338D982-DB2C-0C32-1086-396C4C683D3F}"/>
+              </a:ext>
+            </a:extLst>
+          </p:cNvPr>
+          <p:cNvSpPr/>
+          <p:nvPr/>
+        </p:nvSpPr>
+        <p:spPr>
+          <a:xfrm>
+            <a:off x="68215" y="3286724"/>
+            <a:ext cx="554910" cy="931088"/>
+          </a:xfrm>
+          <a:prstGeom prst="roundRect">
+            <a:avLst>
+              <a:gd name="adj" fmla="val 50000"/>
+            </a:avLst>
+          </a:prstGeom>
+        </p:spPr>
+        <p:style>
+          <a:lnRef idx="2">
+            <a:schemeClr val="accent6"/>
+          </a:lnRef>
+          <a:fillRef idx="1">
+            <a:schemeClr val="lt1"/>
+          </a:fillRef>
+          <a:effectRef idx="0">
+            <a:schemeClr val="accent6"/>
+          </a:effectRef>
+          <a:fontRef idx="minor">
+            <a:schemeClr val="dk1"/>
+          </a:fontRef>
+        </p:style>
+        <p:txBody>
+          <a:bodyPr rtlCol="0" anchor="ctr"/>
+          <a:lstStyle/>
+          <a:p>
+            <a:pPr algn="ctr"/>
+            <a:r>
+              <a:rPr lang="ko-KR" altLang="en-US" sz="1000" dirty="0"/>
+              <a:t>시작</a:t>
+            </a:r>
+          </a:p>
+        </p:txBody>
+      </p:sp>
+      <p:sp>
+        <p:nvSpPr>
+          <p:cNvPr id="18" name="직사각형 17">
+            <a:extLst>
+              <a:ext uri="{FF2B5EF4-FFF2-40B4-BE49-F238E27FC236}">
+                <a16:creationId xmlns:a16="http://schemas.microsoft.com/office/drawing/2014/main" id="{91EE2966-7D07-0EBF-5994-4EC3242D2145}"/>
+              </a:ext>
+            </a:extLst>
+          </p:cNvPr>
+          <p:cNvSpPr/>
+          <p:nvPr/>
+        </p:nvSpPr>
+        <p:spPr>
+          <a:xfrm>
+            <a:off x="810500" y="3530068"/>
+            <a:ext cx="1268979" cy="444399"/>
+          </a:xfrm>
+          <a:prstGeom prst="rect">
+            <a:avLst/>
+          </a:prstGeom>
+        </p:spPr>
+        <p:style>
+          <a:lnRef idx="2">
+            <a:schemeClr val="accent6"/>
+          </a:lnRef>
+          <a:fillRef idx="1">
+            <a:schemeClr val="lt1"/>
+          </a:fillRef>
+          <a:effectRef idx="0">
+            <a:schemeClr val="accent6"/>
+          </a:effectRef>
+          <a:fontRef idx="minor">
+            <a:schemeClr val="dk1"/>
+          </a:fontRef>
+        </p:style>
+        <p:txBody>
+          <a:bodyPr rtlCol="0" anchor="ctr"/>
+          <a:lstStyle/>
+          <a:p>
+            <a:pPr algn="ctr"/>
+            <a:r>
+              <a:rPr lang="ko-KR" altLang="en-US" sz="1000" dirty="0"/>
+              <a:t>스테이지</a:t>
+            </a:r>
+          </a:p>
+        </p:txBody>
+      </p:sp>
+      <p:sp>
+        <p:nvSpPr>
+          <p:cNvPr id="19" name="순서도: 판단 18">
+            <a:extLst>
+              <a:ext uri="{FF2B5EF4-FFF2-40B4-BE49-F238E27FC236}">
+                <a16:creationId xmlns:a16="http://schemas.microsoft.com/office/drawing/2014/main" id="{3A5FBDCD-C60A-EDED-5990-7EA1D6EDEE12}"/>
+              </a:ext>
+            </a:extLst>
+          </p:cNvPr>
+          <p:cNvSpPr/>
+          <p:nvPr/>
+        </p:nvSpPr>
+        <p:spPr>
+          <a:xfrm>
+            <a:off x="2355209" y="2284940"/>
+            <a:ext cx="1403889" cy="903884"/>
+          </a:xfrm>
+          <a:prstGeom prst="flowChartDecision">
+            <a:avLst/>
+          </a:prstGeom>
+        </p:spPr>
+        <p:style>
+          <a:lnRef idx="2">
+            <a:schemeClr val="accent6"/>
+          </a:lnRef>
+          <a:fillRef idx="1">
+            <a:schemeClr val="lt1"/>
+          </a:fillRef>
+          <a:effectRef idx="0">
+            <a:schemeClr val="accent6"/>
+          </a:effectRef>
+          <a:fontRef idx="minor">
+            <a:schemeClr val="dk1"/>
+          </a:fontRef>
+        </p:style>
+        <p:txBody>
+          <a:bodyPr rtlCol="0" anchor="ctr"/>
+          <a:lstStyle/>
+          <a:p>
+            <a:pPr algn="ctr"/>
+            <a:r>
+              <a:rPr lang="ko-KR" altLang="en-US" sz="1000" dirty="0"/>
+              <a:t>생명력 회복</a:t>
+            </a:r>
+            <a:endParaRPr lang="en-US" altLang="ko-KR" sz="1000" dirty="0"/>
+          </a:p>
+          <a:p>
+            <a:pPr algn="ctr"/>
+            <a:r>
+              <a:rPr lang="ko-KR" altLang="en-US" sz="1000" dirty="0"/>
+              <a:t>아이템 습득</a:t>
+            </a:r>
+          </a:p>
+        </p:txBody>
+      </p:sp>
+      <p:sp>
+        <p:nvSpPr>
+          <p:cNvPr id="33" name="직사각형 32">
+            <a:extLst>
+              <a:ext uri="{FF2B5EF4-FFF2-40B4-BE49-F238E27FC236}">
+                <a16:creationId xmlns:a16="http://schemas.microsoft.com/office/drawing/2014/main" id="{04C428E2-47CC-99FA-EA0A-5966E4368B8C}"/>
+              </a:ext>
+            </a:extLst>
+          </p:cNvPr>
+          <p:cNvSpPr/>
+          <p:nvPr/>
+        </p:nvSpPr>
+        <p:spPr>
+          <a:xfrm>
+            <a:off x="3957833" y="2487879"/>
+            <a:ext cx="1112647" cy="429382"/>
+          </a:xfrm>
+          <a:prstGeom prst="rect">
+            <a:avLst/>
+          </a:prstGeom>
+        </p:spPr>
+        <p:style>
+          <a:lnRef idx="2">
+            <a:schemeClr val="accent6"/>
+          </a:lnRef>
+          <a:fillRef idx="1">
+            <a:schemeClr val="lt1"/>
+          </a:fillRef>
+          <a:effectRef idx="0">
+            <a:schemeClr val="accent6"/>
+          </a:effectRef>
+          <a:fontRef idx="minor">
+            <a:schemeClr val="dk1"/>
+          </a:fontRef>
+        </p:style>
+        <p:txBody>
+          <a:bodyPr rtlCol="0" anchor="ctr"/>
+          <a:lstStyle/>
+          <a:p>
+            <a:pPr algn="ctr"/>
+            <a:r>
+              <a:rPr lang="ko-KR" altLang="en-US" sz="1000" dirty="0"/>
+              <a:t>생명력 </a:t>
+            </a:r>
+            <a:r>
+              <a:rPr lang="en-US" altLang="ko-KR" sz="1000" dirty="0"/>
+              <a:t>+1</a:t>
+            </a:r>
+            <a:endParaRPr lang="ko-KR" altLang="en-US" sz="1000" dirty="0"/>
+          </a:p>
+        </p:txBody>
+      </p:sp>
+      <p:sp>
+        <p:nvSpPr>
+          <p:cNvPr id="34" name="직사각형 33">
+            <a:extLst>
+              <a:ext uri="{FF2B5EF4-FFF2-40B4-BE49-F238E27FC236}">
+                <a16:creationId xmlns:a16="http://schemas.microsoft.com/office/drawing/2014/main" id="{A2B0CFB7-6E92-D483-944B-91ECAE6806D4}"/>
+              </a:ext>
+            </a:extLst>
+          </p:cNvPr>
+          <p:cNvSpPr/>
+          <p:nvPr/>
+        </p:nvSpPr>
+        <p:spPr>
+          <a:xfrm>
+            <a:off x="3955986" y="1591150"/>
+            <a:ext cx="1112647" cy="429382"/>
+          </a:xfrm>
+          <a:prstGeom prst="rect">
+            <a:avLst/>
+          </a:prstGeom>
+        </p:spPr>
+        <p:style>
+          <a:lnRef idx="2">
+            <a:schemeClr val="accent6"/>
+          </a:lnRef>
+          <a:fillRef idx="1">
+            <a:schemeClr val="lt1"/>
+          </a:fillRef>
+          <a:effectRef idx="0">
+            <a:schemeClr val="accent6"/>
+          </a:effectRef>
+          <a:fontRef idx="minor">
+            <a:schemeClr val="dk1"/>
+          </a:fontRef>
+        </p:style>
+        <p:txBody>
+          <a:bodyPr rtlCol="0" anchor="ctr"/>
+          <a:lstStyle/>
+          <a:p>
+            <a:pPr algn="ctr"/>
+            <a:r>
+              <a:rPr lang="ko-KR" altLang="en-US" sz="1000" dirty="0"/>
+              <a:t>공 위치 초기화</a:t>
+            </a:r>
+          </a:p>
+        </p:txBody>
+      </p:sp>
+      <p:sp>
+        <p:nvSpPr>
+          <p:cNvPr id="35" name="직사각형 34">
+            <a:extLst>
+              <a:ext uri="{FF2B5EF4-FFF2-40B4-BE49-F238E27FC236}">
+                <a16:creationId xmlns:a16="http://schemas.microsoft.com/office/drawing/2014/main" id="{90B4B28B-9A43-5355-E1F7-487EDB0D9A7E}"/>
+              </a:ext>
+            </a:extLst>
+          </p:cNvPr>
+          <p:cNvSpPr/>
+          <p:nvPr/>
+        </p:nvSpPr>
+        <p:spPr>
+          <a:xfrm>
+            <a:off x="3958211" y="3441178"/>
+            <a:ext cx="1112647" cy="429382"/>
+          </a:xfrm>
+          <a:prstGeom prst="rect">
+            <a:avLst/>
+          </a:prstGeom>
+        </p:spPr>
+        <p:style>
+          <a:lnRef idx="2">
+            <a:schemeClr val="accent6"/>
+          </a:lnRef>
+          <a:fillRef idx="1">
+            <a:schemeClr val="lt1"/>
+          </a:fillRef>
+          <a:effectRef idx="0">
+            <a:schemeClr val="accent6"/>
+          </a:effectRef>
+          <a:fontRef idx="minor">
+            <a:schemeClr val="dk1"/>
+          </a:fontRef>
+        </p:style>
+        <p:txBody>
+          <a:bodyPr rtlCol="0" anchor="ctr"/>
+          <a:lstStyle/>
+          <a:p>
+            <a:pPr algn="ctr"/>
+            <a:r>
+              <a:rPr lang="ko-KR" altLang="en-US" sz="1000" dirty="0"/>
+              <a:t>생명력 </a:t>
+            </a:r>
+            <a:r>
+              <a:rPr lang="en-US" altLang="ko-KR" sz="1000" dirty="0"/>
+              <a:t>-1</a:t>
+            </a:r>
+            <a:endParaRPr lang="ko-KR" altLang="en-US" sz="1000" dirty="0"/>
+          </a:p>
+        </p:txBody>
+      </p:sp>
+      <p:sp>
+        <p:nvSpPr>
+          <p:cNvPr id="36" name="직사각형 35">
+            <a:extLst>
+              <a:ext uri="{FF2B5EF4-FFF2-40B4-BE49-F238E27FC236}">
+                <a16:creationId xmlns:a16="http://schemas.microsoft.com/office/drawing/2014/main" id="{A069573E-4C56-568E-0865-626F94D70A74}"/>
+              </a:ext>
+            </a:extLst>
+          </p:cNvPr>
+          <p:cNvSpPr/>
+          <p:nvPr/>
+        </p:nvSpPr>
+        <p:spPr>
+          <a:xfrm>
+            <a:off x="3955986" y="4442491"/>
+            <a:ext cx="1112647" cy="429382"/>
+          </a:xfrm>
+          <a:prstGeom prst="rect">
+            <a:avLst/>
+          </a:prstGeom>
+        </p:spPr>
+        <p:style>
+          <a:lnRef idx="2">
+            <a:schemeClr val="accent6"/>
+          </a:lnRef>
+          <a:fillRef idx="1">
+            <a:schemeClr val="lt1"/>
+          </a:fillRef>
+          <a:effectRef idx="0">
+            <a:schemeClr val="accent6"/>
+          </a:effectRef>
+          <a:fontRef idx="minor">
+            <a:schemeClr val="dk1"/>
+          </a:fontRef>
+        </p:style>
+        <p:txBody>
+          <a:bodyPr rtlCol="0" anchor="ctr"/>
+          <a:lstStyle/>
+          <a:p>
+            <a:pPr algn="ctr"/>
+            <a:r>
+              <a:rPr lang="ko-KR" altLang="en-US" sz="1000" dirty="0"/>
+              <a:t>벽돌 생명력 </a:t>
+            </a:r>
+            <a:r>
+              <a:rPr lang="en-US" altLang="ko-KR" sz="1000" dirty="0"/>
+              <a:t>-1</a:t>
+            </a:r>
+            <a:endParaRPr lang="ko-KR" altLang="en-US" sz="1000" dirty="0"/>
+          </a:p>
+        </p:txBody>
+      </p:sp>
+      <p:sp>
+        <p:nvSpPr>
+          <p:cNvPr id="40" name="순서도: 판단 39">
+            <a:extLst>
+              <a:ext uri="{FF2B5EF4-FFF2-40B4-BE49-F238E27FC236}">
+                <a16:creationId xmlns:a16="http://schemas.microsoft.com/office/drawing/2014/main" id="{65A4DECB-F8F1-5600-49D0-CD20A9B43F79}"/>
+              </a:ext>
+            </a:extLst>
+          </p:cNvPr>
+          <p:cNvSpPr/>
+          <p:nvPr/>
+        </p:nvSpPr>
+        <p:spPr>
+          <a:xfrm>
+            <a:off x="5505559" y="4239466"/>
+            <a:ext cx="1828954" cy="869658"/>
+          </a:xfrm>
+          <a:prstGeom prst="flowChartDecision">
+            <a:avLst/>
+          </a:prstGeom>
+        </p:spPr>
+        <p:style>
+          <a:lnRef idx="2">
+            <a:schemeClr val="accent6"/>
+          </a:lnRef>
+          <a:fillRef idx="1">
+            <a:schemeClr val="lt1"/>
+          </a:fillRef>
+          <a:effectRef idx="0">
+            <a:schemeClr val="accent6"/>
+          </a:effectRef>
+          <a:fontRef idx="minor">
+            <a:schemeClr val="dk1"/>
+          </a:fontRef>
+        </p:style>
+        <p:txBody>
+          <a:bodyPr rtlCol="0" anchor="ctr"/>
+          <a:lstStyle/>
+          <a:p>
+            <a:pPr algn="ctr"/>
+            <a:r>
+              <a:rPr lang="ko-KR" altLang="en-US" sz="1000" dirty="0"/>
+              <a:t>모든 벽돌을 부셨는가</a:t>
+            </a:r>
+            <a:r>
+              <a:rPr lang="en-US" altLang="ko-KR" sz="1000" dirty="0"/>
+              <a:t>?</a:t>
+            </a:r>
+            <a:endParaRPr lang="ko-KR" altLang="en-US" sz="1000" dirty="0"/>
+          </a:p>
+        </p:txBody>
+      </p:sp>
+      <p:sp>
+        <p:nvSpPr>
+          <p:cNvPr id="41" name="순서도: 판단 40">
+            <a:extLst>
+              <a:ext uri="{FF2B5EF4-FFF2-40B4-BE49-F238E27FC236}">
+                <a16:creationId xmlns:a16="http://schemas.microsoft.com/office/drawing/2014/main" id="{5E079F83-19D8-1718-E38F-DF9D53050917}"/>
+              </a:ext>
+            </a:extLst>
+          </p:cNvPr>
+          <p:cNvSpPr/>
+          <p:nvPr/>
+        </p:nvSpPr>
+        <p:spPr>
+          <a:xfrm>
+            <a:off x="2346564" y="1324790"/>
+            <a:ext cx="1403889" cy="903884"/>
+          </a:xfrm>
+          <a:prstGeom prst="flowChartDecision">
+            <a:avLst/>
+          </a:prstGeom>
+        </p:spPr>
+        <p:style>
+          <a:lnRef idx="2">
+            <a:schemeClr val="accent6"/>
+          </a:lnRef>
+          <a:fillRef idx="1">
+            <a:schemeClr val="lt1"/>
+          </a:fillRef>
+          <a:effectRef idx="0">
+            <a:schemeClr val="accent6"/>
+          </a:effectRef>
+          <a:fontRef idx="minor">
+            <a:schemeClr val="dk1"/>
+          </a:fontRef>
+        </p:style>
+        <p:txBody>
+          <a:bodyPr rtlCol="0" anchor="ctr"/>
+          <a:lstStyle/>
+          <a:p>
+            <a:pPr algn="ctr"/>
+            <a:r>
+              <a:rPr lang="ko-KR" altLang="en-US" sz="1000" dirty="0"/>
+              <a:t>공 위치 초기화 아이템 습득</a:t>
+            </a:r>
+          </a:p>
+        </p:txBody>
+      </p:sp>
+      <p:sp>
+        <p:nvSpPr>
+          <p:cNvPr id="42" name="순서도: 판단 41">
+            <a:extLst>
+              <a:ext uri="{FF2B5EF4-FFF2-40B4-BE49-F238E27FC236}">
+                <a16:creationId xmlns:a16="http://schemas.microsoft.com/office/drawing/2014/main" id="{26EA633E-0338-A52D-40ED-86D58DA9195C}"/>
+              </a:ext>
+            </a:extLst>
+          </p:cNvPr>
+          <p:cNvSpPr/>
+          <p:nvPr/>
+        </p:nvSpPr>
+        <p:spPr>
+          <a:xfrm>
+            <a:off x="2357796" y="3245090"/>
+            <a:ext cx="1403889" cy="903884"/>
+          </a:xfrm>
+          <a:prstGeom prst="flowChartDecision">
+            <a:avLst/>
+          </a:prstGeom>
+        </p:spPr>
+        <p:style>
+          <a:lnRef idx="2">
+            <a:schemeClr val="accent6"/>
+          </a:lnRef>
+          <a:fillRef idx="1">
+            <a:schemeClr val="lt1"/>
+          </a:fillRef>
+          <a:effectRef idx="0">
+            <a:schemeClr val="accent6"/>
+          </a:effectRef>
+          <a:fontRef idx="minor">
+            <a:schemeClr val="dk1"/>
+          </a:fontRef>
+        </p:style>
+        <p:txBody>
+          <a:bodyPr rtlCol="0" anchor="ctr"/>
+          <a:lstStyle/>
+          <a:p>
+            <a:pPr algn="ctr"/>
+            <a:r>
+              <a:rPr lang="ko-KR" altLang="en-US" sz="1000" dirty="0"/>
+              <a:t>공이 </a:t>
+            </a:r>
+            <a:endParaRPr lang="en-US" altLang="ko-KR" sz="1000" dirty="0"/>
+          </a:p>
+          <a:p>
+            <a:pPr algn="ctr"/>
+            <a:r>
+              <a:rPr lang="ko-KR" altLang="en-US" sz="1000" dirty="0"/>
+              <a:t>받침대 밑 벽에 충돌</a:t>
+            </a:r>
+          </a:p>
+        </p:txBody>
+      </p:sp>
+      <p:sp>
+        <p:nvSpPr>
+          <p:cNvPr id="43" name="순서도: 판단 42">
+            <a:extLst>
+              <a:ext uri="{FF2B5EF4-FFF2-40B4-BE49-F238E27FC236}">
+                <a16:creationId xmlns:a16="http://schemas.microsoft.com/office/drawing/2014/main" id="{5DD97ECD-940F-87A1-4A41-DA242A10034B}"/>
+              </a:ext>
+            </a:extLst>
+          </p:cNvPr>
+          <p:cNvSpPr/>
+          <p:nvPr/>
+        </p:nvSpPr>
+        <p:spPr>
+          <a:xfrm>
+            <a:off x="2355209" y="4205240"/>
+            <a:ext cx="1403889" cy="903884"/>
+          </a:xfrm>
+          <a:prstGeom prst="flowChartDecision">
+            <a:avLst/>
+          </a:prstGeom>
+        </p:spPr>
+        <p:style>
+          <a:lnRef idx="2">
+            <a:schemeClr val="accent6"/>
+          </a:lnRef>
+          <a:fillRef idx="1">
+            <a:schemeClr val="lt1"/>
+          </a:fillRef>
+          <a:effectRef idx="0">
+            <a:schemeClr val="accent6"/>
+          </a:effectRef>
+          <a:fontRef idx="minor">
+            <a:schemeClr val="dk1"/>
+          </a:fontRef>
+        </p:style>
+        <p:txBody>
+          <a:bodyPr rtlCol="0" anchor="ctr"/>
+          <a:lstStyle/>
+          <a:p>
+            <a:pPr algn="ctr"/>
+            <a:r>
+              <a:rPr lang="ko-KR" altLang="en-US" sz="1000" dirty="0"/>
+              <a:t>공이</a:t>
+            </a:r>
+            <a:endParaRPr lang="en-US" altLang="ko-KR" sz="1000" dirty="0"/>
+          </a:p>
+          <a:p>
+            <a:pPr algn="ctr"/>
+            <a:r>
+              <a:rPr lang="ko-KR" altLang="en-US" sz="1000" dirty="0"/>
+              <a:t>벽돌에</a:t>
+            </a:r>
+            <a:endParaRPr lang="en-US" altLang="ko-KR" sz="1000" dirty="0"/>
+          </a:p>
+          <a:p>
+            <a:pPr algn="ctr"/>
+            <a:r>
+              <a:rPr lang="ko-KR" altLang="en-US" sz="1000" dirty="0"/>
+              <a:t>충돌</a:t>
+            </a:r>
+          </a:p>
+        </p:txBody>
+      </p:sp>
+      <p:sp>
+        <p:nvSpPr>
+          <p:cNvPr id="44" name="순서도: 판단 43">
+            <a:extLst>
+              <a:ext uri="{FF2B5EF4-FFF2-40B4-BE49-F238E27FC236}">
+                <a16:creationId xmlns:a16="http://schemas.microsoft.com/office/drawing/2014/main" id="{C60A3F7A-8684-6464-ADBC-B7500F7AD268}"/>
+              </a:ext>
+            </a:extLst>
+          </p:cNvPr>
+          <p:cNvSpPr/>
+          <p:nvPr/>
+        </p:nvSpPr>
+        <p:spPr>
+          <a:xfrm>
+            <a:off x="2355209" y="5165390"/>
+            <a:ext cx="1403889" cy="903884"/>
+          </a:xfrm>
+          <a:prstGeom prst="flowChartDecision">
+            <a:avLst/>
+          </a:prstGeom>
+        </p:spPr>
+        <p:style>
+          <a:lnRef idx="2">
+            <a:schemeClr val="accent6"/>
+          </a:lnRef>
+          <a:fillRef idx="1">
+            <a:schemeClr val="lt1"/>
+          </a:fillRef>
+          <a:effectRef idx="0">
+            <a:schemeClr val="accent6"/>
+          </a:effectRef>
+          <a:fontRef idx="minor">
+            <a:schemeClr val="dk1"/>
+          </a:fontRef>
+        </p:style>
+        <p:txBody>
+          <a:bodyPr rtlCol="0" anchor="ctr"/>
+          <a:lstStyle/>
+          <a:p>
+            <a:pPr algn="ctr"/>
+            <a:r>
+              <a:rPr lang="ko-KR" altLang="en-US" sz="1000" dirty="0"/>
+              <a:t>생명력이 </a:t>
+            </a:r>
+            <a:r>
+              <a:rPr lang="en-US" altLang="ko-KR" sz="1000" dirty="0"/>
+              <a:t>0</a:t>
+            </a:r>
+            <a:r>
+              <a:rPr lang="ko-KR" altLang="en-US" sz="1000" dirty="0"/>
+              <a:t>인가</a:t>
+            </a:r>
+          </a:p>
+        </p:txBody>
+      </p:sp>
+      <p:sp>
+        <p:nvSpPr>
+          <p:cNvPr id="45" name="평행 사변형 44">
+            <a:extLst>
+              <a:ext uri="{FF2B5EF4-FFF2-40B4-BE49-F238E27FC236}">
+                <a16:creationId xmlns:a16="http://schemas.microsoft.com/office/drawing/2014/main" id="{483203EE-AA21-484F-F0C3-9FE5EDA55E65}"/>
+              </a:ext>
+            </a:extLst>
+          </p:cNvPr>
+          <p:cNvSpPr/>
+          <p:nvPr/>
+        </p:nvSpPr>
+        <p:spPr>
+          <a:xfrm>
+            <a:off x="10380476" y="5373216"/>
+            <a:ext cx="1260140" cy="914400"/>
+          </a:xfrm>
+          <a:prstGeom prst="parallelogram">
+            <a:avLst/>
+          </a:prstGeom>
+        </p:spPr>
+        <p:style>
+          <a:lnRef idx="2">
+            <a:schemeClr val="accent6"/>
+          </a:lnRef>
+          <a:fillRef idx="1">
+            <a:schemeClr val="lt1"/>
+          </a:fillRef>
+          <a:effectRef idx="0">
+            <a:schemeClr val="accent6"/>
+          </a:effectRef>
+          <a:fontRef idx="minor">
+            <a:schemeClr val="dk1"/>
+          </a:fontRef>
+        </p:style>
+        <p:txBody>
+          <a:bodyPr rtlCol="0" anchor="ctr"/>
+          <a:lstStyle/>
+          <a:p>
+            <a:pPr algn="ctr"/>
+            <a:r>
+              <a:rPr lang="ko-KR" altLang="en-US" sz="1300" dirty="0"/>
+              <a:t>게임종료 </a:t>
+            </a:r>
+            <a:r>
+              <a:rPr lang="ko-KR" altLang="en-US" sz="1300" dirty="0" err="1"/>
+              <a:t>모달창</a:t>
+            </a:r>
+            <a:r>
+              <a:rPr lang="ko-KR" altLang="en-US" sz="1300" dirty="0"/>
+              <a:t> 출력</a:t>
+            </a:r>
+          </a:p>
+        </p:txBody>
+      </p:sp>
+    </p:spTree>
+    <p:extLst>
+      <p:ext uri="{BB962C8B-B14F-4D97-AF65-F5344CB8AC3E}">
+        <p14:creationId xmlns:p14="http://schemas.microsoft.com/office/powerpoint/2010/main" val="3877969412"/>
+      </p:ext>
+    </p:extLst>
+  </p:cSld>
+  <p:clrMapOvr>
+    <a:masterClrMapping/>
+  </p:clrMapOvr>
+</p:sld>
+</file>
+
+<file path=ppt/slides/slide6.xml><?xml version="1.0" encoding="utf-8"?>
 <p:sld xmlns:a="http://schemas.openxmlformats.org/drawingml/2006/main" xmlns:r="http://schemas.openxmlformats.org/officeDocument/2006/relationships" xmlns:p="http://schemas.openxmlformats.org/presentationml/2006/main">
   <p:cSld>
     <p:spTree>
@@ -18077,7 +19763,7 @@
 </p:sld>
 </file>
 
-<file path=ppt/slides/slide6.xml><?xml version="1.0" encoding="utf-8"?>
+<file path=ppt/slides/slide7.xml><?xml version="1.0" encoding="utf-8"?>
 <p:sld xmlns:a="http://schemas.openxmlformats.org/drawingml/2006/main" xmlns:r="http://schemas.openxmlformats.org/officeDocument/2006/relationships" xmlns:p="http://schemas.openxmlformats.org/presentationml/2006/main">
   <p:cSld>
     <p:spTree>
@@ -19133,7 +20819,7 @@
 </p:sld>
 </file>
 
-<file path=ppt/slides/slide7.xml><?xml version="1.0" encoding="utf-8"?>
+<file path=ppt/slides/slide8.xml><?xml version="1.0" encoding="utf-8"?>
 <p:sld xmlns:a="http://schemas.openxmlformats.org/drawingml/2006/main" xmlns:r="http://schemas.openxmlformats.org/officeDocument/2006/relationships" xmlns:p="http://schemas.openxmlformats.org/presentationml/2006/main">
   <p:cSld>
     <p:spTree>
@@ -20027,7 +21713,7 @@
 </p:sld>
 </file>
 
-<file path=ppt/slides/slide8.xml><?xml version="1.0" encoding="utf-8"?>
+<file path=ppt/slides/slide9.xml><?xml version="1.0" encoding="utf-8"?>
 <p:sld xmlns:a="http://schemas.openxmlformats.org/drawingml/2006/main" xmlns:r="http://schemas.openxmlformats.org/officeDocument/2006/relationships" xmlns:p="http://schemas.openxmlformats.org/presentationml/2006/main">
   <p:cSld>
     <p:spTree>
@@ -21423,887 +23109,6 @@
     <p:extLst>
       <p:ext uri="{BB962C8B-B14F-4D97-AF65-F5344CB8AC3E}">
         <p14:creationId xmlns:p14="http://schemas.microsoft.com/office/powerpoint/2010/main" val="611105691"/>
-      </p:ext>
-    </p:extLst>
-  </p:cSld>
-  <p:clrMapOvr>
-    <a:masterClrMapping/>
-  </p:clrMapOvr>
-</p:sld>
-</file>
-
-<file path=ppt/slides/slide9.xml><?xml version="1.0" encoding="utf-8"?>
-<p:sld xmlns:a="http://schemas.openxmlformats.org/drawingml/2006/main" xmlns:r="http://schemas.openxmlformats.org/officeDocument/2006/relationships" xmlns:p="http://schemas.openxmlformats.org/presentationml/2006/main">
-  <p:cSld>
-    <p:spTree>
-      <p:nvGrpSpPr>
-        <p:cNvPr id="1" name=""/>
-        <p:cNvGrpSpPr/>
-        <p:nvPr/>
-      </p:nvGrpSpPr>
-      <p:grpSpPr>
-        <a:xfrm>
-          <a:off x="0" y="0"/>
-          <a:ext cx="0" cy="0"/>
-          <a:chOff x="0" y="0"/>
-          <a:chExt cx="0" cy="0"/>
-        </a:xfrm>
-      </p:grpSpPr>
-      <p:sp>
-        <p:nvSpPr>
-          <p:cNvPr id="18" name="사각형: 둥근 한쪽 모서리 17">
-            <a:extLst>
-              <a:ext uri="{FF2B5EF4-FFF2-40B4-BE49-F238E27FC236}">
-                <a16:creationId xmlns:a16="http://schemas.microsoft.com/office/drawing/2014/main" id="{2EAF6D58-084F-2DED-DF2E-AAB0DF464557}"/>
-              </a:ext>
-            </a:extLst>
-          </p:cNvPr>
-          <p:cNvSpPr/>
-          <p:nvPr/>
-        </p:nvSpPr>
-        <p:spPr>
-          <a:xfrm flipH="1" flipV="1">
-            <a:off x="174170" y="70719"/>
-            <a:ext cx="12017829" cy="1221051"/>
-          </a:xfrm>
-          <a:prstGeom prst="round1Rect">
-            <a:avLst>
-              <a:gd name="adj" fmla="val 23799"/>
-            </a:avLst>
-          </a:prstGeom>
-          <a:solidFill>
-            <a:schemeClr val="bg1">
-              <a:lumMod val="95000"/>
-              <a:alpha val="50000"/>
-            </a:schemeClr>
-          </a:solidFill>
-          <a:ln w="10818" cap="flat">
-            <a:noFill/>
-            <a:prstDash val="solid"/>
-            <a:miter/>
-          </a:ln>
-        </p:spPr>
-        <p:style>
-          <a:lnRef idx="2">
-            <a:schemeClr val="accent1">
-              <a:shade val="15000"/>
-            </a:schemeClr>
-          </a:lnRef>
-          <a:fillRef idx="1">
-            <a:schemeClr val="accent1"/>
-          </a:fillRef>
-          <a:effectRef idx="0">
-            <a:schemeClr val="accent1"/>
-          </a:effectRef>
-          <a:fontRef idx="minor">
-            <a:schemeClr val="lt1"/>
-          </a:fontRef>
-        </p:style>
-        <p:txBody>
-          <a:bodyPr rtlCol="0" anchor="ctr"/>
-          <a:lstStyle/>
-          <a:p>
-            <a:pPr algn="ctr"/>
-            <a:endParaRPr lang="ko-KR" altLang="en-US"/>
-          </a:p>
-        </p:txBody>
-      </p:sp>
-      <p:grpSp>
-        <p:nvGrpSpPr>
-          <p:cNvPr id="20" name="그룹 19">
-            <a:extLst>
-              <a:ext uri="{FF2B5EF4-FFF2-40B4-BE49-F238E27FC236}">
-                <a16:creationId xmlns:a16="http://schemas.microsoft.com/office/drawing/2014/main" id="{739452E3-2013-66BF-2EBE-F0EC960C4077}"/>
-              </a:ext>
-            </a:extLst>
-          </p:cNvPr>
-          <p:cNvGrpSpPr/>
-          <p:nvPr/>
-        </p:nvGrpSpPr>
-        <p:grpSpPr>
-          <a:xfrm>
-            <a:off x="376102" y="333243"/>
-            <a:ext cx="5948498" cy="830997"/>
-            <a:chOff x="376102" y="333243"/>
-            <a:chExt cx="5948498" cy="830997"/>
-          </a:xfrm>
-        </p:grpSpPr>
-        <p:sp>
-          <p:nvSpPr>
-            <p:cNvPr id="22" name="TextBox 21">
-              <a:extLst>
-                <a:ext uri="{FF2B5EF4-FFF2-40B4-BE49-F238E27FC236}">
-                  <a16:creationId xmlns:a16="http://schemas.microsoft.com/office/drawing/2014/main" id="{92519771-A232-D9CF-4769-EBFF2F8CFBB1}"/>
-                </a:ext>
-              </a:extLst>
-            </p:cNvPr>
-            <p:cNvSpPr txBox="1"/>
-            <p:nvPr/>
-          </p:nvSpPr>
-          <p:spPr>
-            <a:xfrm>
-              <a:off x="1461721" y="366114"/>
-              <a:ext cx="2252213" cy="276999"/>
-            </a:xfrm>
-            <a:prstGeom prst="rect">
-              <a:avLst/>
-            </a:prstGeom>
-            <a:noFill/>
-          </p:spPr>
-          <p:txBody>
-            <a:bodyPr wrap="square">
-              <a:spAutoFit/>
-            </a:bodyPr>
-            <a:lstStyle/>
-            <a:p>
-              <a:r>
-                <a:rPr lang="en-US" altLang="ko-KR" sz="1200" b="1" dirty="0">
-                  <a:ln>
-                    <a:solidFill>
-                      <a:schemeClr val="accent1">
-                        <a:shade val="15000"/>
-                        <a:alpha val="0"/>
-                      </a:schemeClr>
-                    </a:solidFill>
-                  </a:ln>
-                  <a:solidFill>
-                    <a:srgbClr val="3378C8">
-                      <a:alpha val="50000"/>
-                    </a:srgbClr>
-                  </a:solidFill>
-                  <a:latin typeface="맑은 고딕" panose="020B0503020000020004" pitchFamily="50" charset="-127"/>
-                  <a:ea typeface="맑은 고딕" panose="020B0503020000020004" pitchFamily="50" charset="-127"/>
-                </a:rPr>
-                <a:t>K-Digital Training</a:t>
-              </a:r>
-              <a:endParaRPr lang="ko-KR" altLang="en-US" sz="1200" b="1" dirty="0">
-                <a:ln>
-                  <a:solidFill>
-                    <a:schemeClr val="accent1">
-                      <a:shade val="15000"/>
-                      <a:alpha val="0"/>
-                    </a:schemeClr>
-                  </a:solidFill>
-                </a:ln>
-                <a:solidFill>
-                  <a:srgbClr val="3378C8">
-                    <a:alpha val="50000"/>
-                  </a:srgbClr>
-                </a:solidFill>
-                <a:latin typeface="맑은 고딕" panose="020B0503020000020004" pitchFamily="50" charset="-127"/>
-                <a:ea typeface="맑은 고딕" panose="020B0503020000020004" pitchFamily="50" charset="-127"/>
-              </a:endParaRPr>
-            </a:p>
-          </p:txBody>
-        </p:sp>
-        <p:sp>
-          <p:nvSpPr>
-            <p:cNvPr id="23" name="TextBox 22">
-              <a:extLst>
-                <a:ext uri="{FF2B5EF4-FFF2-40B4-BE49-F238E27FC236}">
-                  <a16:creationId xmlns:a16="http://schemas.microsoft.com/office/drawing/2014/main" id="{EE109AB5-00CA-F0E8-7FD9-645FB6E912A9}"/>
-                </a:ext>
-              </a:extLst>
-            </p:cNvPr>
-            <p:cNvSpPr txBox="1"/>
-            <p:nvPr/>
-          </p:nvSpPr>
-          <p:spPr>
-            <a:xfrm>
-              <a:off x="1461721" y="585057"/>
-              <a:ext cx="4862879" cy="523220"/>
-            </a:xfrm>
-            <a:prstGeom prst="rect">
-              <a:avLst/>
-            </a:prstGeom>
-            <a:noFill/>
-          </p:spPr>
-          <p:txBody>
-            <a:bodyPr wrap="square">
-              <a:spAutoFit/>
-            </a:bodyPr>
-            <a:lstStyle/>
-            <a:p>
-              <a:pPr>
-                <a:defRPr/>
-              </a:pPr>
-              <a:r>
-                <a:rPr lang="ko-KR" altLang="en-US" sz="2800" b="1" dirty="0">
-                  <a:ln>
-                    <a:solidFill>
-                      <a:schemeClr val="accent1">
-                        <a:shade val="15000"/>
-                        <a:alpha val="0"/>
-                      </a:schemeClr>
-                    </a:solidFill>
-                  </a:ln>
-                  <a:solidFill>
-                    <a:schemeClr val="tx1">
-                      <a:lumMod val="75000"/>
-                      <a:lumOff val="25000"/>
-                    </a:schemeClr>
-                  </a:solidFill>
-                  <a:latin typeface="맑은 고딕" panose="020B0503020000020004" pitchFamily="50" charset="-127"/>
-                  <a:ea typeface="맑은 고딕" panose="020B0503020000020004" pitchFamily="50" charset="-127"/>
-                </a:rPr>
-                <a:t>프로젝트 결과화면</a:t>
-              </a:r>
-              <a:r>
-                <a:rPr lang="en-US" altLang="ko-KR" sz="2800" b="1" dirty="0">
-                  <a:ln>
-                    <a:solidFill>
-                      <a:schemeClr val="accent1">
-                        <a:shade val="15000"/>
-                        <a:alpha val="0"/>
-                      </a:schemeClr>
-                    </a:solidFill>
-                  </a:ln>
-                  <a:solidFill>
-                    <a:schemeClr val="tx1">
-                      <a:lumMod val="75000"/>
-                      <a:lumOff val="25000"/>
-                    </a:schemeClr>
-                  </a:solidFill>
-                  <a:latin typeface="맑은 고딕" panose="020B0503020000020004" pitchFamily="50" charset="-127"/>
-                  <a:ea typeface="맑은 고딕" panose="020B0503020000020004" pitchFamily="50" charset="-127"/>
-                </a:rPr>
-                <a:t>(</a:t>
-              </a:r>
-              <a:r>
-                <a:rPr lang="ko-KR" altLang="en-US" sz="2800" b="1" dirty="0">
-                  <a:ln>
-                    <a:solidFill>
-                      <a:schemeClr val="accent1">
-                        <a:shade val="15000"/>
-                        <a:alpha val="0"/>
-                      </a:schemeClr>
-                    </a:solidFill>
-                  </a:ln>
-                  <a:solidFill>
-                    <a:schemeClr val="tx1">
-                      <a:lumMod val="75000"/>
-                      <a:lumOff val="25000"/>
-                    </a:schemeClr>
-                  </a:solidFill>
-                  <a:latin typeface="맑은 고딕" panose="020B0503020000020004" pitchFamily="50" charset="-127"/>
-                  <a:ea typeface="맑은 고딕" panose="020B0503020000020004" pitchFamily="50" charset="-127"/>
-                </a:rPr>
-                <a:t>아이템</a:t>
-              </a:r>
-              <a:r>
-                <a:rPr lang="en-US" altLang="ko-KR" sz="2800" b="1" dirty="0">
-                  <a:ln>
-                    <a:solidFill>
-                      <a:schemeClr val="accent1">
-                        <a:shade val="15000"/>
-                        <a:alpha val="0"/>
-                      </a:schemeClr>
-                    </a:solidFill>
-                  </a:ln>
-                  <a:solidFill>
-                    <a:schemeClr val="tx1">
-                      <a:lumMod val="75000"/>
-                      <a:lumOff val="25000"/>
-                    </a:schemeClr>
-                  </a:solidFill>
-                  <a:latin typeface="맑은 고딕" panose="020B0503020000020004" pitchFamily="50" charset="-127"/>
-                  <a:ea typeface="맑은 고딕" panose="020B0503020000020004" pitchFamily="50" charset="-127"/>
-                </a:rPr>
-                <a:t>)</a:t>
-              </a:r>
-              <a:endParaRPr lang="ko-KR" altLang="en-US" sz="2800" b="1" dirty="0">
-                <a:ln>
-                  <a:solidFill>
-                    <a:schemeClr val="accent1">
-                      <a:shade val="15000"/>
-                      <a:alpha val="0"/>
-                    </a:schemeClr>
-                  </a:solidFill>
-                </a:ln>
-                <a:solidFill>
-                  <a:schemeClr val="tx1">
-                    <a:lumMod val="75000"/>
-                    <a:lumOff val="25000"/>
-                  </a:schemeClr>
-                </a:solidFill>
-                <a:latin typeface="맑은 고딕" panose="020B0503020000020004" pitchFamily="50" charset="-127"/>
-                <a:ea typeface="맑은 고딕" panose="020B0503020000020004" pitchFamily="50" charset="-127"/>
-              </a:endParaRPr>
-            </a:p>
-          </p:txBody>
-        </p:sp>
-        <p:sp>
-          <p:nvSpPr>
-            <p:cNvPr id="25" name="TextBox 24">
-              <a:extLst>
-                <a:ext uri="{FF2B5EF4-FFF2-40B4-BE49-F238E27FC236}">
-                  <a16:creationId xmlns:a16="http://schemas.microsoft.com/office/drawing/2014/main" id="{093CAA92-4EAE-8A8B-E8EE-0F5B51065B1A}"/>
-                </a:ext>
-              </a:extLst>
-            </p:cNvPr>
-            <p:cNvSpPr txBox="1"/>
-            <p:nvPr/>
-          </p:nvSpPr>
-          <p:spPr>
-            <a:xfrm>
-              <a:off x="376102" y="333243"/>
-              <a:ext cx="1266679" cy="830997"/>
-            </a:xfrm>
-            <a:prstGeom prst="rect">
-              <a:avLst/>
-            </a:prstGeom>
-            <a:noFill/>
-          </p:spPr>
-          <p:txBody>
-            <a:bodyPr wrap="square" tIns="0" bIns="0">
-              <a:spAutoFit/>
-            </a:bodyPr>
-            <a:lstStyle/>
-            <a:p>
-              <a:pPr eaLnBrk="1" fontAlgn="auto" latinLnBrk="1" hangingPunct="1">
-                <a:spcBef>
-                  <a:spcPts val="0"/>
-                </a:spcBef>
-                <a:spcAft>
-                  <a:spcPts val="0"/>
-                </a:spcAft>
-                <a:defRPr/>
-              </a:pPr>
-              <a:r>
-                <a:rPr lang="en-US" altLang="ko-KR" sz="5400" dirty="0">
-                  <a:ln>
-                    <a:solidFill>
-                      <a:schemeClr val="accent1">
-                        <a:shade val="15000"/>
-                        <a:alpha val="0"/>
-                      </a:schemeClr>
-                    </a:solidFill>
-                  </a:ln>
-                  <a:solidFill>
-                    <a:srgbClr val="3378C8"/>
-                  </a:solidFill>
-                  <a:latin typeface="세방고딕 Bold" panose="00000800000000000000" pitchFamily="2" charset="-127"/>
-                  <a:ea typeface="세방고딕 Bold" panose="00000800000000000000" pitchFamily="2" charset="-127"/>
-                </a:rPr>
-                <a:t>01</a:t>
-              </a:r>
-              <a:endParaRPr lang="ko-KR" altLang="en-US" sz="4400" b="1" dirty="0">
-                <a:ln>
-                  <a:solidFill>
-                    <a:schemeClr val="accent1">
-                      <a:shade val="15000"/>
-                      <a:alpha val="0"/>
-                    </a:schemeClr>
-                  </a:solidFill>
-                </a:ln>
-                <a:solidFill>
-                  <a:srgbClr val="3378C8"/>
-                </a:solidFill>
-                <a:latin typeface="세방고딕 Regular" panose="00000500000000000000" pitchFamily="2" charset="-127"/>
-                <a:ea typeface="세방고딕 Regular" panose="00000500000000000000" pitchFamily="2" charset="-127"/>
-              </a:endParaRPr>
-            </a:p>
-          </p:txBody>
-        </p:sp>
-      </p:grpSp>
-      <p:pic>
-        <p:nvPicPr>
-          <p:cNvPr id="26" name="그림 25">
-            <a:extLst>
-              <a:ext uri="{FF2B5EF4-FFF2-40B4-BE49-F238E27FC236}">
-                <a16:creationId xmlns:a16="http://schemas.microsoft.com/office/drawing/2014/main" id="{FE80A41B-F61E-4713-97AE-0B084B8425AD}"/>
-              </a:ext>
-            </a:extLst>
-          </p:cNvPr>
-          <p:cNvPicPr>
-            <a:picLocks noChangeAspect="1"/>
-          </p:cNvPicPr>
-          <p:nvPr/>
-        </p:nvPicPr>
-        <p:blipFill rotWithShape="1">
-          <a:blip r:embed="rId2" cstate="print">
-            <a:duotone>
-              <a:schemeClr val="accent5">
-                <a:shade val="45000"/>
-                <a:satMod val="135000"/>
-              </a:schemeClr>
-              <a:prstClr val="white"/>
-            </a:duotone>
-            <a:alphaModFix amt="27000"/>
-            <a:extLst>
-              <a:ext uri="{28A0092B-C50C-407E-A947-70E740481C1C}">
-                <a14:useLocalDpi xmlns:a14="http://schemas.microsoft.com/office/drawing/2010/main"/>
-              </a:ext>
-            </a:extLst>
-          </a:blip>
-          <a:srcRect/>
-          <a:stretch/>
-        </p:blipFill>
-        <p:spPr>
-          <a:xfrm rot="10800000" flipV="1">
-            <a:off x="-1" y="1673336"/>
-            <a:ext cx="12192000" cy="233580"/>
-          </a:xfrm>
-          <a:prstGeom prst="rect">
-            <a:avLst/>
-          </a:prstGeom>
-        </p:spPr>
-      </p:pic>
-      <p:sp>
-        <p:nvSpPr>
-          <p:cNvPr id="31" name="TextBox 30">
-            <a:extLst>
-              <a:ext uri="{FF2B5EF4-FFF2-40B4-BE49-F238E27FC236}">
-                <a16:creationId xmlns:a16="http://schemas.microsoft.com/office/drawing/2014/main" id="{F3F47CD5-B807-B83F-61E9-F4274413B9B9}"/>
-              </a:ext>
-            </a:extLst>
-          </p:cNvPr>
-          <p:cNvSpPr txBox="1"/>
-          <p:nvPr/>
-        </p:nvSpPr>
-        <p:spPr>
-          <a:xfrm>
-            <a:off x="0" y="0"/>
-            <a:ext cx="12192000" cy="114300"/>
-          </a:xfrm>
-          <a:prstGeom prst="rect">
-            <a:avLst/>
-          </a:prstGeom>
-          <a:solidFill>
-            <a:srgbClr val="FFD85C"/>
-          </a:solidFill>
-          <a:effectLst/>
-        </p:spPr>
-        <p:txBody>
-          <a:bodyPr wrap="square" rtlCol="0" anchor="ctr">
-            <a:noAutofit/>
-          </a:bodyPr>
-          <a:lstStyle/>
-          <a:p>
-            <a:pPr algn="ctr"/>
-            <a:endParaRPr lang="ko-KR" altLang="en-US" sz="1600" b="1" spc="600" dirty="0">
-              <a:ln>
-                <a:solidFill>
-                  <a:schemeClr val="accent1">
-                    <a:shade val="15000"/>
-                    <a:alpha val="0"/>
-                  </a:schemeClr>
-                </a:solidFill>
-              </a:ln>
-              <a:solidFill>
-                <a:srgbClr val="3378C8"/>
-              </a:solidFill>
-              <a:latin typeface="세방고딕 Regular" panose="00000500000000000000" pitchFamily="2" charset="-127"/>
-              <a:ea typeface="세방고딕 Regular" panose="00000500000000000000" pitchFamily="2" charset="-127"/>
-            </a:endParaRPr>
-          </a:p>
-        </p:txBody>
-      </p:sp>
-      <p:sp>
-        <p:nvSpPr>
-          <p:cNvPr id="32" name="TextBox 31">
-            <a:extLst>
-              <a:ext uri="{FF2B5EF4-FFF2-40B4-BE49-F238E27FC236}">
-                <a16:creationId xmlns:a16="http://schemas.microsoft.com/office/drawing/2014/main" id="{33D5EC40-66CF-4031-0B6C-BB0FF72B95AC}"/>
-              </a:ext>
-            </a:extLst>
-          </p:cNvPr>
-          <p:cNvSpPr txBox="1"/>
-          <p:nvPr/>
-        </p:nvSpPr>
-        <p:spPr>
-          <a:xfrm>
-            <a:off x="0" y="0"/>
-            <a:ext cx="1336675" cy="114300"/>
-          </a:xfrm>
-          <a:prstGeom prst="rect">
-            <a:avLst/>
-          </a:prstGeom>
-          <a:solidFill>
-            <a:srgbClr val="3378C8"/>
-          </a:solidFill>
-          <a:effectLst/>
-        </p:spPr>
-        <p:txBody>
-          <a:bodyPr wrap="square" rtlCol="0" anchor="ctr">
-            <a:noAutofit/>
-          </a:bodyPr>
-          <a:lstStyle/>
-          <a:p>
-            <a:pPr algn="ctr"/>
-            <a:endParaRPr lang="ko-KR" altLang="en-US" sz="1600" b="1" spc="600" dirty="0">
-              <a:ln>
-                <a:solidFill>
-                  <a:schemeClr val="accent1">
-                    <a:shade val="15000"/>
-                    <a:alpha val="0"/>
-                  </a:schemeClr>
-                </a:solidFill>
-              </a:ln>
-              <a:solidFill>
-                <a:srgbClr val="3378C8"/>
-              </a:solidFill>
-              <a:latin typeface="세방고딕 Regular" panose="00000500000000000000" pitchFamily="2" charset="-127"/>
-              <a:ea typeface="세방고딕 Regular" panose="00000500000000000000" pitchFamily="2" charset="-127"/>
-            </a:endParaRPr>
-          </a:p>
-        </p:txBody>
-      </p:sp>
-      <p:pic>
-        <p:nvPicPr>
-          <p:cNvPr id="38" name="그래픽 37">
-            <a:extLst>
-              <a:ext uri="{FF2B5EF4-FFF2-40B4-BE49-F238E27FC236}">
-                <a16:creationId xmlns:a16="http://schemas.microsoft.com/office/drawing/2014/main" id="{52169E4C-2799-F656-9DE1-1585D60362A7}"/>
-              </a:ext>
-            </a:extLst>
-          </p:cNvPr>
-          <p:cNvPicPr>
-            <a:picLocks noChangeAspect="1"/>
-          </p:cNvPicPr>
-          <p:nvPr/>
-        </p:nvPicPr>
-        <p:blipFill rotWithShape="1">
-          <a:blip r:embed="rId3">
-            <a:extLst>
-              <a:ext uri="{96DAC541-7B7A-43D3-8B79-37D633B846F1}">
-                <asvg:svgBlip xmlns:asvg="http://schemas.microsoft.com/office/drawing/2016/SVG/main" r:embed="rId4"/>
-              </a:ext>
-            </a:extLst>
-          </a:blip>
-          <a:srcRect l="34974"/>
-          <a:stretch/>
-        </p:blipFill>
-        <p:spPr>
-          <a:xfrm rot="14660350">
-            <a:off x="1714" y="5530566"/>
-            <a:ext cx="1452422" cy="917364"/>
-          </a:xfrm>
-          <a:prstGeom prst="rect">
-            <a:avLst/>
-          </a:prstGeom>
-        </p:spPr>
-      </p:pic>
-      <p:pic>
-        <p:nvPicPr>
-          <p:cNvPr id="5" name="그래픽 4">
-            <a:extLst>
-              <a:ext uri="{FF2B5EF4-FFF2-40B4-BE49-F238E27FC236}">
-                <a16:creationId xmlns:a16="http://schemas.microsoft.com/office/drawing/2014/main" id="{F78E59B9-5F04-49C5-1722-52369FFA7F3C}"/>
-              </a:ext>
-            </a:extLst>
-          </p:cNvPr>
-          <p:cNvPicPr>
-            <a:picLocks noChangeAspect="1"/>
-          </p:cNvPicPr>
-          <p:nvPr/>
-        </p:nvPicPr>
-        <p:blipFill rotWithShape="1">
-          <a:blip r:embed="rId5">
-            <a:extLst>
-              <a:ext uri="{96DAC541-7B7A-43D3-8B79-37D633B846F1}">
-                <asvg:svgBlip xmlns:asvg="http://schemas.microsoft.com/office/drawing/2016/SVG/main" r:embed="rId6"/>
-              </a:ext>
-            </a:extLst>
-          </a:blip>
-          <a:srcRect l="45412"/>
-          <a:stretch/>
-        </p:blipFill>
-        <p:spPr>
-          <a:xfrm>
-            <a:off x="-1" y="3018378"/>
-            <a:ext cx="2914927" cy="2847758"/>
-          </a:xfrm>
-          <a:prstGeom prst="rect">
-            <a:avLst/>
-          </a:prstGeom>
-        </p:spPr>
-      </p:pic>
-      <p:pic>
-        <p:nvPicPr>
-          <p:cNvPr id="7" name="그래픽 6">
-            <a:extLst>
-              <a:ext uri="{FF2B5EF4-FFF2-40B4-BE49-F238E27FC236}">
-                <a16:creationId xmlns:a16="http://schemas.microsoft.com/office/drawing/2014/main" id="{83FBC032-B6AF-A79B-5B30-F603859AE362}"/>
-              </a:ext>
-            </a:extLst>
-          </p:cNvPr>
-          <p:cNvPicPr>
-            <a:picLocks noChangeAspect="1"/>
-          </p:cNvPicPr>
-          <p:nvPr/>
-        </p:nvPicPr>
-        <p:blipFill>
-          <a:blip r:embed="rId7">
-            <a:extLst>
-              <a:ext uri="{96DAC541-7B7A-43D3-8B79-37D633B846F1}">
-                <asvg:svgBlip xmlns:asvg="http://schemas.microsoft.com/office/drawing/2016/SVG/main" r:embed="rId8"/>
-              </a:ext>
-            </a:extLst>
-          </a:blip>
-          <a:stretch>
-            <a:fillRect/>
-          </a:stretch>
-        </p:blipFill>
-        <p:spPr>
-          <a:xfrm>
-            <a:off x="0" y="6328534"/>
-            <a:ext cx="12192000" cy="529466"/>
-          </a:xfrm>
-          <a:prstGeom prst="rect">
-            <a:avLst/>
-          </a:prstGeom>
-        </p:spPr>
-      </p:pic>
-      <p:pic>
-        <p:nvPicPr>
-          <p:cNvPr id="3" name="그림 2">
-            <a:extLst>
-              <a:ext uri="{FF2B5EF4-FFF2-40B4-BE49-F238E27FC236}">
-                <a16:creationId xmlns:a16="http://schemas.microsoft.com/office/drawing/2014/main" id="{42910119-75C6-E73C-D0BE-AAE4A83EA0A8}"/>
-              </a:ext>
-            </a:extLst>
-          </p:cNvPr>
-          <p:cNvPicPr>
-            <a:picLocks noChangeAspect="1"/>
-          </p:cNvPicPr>
-          <p:nvPr/>
-        </p:nvPicPr>
-        <p:blipFill>
-          <a:blip r:embed="rId9"/>
-          <a:stretch>
-            <a:fillRect/>
-          </a:stretch>
-        </p:blipFill>
-        <p:spPr>
-          <a:xfrm>
-            <a:off x="294412" y="2030653"/>
-            <a:ext cx="3781953" cy="3940559"/>
-          </a:xfrm>
-          <a:prstGeom prst="rect">
-            <a:avLst/>
-          </a:prstGeom>
-        </p:spPr>
-      </p:pic>
-      <p:pic>
-        <p:nvPicPr>
-          <p:cNvPr id="6" name="그림 5">
-            <a:extLst>
-              <a:ext uri="{FF2B5EF4-FFF2-40B4-BE49-F238E27FC236}">
-                <a16:creationId xmlns:a16="http://schemas.microsoft.com/office/drawing/2014/main" id="{A72DDFB0-7B14-6441-98CD-B2987DCF1783}"/>
-              </a:ext>
-            </a:extLst>
-          </p:cNvPr>
-          <p:cNvPicPr>
-            <a:picLocks noChangeAspect="1"/>
-          </p:cNvPicPr>
-          <p:nvPr/>
-        </p:nvPicPr>
-        <p:blipFill>
-          <a:blip r:embed="rId10"/>
-          <a:stretch>
-            <a:fillRect/>
-          </a:stretch>
-        </p:blipFill>
-        <p:spPr>
-          <a:xfrm>
-            <a:off x="7989303" y="1906917"/>
-            <a:ext cx="4124901" cy="4082371"/>
-          </a:xfrm>
-          <a:prstGeom prst="rect">
-            <a:avLst/>
-          </a:prstGeom>
-        </p:spPr>
-      </p:pic>
-      <p:cxnSp>
-        <p:nvCxnSpPr>
-          <p:cNvPr id="9" name="연결선: 꺾임 8">
-            <a:extLst>
-              <a:ext uri="{FF2B5EF4-FFF2-40B4-BE49-F238E27FC236}">
-                <a16:creationId xmlns:a16="http://schemas.microsoft.com/office/drawing/2014/main" id="{ADC02F6F-FAC8-572A-B8CD-977DE4CD2C9B}"/>
-              </a:ext>
-            </a:extLst>
-          </p:cNvPr>
-          <p:cNvCxnSpPr>
-            <a:cxnSpLocks/>
-          </p:cNvCxnSpPr>
-          <p:nvPr/>
-        </p:nvCxnSpPr>
-        <p:spPr>
-          <a:xfrm rot="16200000" flipH="1">
-            <a:off x="3754328" y="2171353"/>
-            <a:ext cx="4605549" cy="3708809"/>
-          </a:xfrm>
-          <a:prstGeom prst="bentConnector3">
-            <a:avLst>
-              <a:gd name="adj1" fmla="val 50000"/>
-            </a:avLst>
-          </a:prstGeom>
-        </p:spPr>
-        <p:style>
-          <a:lnRef idx="1">
-            <a:schemeClr val="accent1"/>
-          </a:lnRef>
-          <a:fillRef idx="0">
-            <a:schemeClr val="accent1"/>
-          </a:fillRef>
-          <a:effectRef idx="0">
-            <a:schemeClr val="accent1"/>
-          </a:effectRef>
-          <a:fontRef idx="minor">
-            <a:schemeClr val="tx1"/>
-          </a:fontRef>
-        </p:style>
-      </p:cxnSp>
-      <p:sp>
-        <p:nvSpPr>
-          <p:cNvPr id="13" name="TextBox 12">
-            <a:extLst>
-              <a:ext uri="{FF2B5EF4-FFF2-40B4-BE49-F238E27FC236}">
-                <a16:creationId xmlns:a16="http://schemas.microsoft.com/office/drawing/2014/main" id="{F180433A-CF02-72FE-2C0D-A068955B117E}"/>
-              </a:ext>
-            </a:extLst>
-          </p:cNvPr>
-          <p:cNvSpPr txBox="1"/>
-          <p:nvPr/>
-        </p:nvSpPr>
-        <p:spPr>
-          <a:xfrm>
-            <a:off x="4582845" y="4317061"/>
-            <a:ext cx="3176013" cy="646331"/>
-          </a:xfrm>
-          <a:prstGeom prst="rect">
-            <a:avLst/>
-          </a:prstGeom>
-          <a:noFill/>
-        </p:spPr>
-        <p:txBody>
-          <a:bodyPr wrap="square" rtlCol="0">
-            <a:spAutoFit/>
-          </a:bodyPr>
-          <a:lstStyle/>
-          <a:p>
-            <a:r>
-              <a:rPr lang="ko-KR" altLang="en-US" dirty="0">
-                <a:solidFill>
-                  <a:srgbClr val="FF0000"/>
-                </a:solidFill>
-              </a:rPr>
-              <a:t>빨간색</a:t>
-            </a:r>
-            <a:r>
-              <a:rPr lang="en-US" altLang="ko-KR" dirty="0"/>
-              <a:t>: </a:t>
-            </a:r>
-            <a:r>
-              <a:rPr lang="ko-KR" altLang="en-US" dirty="0"/>
-              <a:t>받침대로 아이템과 충돌발생시 </a:t>
-            </a:r>
-            <a:r>
-              <a:rPr lang="en-US" altLang="ko-KR" dirty="0"/>
-              <a:t>Life</a:t>
-            </a:r>
-            <a:r>
-              <a:rPr lang="ko-KR" altLang="en-US" dirty="0"/>
-              <a:t>를 </a:t>
-            </a:r>
-            <a:r>
-              <a:rPr lang="en-US" altLang="ko-KR" dirty="0"/>
-              <a:t>1 </a:t>
-            </a:r>
-            <a:r>
-              <a:rPr lang="ko-KR" altLang="en-US" dirty="0"/>
-              <a:t>회복</a:t>
-            </a:r>
-          </a:p>
-        </p:txBody>
-      </p:sp>
-      <p:sp>
-        <p:nvSpPr>
-          <p:cNvPr id="14" name="TextBox 13">
-            <a:extLst>
-              <a:ext uri="{FF2B5EF4-FFF2-40B4-BE49-F238E27FC236}">
-                <a16:creationId xmlns:a16="http://schemas.microsoft.com/office/drawing/2014/main" id="{3C42EB31-E1F7-78FE-286E-59AA218088E6}"/>
-              </a:ext>
-            </a:extLst>
-          </p:cNvPr>
-          <p:cNvSpPr txBox="1"/>
-          <p:nvPr/>
-        </p:nvSpPr>
-        <p:spPr>
-          <a:xfrm>
-            <a:off x="4595077" y="2881523"/>
-            <a:ext cx="3176013" cy="923330"/>
-          </a:xfrm>
-          <a:prstGeom prst="rect">
-            <a:avLst/>
-          </a:prstGeom>
-          <a:noFill/>
-        </p:spPr>
-        <p:txBody>
-          <a:bodyPr wrap="square" rtlCol="0">
-            <a:spAutoFit/>
-          </a:bodyPr>
-          <a:lstStyle/>
-          <a:p>
-            <a:r>
-              <a:rPr lang="ko-KR" altLang="en-US" dirty="0">
-                <a:solidFill>
-                  <a:srgbClr val="00B0F0"/>
-                </a:solidFill>
-              </a:rPr>
-              <a:t>파란색</a:t>
-            </a:r>
-            <a:r>
-              <a:rPr lang="en-US" altLang="ko-KR" dirty="0"/>
-              <a:t>: </a:t>
-            </a:r>
-            <a:r>
-              <a:rPr lang="ko-KR" altLang="en-US" dirty="0"/>
-              <a:t>받침대로 아이템과 충돌발생시 공의 위치를 초기상태로</a:t>
-            </a:r>
-          </a:p>
-        </p:txBody>
-      </p:sp>
-      <p:sp>
-        <p:nvSpPr>
-          <p:cNvPr id="8" name="TextBox 7">
-            <a:extLst>
-              <a:ext uri="{FF2B5EF4-FFF2-40B4-BE49-F238E27FC236}">
-                <a16:creationId xmlns:a16="http://schemas.microsoft.com/office/drawing/2014/main" id="{2293372F-A805-3A02-3107-F6F66FC95146}"/>
-              </a:ext>
-            </a:extLst>
-          </p:cNvPr>
-          <p:cNvSpPr txBox="1"/>
-          <p:nvPr/>
-        </p:nvSpPr>
-        <p:spPr>
-          <a:xfrm>
-            <a:off x="2732474" y="6364040"/>
-            <a:ext cx="7184251" cy="369332"/>
-          </a:xfrm>
-          <a:prstGeom prst="rect">
-            <a:avLst/>
-          </a:prstGeom>
-          <a:noFill/>
-        </p:spPr>
-        <p:txBody>
-          <a:bodyPr wrap="square" rtlCol="0">
-            <a:spAutoFit/>
-          </a:bodyPr>
-          <a:lstStyle/>
-          <a:p>
-            <a:r>
-              <a:rPr lang="ko-KR" altLang="en-US" dirty="0"/>
-              <a:t>벽돌이 파괴될 때 일정확률로 랜덤의 아이템을 습득할 수 있음</a:t>
-            </a:r>
-          </a:p>
-        </p:txBody>
-      </p:sp>
-    </p:spTree>
-    <p:extLst>
-      <p:ext uri="{BB962C8B-B14F-4D97-AF65-F5344CB8AC3E}">
-        <p14:creationId xmlns:p14="http://schemas.microsoft.com/office/powerpoint/2010/main" val="376960664"/>
       </p:ext>
     </p:extLst>
   </p:cSld>

--- a/보고서/PPT/결과보고서_6조(벽돌깨기게임).pptx
+++ b/보고서/PPT/결과보고서_6조(벽돌깨기게임).pptx
@@ -10,14 +10,16 @@
     <p:sldId id="294" r:id="rId4"/>
     <p:sldId id="333" r:id="rId5"/>
     <p:sldId id="342" r:id="rId6"/>
-    <p:sldId id="335" r:id="rId7"/>
-    <p:sldId id="336" r:id="rId8"/>
-    <p:sldId id="338" r:id="rId9"/>
-    <p:sldId id="340" r:id="rId10"/>
-    <p:sldId id="337" r:id="rId11"/>
-    <p:sldId id="339" r:id="rId12"/>
-    <p:sldId id="341" r:id="rId13"/>
-    <p:sldId id="303" r:id="rId14"/>
+    <p:sldId id="343" r:id="rId7"/>
+    <p:sldId id="335" r:id="rId8"/>
+    <p:sldId id="336" r:id="rId9"/>
+    <p:sldId id="338" r:id="rId10"/>
+    <p:sldId id="340" r:id="rId11"/>
+    <p:sldId id="337" r:id="rId12"/>
+    <p:sldId id="339" r:id="rId13"/>
+    <p:sldId id="341" r:id="rId14"/>
+    <p:sldId id="303" r:id="rId15"/>
+    <p:sldId id="345" r:id="rId16"/>
   </p:sldIdLst>
   <p:sldSz cx="12192000" cy="6858000"/>
   <p:notesSz cx="6858000" cy="9144000"/>
@@ -297,7 +299,7 @@
           <a:p>
             <a:fld id="{3FB245E4-741B-46A9-94D1-0E241DD65ACD}" type="datetimeFigureOut">
               <a:rPr lang="ko-KR" altLang="en-US" smtClean="0"/>
-              <a:t>2024-07-19</a:t>
+              <a:t>2024-07-21</a:t>
             </a:fld>
             <a:endParaRPr lang="ko-KR" altLang="en-US"/>
           </a:p>
@@ -495,7 +497,7 @@
           <a:p>
             <a:fld id="{3FB245E4-741B-46A9-94D1-0E241DD65ACD}" type="datetimeFigureOut">
               <a:rPr lang="ko-KR" altLang="en-US" smtClean="0"/>
-              <a:t>2024-07-19</a:t>
+              <a:t>2024-07-21</a:t>
             </a:fld>
             <a:endParaRPr lang="ko-KR" altLang="en-US"/>
           </a:p>
@@ -703,7 +705,7 @@
           <a:p>
             <a:fld id="{3FB245E4-741B-46A9-94D1-0E241DD65ACD}" type="datetimeFigureOut">
               <a:rPr lang="ko-KR" altLang="en-US" smtClean="0"/>
-              <a:t>2024-07-19</a:t>
+              <a:t>2024-07-21</a:t>
             </a:fld>
             <a:endParaRPr lang="ko-KR" altLang="en-US"/>
           </a:p>
@@ -1127,7 +1129,7 @@
           <a:p>
             <a:fld id="{3FB245E4-741B-46A9-94D1-0E241DD65ACD}" type="datetimeFigureOut">
               <a:rPr lang="ko-KR" altLang="en-US" smtClean="0"/>
-              <a:t>2024-07-19</a:t>
+              <a:t>2024-07-21</a:t>
             </a:fld>
             <a:endParaRPr lang="ko-KR" altLang="en-US"/>
           </a:p>
@@ -1402,7 +1404,7 @@
           <a:p>
             <a:fld id="{3FB245E4-741B-46A9-94D1-0E241DD65ACD}" type="datetimeFigureOut">
               <a:rPr lang="ko-KR" altLang="en-US" smtClean="0"/>
-              <a:t>2024-07-19</a:t>
+              <a:t>2024-07-21</a:t>
             </a:fld>
             <a:endParaRPr lang="ko-KR" altLang="en-US"/>
           </a:p>
@@ -1667,7 +1669,7 @@
           <a:p>
             <a:fld id="{3FB245E4-741B-46A9-94D1-0E241DD65ACD}" type="datetimeFigureOut">
               <a:rPr lang="ko-KR" altLang="en-US" smtClean="0"/>
-              <a:t>2024-07-19</a:t>
+              <a:t>2024-07-21</a:t>
             </a:fld>
             <a:endParaRPr lang="ko-KR" altLang="en-US"/>
           </a:p>
@@ -2079,7 +2081,7 @@
           <a:p>
             <a:fld id="{3FB245E4-741B-46A9-94D1-0E241DD65ACD}" type="datetimeFigureOut">
               <a:rPr lang="ko-KR" altLang="en-US" smtClean="0"/>
-              <a:t>2024-07-19</a:t>
+              <a:t>2024-07-21</a:t>
             </a:fld>
             <a:endParaRPr lang="ko-KR" altLang="en-US"/>
           </a:p>
@@ -2220,7 +2222,7 @@
           <a:p>
             <a:fld id="{3FB245E4-741B-46A9-94D1-0E241DD65ACD}" type="datetimeFigureOut">
               <a:rPr lang="ko-KR" altLang="en-US" smtClean="0"/>
-              <a:t>2024-07-19</a:t>
+              <a:t>2024-07-21</a:t>
             </a:fld>
             <a:endParaRPr lang="ko-KR" altLang="en-US"/>
           </a:p>
@@ -2333,7 +2335,7 @@
           <a:p>
             <a:fld id="{3FB245E4-741B-46A9-94D1-0E241DD65ACD}" type="datetimeFigureOut">
               <a:rPr lang="ko-KR" altLang="en-US" smtClean="0"/>
-              <a:t>2024-07-19</a:t>
+              <a:t>2024-07-21</a:t>
             </a:fld>
             <a:endParaRPr lang="ko-KR" altLang="en-US"/>
           </a:p>
@@ -2644,7 +2646,7 @@
           <a:p>
             <a:fld id="{3FB245E4-741B-46A9-94D1-0E241DD65ACD}" type="datetimeFigureOut">
               <a:rPr lang="ko-KR" altLang="en-US" smtClean="0"/>
-              <a:t>2024-07-19</a:t>
+              <a:t>2024-07-21</a:t>
             </a:fld>
             <a:endParaRPr lang="ko-KR" altLang="en-US"/>
           </a:p>
@@ -2932,7 +2934,7 @@
           <a:p>
             <a:fld id="{3FB245E4-741B-46A9-94D1-0E241DD65ACD}" type="datetimeFigureOut">
               <a:rPr lang="ko-KR" altLang="en-US" smtClean="0"/>
-              <a:t>2024-07-19</a:t>
+              <a:t>2024-07-21</a:t>
             </a:fld>
             <a:endParaRPr lang="ko-KR" altLang="en-US"/>
           </a:p>
@@ -3173,7 +3175,7 @@
           <a:p>
             <a:fld id="{3FB245E4-741B-46A9-94D1-0E241DD65ACD}" type="datetimeFigureOut">
               <a:rPr lang="ko-KR" altLang="en-US" smtClean="0"/>
-              <a:t>2024-07-19</a:t>
+              <a:t>2024-07-21</a:t>
             </a:fld>
             <a:endParaRPr lang="ko-KR" altLang="en-US"/>
           </a:p>
@@ -5448,6 +5450,1411 @@
         <p:grpSpPr>
           <a:xfrm>
             <a:off x="376102" y="333243"/>
+            <a:ext cx="6836022" cy="830997"/>
+            <a:chOff x="376102" y="333243"/>
+            <a:chExt cx="6836022" cy="830997"/>
+          </a:xfrm>
+        </p:grpSpPr>
+        <p:sp>
+          <p:nvSpPr>
+            <p:cNvPr id="22" name="TextBox 21">
+              <a:extLst>
+                <a:ext uri="{FF2B5EF4-FFF2-40B4-BE49-F238E27FC236}">
+                  <a16:creationId xmlns:a16="http://schemas.microsoft.com/office/drawing/2014/main" id="{92519771-A232-D9CF-4769-EBFF2F8CFBB1}"/>
+                </a:ext>
+              </a:extLst>
+            </p:cNvPr>
+            <p:cNvSpPr txBox="1"/>
+            <p:nvPr/>
+          </p:nvSpPr>
+          <p:spPr>
+            <a:xfrm>
+              <a:off x="1461721" y="366114"/>
+              <a:ext cx="2252213" cy="276999"/>
+            </a:xfrm>
+            <a:prstGeom prst="rect">
+              <a:avLst/>
+            </a:prstGeom>
+            <a:noFill/>
+          </p:spPr>
+          <p:txBody>
+            <a:bodyPr wrap="square">
+              <a:spAutoFit/>
+            </a:bodyPr>
+            <a:lstStyle/>
+            <a:p>
+              <a:r>
+                <a:rPr lang="en-US" altLang="ko-KR" sz="1200" b="1" dirty="0">
+                  <a:ln>
+                    <a:solidFill>
+                      <a:schemeClr val="accent1">
+                        <a:shade val="15000"/>
+                        <a:alpha val="0"/>
+                      </a:schemeClr>
+                    </a:solidFill>
+                  </a:ln>
+                  <a:solidFill>
+                    <a:srgbClr val="3378C8">
+                      <a:alpha val="50000"/>
+                    </a:srgbClr>
+                  </a:solidFill>
+                  <a:latin typeface="맑은 고딕" panose="020B0503020000020004" pitchFamily="50" charset="-127"/>
+                  <a:ea typeface="맑은 고딕" panose="020B0503020000020004" pitchFamily="50" charset="-127"/>
+                </a:rPr>
+                <a:t>K-Digital Training</a:t>
+              </a:r>
+              <a:endParaRPr lang="ko-KR" altLang="en-US" sz="1200" b="1" dirty="0">
+                <a:ln>
+                  <a:solidFill>
+                    <a:schemeClr val="accent1">
+                      <a:shade val="15000"/>
+                      <a:alpha val="0"/>
+                    </a:schemeClr>
+                  </a:solidFill>
+                </a:ln>
+                <a:solidFill>
+                  <a:srgbClr val="3378C8">
+                    <a:alpha val="50000"/>
+                  </a:srgbClr>
+                </a:solidFill>
+                <a:latin typeface="맑은 고딕" panose="020B0503020000020004" pitchFamily="50" charset="-127"/>
+                <a:ea typeface="맑은 고딕" panose="020B0503020000020004" pitchFamily="50" charset="-127"/>
+              </a:endParaRPr>
+            </a:p>
+          </p:txBody>
+        </p:sp>
+        <p:sp>
+          <p:nvSpPr>
+            <p:cNvPr id="23" name="TextBox 22">
+              <a:extLst>
+                <a:ext uri="{FF2B5EF4-FFF2-40B4-BE49-F238E27FC236}">
+                  <a16:creationId xmlns:a16="http://schemas.microsoft.com/office/drawing/2014/main" id="{EE109AB5-00CA-F0E8-7FD9-645FB6E912A9}"/>
+                </a:ext>
+              </a:extLst>
+            </p:cNvPr>
+            <p:cNvSpPr txBox="1"/>
+            <p:nvPr/>
+          </p:nvSpPr>
+          <p:spPr>
+            <a:xfrm>
+              <a:off x="1461721" y="585057"/>
+              <a:ext cx="5750403" cy="523220"/>
+            </a:xfrm>
+            <a:prstGeom prst="rect">
+              <a:avLst/>
+            </a:prstGeom>
+            <a:noFill/>
+          </p:spPr>
+          <p:txBody>
+            <a:bodyPr wrap="square">
+              <a:spAutoFit/>
+            </a:bodyPr>
+            <a:lstStyle/>
+            <a:p>
+              <a:pPr>
+                <a:defRPr/>
+              </a:pPr>
+              <a:r>
+                <a:rPr lang="ko-KR" altLang="en-US" sz="2800" b="1" dirty="0">
+                  <a:ln>
+                    <a:solidFill>
+                      <a:schemeClr val="accent1">
+                        <a:shade val="15000"/>
+                        <a:alpha val="0"/>
+                      </a:schemeClr>
+                    </a:solidFill>
+                  </a:ln>
+                  <a:solidFill>
+                    <a:schemeClr val="tx1">
+                      <a:lumMod val="75000"/>
+                      <a:lumOff val="25000"/>
+                    </a:schemeClr>
+                  </a:solidFill>
+                  <a:latin typeface="맑은 고딕" panose="020B0503020000020004" pitchFamily="50" charset="-127"/>
+                  <a:ea typeface="맑은 고딕" panose="020B0503020000020004" pitchFamily="50" charset="-127"/>
+                </a:rPr>
+                <a:t>프로젝트 결과화면</a:t>
+              </a:r>
+              <a:r>
+                <a:rPr lang="en-US" altLang="ko-KR" sz="2800" b="1" dirty="0">
+                  <a:ln>
+                    <a:solidFill>
+                      <a:schemeClr val="accent1">
+                        <a:shade val="15000"/>
+                        <a:alpha val="0"/>
+                      </a:schemeClr>
+                    </a:solidFill>
+                  </a:ln>
+                  <a:solidFill>
+                    <a:schemeClr val="tx1">
+                      <a:lumMod val="75000"/>
+                      <a:lumOff val="25000"/>
+                    </a:schemeClr>
+                  </a:solidFill>
+                  <a:latin typeface="맑은 고딕" panose="020B0503020000020004" pitchFamily="50" charset="-127"/>
+                  <a:ea typeface="맑은 고딕" panose="020B0503020000020004" pitchFamily="50" charset="-127"/>
+                </a:rPr>
+                <a:t>(</a:t>
+              </a:r>
+              <a:r>
+                <a:rPr lang="ko-KR" altLang="en-US" sz="2800" b="1" dirty="0">
+                  <a:ln>
+                    <a:solidFill>
+                      <a:schemeClr val="accent1">
+                        <a:shade val="15000"/>
+                        <a:alpha val="0"/>
+                      </a:schemeClr>
+                    </a:solidFill>
+                  </a:ln>
+                  <a:solidFill>
+                    <a:schemeClr val="tx1">
+                      <a:lumMod val="75000"/>
+                      <a:lumOff val="25000"/>
+                    </a:schemeClr>
+                  </a:solidFill>
+                  <a:latin typeface="맑은 고딕" panose="020B0503020000020004" pitchFamily="50" charset="-127"/>
+                  <a:ea typeface="맑은 고딕" panose="020B0503020000020004" pitchFamily="50" charset="-127"/>
+                </a:rPr>
+                <a:t>벽돌의 생명력</a:t>
+              </a:r>
+              <a:r>
+                <a:rPr lang="en-US" altLang="ko-KR" sz="2800" b="1" dirty="0">
+                  <a:ln>
+                    <a:solidFill>
+                      <a:schemeClr val="accent1">
+                        <a:shade val="15000"/>
+                        <a:alpha val="0"/>
+                      </a:schemeClr>
+                    </a:solidFill>
+                  </a:ln>
+                  <a:solidFill>
+                    <a:schemeClr val="tx1">
+                      <a:lumMod val="75000"/>
+                      <a:lumOff val="25000"/>
+                    </a:schemeClr>
+                  </a:solidFill>
+                  <a:latin typeface="맑은 고딕" panose="020B0503020000020004" pitchFamily="50" charset="-127"/>
+                  <a:ea typeface="맑은 고딕" panose="020B0503020000020004" pitchFamily="50" charset="-127"/>
+                </a:rPr>
+                <a:t>)</a:t>
+              </a:r>
+              <a:endParaRPr lang="ko-KR" altLang="en-US" sz="2800" b="1" dirty="0">
+                <a:ln>
+                  <a:solidFill>
+                    <a:schemeClr val="accent1">
+                      <a:shade val="15000"/>
+                      <a:alpha val="0"/>
+                    </a:schemeClr>
+                  </a:solidFill>
+                </a:ln>
+                <a:solidFill>
+                  <a:schemeClr val="tx1">
+                    <a:lumMod val="75000"/>
+                    <a:lumOff val="25000"/>
+                  </a:schemeClr>
+                </a:solidFill>
+                <a:latin typeface="맑은 고딕" panose="020B0503020000020004" pitchFamily="50" charset="-127"/>
+                <a:ea typeface="맑은 고딕" panose="020B0503020000020004" pitchFamily="50" charset="-127"/>
+              </a:endParaRPr>
+            </a:p>
+          </p:txBody>
+        </p:sp>
+        <p:sp>
+          <p:nvSpPr>
+            <p:cNvPr id="25" name="TextBox 24">
+              <a:extLst>
+                <a:ext uri="{FF2B5EF4-FFF2-40B4-BE49-F238E27FC236}">
+                  <a16:creationId xmlns:a16="http://schemas.microsoft.com/office/drawing/2014/main" id="{093CAA92-4EAE-8A8B-E8EE-0F5B51065B1A}"/>
+                </a:ext>
+              </a:extLst>
+            </p:cNvPr>
+            <p:cNvSpPr txBox="1"/>
+            <p:nvPr/>
+          </p:nvSpPr>
+          <p:spPr>
+            <a:xfrm>
+              <a:off x="376102" y="333243"/>
+              <a:ext cx="1266679" cy="830997"/>
+            </a:xfrm>
+            <a:prstGeom prst="rect">
+              <a:avLst/>
+            </a:prstGeom>
+            <a:noFill/>
+          </p:spPr>
+          <p:txBody>
+            <a:bodyPr wrap="square" tIns="0" bIns="0">
+              <a:spAutoFit/>
+            </a:bodyPr>
+            <a:lstStyle/>
+            <a:p>
+              <a:pPr eaLnBrk="1" fontAlgn="auto" latinLnBrk="1" hangingPunct="1">
+                <a:spcBef>
+                  <a:spcPts val="0"/>
+                </a:spcBef>
+                <a:spcAft>
+                  <a:spcPts val="0"/>
+                </a:spcAft>
+                <a:defRPr/>
+              </a:pPr>
+              <a:r>
+                <a:rPr lang="en-US" altLang="ko-KR" sz="5400" dirty="0">
+                  <a:ln>
+                    <a:solidFill>
+                      <a:schemeClr val="accent1">
+                        <a:shade val="15000"/>
+                        <a:alpha val="0"/>
+                      </a:schemeClr>
+                    </a:solidFill>
+                  </a:ln>
+                  <a:solidFill>
+                    <a:srgbClr val="3378C8"/>
+                  </a:solidFill>
+                  <a:latin typeface="세방고딕 Bold" panose="00000800000000000000" pitchFamily="2" charset="-127"/>
+                  <a:ea typeface="세방고딕 Bold" panose="00000800000000000000" pitchFamily="2" charset="-127"/>
+                </a:rPr>
+                <a:t>01</a:t>
+              </a:r>
+              <a:endParaRPr lang="ko-KR" altLang="en-US" sz="4400" b="1" dirty="0">
+                <a:ln>
+                  <a:solidFill>
+                    <a:schemeClr val="accent1">
+                      <a:shade val="15000"/>
+                      <a:alpha val="0"/>
+                    </a:schemeClr>
+                  </a:solidFill>
+                </a:ln>
+                <a:solidFill>
+                  <a:srgbClr val="3378C8"/>
+                </a:solidFill>
+                <a:latin typeface="세방고딕 Regular" panose="00000500000000000000" pitchFamily="2" charset="-127"/>
+                <a:ea typeface="세방고딕 Regular" panose="00000500000000000000" pitchFamily="2" charset="-127"/>
+              </a:endParaRPr>
+            </a:p>
+          </p:txBody>
+        </p:sp>
+      </p:grpSp>
+      <p:pic>
+        <p:nvPicPr>
+          <p:cNvPr id="26" name="그림 25">
+            <a:extLst>
+              <a:ext uri="{FF2B5EF4-FFF2-40B4-BE49-F238E27FC236}">
+                <a16:creationId xmlns:a16="http://schemas.microsoft.com/office/drawing/2014/main" id="{FE80A41B-F61E-4713-97AE-0B084B8425AD}"/>
+              </a:ext>
+            </a:extLst>
+          </p:cNvPr>
+          <p:cNvPicPr>
+            <a:picLocks noChangeAspect="1"/>
+          </p:cNvPicPr>
+          <p:nvPr/>
+        </p:nvPicPr>
+        <p:blipFill rotWithShape="1">
+          <a:blip r:embed="rId2" cstate="print">
+            <a:duotone>
+              <a:schemeClr val="accent5">
+                <a:shade val="45000"/>
+                <a:satMod val="135000"/>
+              </a:schemeClr>
+              <a:prstClr val="white"/>
+            </a:duotone>
+            <a:alphaModFix amt="27000"/>
+            <a:extLst>
+              <a:ext uri="{28A0092B-C50C-407E-A947-70E740481C1C}">
+                <a14:useLocalDpi xmlns:a14="http://schemas.microsoft.com/office/drawing/2010/main"/>
+              </a:ext>
+            </a:extLst>
+          </a:blip>
+          <a:srcRect/>
+          <a:stretch/>
+        </p:blipFill>
+        <p:spPr>
+          <a:xfrm rot="10800000" flipV="1">
+            <a:off x="-1" y="1673336"/>
+            <a:ext cx="12192000" cy="233580"/>
+          </a:xfrm>
+          <a:prstGeom prst="rect">
+            <a:avLst/>
+          </a:prstGeom>
+        </p:spPr>
+      </p:pic>
+      <p:sp>
+        <p:nvSpPr>
+          <p:cNvPr id="31" name="TextBox 30">
+            <a:extLst>
+              <a:ext uri="{FF2B5EF4-FFF2-40B4-BE49-F238E27FC236}">
+                <a16:creationId xmlns:a16="http://schemas.microsoft.com/office/drawing/2014/main" id="{F3F47CD5-B807-B83F-61E9-F4274413B9B9}"/>
+              </a:ext>
+            </a:extLst>
+          </p:cNvPr>
+          <p:cNvSpPr txBox="1"/>
+          <p:nvPr/>
+        </p:nvSpPr>
+        <p:spPr>
+          <a:xfrm>
+            <a:off x="0" y="0"/>
+            <a:ext cx="12192000" cy="114300"/>
+          </a:xfrm>
+          <a:prstGeom prst="rect">
+            <a:avLst/>
+          </a:prstGeom>
+          <a:solidFill>
+            <a:srgbClr val="FFD85C"/>
+          </a:solidFill>
+          <a:effectLst/>
+        </p:spPr>
+        <p:txBody>
+          <a:bodyPr wrap="square" rtlCol="0" anchor="ctr">
+            <a:noAutofit/>
+          </a:bodyPr>
+          <a:lstStyle/>
+          <a:p>
+            <a:pPr algn="ctr"/>
+            <a:endParaRPr lang="ko-KR" altLang="en-US" sz="1600" b="1" spc="600" dirty="0">
+              <a:ln>
+                <a:solidFill>
+                  <a:schemeClr val="accent1">
+                    <a:shade val="15000"/>
+                    <a:alpha val="0"/>
+                  </a:schemeClr>
+                </a:solidFill>
+              </a:ln>
+              <a:solidFill>
+                <a:srgbClr val="3378C8"/>
+              </a:solidFill>
+              <a:latin typeface="세방고딕 Regular" panose="00000500000000000000" pitchFamily="2" charset="-127"/>
+              <a:ea typeface="세방고딕 Regular" panose="00000500000000000000" pitchFamily="2" charset="-127"/>
+            </a:endParaRPr>
+          </a:p>
+        </p:txBody>
+      </p:sp>
+      <p:sp>
+        <p:nvSpPr>
+          <p:cNvPr id="32" name="TextBox 31">
+            <a:extLst>
+              <a:ext uri="{FF2B5EF4-FFF2-40B4-BE49-F238E27FC236}">
+                <a16:creationId xmlns:a16="http://schemas.microsoft.com/office/drawing/2014/main" id="{33D5EC40-66CF-4031-0B6C-BB0FF72B95AC}"/>
+              </a:ext>
+            </a:extLst>
+          </p:cNvPr>
+          <p:cNvSpPr txBox="1"/>
+          <p:nvPr/>
+        </p:nvSpPr>
+        <p:spPr>
+          <a:xfrm>
+            <a:off x="0" y="0"/>
+            <a:ext cx="1336675" cy="114300"/>
+          </a:xfrm>
+          <a:prstGeom prst="rect">
+            <a:avLst/>
+          </a:prstGeom>
+          <a:solidFill>
+            <a:srgbClr val="3378C8"/>
+          </a:solidFill>
+          <a:effectLst/>
+        </p:spPr>
+        <p:txBody>
+          <a:bodyPr wrap="square" rtlCol="0" anchor="ctr">
+            <a:noAutofit/>
+          </a:bodyPr>
+          <a:lstStyle/>
+          <a:p>
+            <a:pPr algn="ctr"/>
+            <a:endParaRPr lang="ko-KR" altLang="en-US" sz="1600" b="1" spc="600" dirty="0">
+              <a:ln>
+                <a:solidFill>
+                  <a:schemeClr val="accent1">
+                    <a:shade val="15000"/>
+                    <a:alpha val="0"/>
+                  </a:schemeClr>
+                </a:solidFill>
+              </a:ln>
+              <a:solidFill>
+                <a:srgbClr val="3378C8"/>
+              </a:solidFill>
+              <a:latin typeface="세방고딕 Regular" panose="00000500000000000000" pitchFamily="2" charset="-127"/>
+              <a:ea typeface="세방고딕 Regular" panose="00000500000000000000" pitchFamily="2" charset="-127"/>
+            </a:endParaRPr>
+          </a:p>
+        </p:txBody>
+      </p:sp>
+      <p:pic>
+        <p:nvPicPr>
+          <p:cNvPr id="38" name="그래픽 37">
+            <a:extLst>
+              <a:ext uri="{FF2B5EF4-FFF2-40B4-BE49-F238E27FC236}">
+                <a16:creationId xmlns:a16="http://schemas.microsoft.com/office/drawing/2014/main" id="{52169E4C-2799-F656-9DE1-1585D60362A7}"/>
+              </a:ext>
+            </a:extLst>
+          </p:cNvPr>
+          <p:cNvPicPr>
+            <a:picLocks noChangeAspect="1"/>
+          </p:cNvPicPr>
+          <p:nvPr/>
+        </p:nvPicPr>
+        <p:blipFill rotWithShape="1">
+          <a:blip r:embed="rId3">
+            <a:extLst>
+              <a:ext uri="{96DAC541-7B7A-43D3-8B79-37D633B846F1}">
+                <asvg:svgBlip xmlns:asvg="http://schemas.microsoft.com/office/drawing/2016/SVG/main" r:embed="rId4"/>
+              </a:ext>
+            </a:extLst>
+          </a:blip>
+          <a:srcRect l="34974"/>
+          <a:stretch/>
+        </p:blipFill>
+        <p:spPr>
+          <a:xfrm rot="14660350">
+            <a:off x="1714" y="5530566"/>
+            <a:ext cx="1452422" cy="917364"/>
+          </a:xfrm>
+          <a:prstGeom prst="rect">
+            <a:avLst/>
+          </a:prstGeom>
+        </p:spPr>
+      </p:pic>
+      <p:pic>
+        <p:nvPicPr>
+          <p:cNvPr id="77" name="그래픽 76">
+            <a:extLst>
+              <a:ext uri="{FF2B5EF4-FFF2-40B4-BE49-F238E27FC236}">
+                <a16:creationId xmlns:a16="http://schemas.microsoft.com/office/drawing/2014/main" id="{07A591E4-A623-F9E5-1D76-C87CC8D6F30F}"/>
+              </a:ext>
+            </a:extLst>
+          </p:cNvPr>
+          <p:cNvPicPr>
+            <a:picLocks noChangeAspect="1"/>
+          </p:cNvPicPr>
+          <p:nvPr/>
+        </p:nvPicPr>
+        <p:blipFill>
+          <a:blip r:embed="rId5">
+            <a:extLst>
+              <a:ext uri="{96DAC541-7B7A-43D3-8B79-37D633B846F1}">
+                <asvg:svgBlip xmlns:asvg="http://schemas.microsoft.com/office/drawing/2016/SVG/main" r:embed="rId6"/>
+              </a:ext>
+            </a:extLst>
+          </a:blip>
+          <a:stretch>
+            <a:fillRect/>
+          </a:stretch>
+        </p:blipFill>
+        <p:spPr>
+          <a:xfrm rot="21165700">
+            <a:off x="8621099" y="4762217"/>
+            <a:ext cx="3710393" cy="1869483"/>
+          </a:xfrm>
+          <a:prstGeom prst="rect">
+            <a:avLst/>
+          </a:prstGeom>
+        </p:spPr>
+      </p:pic>
+      <p:pic>
+        <p:nvPicPr>
+          <p:cNvPr id="5" name="그래픽 4">
+            <a:extLst>
+              <a:ext uri="{FF2B5EF4-FFF2-40B4-BE49-F238E27FC236}">
+                <a16:creationId xmlns:a16="http://schemas.microsoft.com/office/drawing/2014/main" id="{F78E59B9-5F04-49C5-1722-52369FFA7F3C}"/>
+              </a:ext>
+            </a:extLst>
+          </p:cNvPr>
+          <p:cNvPicPr>
+            <a:picLocks noChangeAspect="1"/>
+          </p:cNvPicPr>
+          <p:nvPr/>
+        </p:nvPicPr>
+        <p:blipFill rotWithShape="1">
+          <a:blip r:embed="rId7">
+            <a:extLst>
+              <a:ext uri="{96DAC541-7B7A-43D3-8B79-37D633B846F1}">
+                <asvg:svgBlip xmlns:asvg="http://schemas.microsoft.com/office/drawing/2016/SVG/main" r:embed="rId8"/>
+              </a:ext>
+            </a:extLst>
+          </a:blip>
+          <a:srcRect l="45412"/>
+          <a:stretch/>
+        </p:blipFill>
+        <p:spPr>
+          <a:xfrm>
+            <a:off x="-1" y="3018378"/>
+            <a:ext cx="2914927" cy="2847758"/>
+          </a:xfrm>
+          <a:prstGeom prst="rect">
+            <a:avLst/>
+          </a:prstGeom>
+        </p:spPr>
+      </p:pic>
+      <p:pic>
+        <p:nvPicPr>
+          <p:cNvPr id="7" name="그래픽 6">
+            <a:extLst>
+              <a:ext uri="{FF2B5EF4-FFF2-40B4-BE49-F238E27FC236}">
+                <a16:creationId xmlns:a16="http://schemas.microsoft.com/office/drawing/2014/main" id="{83FBC032-B6AF-A79B-5B30-F603859AE362}"/>
+              </a:ext>
+            </a:extLst>
+          </p:cNvPr>
+          <p:cNvPicPr>
+            <a:picLocks noChangeAspect="1"/>
+          </p:cNvPicPr>
+          <p:nvPr/>
+        </p:nvPicPr>
+        <p:blipFill>
+          <a:blip r:embed="rId9">
+            <a:extLst>
+              <a:ext uri="{96DAC541-7B7A-43D3-8B79-37D633B846F1}">
+                <asvg:svgBlip xmlns:asvg="http://schemas.microsoft.com/office/drawing/2016/SVG/main" r:embed="rId10"/>
+              </a:ext>
+            </a:extLst>
+          </a:blip>
+          <a:stretch>
+            <a:fillRect/>
+          </a:stretch>
+        </p:blipFill>
+        <p:spPr>
+          <a:xfrm>
+            <a:off x="0" y="5934670"/>
+            <a:ext cx="12192000" cy="923330"/>
+          </a:xfrm>
+          <a:prstGeom prst="rect">
+            <a:avLst/>
+          </a:prstGeom>
+        </p:spPr>
+      </p:pic>
+      <p:sp>
+        <p:nvSpPr>
+          <p:cNvPr id="17" name="직사각형 16">
+            <a:extLst>
+              <a:ext uri="{FF2B5EF4-FFF2-40B4-BE49-F238E27FC236}">
+                <a16:creationId xmlns:a16="http://schemas.microsoft.com/office/drawing/2014/main" id="{FA9F5B4A-72BD-2DA3-FD24-DCAC9BE771F7}"/>
+              </a:ext>
+            </a:extLst>
+          </p:cNvPr>
+          <p:cNvSpPr/>
+          <p:nvPr/>
+        </p:nvSpPr>
+        <p:spPr>
+          <a:xfrm>
+            <a:off x="6132964" y="5025455"/>
+            <a:ext cx="5088427" cy="707886"/>
+          </a:xfrm>
+          <a:prstGeom prst="rect">
+            <a:avLst/>
+          </a:prstGeom>
+          <a:noFill/>
+        </p:spPr>
+        <p:txBody>
+          <a:bodyPr wrap="square" lIns="91440" tIns="45720" rIns="91440" bIns="45720">
+            <a:spAutoFit/>
+          </a:bodyPr>
+          <a:lstStyle/>
+          <a:p>
+            <a:pPr algn="ctr"/>
+            <a:r>
+              <a:rPr lang="ko-KR" altLang="en-US" sz="2000" dirty="0">
+                <a:ln w="0"/>
+                <a:effectLst>
+                  <a:outerShdw blurRad="38100" dist="19050" dir="2700000" algn="tl" rotWithShape="0">
+                    <a:schemeClr val="dk1">
+                      <a:alpha val="40000"/>
+                    </a:schemeClr>
+                  </a:outerShdw>
+                </a:effectLst>
+              </a:rPr>
+              <a:t>벽돌의 생명력 </a:t>
+            </a:r>
+            <a:r>
+              <a:rPr lang="en-US" altLang="ko-KR" sz="2000" dirty="0">
+                <a:ln w="0"/>
+                <a:effectLst>
+                  <a:outerShdw blurRad="38100" dist="19050" dir="2700000" algn="tl" rotWithShape="0">
+                    <a:schemeClr val="dk1">
+                      <a:alpha val="40000"/>
+                    </a:schemeClr>
+                  </a:outerShdw>
+                </a:effectLst>
+              </a:rPr>
+              <a:t>= </a:t>
+            </a:r>
+            <a:r>
+              <a:rPr lang="ko-KR" altLang="en-US" sz="2000" dirty="0">
+                <a:ln w="0"/>
+                <a:effectLst>
+                  <a:outerShdw blurRad="38100" dist="19050" dir="2700000" algn="tl" rotWithShape="0">
+                    <a:schemeClr val="dk1">
+                      <a:alpha val="40000"/>
+                    </a:schemeClr>
+                  </a:outerShdw>
+                </a:effectLst>
+              </a:rPr>
+              <a:t>스테이지 번호</a:t>
+            </a:r>
+            <a:endParaRPr lang="en-US" altLang="ko-KR" sz="2000" dirty="0">
+              <a:ln w="0"/>
+              <a:effectLst>
+                <a:outerShdw blurRad="38100" dist="19050" dir="2700000" algn="tl" rotWithShape="0">
+                  <a:schemeClr val="dk1">
+                    <a:alpha val="40000"/>
+                  </a:schemeClr>
+                </a:outerShdw>
+              </a:effectLst>
+            </a:endParaRPr>
+          </a:p>
+          <a:p>
+            <a:pPr algn="ctr"/>
+            <a:r>
+              <a:rPr lang="ko-KR" altLang="en-US" sz="2000" b="0" cap="none" spc="0" dirty="0">
+                <a:ln w="0"/>
+                <a:solidFill>
+                  <a:schemeClr val="tx1"/>
+                </a:solidFill>
+                <a:effectLst>
+                  <a:outerShdw blurRad="38100" dist="19050" dir="2700000" algn="tl" rotWithShape="0">
+                    <a:schemeClr val="dk1">
+                      <a:alpha val="40000"/>
+                    </a:schemeClr>
+                  </a:outerShdw>
+                </a:effectLst>
+              </a:rPr>
+              <a:t>공이 벽돌의 생명력 만큼 충돌해야 파괴됨</a:t>
+            </a:r>
+            <a:r>
+              <a:rPr lang="en-US" altLang="ko-KR" sz="2000" b="0" cap="none" spc="0" dirty="0">
+                <a:ln w="0"/>
+                <a:solidFill>
+                  <a:schemeClr val="tx1"/>
+                </a:solidFill>
+                <a:effectLst>
+                  <a:outerShdw blurRad="38100" dist="19050" dir="2700000" algn="tl" rotWithShape="0">
+                    <a:schemeClr val="dk1">
+                      <a:alpha val="40000"/>
+                    </a:schemeClr>
+                  </a:outerShdw>
+                </a:effectLst>
+              </a:rPr>
+              <a:t>.</a:t>
+            </a:r>
+          </a:p>
+        </p:txBody>
+      </p:sp>
+      <p:sp>
+        <p:nvSpPr>
+          <p:cNvPr id="19" name="직사각형 18">
+            <a:extLst>
+              <a:ext uri="{FF2B5EF4-FFF2-40B4-BE49-F238E27FC236}">
+                <a16:creationId xmlns:a16="http://schemas.microsoft.com/office/drawing/2014/main" id="{27F4C92D-FC09-F126-988B-4A29683F23DC}"/>
+              </a:ext>
+            </a:extLst>
+          </p:cNvPr>
+          <p:cNvSpPr/>
+          <p:nvPr/>
+        </p:nvSpPr>
+        <p:spPr>
+          <a:xfrm>
+            <a:off x="9575705" y="2006105"/>
+            <a:ext cx="1811424" cy="400110"/>
+          </a:xfrm>
+          <a:prstGeom prst="rect">
+            <a:avLst/>
+          </a:prstGeom>
+          <a:noFill/>
+        </p:spPr>
+        <p:txBody>
+          <a:bodyPr wrap="square" lIns="91440" tIns="45720" rIns="91440" bIns="45720">
+            <a:spAutoFit/>
+          </a:bodyPr>
+          <a:lstStyle/>
+          <a:p>
+            <a:pPr algn="ctr"/>
+            <a:r>
+              <a:rPr lang="en-US" altLang="ko-KR" sz="2000" b="0" cap="none" spc="0" dirty="0">
+                <a:ln w="0"/>
+                <a:solidFill>
+                  <a:schemeClr val="tx1"/>
+                </a:solidFill>
+                <a:effectLst>
+                  <a:outerShdw blurRad="38100" dist="19050" dir="2700000" algn="tl" rotWithShape="0">
+                    <a:schemeClr val="dk1">
+                      <a:alpha val="40000"/>
+                    </a:schemeClr>
+                  </a:outerShdw>
+                </a:effectLst>
+              </a:rPr>
+              <a:t>1 </a:t>
+            </a:r>
+            <a:r>
+              <a:rPr lang="ko-KR" altLang="en-US" sz="2000" b="0" cap="none" spc="0" dirty="0">
+                <a:ln w="0"/>
+                <a:solidFill>
+                  <a:schemeClr val="tx1"/>
+                </a:solidFill>
+                <a:effectLst>
+                  <a:outerShdw blurRad="38100" dist="19050" dir="2700000" algn="tl" rotWithShape="0">
+                    <a:schemeClr val="dk1">
+                      <a:alpha val="40000"/>
+                    </a:schemeClr>
+                  </a:outerShdw>
+                </a:effectLst>
+              </a:rPr>
+              <a:t>스테이지</a:t>
+            </a:r>
+            <a:endParaRPr lang="en-US" altLang="ko-KR" sz="2000" b="0" cap="none" spc="0" dirty="0">
+              <a:ln w="0"/>
+              <a:solidFill>
+                <a:schemeClr val="tx1"/>
+              </a:solidFill>
+              <a:effectLst>
+                <a:outerShdw blurRad="38100" dist="19050" dir="2700000" algn="tl" rotWithShape="0">
+                  <a:schemeClr val="dk1">
+                    <a:alpha val="40000"/>
+                  </a:schemeClr>
+                </a:outerShdw>
+              </a:effectLst>
+            </a:endParaRPr>
+          </a:p>
+        </p:txBody>
+      </p:sp>
+      <p:sp>
+        <p:nvSpPr>
+          <p:cNvPr id="21" name="직사각형 20">
+            <a:extLst>
+              <a:ext uri="{FF2B5EF4-FFF2-40B4-BE49-F238E27FC236}">
+                <a16:creationId xmlns:a16="http://schemas.microsoft.com/office/drawing/2014/main" id="{9E6362D2-4906-F158-01A9-F5ECE94E824C}"/>
+              </a:ext>
+            </a:extLst>
+          </p:cNvPr>
+          <p:cNvSpPr/>
+          <p:nvPr/>
+        </p:nvSpPr>
+        <p:spPr>
+          <a:xfrm>
+            <a:off x="9575705" y="2612223"/>
+            <a:ext cx="1811424" cy="400110"/>
+          </a:xfrm>
+          <a:prstGeom prst="rect">
+            <a:avLst/>
+          </a:prstGeom>
+          <a:noFill/>
+        </p:spPr>
+        <p:txBody>
+          <a:bodyPr wrap="square" lIns="91440" tIns="45720" rIns="91440" bIns="45720">
+            <a:spAutoFit/>
+          </a:bodyPr>
+          <a:lstStyle/>
+          <a:p>
+            <a:pPr algn="ctr"/>
+            <a:r>
+              <a:rPr lang="en-US" altLang="ko-KR" sz="2000" dirty="0">
+                <a:ln w="0"/>
+                <a:effectLst>
+                  <a:outerShdw blurRad="38100" dist="19050" dir="2700000" algn="tl" rotWithShape="0">
+                    <a:schemeClr val="dk1">
+                      <a:alpha val="40000"/>
+                    </a:schemeClr>
+                  </a:outerShdw>
+                </a:effectLst>
+              </a:rPr>
+              <a:t>2</a:t>
+            </a:r>
+            <a:r>
+              <a:rPr lang="en-US" altLang="ko-KR" sz="2000" b="0" cap="none" spc="0" dirty="0">
+                <a:ln w="0"/>
+                <a:solidFill>
+                  <a:schemeClr val="tx1"/>
+                </a:solidFill>
+                <a:effectLst>
+                  <a:outerShdw blurRad="38100" dist="19050" dir="2700000" algn="tl" rotWithShape="0">
+                    <a:schemeClr val="dk1">
+                      <a:alpha val="40000"/>
+                    </a:schemeClr>
+                  </a:outerShdw>
+                </a:effectLst>
+              </a:rPr>
+              <a:t> </a:t>
+            </a:r>
+            <a:r>
+              <a:rPr lang="ko-KR" altLang="en-US" sz="2000" b="0" cap="none" spc="0" dirty="0">
+                <a:ln w="0"/>
+                <a:solidFill>
+                  <a:schemeClr val="tx1"/>
+                </a:solidFill>
+                <a:effectLst>
+                  <a:outerShdw blurRad="38100" dist="19050" dir="2700000" algn="tl" rotWithShape="0">
+                    <a:schemeClr val="dk1">
+                      <a:alpha val="40000"/>
+                    </a:schemeClr>
+                  </a:outerShdw>
+                </a:effectLst>
+              </a:rPr>
+              <a:t>스테이지</a:t>
+            </a:r>
+            <a:endParaRPr lang="en-US" altLang="ko-KR" sz="2000" b="0" cap="none" spc="0" dirty="0">
+              <a:ln w="0"/>
+              <a:solidFill>
+                <a:schemeClr val="tx1"/>
+              </a:solidFill>
+              <a:effectLst>
+                <a:outerShdw blurRad="38100" dist="19050" dir="2700000" algn="tl" rotWithShape="0">
+                  <a:schemeClr val="dk1">
+                    <a:alpha val="40000"/>
+                  </a:schemeClr>
+                </a:outerShdw>
+              </a:effectLst>
+            </a:endParaRPr>
+          </a:p>
+        </p:txBody>
+      </p:sp>
+      <p:sp>
+        <p:nvSpPr>
+          <p:cNvPr id="24" name="직사각형 23">
+            <a:extLst>
+              <a:ext uri="{FF2B5EF4-FFF2-40B4-BE49-F238E27FC236}">
+                <a16:creationId xmlns:a16="http://schemas.microsoft.com/office/drawing/2014/main" id="{A2310716-ED50-7E34-476B-158AF4C45EB1}"/>
+              </a:ext>
+            </a:extLst>
+          </p:cNvPr>
+          <p:cNvSpPr/>
+          <p:nvPr/>
+        </p:nvSpPr>
+        <p:spPr>
+          <a:xfrm>
+            <a:off x="9575705" y="3265073"/>
+            <a:ext cx="1811424" cy="400110"/>
+          </a:xfrm>
+          <a:prstGeom prst="rect">
+            <a:avLst/>
+          </a:prstGeom>
+          <a:noFill/>
+        </p:spPr>
+        <p:txBody>
+          <a:bodyPr wrap="square" lIns="91440" tIns="45720" rIns="91440" bIns="45720">
+            <a:spAutoFit/>
+          </a:bodyPr>
+          <a:lstStyle/>
+          <a:p>
+            <a:pPr algn="ctr"/>
+            <a:r>
+              <a:rPr lang="en-US" altLang="ko-KR" sz="2000" dirty="0">
+                <a:ln w="0"/>
+                <a:effectLst>
+                  <a:outerShdw blurRad="38100" dist="19050" dir="2700000" algn="tl" rotWithShape="0">
+                    <a:schemeClr val="dk1">
+                      <a:alpha val="40000"/>
+                    </a:schemeClr>
+                  </a:outerShdw>
+                </a:effectLst>
+              </a:rPr>
+              <a:t>3</a:t>
+            </a:r>
+            <a:r>
+              <a:rPr lang="en-US" altLang="ko-KR" sz="2000" b="0" cap="none" spc="0" dirty="0">
+                <a:ln w="0"/>
+                <a:solidFill>
+                  <a:schemeClr val="tx1"/>
+                </a:solidFill>
+                <a:effectLst>
+                  <a:outerShdw blurRad="38100" dist="19050" dir="2700000" algn="tl" rotWithShape="0">
+                    <a:schemeClr val="dk1">
+                      <a:alpha val="40000"/>
+                    </a:schemeClr>
+                  </a:outerShdw>
+                </a:effectLst>
+              </a:rPr>
+              <a:t> </a:t>
+            </a:r>
+            <a:r>
+              <a:rPr lang="ko-KR" altLang="en-US" sz="2000" b="0" cap="none" spc="0" dirty="0">
+                <a:ln w="0"/>
+                <a:solidFill>
+                  <a:schemeClr val="tx1"/>
+                </a:solidFill>
+                <a:effectLst>
+                  <a:outerShdw blurRad="38100" dist="19050" dir="2700000" algn="tl" rotWithShape="0">
+                    <a:schemeClr val="dk1">
+                      <a:alpha val="40000"/>
+                    </a:schemeClr>
+                  </a:outerShdw>
+                </a:effectLst>
+              </a:rPr>
+              <a:t>스테이지</a:t>
+            </a:r>
+            <a:endParaRPr lang="en-US" altLang="ko-KR" sz="2000" b="0" cap="none" spc="0" dirty="0">
+              <a:ln w="0"/>
+              <a:solidFill>
+                <a:schemeClr val="tx1"/>
+              </a:solidFill>
+              <a:effectLst>
+                <a:outerShdw blurRad="38100" dist="19050" dir="2700000" algn="tl" rotWithShape="0">
+                  <a:schemeClr val="dk1">
+                    <a:alpha val="40000"/>
+                  </a:schemeClr>
+                </a:outerShdw>
+              </a:effectLst>
+            </a:endParaRPr>
+          </a:p>
+        </p:txBody>
+      </p:sp>
+      <p:sp>
+        <p:nvSpPr>
+          <p:cNvPr id="27" name="직사각형 26">
+            <a:extLst>
+              <a:ext uri="{FF2B5EF4-FFF2-40B4-BE49-F238E27FC236}">
+                <a16:creationId xmlns:a16="http://schemas.microsoft.com/office/drawing/2014/main" id="{E933E10C-2E6D-DB96-2667-B41CE8DD36F1}"/>
+              </a:ext>
+            </a:extLst>
+          </p:cNvPr>
+          <p:cNvSpPr/>
+          <p:nvPr/>
+        </p:nvSpPr>
+        <p:spPr>
+          <a:xfrm>
+            <a:off x="9575705" y="3899020"/>
+            <a:ext cx="1811424" cy="400110"/>
+          </a:xfrm>
+          <a:prstGeom prst="rect">
+            <a:avLst/>
+          </a:prstGeom>
+          <a:noFill/>
+        </p:spPr>
+        <p:txBody>
+          <a:bodyPr wrap="square" lIns="91440" tIns="45720" rIns="91440" bIns="45720">
+            <a:spAutoFit/>
+          </a:bodyPr>
+          <a:lstStyle/>
+          <a:p>
+            <a:pPr algn="ctr"/>
+            <a:r>
+              <a:rPr lang="en-US" altLang="ko-KR" sz="2000" dirty="0">
+                <a:ln w="0"/>
+                <a:effectLst>
+                  <a:outerShdw blurRad="38100" dist="19050" dir="2700000" algn="tl" rotWithShape="0">
+                    <a:schemeClr val="dk1">
+                      <a:alpha val="40000"/>
+                    </a:schemeClr>
+                  </a:outerShdw>
+                </a:effectLst>
+              </a:rPr>
+              <a:t>4</a:t>
+            </a:r>
+            <a:r>
+              <a:rPr lang="en-US" altLang="ko-KR" sz="2000" b="0" cap="none" spc="0" dirty="0">
+                <a:ln w="0"/>
+                <a:solidFill>
+                  <a:schemeClr val="tx1"/>
+                </a:solidFill>
+                <a:effectLst>
+                  <a:outerShdw blurRad="38100" dist="19050" dir="2700000" algn="tl" rotWithShape="0">
+                    <a:schemeClr val="dk1">
+                      <a:alpha val="40000"/>
+                    </a:schemeClr>
+                  </a:outerShdw>
+                </a:effectLst>
+              </a:rPr>
+              <a:t> </a:t>
+            </a:r>
+            <a:r>
+              <a:rPr lang="ko-KR" altLang="en-US" sz="2000" b="0" cap="none" spc="0" dirty="0">
+                <a:ln w="0"/>
+                <a:solidFill>
+                  <a:schemeClr val="tx1"/>
+                </a:solidFill>
+                <a:effectLst>
+                  <a:outerShdw blurRad="38100" dist="19050" dir="2700000" algn="tl" rotWithShape="0">
+                    <a:schemeClr val="dk1">
+                      <a:alpha val="40000"/>
+                    </a:schemeClr>
+                  </a:outerShdw>
+                </a:effectLst>
+              </a:rPr>
+              <a:t>스테이지</a:t>
+            </a:r>
+            <a:endParaRPr lang="en-US" altLang="ko-KR" sz="2000" b="0" cap="none" spc="0" dirty="0">
+              <a:ln w="0"/>
+              <a:solidFill>
+                <a:schemeClr val="tx1"/>
+              </a:solidFill>
+              <a:effectLst>
+                <a:outerShdw blurRad="38100" dist="19050" dir="2700000" algn="tl" rotWithShape="0">
+                  <a:schemeClr val="dk1">
+                    <a:alpha val="40000"/>
+                  </a:schemeClr>
+                </a:outerShdw>
+              </a:effectLst>
+            </a:endParaRPr>
+          </a:p>
+        </p:txBody>
+      </p:sp>
+      <p:sp>
+        <p:nvSpPr>
+          <p:cNvPr id="28" name="직사각형 27">
+            <a:extLst>
+              <a:ext uri="{FF2B5EF4-FFF2-40B4-BE49-F238E27FC236}">
+                <a16:creationId xmlns:a16="http://schemas.microsoft.com/office/drawing/2014/main" id="{45B96D85-70A7-FA73-2417-164DD5C31279}"/>
+              </a:ext>
+            </a:extLst>
+          </p:cNvPr>
+          <p:cNvSpPr/>
+          <p:nvPr/>
+        </p:nvSpPr>
+        <p:spPr>
+          <a:xfrm>
+            <a:off x="9575705" y="4500917"/>
+            <a:ext cx="1811424" cy="400110"/>
+          </a:xfrm>
+          <a:prstGeom prst="rect">
+            <a:avLst/>
+          </a:prstGeom>
+          <a:noFill/>
+        </p:spPr>
+        <p:txBody>
+          <a:bodyPr wrap="square" lIns="91440" tIns="45720" rIns="91440" bIns="45720">
+            <a:spAutoFit/>
+          </a:bodyPr>
+          <a:lstStyle/>
+          <a:p>
+            <a:pPr algn="ctr"/>
+            <a:r>
+              <a:rPr lang="en-US" altLang="ko-KR" sz="2000" dirty="0">
+                <a:ln w="0"/>
+                <a:effectLst>
+                  <a:outerShdw blurRad="38100" dist="19050" dir="2700000" algn="tl" rotWithShape="0">
+                    <a:schemeClr val="dk1">
+                      <a:alpha val="40000"/>
+                    </a:schemeClr>
+                  </a:outerShdw>
+                </a:effectLst>
+              </a:rPr>
+              <a:t>5</a:t>
+            </a:r>
+            <a:r>
+              <a:rPr lang="en-US" altLang="ko-KR" sz="2000" b="0" cap="none" spc="0" dirty="0">
+                <a:ln w="0"/>
+                <a:solidFill>
+                  <a:schemeClr val="tx1"/>
+                </a:solidFill>
+                <a:effectLst>
+                  <a:outerShdw blurRad="38100" dist="19050" dir="2700000" algn="tl" rotWithShape="0">
+                    <a:schemeClr val="dk1">
+                      <a:alpha val="40000"/>
+                    </a:schemeClr>
+                  </a:outerShdw>
+                </a:effectLst>
+              </a:rPr>
+              <a:t> </a:t>
+            </a:r>
+            <a:r>
+              <a:rPr lang="ko-KR" altLang="en-US" sz="2000" b="0" cap="none" spc="0" dirty="0">
+                <a:ln w="0"/>
+                <a:solidFill>
+                  <a:schemeClr val="tx1"/>
+                </a:solidFill>
+                <a:effectLst>
+                  <a:outerShdw blurRad="38100" dist="19050" dir="2700000" algn="tl" rotWithShape="0">
+                    <a:schemeClr val="dk1">
+                      <a:alpha val="40000"/>
+                    </a:schemeClr>
+                  </a:outerShdw>
+                </a:effectLst>
+              </a:rPr>
+              <a:t>스테이지</a:t>
+            </a:r>
+            <a:endParaRPr lang="en-US" altLang="ko-KR" sz="2000" b="0" cap="none" spc="0" dirty="0">
+              <a:ln w="0"/>
+              <a:solidFill>
+                <a:schemeClr val="tx1"/>
+              </a:solidFill>
+              <a:effectLst>
+                <a:outerShdw blurRad="38100" dist="19050" dir="2700000" algn="tl" rotWithShape="0">
+                  <a:schemeClr val="dk1">
+                    <a:alpha val="40000"/>
+                  </a:schemeClr>
+                </a:outerShdw>
+              </a:effectLst>
+            </a:endParaRPr>
+          </a:p>
+        </p:txBody>
+      </p:sp>
+      <p:pic>
+        <p:nvPicPr>
+          <p:cNvPr id="4" name="그림 3">
+            <a:extLst>
+              <a:ext uri="{FF2B5EF4-FFF2-40B4-BE49-F238E27FC236}">
+                <a16:creationId xmlns:a16="http://schemas.microsoft.com/office/drawing/2014/main" id="{BE5D7176-E38A-5F72-5E1B-78E0D143005E}"/>
+              </a:ext>
+            </a:extLst>
+          </p:cNvPr>
+          <p:cNvPicPr>
+            <a:picLocks noChangeAspect="1"/>
+          </p:cNvPicPr>
+          <p:nvPr/>
+        </p:nvPicPr>
+        <p:blipFill>
+          <a:blip r:embed="rId11"/>
+          <a:stretch>
+            <a:fillRect/>
+          </a:stretch>
+        </p:blipFill>
+        <p:spPr>
+          <a:xfrm>
+            <a:off x="6521756" y="2097622"/>
+            <a:ext cx="2953162" cy="161948"/>
+          </a:xfrm>
+          <a:prstGeom prst="rect">
+            <a:avLst/>
+          </a:prstGeom>
+        </p:spPr>
+      </p:pic>
+      <p:pic>
+        <p:nvPicPr>
+          <p:cNvPr id="10" name="그림 9">
+            <a:extLst>
+              <a:ext uri="{FF2B5EF4-FFF2-40B4-BE49-F238E27FC236}">
+                <a16:creationId xmlns:a16="http://schemas.microsoft.com/office/drawing/2014/main" id="{CA2FFF0A-AAA3-EDEF-3FCF-7B9BA9FF97F0}"/>
+              </a:ext>
+            </a:extLst>
+          </p:cNvPr>
+          <p:cNvPicPr>
+            <a:picLocks noChangeAspect="1"/>
+          </p:cNvPicPr>
+          <p:nvPr/>
+        </p:nvPicPr>
+        <p:blipFill>
+          <a:blip r:embed="rId12"/>
+          <a:stretch>
+            <a:fillRect/>
+          </a:stretch>
+        </p:blipFill>
+        <p:spPr>
+          <a:xfrm>
+            <a:off x="6526519" y="2777651"/>
+            <a:ext cx="2943636" cy="114316"/>
+          </a:xfrm>
+          <a:prstGeom prst="rect">
+            <a:avLst/>
+          </a:prstGeom>
+        </p:spPr>
+      </p:pic>
+      <p:pic>
+        <p:nvPicPr>
+          <p:cNvPr id="13" name="그림 12">
+            <a:extLst>
+              <a:ext uri="{FF2B5EF4-FFF2-40B4-BE49-F238E27FC236}">
+                <a16:creationId xmlns:a16="http://schemas.microsoft.com/office/drawing/2014/main" id="{3D6E5B95-8642-5B3C-41C1-984C666AAB78}"/>
+              </a:ext>
+            </a:extLst>
+          </p:cNvPr>
+          <p:cNvPicPr>
+            <a:picLocks noChangeAspect="1"/>
+          </p:cNvPicPr>
+          <p:nvPr/>
+        </p:nvPicPr>
+        <p:blipFill>
+          <a:blip r:embed="rId13"/>
+          <a:stretch>
+            <a:fillRect/>
+          </a:stretch>
+        </p:blipFill>
+        <p:spPr>
+          <a:xfrm>
+            <a:off x="6521756" y="3419821"/>
+            <a:ext cx="2953162" cy="161948"/>
+          </a:xfrm>
+          <a:prstGeom prst="rect">
+            <a:avLst/>
+          </a:prstGeom>
+        </p:spPr>
+      </p:pic>
+      <p:pic>
+        <p:nvPicPr>
+          <p:cNvPr id="29" name="그림 28">
+            <a:extLst>
+              <a:ext uri="{FF2B5EF4-FFF2-40B4-BE49-F238E27FC236}">
+                <a16:creationId xmlns:a16="http://schemas.microsoft.com/office/drawing/2014/main" id="{77FC283B-2B5F-4D78-FEBB-FF5785EB18A9}"/>
+              </a:ext>
+            </a:extLst>
+          </p:cNvPr>
+          <p:cNvPicPr>
+            <a:picLocks noChangeAspect="1"/>
+          </p:cNvPicPr>
+          <p:nvPr/>
+        </p:nvPicPr>
+        <p:blipFill>
+          <a:blip r:embed="rId14"/>
+          <a:stretch>
+            <a:fillRect/>
+          </a:stretch>
+        </p:blipFill>
+        <p:spPr>
+          <a:xfrm>
+            <a:off x="6507467" y="4002744"/>
+            <a:ext cx="2981741" cy="190527"/>
+          </a:xfrm>
+          <a:prstGeom prst="rect">
+            <a:avLst/>
+          </a:prstGeom>
+        </p:spPr>
+      </p:pic>
+      <p:pic>
+        <p:nvPicPr>
+          <p:cNvPr id="35" name="그림 34">
+            <a:extLst>
+              <a:ext uri="{FF2B5EF4-FFF2-40B4-BE49-F238E27FC236}">
+                <a16:creationId xmlns:a16="http://schemas.microsoft.com/office/drawing/2014/main" id="{4EAB88DC-FE27-EFA0-1D28-42AFDCA1F139}"/>
+              </a:ext>
+            </a:extLst>
+          </p:cNvPr>
+          <p:cNvPicPr>
+            <a:picLocks noChangeAspect="1"/>
+          </p:cNvPicPr>
+          <p:nvPr/>
+        </p:nvPicPr>
+        <p:blipFill>
+          <a:blip r:embed="rId15"/>
+          <a:stretch>
+            <a:fillRect/>
+          </a:stretch>
+        </p:blipFill>
+        <p:spPr>
+          <a:xfrm>
+            <a:off x="6526519" y="4670411"/>
+            <a:ext cx="2943636" cy="142895"/>
+          </a:xfrm>
+          <a:prstGeom prst="rect">
+            <a:avLst/>
+          </a:prstGeom>
+        </p:spPr>
+      </p:pic>
+      <p:pic>
+        <p:nvPicPr>
+          <p:cNvPr id="37" name="그림 36">
+            <a:extLst>
+              <a:ext uri="{FF2B5EF4-FFF2-40B4-BE49-F238E27FC236}">
+                <a16:creationId xmlns:a16="http://schemas.microsoft.com/office/drawing/2014/main" id="{C81E2CA8-8FE2-2D8E-A88A-11AE21A8A1F0}"/>
+              </a:ext>
+            </a:extLst>
+          </p:cNvPr>
+          <p:cNvPicPr>
+            <a:picLocks noChangeAspect="1"/>
+          </p:cNvPicPr>
+          <p:nvPr/>
+        </p:nvPicPr>
+        <p:blipFill>
+          <a:blip r:embed="rId16"/>
+          <a:stretch>
+            <a:fillRect/>
+          </a:stretch>
+        </p:blipFill>
+        <p:spPr>
+          <a:xfrm>
+            <a:off x="2066924" y="1833603"/>
+            <a:ext cx="3548141" cy="3809154"/>
+          </a:xfrm>
+          <a:prstGeom prst="rect">
+            <a:avLst/>
+          </a:prstGeom>
+        </p:spPr>
+      </p:pic>
+    </p:spTree>
+    <p:extLst>
+      <p:ext uri="{BB962C8B-B14F-4D97-AF65-F5344CB8AC3E}">
+        <p14:creationId xmlns:p14="http://schemas.microsoft.com/office/powerpoint/2010/main" val="611105691"/>
+      </p:ext>
+    </p:extLst>
+  </p:cSld>
+  <p:clrMapOvr>
+    <a:masterClrMapping/>
+  </p:clrMapOvr>
+</p:sld>
+</file>
+
+<file path=ppt/slides/slide11.xml><?xml version="1.0" encoding="utf-8"?>
+<p:sld xmlns:a="http://schemas.openxmlformats.org/drawingml/2006/main" xmlns:r="http://schemas.openxmlformats.org/officeDocument/2006/relationships" xmlns:p="http://schemas.openxmlformats.org/presentationml/2006/main">
+  <p:cSld>
+    <p:spTree>
+      <p:nvGrpSpPr>
+        <p:cNvPr id="1" name=""/>
+        <p:cNvGrpSpPr/>
+        <p:nvPr/>
+      </p:nvGrpSpPr>
+      <p:grpSpPr>
+        <a:xfrm>
+          <a:off x="0" y="0"/>
+          <a:ext cx="0" cy="0"/>
+          <a:chOff x="0" y="0"/>
+          <a:chExt cx="0" cy="0"/>
+        </a:xfrm>
+      </p:grpSpPr>
+      <p:sp>
+        <p:nvSpPr>
+          <p:cNvPr id="18" name="사각형: 둥근 한쪽 모서리 17">
+            <a:extLst>
+              <a:ext uri="{FF2B5EF4-FFF2-40B4-BE49-F238E27FC236}">
+                <a16:creationId xmlns:a16="http://schemas.microsoft.com/office/drawing/2014/main" id="{2EAF6D58-084F-2DED-DF2E-AAB0DF464557}"/>
+              </a:ext>
+            </a:extLst>
+          </p:cNvPr>
+          <p:cNvSpPr/>
+          <p:nvPr/>
+        </p:nvSpPr>
+        <p:spPr>
+          <a:xfrm flipH="1" flipV="1">
+            <a:off x="174170" y="70719"/>
+            <a:ext cx="12017829" cy="1221051"/>
+          </a:xfrm>
+          <a:prstGeom prst="round1Rect">
+            <a:avLst>
+              <a:gd name="adj" fmla="val 23799"/>
+            </a:avLst>
+          </a:prstGeom>
+          <a:solidFill>
+            <a:schemeClr val="bg1">
+              <a:lumMod val="95000"/>
+              <a:alpha val="50000"/>
+            </a:schemeClr>
+          </a:solidFill>
+          <a:ln w="10818" cap="flat">
+            <a:noFill/>
+            <a:prstDash val="solid"/>
+            <a:miter/>
+          </a:ln>
+        </p:spPr>
+        <p:style>
+          <a:lnRef idx="2">
+            <a:schemeClr val="accent1">
+              <a:shade val="15000"/>
+            </a:schemeClr>
+          </a:lnRef>
+          <a:fillRef idx="1">
+            <a:schemeClr val="accent1"/>
+          </a:fillRef>
+          <a:effectRef idx="0">
+            <a:schemeClr val="accent1"/>
+          </a:effectRef>
+          <a:fontRef idx="minor">
+            <a:schemeClr val="lt1"/>
+          </a:fontRef>
+        </p:style>
+        <p:txBody>
+          <a:bodyPr rtlCol="0" anchor="ctr"/>
+          <a:lstStyle/>
+          <a:p>
+            <a:pPr algn="ctr"/>
+            <a:endParaRPr lang="ko-KR" altLang="en-US"/>
+          </a:p>
+        </p:txBody>
+      </p:sp>
+      <p:grpSp>
+        <p:nvGrpSpPr>
+          <p:cNvPr id="20" name="그룹 19">
+            <a:extLst>
+              <a:ext uri="{FF2B5EF4-FFF2-40B4-BE49-F238E27FC236}">
+                <a16:creationId xmlns:a16="http://schemas.microsoft.com/office/drawing/2014/main" id="{739452E3-2013-66BF-2EBE-F0EC960C4077}"/>
+              </a:ext>
+            </a:extLst>
+          </p:cNvPr>
+          <p:cNvGrpSpPr/>
+          <p:nvPr/>
+        </p:nvGrpSpPr>
+        <p:grpSpPr>
+          <a:xfrm>
+            <a:off x="376102" y="333243"/>
             <a:ext cx="5948498" cy="830997"/>
             <a:chOff x="376102" y="333243"/>
             <a:chExt cx="5948498" cy="830997"/>
@@ -5980,66 +7387,6 @@
           </a:prstGeom>
         </p:spPr>
       </p:pic>
-      <p:pic>
-        <p:nvPicPr>
-          <p:cNvPr id="3" name="그림 2">
-            <a:extLst>
-              <a:ext uri="{FF2B5EF4-FFF2-40B4-BE49-F238E27FC236}">
-                <a16:creationId xmlns:a16="http://schemas.microsoft.com/office/drawing/2014/main" id="{42910119-75C6-E73C-D0BE-AAE4A83EA0A8}"/>
-              </a:ext>
-            </a:extLst>
-          </p:cNvPr>
-          <p:cNvPicPr>
-            <a:picLocks noChangeAspect="1"/>
-          </p:cNvPicPr>
-          <p:nvPr/>
-        </p:nvPicPr>
-        <p:blipFill>
-          <a:blip r:embed="rId9"/>
-          <a:stretch>
-            <a:fillRect/>
-          </a:stretch>
-        </p:blipFill>
-        <p:spPr>
-          <a:xfrm>
-            <a:off x="294412" y="2030653"/>
-            <a:ext cx="3781953" cy="3940559"/>
-          </a:xfrm>
-          <a:prstGeom prst="rect">
-            <a:avLst/>
-          </a:prstGeom>
-        </p:spPr>
-      </p:pic>
-      <p:pic>
-        <p:nvPicPr>
-          <p:cNvPr id="6" name="그림 5">
-            <a:extLst>
-              <a:ext uri="{FF2B5EF4-FFF2-40B4-BE49-F238E27FC236}">
-                <a16:creationId xmlns:a16="http://schemas.microsoft.com/office/drawing/2014/main" id="{A72DDFB0-7B14-6441-98CD-B2987DCF1783}"/>
-              </a:ext>
-            </a:extLst>
-          </p:cNvPr>
-          <p:cNvPicPr>
-            <a:picLocks noChangeAspect="1"/>
-          </p:cNvPicPr>
-          <p:nvPr/>
-        </p:nvPicPr>
-        <p:blipFill>
-          <a:blip r:embed="rId10"/>
-          <a:stretch>
-            <a:fillRect/>
-          </a:stretch>
-        </p:blipFill>
-        <p:spPr>
-          <a:xfrm>
-            <a:off x="7989303" y="1906917"/>
-            <a:ext cx="4124901" cy="4082371"/>
-          </a:xfrm>
-          <a:prstGeom prst="rect">
-            <a:avLst/>
-          </a:prstGeom>
-        </p:spPr>
-      </p:pic>
       <p:cxnSp>
         <p:nvCxnSpPr>
           <p:cNvPr id="9" name="연결선: 꺾임 8">
@@ -6225,6 +7572,166 @@
           </a:p>
         </p:txBody>
       </p:sp>
+      <p:pic>
+        <p:nvPicPr>
+          <p:cNvPr id="4" name="그림 3">
+            <a:extLst>
+              <a:ext uri="{FF2B5EF4-FFF2-40B4-BE49-F238E27FC236}">
+                <a16:creationId xmlns:a16="http://schemas.microsoft.com/office/drawing/2014/main" id="{5D1A044A-3413-E120-DDA2-02C9BDBE01F1}"/>
+              </a:ext>
+            </a:extLst>
+          </p:cNvPr>
+          <p:cNvPicPr>
+            <a:picLocks noChangeAspect="1"/>
+          </p:cNvPicPr>
+          <p:nvPr/>
+        </p:nvPicPr>
+        <p:blipFill>
+          <a:blip r:embed="rId9"/>
+          <a:stretch>
+            <a:fillRect/>
+          </a:stretch>
+        </p:blipFill>
+        <p:spPr>
+          <a:xfrm>
+            <a:off x="139417" y="2163035"/>
+            <a:ext cx="3953427" cy="3982006"/>
+          </a:xfrm>
+          <a:prstGeom prst="rect">
+            <a:avLst/>
+          </a:prstGeom>
+        </p:spPr>
+      </p:pic>
+      <p:pic>
+        <p:nvPicPr>
+          <p:cNvPr id="11" name="그림 10">
+            <a:extLst>
+              <a:ext uri="{FF2B5EF4-FFF2-40B4-BE49-F238E27FC236}">
+                <a16:creationId xmlns:a16="http://schemas.microsoft.com/office/drawing/2014/main" id="{6310373E-B6F0-91B3-C124-A1375E52D1EE}"/>
+              </a:ext>
+            </a:extLst>
+          </p:cNvPr>
+          <p:cNvPicPr>
+            <a:picLocks noChangeAspect="1"/>
+          </p:cNvPicPr>
+          <p:nvPr/>
+        </p:nvPicPr>
+        <p:blipFill>
+          <a:blip r:embed="rId10"/>
+          <a:stretch>
+            <a:fillRect/>
+          </a:stretch>
+        </p:blipFill>
+        <p:spPr>
+          <a:xfrm>
+            <a:off x="8011618" y="2090410"/>
+            <a:ext cx="4001058" cy="3962953"/>
+          </a:xfrm>
+          <a:prstGeom prst="rect">
+            <a:avLst/>
+          </a:prstGeom>
+        </p:spPr>
+      </p:pic>
+      <p:sp>
+        <p:nvSpPr>
+          <p:cNvPr id="12" name="타원 11">
+            <a:extLst>
+              <a:ext uri="{FF2B5EF4-FFF2-40B4-BE49-F238E27FC236}">
+                <a16:creationId xmlns:a16="http://schemas.microsoft.com/office/drawing/2014/main" id="{995F1EF5-17C5-F386-1ADF-1C5AC21C5AC9}"/>
+              </a:ext>
+            </a:extLst>
+          </p:cNvPr>
+          <p:cNvSpPr/>
+          <p:nvPr/>
+        </p:nvSpPr>
+        <p:spPr>
+          <a:xfrm>
+            <a:off x="1667751" y="4199946"/>
+            <a:ext cx="647829" cy="597206"/>
+          </a:xfrm>
+          <a:prstGeom prst="ellipse">
+            <a:avLst/>
+          </a:prstGeom>
+          <a:noFill/>
+          <a:ln w="38100">
+            <a:solidFill>
+              <a:schemeClr val="tx1"/>
+            </a:solidFill>
+          </a:ln>
+        </p:spPr>
+        <p:style>
+          <a:lnRef idx="2">
+            <a:schemeClr val="accent6"/>
+          </a:lnRef>
+          <a:fillRef idx="1">
+            <a:schemeClr val="lt1"/>
+          </a:fillRef>
+          <a:effectRef idx="0">
+            <a:schemeClr val="accent6"/>
+          </a:effectRef>
+          <a:fontRef idx="minor">
+            <a:schemeClr val="dk1"/>
+          </a:fontRef>
+        </p:style>
+        <p:txBody>
+          <a:bodyPr rtlCol="0" anchor="ctr"/>
+          <a:lstStyle/>
+          <a:p>
+            <a:pPr algn="ctr"/>
+            <a:endParaRPr lang="ko-KR" altLang="en-US"/>
+          </a:p>
+        </p:txBody>
+      </p:sp>
+      <p:sp>
+        <p:nvSpPr>
+          <p:cNvPr id="17" name="타원 16">
+            <a:extLst>
+              <a:ext uri="{FF2B5EF4-FFF2-40B4-BE49-F238E27FC236}">
+                <a16:creationId xmlns:a16="http://schemas.microsoft.com/office/drawing/2014/main" id="{AB202E5D-BC69-0AE9-1892-1724F7B8B147}"/>
+              </a:ext>
+            </a:extLst>
+          </p:cNvPr>
+          <p:cNvSpPr/>
+          <p:nvPr/>
+        </p:nvSpPr>
+        <p:spPr>
+          <a:xfrm>
+            <a:off x="10848528" y="4227390"/>
+            <a:ext cx="647829" cy="597206"/>
+          </a:xfrm>
+          <a:prstGeom prst="ellipse">
+            <a:avLst/>
+          </a:prstGeom>
+          <a:noFill/>
+          <a:ln w="38100">
+            <a:solidFill>
+              <a:schemeClr val="tx1"/>
+            </a:solidFill>
+          </a:ln>
+        </p:spPr>
+        <p:style>
+          <a:lnRef idx="2">
+            <a:schemeClr val="accent6"/>
+          </a:lnRef>
+          <a:fillRef idx="1">
+            <a:schemeClr val="lt1"/>
+          </a:fillRef>
+          <a:effectRef idx="0">
+            <a:schemeClr val="accent6"/>
+          </a:effectRef>
+          <a:fontRef idx="minor">
+            <a:schemeClr val="dk1"/>
+          </a:fontRef>
+        </p:style>
+        <p:txBody>
+          <a:bodyPr rtlCol="0" anchor="ctr"/>
+          <a:lstStyle/>
+          <a:p>
+            <a:pPr algn="ctr"/>
+            <a:endParaRPr lang="ko-KR" altLang="en-US"/>
+          </a:p>
+        </p:txBody>
+      </p:sp>
     </p:spTree>
     <p:extLst>
       <p:ext uri="{BB962C8B-B14F-4D97-AF65-F5344CB8AC3E}">
@@ -6238,7 +7745,7 @@
 </p:sld>
 </file>
 
-<file path=ppt/slides/slide11.xml><?xml version="1.0" encoding="utf-8"?>
+<file path=ppt/slides/slide12.xml><?xml version="1.0" encoding="utf-8"?>
 <p:sld xmlns:a="http://schemas.openxmlformats.org/drawingml/2006/main" xmlns:r="http://schemas.openxmlformats.org/officeDocument/2006/relationships" xmlns:p="http://schemas.openxmlformats.org/presentationml/2006/main">
   <p:cSld>
     <p:spTree>
@@ -6918,36 +8425,6 @@
           </a:prstGeom>
         </p:spPr>
       </p:pic>
-      <p:pic>
-        <p:nvPicPr>
-          <p:cNvPr id="3" name="그림 2">
-            <a:extLst>
-              <a:ext uri="{FF2B5EF4-FFF2-40B4-BE49-F238E27FC236}">
-                <a16:creationId xmlns:a16="http://schemas.microsoft.com/office/drawing/2014/main" id="{1D585DC6-CCA2-F2D2-C79C-9EBECC19F27A}"/>
-              </a:ext>
-            </a:extLst>
-          </p:cNvPr>
-          <p:cNvPicPr>
-            <a:picLocks noChangeAspect="1"/>
-          </p:cNvPicPr>
-          <p:nvPr/>
-        </p:nvPicPr>
-        <p:blipFill>
-          <a:blip r:embed="rId11"/>
-          <a:stretch>
-            <a:fillRect/>
-          </a:stretch>
-        </p:blipFill>
-        <p:spPr>
-          <a:xfrm>
-            <a:off x="2044892" y="1762527"/>
-            <a:ext cx="4860621" cy="4227576"/>
-          </a:xfrm>
-          <a:prstGeom prst="rect">
-            <a:avLst/>
-          </a:prstGeom>
-        </p:spPr>
-      </p:pic>
       <p:sp>
         <p:nvSpPr>
           <p:cNvPr id="4" name="직사각형 3">
@@ -6962,7 +8439,7 @@
         </p:nvSpPr>
         <p:spPr>
           <a:xfrm>
-            <a:off x="7173028" y="4717500"/>
+            <a:off x="7380649" y="4028085"/>
             <a:ext cx="3304110" cy="1015663"/>
           </a:xfrm>
           <a:prstGeom prst="rect">
@@ -7133,6 +8610,36 @@
           </a:p>
         </p:txBody>
       </p:sp>
+      <p:pic>
+        <p:nvPicPr>
+          <p:cNvPr id="6" name="그림 5">
+            <a:extLst>
+              <a:ext uri="{FF2B5EF4-FFF2-40B4-BE49-F238E27FC236}">
+                <a16:creationId xmlns:a16="http://schemas.microsoft.com/office/drawing/2014/main" id="{7EB441CC-7586-A8DE-B473-26E651716F66}"/>
+              </a:ext>
+            </a:extLst>
+          </p:cNvPr>
+          <p:cNvPicPr>
+            <a:picLocks noChangeAspect="1"/>
+          </p:cNvPicPr>
+          <p:nvPr/>
+        </p:nvPicPr>
+        <p:blipFill>
+          <a:blip r:embed="rId11"/>
+          <a:stretch>
+            <a:fillRect/>
+          </a:stretch>
+        </p:blipFill>
+        <p:spPr>
+          <a:xfrm>
+            <a:off x="1505719" y="2625789"/>
+            <a:ext cx="5508575" cy="3356387"/>
+          </a:xfrm>
+          <a:prstGeom prst="rect">
+            <a:avLst/>
+          </a:prstGeom>
+        </p:spPr>
+      </p:pic>
     </p:spTree>
     <p:extLst>
       <p:ext uri="{BB962C8B-B14F-4D97-AF65-F5344CB8AC3E}">
@@ -7146,7 +8653,7 @@
 </p:sld>
 </file>
 
-<file path=ppt/slides/slide12.xml><?xml version="1.0" encoding="utf-8"?>
+<file path=ppt/slides/slide13.xml><?xml version="1.0" encoding="utf-8"?>
 <p:sld xmlns:a="http://schemas.openxmlformats.org/drawingml/2006/main" xmlns:r="http://schemas.openxmlformats.org/officeDocument/2006/relationships" xmlns:p="http://schemas.openxmlformats.org/presentationml/2006/main">
   <p:cSld>
     <p:spTree>
@@ -7840,8 +9347,8 @@
         </p:nvSpPr>
         <p:spPr>
           <a:xfrm>
-            <a:off x="7068108" y="5263559"/>
-            <a:ext cx="4532010" cy="707886"/>
+            <a:off x="5561255" y="3438766"/>
+            <a:ext cx="6630744" cy="1015663"/>
           </a:xfrm>
           <a:prstGeom prst="rect">
             <a:avLst/>
@@ -7849,17 +9356,66 @@
           <a:noFill/>
         </p:spPr>
         <p:txBody>
-          <a:bodyPr wrap="none" lIns="91440" tIns="45720" rIns="91440" bIns="45720">
+          <a:bodyPr wrap="square" lIns="91440" tIns="45720" rIns="91440" bIns="45720">
             <a:spAutoFit/>
           </a:bodyPr>
           <a:lstStyle/>
           <a:p>
             <a:r>
-              <a:rPr lang="en-US" altLang="ko-KR" sz="2000" b="0" cap="none" spc="0" dirty="0">
+              <a:rPr lang="en-US" altLang="ko-KR" sz="2000" dirty="0">
                 <a:ln w="0"/>
-                <a:solidFill>
-                  <a:schemeClr val="tx1"/>
-                </a:solidFill>
+                <a:effectLst>
+                  <a:outerShdw blurRad="38100" dist="19050" dir="2700000" algn="tl" rotWithShape="0">
+                    <a:schemeClr val="dk1">
+                      <a:alpha val="40000"/>
+                    </a:schemeClr>
+                  </a:outerShdw>
+                </a:effectLst>
+              </a:rPr>
+              <a:t>-</a:t>
+            </a:r>
+            <a:r>
+              <a:rPr lang="ko-KR" altLang="en-US" sz="2000" dirty="0">
+                <a:ln w="0"/>
+                <a:effectLst>
+                  <a:outerShdw blurRad="38100" dist="19050" dir="2700000" algn="tl" rotWithShape="0">
+                    <a:schemeClr val="dk1">
+                      <a:alpha val="40000"/>
+                    </a:schemeClr>
+                  </a:outerShdw>
+                </a:effectLst>
+              </a:rPr>
+              <a:t>생명력이 </a:t>
+            </a:r>
+            <a:r>
+              <a:rPr lang="en-US" altLang="ko-KR" sz="2000" dirty="0">
+                <a:ln w="0"/>
+                <a:effectLst>
+                  <a:outerShdw blurRad="38100" dist="19050" dir="2700000" algn="tl" rotWithShape="0">
+                    <a:schemeClr val="dk1">
+                      <a:alpha val="40000"/>
+                    </a:schemeClr>
+                  </a:outerShdw>
+                </a:effectLst>
+              </a:rPr>
+              <a:t>0</a:t>
+            </a:r>
+            <a:r>
+              <a:rPr lang="ko-KR" altLang="en-US" sz="2000" dirty="0">
+                <a:ln w="0"/>
+                <a:effectLst>
+                  <a:outerShdw blurRad="38100" dist="19050" dir="2700000" algn="tl" rotWithShape="0">
+                    <a:schemeClr val="dk1">
+                      <a:alpha val="40000"/>
+                    </a:schemeClr>
+                  </a:outerShdw>
+                </a:effectLst>
+              </a:rPr>
+              <a:t>이 되거나 </a:t>
+            </a:r>
+            <a:r>
+              <a:rPr lang="en-US" altLang="ko-KR" sz="2000" dirty="0">
+                <a:ln w="0"/>
                 <a:effectLst>
                   <a:outerShdw blurRad="38100" dist="19050" dir="2700000" algn="tl" rotWithShape="0">
                     <a:schemeClr val="dk1">
@@ -7871,11 +9427,8 @@
               <a:t>5</a:t>
             </a:r>
             <a:r>
-              <a:rPr lang="ko-KR" altLang="en-US" sz="2000" b="0" cap="none" spc="0" dirty="0">
+              <a:rPr lang="ko-KR" altLang="en-US" sz="2000" dirty="0">
                 <a:ln w="0"/>
-                <a:solidFill>
-                  <a:schemeClr val="tx1"/>
-                </a:solidFill>
                 <a:effectLst>
                   <a:outerShdw blurRad="38100" dist="19050" dir="2700000" algn="tl" rotWithShape="0">
                     <a:schemeClr val="dk1">
@@ -7884,13 +9437,10 @@
                   </a:outerShdw>
                 </a:effectLst>
               </a:rPr>
-              <a:t>스테이지에서 모든 벽돌을 부셨을 시</a:t>
+              <a:t>스테이지에서 모든 블록을 </a:t>
             </a:r>
-            <a:endParaRPr lang="en-US" altLang="ko-KR" sz="2000" b="0" cap="none" spc="0" dirty="0">
+            <a:endParaRPr lang="en-US" altLang="ko-KR" sz="2000" dirty="0">
               <a:ln w="0"/>
-              <a:solidFill>
-                <a:schemeClr val="tx1"/>
-              </a:solidFill>
               <a:effectLst>
                 <a:outerShdw blurRad="38100" dist="19050" dir="2700000" algn="tl" rotWithShape="0">
                   <a:schemeClr val="dk1">
@@ -7902,6 +9452,19 @@
           </a:p>
           <a:p>
             <a:r>
+              <a:rPr lang="ko-KR" altLang="en-US" sz="2000" dirty="0" err="1">
+                <a:ln w="0"/>
+                <a:effectLst>
+                  <a:outerShdw blurRad="38100" dist="19050" dir="2700000" algn="tl" rotWithShape="0">
+                    <a:schemeClr val="dk1">
+                      <a:alpha val="40000"/>
+                    </a:schemeClr>
+                  </a:outerShdw>
+                </a:effectLst>
+              </a:rPr>
+              <a:t>부셨을때</a:t>
+            </a:r>
+            <a:r>
               <a:rPr lang="ko-KR" altLang="en-US" sz="2000" dirty="0">
                 <a:ln w="0"/>
                 <a:effectLst>
@@ -7912,10 +9475,22 @@
                   </a:outerShdw>
                 </a:effectLst>
               </a:rPr>
-              <a:t>최종 점수를 출력시키는 </a:t>
+              <a:t> 출력</a:t>
             </a:r>
+            <a:endParaRPr lang="en-US" altLang="ko-KR" sz="2000" dirty="0">
+              <a:ln w="0"/>
+              <a:effectLst>
+                <a:outerShdw blurRad="38100" dist="19050" dir="2700000" algn="tl" rotWithShape="0">
+                  <a:schemeClr val="dk1">
+                    <a:alpha val="40000"/>
+                  </a:schemeClr>
+                </a:outerShdw>
+              </a:effectLst>
+            </a:endParaRPr>
+          </a:p>
+          <a:p>
             <a:r>
-              <a:rPr lang="ko-KR" altLang="en-US" sz="2000" dirty="0" err="1">
+              <a:rPr lang="en-US" altLang="ko-KR" sz="2000" dirty="0">
                 <a:ln w="0"/>
                 <a:effectLst>
                   <a:outerShdw blurRad="38100" dist="19050" dir="2700000" algn="tl" rotWithShape="0">
@@ -7925,7 +9500,33 @@
                   </a:outerShdw>
                 </a:effectLst>
               </a:rPr>
-              <a:t>모달창</a:t>
+              <a:t>-</a:t>
+            </a:r>
+            <a:r>
+              <a:rPr lang="ko-KR" altLang="en-US" sz="2000" dirty="0">
+                <a:ln w="0"/>
+                <a:effectLst>
+                  <a:outerShdw blurRad="38100" dist="19050" dir="2700000" algn="tl" rotWithShape="0">
+                    <a:schemeClr val="dk1">
+                      <a:alpha val="40000"/>
+                    </a:schemeClr>
+                  </a:outerShdw>
+                </a:effectLst>
+              </a:rPr>
+              <a:t>최종 점수와 내림차순으로 순위를 출력시켜 보여준다</a:t>
+            </a:r>
+            <a:r>
+              <a:rPr lang="en-US" altLang="ko-KR" sz="2000" dirty="0">
+                <a:ln w="0"/>
+                <a:effectLst>
+                  <a:outerShdw blurRad="38100" dist="19050" dir="2700000" algn="tl" rotWithShape="0">
+                    <a:schemeClr val="dk1">
+                      <a:alpha val="40000"/>
+                    </a:schemeClr>
+                  </a:outerShdw>
+                </a:effectLst>
+              </a:rPr>
+              <a:t>.</a:t>
             </a:r>
             <a:endParaRPr lang="en-US" altLang="ko-KR" sz="2000" b="0" cap="none" spc="0" dirty="0">
               <a:ln w="0"/>
@@ -7948,7 +9549,7 @@
           <p:cNvPr id="6" name="그림 5">
             <a:extLst>
               <a:ext uri="{FF2B5EF4-FFF2-40B4-BE49-F238E27FC236}">
-                <a16:creationId xmlns:a16="http://schemas.microsoft.com/office/drawing/2014/main" id="{B317D534-F08B-197E-5528-1C9C42E54E77}"/>
+                <a16:creationId xmlns:a16="http://schemas.microsoft.com/office/drawing/2014/main" id="{9B96429F-9C58-0468-CC65-86E800535738}"/>
               </a:ext>
             </a:extLst>
           </p:cNvPr>
@@ -7965,8 +9566,8 @@
         </p:blipFill>
         <p:spPr>
           <a:xfrm>
-            <a:off x="749309" y="2304365"/>
-            <a:ext cx="5849166" cy="3572374"/>
+            <a:off x="569732" y="2041071"/>
+            <a:ext cx="4986208" cy="4088229"/>
           </a:xfrm>
           <a:prstGeom prst="rect">
             <a:avLst/>
@@ -7986,7 +9587,266 @@
 </p:sld>
 </file>
 
-<file path=ppt/slides/slide13.xml><?xml version="1.0" encoding="utf-8"?>
+<file path=ppt/slides/slide14.xml><?xml version="1.0" encoding="utf-8"?>
+<p:sld xmlns:a="http://schemas.openxmlformats.org/drawingml/2006/main" xmlns:r="http://schemas.openxmlformats.org/officeDocument/2006/relationships" xmlns:p="http://schemas.openxmlformats.org/presentationml/2006/main">
+  <p:cSld>
+    <p:spTree>
+      <p:nvGrpSpPr>
+        <p:cNvPr id="1" name=""/>
+        <p:cNvGrpSpPr/>
+        <p:nvPr/>
+      </p:nvGrpSpPr>
+      <p:grpSpPr>
+        <a:xfrm>
+          <a:off x="0" y="0"/>
+          <a:ext cx="0" cy="0"/>
+          <a:chOff x="0" y="0"/>
+          <a:chExt cx="0" cy="0"/>
+        </a:xfrm>
+      </p:grpSpPr>
+      <p:pic>
+        <p:nvPicPr>
+          <p:cNvPr id="61" name="그래픽 60">
+            <a:extLst>
+              <a:ext uri="{FF2B5EF4-FFF2-40B4-BE49-F238E27FC236}">
+                <a16:creationId xmlns:a16="http://schemas.microsoft.com/office/drawing/2014/main" id="{625593F1-7D9F-57DB-9FA7-6FB470616989}"/>
+              </a:ext>
+            </a:extLst>
+          </p:cNvPr>
+          <p:cNvPicPr>
+            <a:picLocks noChangeAspect="1"/>
+          </p:cNvPicPr>
+          <p:nvPr/>
+        </p:nvPicPr>
+        <p:blipFill>
+          <a:blip r:embed="rId2">
+            <a:extLst>
+              <a:ext uri="{96DAC541-7B7A-43D3-8B79-37D633B846F1}">
+                <asvg:svgBlip xmlns:asvg="http://schemas.microsoft.com/office/drawing/2016/SVG/main" r:embed="rId3"/>
+              </a:ext>
+            </a:extLst>
+          </a:blip>
+          <a:stretch>
+            <a:fillRect/>
+          </a:stretch>
+        </p:blipFill>
+        <p:spPr>
+          <a:xfrm>
+            <a:off x="-3" y="-135396"/>
+            <a:ext cx="12192000" cy="6858000"/>
+          </a:xfrm>
+          <a:prstGeom prst="rect">
+            <a:avLst/>
+          </a:prstGeom>
+        </p:spPr>
+      </p:pic>
+      <p:pic>
+        <p:nvPicPr>
+          <p:cNvPr id="54" name="그래픽 53">
+            <a:extLst>
+              <a:ext uri="{FF2B5EF4-FFF2-40B4-BE49-F238E27FC236}">
+                <a16:creationId xmlns:a16="http://schemas.microsoft.com/office/drawing/2014/main" id="{BD4C7F95-5077-208A-7860-7A398744B57E}"/>
+              </a:ext>
+            </a:extLst>
+          </p:cNvPr>
+          <p:cNvPicPr>
+            <a:picLocks noChangeAspect="1"/>
+          </p:cNvPicPr>
+          <p:nvPr/>
+        </p:nvPicPr>
+        <p:blipFill rotWithShape="1">
+          <a:blip r:embed="rId4">
+            <a:extLst>
+              <a:ext uri="{96DAC541-7B7A-43D3-8B79-37D633B846F1}">
+                <asvg:svgBlip xmlns:asvg="http://schemas.microsoft.com/office/drawing/2016/SVG/main" r:embed="rId5"/>
+              </a:ext>
+            </a:extLst>
+          </a:blip>
+          <a:srcRect t="5760" r="51763"/>
+          <a:stretch/>
+        </p:blipFill>
+        <p:spPr>
+          <a:xfrm rot="10800000">
+            <a:off x="-2" y="5284239"/>
+            <a:ext cx="1369421" cy="1573760"/>
+          </a:xfrm>
+          <a:prstGeom prst="rect">
+            <a:avLst/>
+          </a:prstGeom>
+        </p:spPr>
+      </p:pic>
+      <p:sp>
+        <p:nvSpPr>
+          <p:cNvPr id="13" name="TextBox 12">
+            <a:extLst>
+              <a:ext uri="{FF2B5EF4-FFF2-40B4-BE49-F238E27FC236}">
+                <a16:creationId xmlns:a16="http://schemas.microsoft.com/office/drawing/2014/main" id="{E0E94AA3-A994-6AB2-870F-88DA16811E4D}"/>
+              </a:ext>
+            </a:extLst>
+          </p:cNvPr>
+          <p:cNvSpPr txBox="1"/>
+          <p:nvPr/>
+        </p:nvSpPr>
+        <p:spPr>
+          <a:xfrm>
+            <a:off x="4223789" y="2708920"/>
+            <a:ext cx="3744416" cy="677108"/>
+          </a:xfrm>
+          <a:prstGeom prst="rect">
+            <a:avLst/>
+          </a:prstGeom>
+          <a:noFill/>
+        </p:spPr>
+        <p:txBody>
+          <a:bodyPr wrap="square" tIns="0" bIns="0">
+            <a:spAutoFit/>
+          </a:bodyPr>
+          <a:lstStyle/>
+          <a:p>
+            <a:pPr algn="ctr" eaLnBrk="1" fontAlgn="auto" latinLnBrk="1" hangingPunct="1">
+              <a:spcBef>
+                <a:spcPts val="0"/>
+              </a:spcBef>
+              <a:spcAft>
+                <a:spcPts val="0"/>
+              </a:spcAft>
+              <a:defRPr/>
+            </a:pPr>
+            <a:r>
+              <a:rPr lang="ko-KR" altLang="en-US" sz="4400" b="1" dirty="0">
+                <a:ln>
+                  <a:solidFill>
+                    <a:schemeClr val="accent1">
+                      <a:shade val="15000"/>
+                      <a:alpha val="0"/>
+                    </a:schemeClr>
+                  </a:solidFill>
+                </a:ln>
+                <a:solidFill>
+                  <a:srgbClr val="3378C8"/>
+                </a:solidFill>
+                <a:latin typeface="세방고딕 Regular" panose="00000500000000000000" pitchFamily="2" charset="-127"/>
+                <a:ea typeface="세방고딕 Regular" panose="00000500000000000000" pitchFamily="2" charset="-127"/>
+              </a:rPr>
+              <a:t>게임 시연</a:t>
+            </a:r>
+          </a:p>
+        </p:txBody>
+      </p:sp>
+      <p:sp>
+        <p:nvSpPr>
+          <p:cNvPr id="2" name="TextBox 1">
+            <a:extLst>
+              <a:ext uri="{FF2B5EF4-FFF2-40B4-BE49-F238E27FC236}">
+                <a16:creationId xmlns:a16="http://schemas.microsoft.com/office/drawing/2014/main" id="{D2C2358E-3B03-27B5-CA0C-4BF0B1CDFADB}"/>
+              </a:ext>
+            </a:extLst>
+          </p:cNvPr>
+          <p:cNvSpPr txBox="1"/>
+          <p:nvPr/>
+        </p:nvSpPr>
+        <p:spPr>
+          <a:xfrm>
+            <a:off x="0" y="0"/>
+            <a:ext cx="12192000" cy="114300"/>
+          </a:xfrm>
+          <a:prstGeom prst="rect">
+            <a:avLst/>
+          </a:prstGeom>
+          <a:solidFill>
+            <a:srgbClr val="FFD85C"/>
+          </a:solidFill>
+          <a:effectLst/>
+        </p:spPr>
+        <p:txBody>
+          <a:bodyPr wrap="square" rtlCol="0" anchor="ctr">
+            <a:noAutofit/>
+          </a:bodyPr>
+          <a:lstStyle/>
+          <a:p>
+            <a:pPr algn="ctr"/>
+            <a:endParaRPr lang="ko-KR" altLang="en-US" sz="1600" b="1" spc="600" dirty="0">
+              <a:ln>
+                <a:solidFill>
+                  <a:schemeClr val="accent1">
+                    <a:shade val="15000"/>
+                    <a:alpha val="0"/>
+                  </a:schemeClr>
+                </a:solidFill>
+              </a:ln>
+              <a:solidFill>
+                <a:srgbClr val="3378C8"/>
+              </a:solidFill>
+              <a:latin typeface="세방고딕 Regular" panose="00000500000000000000" pitchFamily="2" charset="-127"/>
+              <a:ea typeface="세방고딕 Regular" panose="00000500000000000000" pitchFamily="2" charset="-127"/>
+            </a:endParaRPr>
+          </a:p>
+        </p:txBody>
+      </p:sp>
+      <p:sp>
+        <p:nvSpPr>
+          <p:cNvPr id="4" name="TextBox 3">
+            <a:extLst>
+              <a:ext uri="{FF2B5EF4-FFF2-40B4-BE49-F238E27FC236}">
+                <a16:creationId xmlns:a16="http://schemas.microsoft.com/office/drawing/2014/main" id="{487E27BB-6406-EC3A-3BF4-56C8615BDA14}"/>
+              </a:ext>
+            </a:extLst>
+          </p:cNvPr>
+          <p:cNvSpPr txBox="1"/>
+          <p:nvPr/>
+        </p:nvSpPr>
+        <p:spPr>
+          <a:xfrm>
+            <a:off x="0" y="0"/>
+            <a:ext cx="1336675" cy="114300"/>
+          </a:xfrm>
+          <a:prstGeom prst="rect">
+            <a:avLst/>
+          </a:prstGeom>
+          <a:solidFill>
+            <a:srgbClr val="3378C8"/>
+          </a:solidFill>
+          <a:effectLst/>
+        </p:spPr>
+        <p:txBody>
+          <a:bodyPr wrap="square" rtlCol="0" anchor="ctr">
+            <a:noAutofit/>
+          </a:bodyPr>
+          <a:lstStyle/>
+          <a:p>
+            <a:pPr algn="ctr"/>
+            <a:endParaRPr lang="ko-KR" altLang="en-US" sz="1600" b="1" spc="600" dirty="0">
+              <a:ln>
+                <a:solidFill>
+                  <a:schemeClr val="accent1">
+                    <a:shade val="15000"/>
+                    <a:alpha val="0"/>
+                  </a:schemeClr>
+                </a:solidFill>
+              </a:ln>
+              <a:solidFill>
+                <a:srgbClr val="3378C8"/>
+              </a:solidFill>
+              <a:latin typeface="세방고딕 Regular" panose="00000500000000000000" pitchFamily="2" charset="-127"/>
+              <a:ea typeface="세방고딕 Regular" panose="00000500000000000000" pitchFamily="2" charset="-127"/>
+            </a:endParaRPr>
+          </a:p>
+        </p:txBody>
+      </p:sp>
+    </p:spTree>
+    <p:extLst>
+      <p:ext uri="{BB962C8B-B14F-4D97-AF65-F5344CB8AC3E}">
+        <p14:creationId xmlns:p14="http://schemas.microsoft.com/office/powerpoint/2010/main" val="4097756570"/>
+      </p:ext>
+    </p:extLst>
+  </p:cSld>
+  <p:clrMapOvr>
+    <a:masterClrMapping/>
+  </p:clrMapOvr>
+</p:sld>
+</file>
+
+<file path=ppt/slides/slide15.xml><?xml version="1.0" encoding="utf-8"?>
 <p:sld xmlns:a="http://schemas.openxmlformats.org/drawingml/2006/main" xmlns:r="http://schemas.openxmlformats.org/officeDocument/2006/relationships" xmlns:p="http://schemas.openxmlformats.org/presentationml/2006/main">
   <p:cSld>
     <p:spTree>
@@ -8250,7 +10110,7 @@
     </p:spTree>
     <p:extLst>
       <p:ext uri="{BB962C8B-B14F-4D97-AF65-F5344CB8AC3E}">
-        <p14:creationId xmlns:p14="http://schemas.microsoft.com/office/powerpoint/2010/main" val="4097756570"/>
+        <p14:creationId xmlns:p14="http://schemas.microsoft.com/office/powerpoint/2010/main" val="937635197"/>
       </p:ext>
     </p:extLst>
   </p:cSld>
@@ -8839,7 +10699,7 @@
                   <a:latin typeface="맑은 고딕" panose="020B0503020000020004" pitchFamily="50" charset="-127"/>
                   <a:ea typeface="맑은 고딕" panose="020B0503020000020004" pitchFamily="50" charset="-127"/>
                 </a:rPr>
-                <a:t>프로젝트 수행 절차 및 방법</a:t>
+                <a:t>순서도</a:t>
               </a:r>
             </a:p>
           </p:txBody>
@@ -8973,7 +10833,7 @@
                   <a:latin typeface="맑은 고딕" panose="020B0503020000020004" pitchFamily="50" charset="-127"/>
                   <a:ea typeface="맑은 고딕" panose="020B0503020000020004" pitchFamily="50" charset="-127"/>
                 </a:rPr>
-                <a:t>프로젝트 시나리오</a:t>
+                <a:t>프로젝트 구현결과 </a:t>
               </a:r>
             </a:p>
           </p:txBody>
@@ -9396,6 +11256,140 @@
             </a:prstGeom>
           </p:spPr>
         </p:pic>
+      </p:grpSp>
+      <p:grpSp>
+        <p:nvGrpSpPr>
+          <p:cNvPr id="8" name="그룹 7">
+            <a:extLst>
+              <a:ext uri="{FF2B5EF4-FFF2-40B4-BE49-F238E27FC236}">
+                <a16:creationId xmlns:a16="http://schemas.microsoft.com/office/drawing/2014/main" id="{D4F9075C-D4C7-7F93-57EC-6830D7E34E16}"/>
+              </a:ext>
+            </a:extLst>
+          </p:cNvPr>
+          <p:cNvGrpSpPr/>
+          <p:nvPr/>
+        </p:nvGrpSpPr>
+        <p:grpSpPr>
+          <a:xfrm>
+            <a:off x="6242109" y="5615834"/>
+            <a:ext cx="3843845" cy="584775"/>
+            <a:chOff x="6242109" y="4773997"/>
+            <a:chExt cx="3078371" cy="584775"/>
+          </a:xfrm>
+        </p:grpSpPr>
+        <p:sp>
+          <p:nvSpPr>
+            <p:cNvPr id="10" name="TextBox 9">
+              <a:extLst>
+                <a:ext uri="{FF2B5EF4-FFF2-40B4-BE49-F238E27FC236}">
+                  <a16:creationId xmlns:a16="http://schemas.microsoft.com/office/drawing/2014/main" id="{8C4DA8AF-5EB8-CBD9-5983-C057D21C0990}"/>
+                </a:ext>
+              </a:extLst>
+            </p:cNvPr>
+            <p:cNvSpPr txBox="1"/>
+            <p:nvPr/>
+          </p:nvSpPr>
+          <p:spPr>
+            <a:xfrm>
+              <a:off x="6835591" y="4917846"/>
+              <a:ext cx="2484889" cy="307777"/>
+            </a:xfrm>
+            <a:prstGeom prst="rect">
+              <a:avLst/>
+            </a:prstGeom>
+            <a:noFill/>
+          </p:spPr>
+          <p:txBody>
+            <a:bodyPr wrap="square" tIns="0" bIns="0">
+              <a:spAutoFit/>
+            </a:bodyPr>
+            <a:lstStyle/>
+            <a:p>
+              <a:pPr>
+                <a:defRPr/>
+              </a:pPr>
+              <a:r>
+                <a:rPr lang="ko-KR" altLang="en-US" sz="2000" b="1" dirty="0">
+                  <a:ln>
+                    <a:solidFill>
+                      <a:schemeClr val="accent1">
+                        <a:alpha val="0"/>
+                      </a:schemeClr>
+                    </a:solidFill>
+                  </a:ln>
+                  <a:solidFill>
+                    <a:schemeClr val="tx1">
+                      <a:lumMod val="75000"/>
+                      <a:lumOff val="25000"/>
+                    </a:schemeClr>
+                  </a:solidFill>
+                  <a:latin typeface="맑은 고딕" panose="020B0503020000020004" pitchFamily="50" charset="-127"/>
+                  <a:ea typeface="맑은 고딕" panose="020B0503020000020004" pitchFamily="50" charset="-127"/>
+                </a:rPr>
+                <a:t>시연</a:t>
+              </a:r>
+            </a:p>
+          </p:txBody>
+        </p:sp>
+        <p:sp>
+          <p:nvSpPr>
+            <p:cNvPr id="11" name="TextBox 10">
+              <a:extLst>
+                <a:ext uri="{FF2B5EF4-FFF2-40B4-BE49-F238E27FC236}">
+                  <a16:creationId xmlns:a16="http://schemas.microsoft.com/office/drawing/2014/main" id="{77B4B417-EA31-7C28-93D1-7845B1200A9A}"/>
+                </a:ext>
+              </a:extLst>
+            </p:cNvPr>
+            <p:cNvSpPr txBox="1"/>
+            <p:nvPr/>
+          </p:nvSpPr>
+          <p:spPr>
+            <a:xfrm>
+              <a:off x="6242109" y="4773997"/>
+              <a:ext cx="764479" cy="584775"/>
+            </a:xfrm>
+            <a:prstGeom prst="rect">
+              <a:avLst/>
+            </a:prstGeom>
+            <a:noFill/>
+          </p:spPr>
+          <p:txBody>
+            <a:bodyPr wrap="square">
+              <a:spAutoFit/>
+            </a:bodyPr>
+            <a:lstStyle/>
+            <a:p>
+              <a:r>
+                <a:rPr lang="en-US" altLang="ko-KR" sz="3200" b="1" dirty="0">
+                  <a:ln>
+                    <a:solidFill>
+                      <a:schemeClr val="accent1">
+                        <a:alpha val="0"/>
+                      </a:schemeClr>
+                    </a:solidFill>
+                  </a:ln>
+                  <a:solidFill>
+                    <a:srgbClr val="3378C8">
+                      <a:alpha val="50000"/>
+                    </a:srgbClr>
+                  </a:solidFill>
+                  <a:latin typeface="세방고딕 Bold" panose="00000800000000000000" pitchFamily="2" charset="-127"/>
+                  <a:ea typeface="세방고딕 Bold" panose="00000800000000000000" pitchFamily="2" charset="-127"/>
+                </a:rPr>
+                <a:t>05</a:t>
+              </a:r>
+              <a:endParaRPr lang="ko-KR" altLang="en-US" sz="3200" dirty="0">
+                <a:solidFill>
+                  <a:srgbClr val="3378C8">
+                    <a:alpha val="50000"/>
+                  </a:srgbClr>
+                </a:solidFill>
+                <a:latin typeface="세방고딕 Bold" panose="00000800000000000000" pitchFamily="2" charset="-127"/>
+                <a:ea typeface="세방고딕 Bold" panose="00000800000000000000" pitchFamily="2" charset="-127"/>
+              </a:endParaRPr>
+            </a:p>
+          </p:txBody>
+        </p:sp>
       </p:grpSp>
     </p:spTree>
     <p:extLst>
@@ -14593,7 +16587,7 @@
           <p:nvPr>
             <p:extLst>
               <p:ext uri="{D42A27DB-BD31-4B8C-83A1-F6EECF244321}">
-                <p14:modId xmlns:p14="http://schemas.microsoft.com/office/powerpoint/2010/main" val="1391236373"/>
+                <p14:modId xmlns:p14="http://schemas.microsoft.com/office/powerpoint/2010/main" val="58603137"/>
               </p:ext>
             </p:extLst>
           </p:nvPr>
@@ -15864,6 +17858,86 @@
                         <a:tabLst/>
                         <a:defRPr/>
                       </a:pPr>
+                      <a:r>
+                        <a:rPr lang="ko-KR" altLang="en-US" sz="1600" b="1" i="0" kern="1200" noProof="0" dirty="0">
+                          <a:ln>
+                            <a:solidFill>
+                              <a:schemeClr val="bg1">
+                                <a:alpha val="0"/>
+                              </a:schemeClr>
+                            </a:solidFill>
+                          </a:ln>
+                          <a:solidFill>
+                            <a:schemeClr val="bg2">
+                              <a:lumMod val="25000"/>
+                            </a:schemeClr>
+                          </a:solidFill>
+                          <a:latin typeface="맑은 고딕" panose="020B0503020000020004" pitchFamily="50" charset="-127"/>
+                          <a:ea typeface="맑은 고딕" panose="020B0503020000020004" pitchFamily="50" charset="-127"/>
+                          <a:cs typeface="+mn-cs"/>
+                        </a:rPr>
+                        <a:t>김경훈</a:t>
+                      </a:r>
+                      <a:r>
+                        <a:rPr lang="en-US" altLang="ko-KR" sz="1600" b="1" i="0" kern="1200" noProof="0" dirty="0">
+                          <a:ln>
+                            <a:solidFill>
+                              <a:schemeClr val="bg1">
+                                <a:alpha val="0"/>
+                              </a:schemeClr>
+                            </a:solidFill>
+                          </a:ln>
+                          <a:solidFill>
+                            <a:schemeClr val="bg2">
+                              <a:lumMod val="25000"/>
+                            </a:schemeClr>
+                          </a:solidFill>
+                          <a:latin typeface="맑은 고딕" panose="020B0503020000020004" pitchFamily="50" charset="-127"/>
+                          <a:ea typeface="맑은 고딕" panose="020B0503020000020004" pitchFamily="50" charset="-127"/>
+                          <a:cs typeface="+mn-cs"/>
+                        </a:rPr>
+                        <a:t>(</a:t>
+                      </a:r>
+                      <a:r>
+                        <a:rPr lang="ko-KR" altLang="en-US" sz="1600" b="1" i="0" kern="1200" noProof="0" dirty="0">
+                          <a:ln>
+                            <a:solidFill>
+                              <a:schemeClr val="bg1">
+                                <a:alpha val="0"/>
+                              </a:schemeClr>
+                            </a:solidFill>
+                          </a:ln>
+                          <a:solidFill>
+                            <a:schemeClr val="bg2">
+                              <a:lumMod val="25000"/>
+                            </a:schemeClr>
+                          </a:solidFill>
+                          <a:latin typeface="맑은 고딕" panose="020B0503020000020004" pitchFamily="50" charset="-127"/>
+                          <a:ea typeface="맑은 고딕" panose="020B0503020000020004" pitchFamily="50" charset="-127"/>
+                          <a:cs typeface="+mn-cs"/>
+                        </a:rPr>
+                        <a:t>강사</a:t>
+                      </a:r>
+                      <a:r>
+                        <a:rPr lang="en-US" altLang="ko-KR" sz="1600" b="1" i="0" kern="1200" noProof="0" dirty="0">
+                          <a:ln>
+                            <a:solidFill>
+                              <a:schemeClr val="bg1">
+                                <a:alpha val="0"/>
+                              </a:schemeClr>
+                            </a:solidFill>
+                          </a:ln>
+                          <a:solidFill>
+                            <a:schemeClr val="bg2">
+                              <a:lumMod val="25000"/>
+                            </a:schemeClr>
+                          </a:solidFill>
+                          <a:latin typeface="맑은 고딕" panose="020B0503020000020004" pitchFamily="50" charset="-127"/>
+                          <a:ea typeface="맑은 고딕" panose="020B0503020000020004" pitchFamily="50" charset="-127"/>
+                          <a:cs typeface="+mn-cs"/>
+                        </a:rPr>
+                        <a:t>)</a:t>
+                      </a:r>
                       <a:endParaRPr lang="ko-KR" altLang="en-US" sz="1600" b="1" i="0" kern="1200" noProof="0" dirty="0">
                         <a:ln>
                           <a:solidFill>
@@ -15964,23 +18038,26 @@
                         <a:tabLst/>
                         <a:defRPr/>
                       </a:pPr>
-                      <a:endParaRPr lang="ko-KR" altLang="en-US" sz="1600" b="1" i="0" kern="1200" noProof="0" dirty="0">
-                        <a:ln>
+                      <a:r>
+                        <a:rPr lang="ko-KR" altLang="en-US" sz="1600" b="1" i="0" kern="1200" noProof="0" dirty="0">
+                          <a:ln>
+                            <a:solidFill>
+                              <a:schemeClr val="bg1">
+                                <a:alpha val="0"/>
+                              </a:schemeClr>
+                            </a:solidFill>
+                          </a:ln>
                           <a:solidFill>
-                            <a:schemeClr val="bg1">
-                              <a:alpha val="0"/>
+                            <a:schemeClr val="bg2">
+                              <a:lumMod val="25000"/>
                             </a:schemeClr>
                           </a:solidFill>
-                        </a:ln>
-                        <a:solidFill>
-                          <a:schemeClr val="bg2">
-                            <a:lumMod val="25000"/>
-                          </a:schemeClr>
-                        </a:solidFill>
-                        <a:latin typeface="맑은 고딕" panose="020B0503020000020004" pitchFamily="50" charset="-127"/>
-                        <a:ea typeface="맑은 고딕" panose="020B0503020000020004" pitchFamily="50" charset="-127"/>
-                        <a:cs typeface="+mn-cs"/>
-                      </a:endParaRPr>
+                          <a:latin typeface="맑은 고딕" panose="020B0503020000020004" pitchFamily="50" charset="-127"/>
+                          <a:ea typeface="맑은 고딕" panose="020B0503020000020004" pitchFamily="50" charset="-127"/>
+                          <a:cs typeface="+mn-cs"/>
+                        </a:rPr>
+                        <a:t>멘토</a:t>
+                      </a:r>
                     </a:p>
                   </a:txBody>
                   <a:tcPr marT="45741" marB="45741" anchor="ctr">
@@ -17883,6 +19960,284 @@
           </p:spPr>
         </p:pic>
       </p:grpSp>
+      <p:grpSp>
+        <p:nvGrpSpPr>
+          <p:cNvPr id="17" name="그룹 16">
+            <a:extLst>
+              <a:ext uri="{FF2B5EF4-FFF2-40B4-BE49-F238E27FC236}">
+                <a16:creationId xmlns:a16="http://schemas.microsoft.com/office/drawing/2014/main" id="{40D401E7-2887-88D6-145F-D10A3772AB0E}"/>
+              </a:ext>
+            </a:extLst>
+          </p:cNvPr>
+          <p:cNvGrpSpPr/>
+          <p:nvPr/>
+        </p:nvGrpSpPr>
+        <p:grpSpPr>
+          <a:xfrm>
+            <a:off x="4525872" y="5618281"/>
+            <a:ext cx="4226492" cy="358636"/>
+            <a:chOff x="4525872" y="5811259"/>
+            <a:chExt cx="4226492" cy="358636"/>
+          </a:xfrm>
+        </p:grpSpPr>
+        <p:sp>
+          <p:nvSpPr>
+            <p:cNvPr id="18" name="사각형: 둥근 모서리 17">
+              <a:extLst>
+                <a:ext uri="{FF2B5EF4-FFF2-40B4-BE49-F238E27FC236}">
+                  <a16:creationId xmlns:a16="http://schemas.microsoft.com/office/drawing/2014/main" id="{FA88CC88-4F27-9865-DF0B-49276BFD04CC}"/>
+                </a:ext>
+              </a:extLst>
+            </p:cNvPr>
+            <p:cNvSpPr/>
+            <p:nvPr/>
+          </p:nvSpPr>
+          <p:spPr>
+            <a:xfrm>
+              <a:off x="4525872" y="5811259"/>
+              <a:ext cx="3226312" cy="358636"/>
+            </a:xfrm>
+            <a:prstGeom prst="roundRect">
+              <a:avLst>
+                <a:gd name="adj" fmla="val 50000"/>
+              </a:avLst>
+            </a:prstGeom>
+            <a:solidFill>
+              <a:schemeClr val="bg1">
+                <a:lumMod val="95000"/>
+              </a:schemeClr>
+            </a:solidFill>
+            <a:ln>
+              <a:noFill/>
+            </a:ln>
+          </p:spPr>
+          <p:style>
+            <a:lnRef idx="2">
+              <a:schemeClr val="accent1">
+                <a:shade val="50000"/>
+              </a:schemeClr>
+            </a:lnRef>
+            <a:fillRef idx="1">
+              <a:schemeClr val="accent1"/>
+            </a:fillRef>
+            <a:effectRef idx="0">
+              <a:schemeClr val="accent1"/>
+            </a:effectRef>
+            <a:fontRef idx="minor">
+              <a:schemeClr val="lt1"/>
+            </a:fontRef>
+          </p:style>
+          <p:txBody>
+            <a:bodyPr rtlCol="0" anchor="ctr"/>
+            <a:lstStyle/>
+            <a:p>
+              <a:pPr algn="ctr"/>
+              <a:endParaRPr lang="ko-KR" altLang="en-US" sz="1600" dirty="0">
+                <a:latin typeface="세방고딕 Regular" panose="00000500000000000000" pitchFamily="2" charset="-127"/>
+                <a:ea typeface="세방고딕 Regular" panose="00000500000000000000" pitchFamily="2" charset="-127"/>
+              </a:endParaRPr>
+            </a:p>
+          </p:txBody>
+        </p:sp>
+        <p:sp>
+          <p:nvSpPr>
+            <p:cNvPr id="19" name="타원 18">
+              <a:extLst>
+                <a:ext uri="{FF2B5EF4-FFF2-40B4-BE49-F238E27FC236}">
+                  <a16:creationId xmlns:a16="http://schemas.microsoft.com/office/drawing/2014/main" id="{CE25E09D-1E12-CE17-060F-06CD69D03E89}"/>
+                </a:ext>
+              </a:extLst>
+            </p:cNvPr>
+            <p:cNvSpPr/>
+            <p:nvPr/>
+          </p:nvSpPr>
+          <p:spPr>
+            <a:xfrm>
+              <a:off x="4525872" y="5811259"/>
+              <a:ext cx="358635" cy="358635"/>
+            </a:xfrm>
+            <a:prstGeom prst="ellipse">
+              <a:avLst/>
+            </a:prstGeom>
+            <a:solidFill>
+              <a:srgbClr val="3378C8"/>
+            </a:solidFill>
+            <a:ln>
+              <a:noFill/>
+            </a:ln>
+          </p:spPr>
+          <p:style>
+            <a:lnRef idx="2">
+              <a:schemeClr val="accent1">
+                <a:shade val="50000"/>
+              </a:schemeClr>
+            </a:lnRef>
+            <a:fillRef idx="1">
+              <a:schemeClr val="accent1"/>
+            </a:fillRef>
+            <a:effectRef idx="0">
+              <a:schemeClr val="accent1"/>
+            </a:effectRef>
+            <a:fontRef idx="minor">
+              <a:schemeClr val="lt1"/>
+            </a:fontRef>
+          </p:style>
+          <p:txBody>
+            <a:bodyPr rtlCol="0" anchor="ctr"/>
+            <a:lstStyle/>
+            <a:p>
+              <a:pPr algn="ctr"/>
+              <a:endParaRPr lang="ko-KR" altLang="en-US" dirty="0">
+                <a:latin typeface="세방고딕 Regular" panose="00000500000000000000" pitchFamily="2" charset="-127"/>
+                <a:ea typeface="세방고딕 Regular" panose="00000500000000000000" pitchFamily="2" charset="-127"/>
+              </a:endParaRPr>
+            </a:p>
+          </p:txBody>
+        </p:sp>
+        <p:sp>
+          <p:nvSpPr>
+            <p:cNvPr id="23" name="TextBox 22">
+              <a:extLst>
+                <a:ext uri="{FF2B5EF4-FFF2-40B4-BE49-F238E27FC236}">
+                  <a16:creationId xmlns:a16="http://schemas.microsoft.com/office/drawing/2014/main" id="{E0EDD62F-617F-E136-5AF3-3129F1D45F10}"/>
+                </a:ext>
+              </a:extLst>
+            </p:cNvPr>
+            <p:cNvSpPr txBox="1"/>
+            <p:nvPr/>
+          </p:nvSpPr>
+          <p:spPr>
+            <a:xfrm>
+              <a:off x="4898656" y="5852537"/>
+              <a:ext cx="3853708" cy="276999"/>
+            </a:xfrm>
+            <a:prstGeom prst="rect">
+              <a:avLst/>
+            </a:prstGeom>
+            <a:noFill/>
+          </p:spPr>
+          <p:txBody>
+            <a:bodyPr wrap="square">
+              <a:spAutoFit/>
+            </a:bodyPr>
+            <a:lstStyle/>
+            <a:p>
+              <a:pPr>
+                <a:defRPr/>
+              </a:pPr>
+              <a:r>
+                <a:rPr lang="ko-KR" altLang="en-US" sz="1200" b="1" dirty="0">
+                  <a:ln>
+                    <a:solidFill>
+                      <a:schemeClr val="bg1">
+                        <a:alpha val="0"/>
+                      </a:schemeClr>
+                    </a:solidFill>
+                  </a:ln>
+                  <a:solidFill>
+                    <a:schemeClr val="bg2">
+                      <a:lumMod val="25000"/>
+                    </a:schemeClr>
+                  </a:solidFill>
+                  <a:latin typeface="맑은 고딕" panose="020B0503020000020004" pitchFamily="50" charset="-127"/>
+                  <a:ea typeface="맑은 고딕" panose="020B0503020000020004" pitchFamily="50" charset="-127"/>
+                </a:rPr>
+                <a:t>주제 선정 피드백</a:t>
+              </a:r>
+              <a:r>
+                <a:rPr lang="en-US" altLang="ko-KR" sz="1200" b="1" dirty="0">
+                  <a:ln>
+                    <a:solidFill>
+                      <a:schemeClr val="bg1">
+                        <a:alpha val="0"/>
+                      </a:schemeClr>
+                    </a:solidFill>
+                  </a:ln>
+                  <a:solidFill>
+                    <a:schemeClr val="bg2">
+                      <a:lumMod val="25000"/>
+                    </a:schemeClr>
+                  </a:solidFill>
+                  <a:latin typeface="맑은 고딕" panose="020B0503020000020004" pitchFamily="50" charset="-127"/>
+                  <a:ea typeface="맑은 고딕" panose="020B0503020000020004" pitchFamily="50" charset="-127"/>
+                </a:rPr>
+                <a:t>, </a:t>
+              </a:r>
+              <a:r>
+                <a:rPr lang="ko-KR" altLang="en-US" sz="1200" b="1" dirty="0">
+                  <a:ln>
+                    <a:solidFill>
+                      <a:schemeClr val="bg1">
+                        <a:alpha val="0"/>
+                      </a:schemeClr>
+                    </a:solidFill>
+                  </a:ln>
+                  <a:solidFill>
+                    <a:schemeClr val="bg2">
+                      <a:lumMod val="25000"/>
+                    </a:schemeClr>
+                  </a:solidFill>
+                  <a:latin typeface="맑은 고딕" panose="020B0503020000020004" pitchFamily="50" charset="-127"/>
+                  <a:ea typeface="맑은 고딕" panose="020B0503020000020004" pitchFamily="50" charset="-127"/>
+                </a:rPr>
+                <a:t>프로젝트 질의응답</a:t>
+              </a:r>
+              <a:endParaRPr lang="en-US" altLang="ko-KR" sz="1200" b="1" dirty="0">
+                <a:ln>
+                  <a:solidFill>
+                    <a:schemeClr val="bg1">
+                      <a:alpha val="0"/>
+                    </a:schemeClr>
+                  </a:solidFill>
+                </a:ln>
+                <a:solidFill>
+                  <a:schemeClr val="bg2">
+                    <a:lumMod val="25000"/>
+                  </a:schemeClr>
+                </a:solidFill>
+                <a:latin typeface="맑은 고딕" panose="020B0503020000020004" pitchFamily="50" charset="-127"/>
+                <a:ea typeface="맑은 고딕" panose="020B0503020000020004" pitchFamily="50" charset="-127"/>
+              </a:endParaRPr>
+            </a:p>
+          </p:txBody>
+        </p:sp>
+        <p:pic>
+          <p:nvPicPr>
+            <p:cNvPr id="24" name="그래픽 23">
+              <a:extLst>
+                <a:ext uri="{FF2B5EF4-FFF2-40B4-BE49-F238E27FC236}">
+                  <a16:creationId xmlns:a16="http://schemas.microsoft.com/office/drawing/2014/main" id="{748713F0-0EB5-10A5-A7E4-E78CAF9FDD63}"/>
+                </a:ext>
+              </a:extLst>
+            </p:cNvPr>
+            <p:cNvPicPr>
+              <a:picLocks noChangeAspect="1"/>
+            </p:cNvPicPr>
+            <p:nvPr/>
+          </p:nvPicPr>
+          <p:blipFill>
+            <a:blip r:embed="rId19">
+              <a:extLst>
+                <a:ext uri="{96DAC541-7B7A-43D3-8B79-37D633B846F1}">
+                  <asvg:svgBlip xmlns:asvg="http://schemas.microsoft.com/office/drawing/2016/SVG/main" r:embed="rId20"/>
+                </a:ext>
+              </a:extLst>
+            </a:blip>
+            <a:stretch>
+              <a:fillRect/>
+            </a:stretch>
+          </p:blipFill>
+          <p:spPr>
+            <a:xfrm>
+              <a:off x="4606764" y="5897394"/>
+              <a:ext cx="186838" cy="182946"/>
+            </a:xfrm>
+            <a:prstGeom prst="rect">
+              <a:avLst/>
+            </a:prstGeom>
+          </p:spPr>
+        </p:pic>
+      </p:grpSp>
     </p:spTree>
     <p:extLst>
       <p:ext uri="{BB962C8B-B14F-4D97-AF65-F5344CB8AC3E}">
@@ -18389,6 +20744,11 @@
               <a:gd name="adj" fmla="val 50000"/>
             </a:avLst>
           </a:prstGeom>
+          <a:ln>
+            <a:solidFill>
+              <a:schemeClr val="tx1"/>
+            </a:solidFill>
+          </a:ln>
         </p:spPr>
         <p:style>
           <a:lnRef idx="2">
@@ -18436,6 +20796,11 @@
           <a:prstGeom prst="rect">
             <a:avLst/>
           </a:prstGeom>
+          <a:ln>
+            <a:solidFill>
+              <a:schemeClr val="tx1"/>
+            </a:solidFill>
+          </a:ln>
         </p:spPr>
         <p:style>
           <a:lnRef idx="2">
@@ -18483,6 +20848,11 @@
           <a:prstGeom prst="flowChartDecision">
             <a:avLst/>
           </a:prstGeom>
+          <a:ln>
+            <a:solidFill>
+              <a:schemeClr val="tx1"/>
+            </a:solidFill>
+          </a:ln>
         </p:spPr>
         <p:style>
           <a:lnRef idx="2">
@@ -18532,12 +20902,17 @@
         </p:nvSpPr>
         <p:spPr>
           <a:xfrm>
-            <a:off x="3957833" y="2487879"/>
+            <a:off x="4021609" y="2503542"/>
             <a:ext cx="1112647" cy="429382"/>
           </a:xfrm>
           <a:prstGeom prst="rect">
             <a:avLst/>
           </a:prstGeom>
+          <a:ln>
+            <a:solidFill>
+              <a:schemeClr val="tx1"/>
+            </a:solidFill>
+          </a:ln>
         </p:spPr>
         <p:style>
           <a:lnRef idx="2">
@@ -18584,12 +20959,17 @@
         </p:nvSpPr>
         <p:spPr>
           <a:xfrm>
-            <a:off x="3955986" y="1591150"/>
+            <a:off x="4006753" y="1565906"/>
             <a:ext cx="1112647" cy="429382"/>
           </a:xfrm>
           <a:prstGeom prst="rect">
             <a:avLst/>
           </a:prstGeom>
+          <a:ln>
+            <a:solidFill>
+              <a:schemeClr val="tx1"/>
+            </a:solidFill>
+          </a:ln>
         </p:spPr>
         <p:style>
           <a:lnRef idx="2">
@@ -18631,12 +21011,17 @@
         </p:nvSpPr>
         <p:spPr>
           <a:xfrm>
-            <a:off x="3958211" y="3441178"/>
+            <a:off x="4021608" y="3527423"/>
             <a:ext cx="1112647" cy="429382"/>
           </a:xfrm>
           <a:prstGeom prst="rect">
             <a:avLst/>
           </a:prstGeom>
+          <a:ln>
+            <a:solidFill>
+              <a:schemeClr val="tx1"/>
+            </a:solidFill>
+          </a:ln>
         </p:spPr>
         <p:style>
           <a:lnRef idx="2">
@@ -18683,12 +21068,17 @@
         </p:nvSpPr>
         <p:spPr>
           <a:xfrm>
-            <a:off x="3955986" y="4442491"/>
+            <a:off x="4114566" y="4547491"/>
             <a:ext cx="1112647" cy="429382"/>
           </a:xfrm>
           <a:prstGeom prst="rect">
             <a:avLst/>
           </a:prstGeom>
+          <a:ln>
+            <a:solidFill>
+              <a:schemeClr val="tx1"/>
+            </a:solidFill>
+          </a:ln>
         </p:spPr>
         <p:style>
           <a:lnRef idx="2">
@@ -18735,12 +21125,17 @@
         </p:nvSpPr>
         <p:spPr>
           <a:xfrm>
-            <a:off x="5505559" y="4239466"/>
+            <a:off x="5546668" y="4327353"/>
             <a:ext cx="1828954" cy="869658"/>
           </a:xfrm>
           <a:prstGeom prst="flowChartDecision">
             <a:avLst/>
           </a:prstGeom>
+          <a:ln>
+            <a:solidFill>
+              <a:schemeClr val="tx1"/>
+            </a:solidFill>
+          </a:ln>
         </p:spPr>
         <p:style>
           <a:lnRef idx="2">
@@ -18793,6 +21188,11 @@
           <a:prstGeom prst="flowChartDecision">
             <a:avLst/>
           </a:prstGeom>
+          <a:ln>
+            <a:solidFill>
+              <a:schemeClr val="tx1"/>
+            </a:solidFill>
+          </a:ln>
         </p:spPr>
         <p:style>
           <a:lnRef idx="2">
@@ -18834,12 +21234,17 @@
         </p:nvSpPr>
         <p:spPr>
           <a:xfrm>
-            <a:off x="2357796" y="3245090"/>
+            <a:off x="2336881" y="3281297"/>
             <a:ext cx="1403889" cy="903884"/>
           </a:xfrm>
           <a:prstGeom prst="flowChartDecision">
             <a:avLst/>
           </a:prstGeom>
+          <a:ln>
+            <a:solidFill>
+              <a:schemeClr val="tx1"/>
+            </a:solidFill>
+          </a:ln>
         </p:spPr>
         <p:style>
           <a:lnRef idx="2">
@@ -18889,12 +21294,17 @@
         </p:nvSpPr>
         <p:spPr>
           <a:xfrm>
-            <a:off x="2355209" y="4205240"/>
+            <a:off x="2342313" y="4310240"/>
             <a:ext cx="1403889" cy="903884"/>
           </a:xfrm>
           <a:prstGeom prst="flowChartDecision">
             <a:avLst/>
           </a:prstGeom>
+          <a:ln>
+            <a:solidFill>
+              <a:schemeClr val="tx1"/>
+            </a:solidFill>
+          </a:ln>
         </p:spPr>
         <p:style>
           <a:lnRef idx="2">
@@ -18952,12 +21362,17 @@
         </p:nvSpPr>
         <p:spPr>
           <a:xfrm>
-            <a:off x="2355209" y="5165390"/>
+            <a:off x="2355209" y="5375391"/>
             <a:ext cx="1403889" cy="903884"/>
           </a:xfrm>
           <a:prstGeom prst="flowChartDecision">
             <a:avLst/>
           </a:prstGeom>
+          <a:ln>
+            <a:solidFill>
+              <a:schemeClr val="tx1"/>
+            </a:solidFill>
+          </a:ln>
         </p:spPr>
         <p:style>
           <a:lnRef idx="2">
@@ -19007,12 +21422,17 @@
         </p:nvSpPr>
         <p:spPr>
           <a:xfrm>
-            <a:off x="10380476" y="5373216"/>
-            <a:ext cx="1260140" cy="914400"/>
+            <a:off x="10751430" y="3247937"/>
+            <a:ext cx="1260140" cy="576064"/>
           </a:xfrm>
           <a:prstGeom prst="parallelogram">
             <a:avLst/>
           </a:prstGeom>
+          <a:ln>
+            <a:solidFill>
+              <a:schemeClr val="tx1"/>
+            </a:solidFill>
+          </a:ln>
         </p:spPr>
         <p:style>
           <a:lnRef idx="2">
@@ -19035,19 +21455,991 @@
             <a:pPr algn="ctr"/>
             <a:r>
               <a:rPr lang="ko-KR" altLang="en-US" sz="1300" dirty="0"/>
-              <a:t>게임종료 </a:t>
-            </a:r>
-            <a:r>
-              <a:rPr lang="ko-KR" altLang="en-US" sz="1300" dirty="0" err="1"/>
-              <a:t>모달창</a:t>
-            </a:r>
-            <a:r>
-              <a:rPr lang="ko-KR" altLang="en-US" sz="1300" dirty="0"/>
-              <a:t> 출력</a:t>
+              <a:t>게임종료</a:t>
             </a:r>
           </a:p>
         </p:txBody>
       </p:sp>
+      <p:sp>
+        <p:nvSpPr>
+          <p:cNvPr id="5" name="직사각형 4">
+            <a:extLst>
+              <a:ext uri="{FF2B5EF4-FFF2-40B4-BE49-F238E27FC236}">
+                <a16:creationId xmlns:a16="http://schemas.microsoft.com/office/drawing/2014/main" id="{4A51CE0C-25D5-EC59-8F0A-FB140FD0E3A9}"/>
+              </a:ext>
+            </a:extLst>
+          </p:cNvPr>
+          <p:cNvSpPr/>
+          <p:nvPr/>
+        </p:nvSpPr>
+        <p:spPr>
+          <a:xfrm>
+            <a:off x="7769994" y="4547491"/>
+            <a:ext cx="1112647" cy="429382"/>
+          </a:xfrm>
+          <a:prstGeom prst="rect">
+            <a:avLst/>
+          </a:prstGeom>
+          <a:ln>
+            <a:solidFill>
+              <a:schemeClr val="tx1"/>
+            </a:solidFill>
+          </a:ln>
+        </p:spPr>
+        <p:style>
+          <a:lnRef idx="2">
+            <a:schemeClr val="accent6"/>
+          </a:lnRef>
+          <a:fillRef idx="1">
+            <a:schemeClr val="lt1"/>
+          </a:fillRef>
+          <a:effectRef idx="0">
+            <a:schemeClr val="accent6"/>
+          </a:effectRef>
+          <a:fontRef idx="minor">
+            <a:schemeClr val="dk1"/>
+          </a:fontRef>
+        </p:style>
+        <p:txBody>
+          <a:bodyPr rtlCol="0" anchor="ctr"/>
+          <a:lstStyle/>
+          <a:p>
+            <a:pPr algn="ctr"/>
+            <a:r>
+              <a:rPr lang="ko-KR" altLang="en-US" sz="1000" dirty="0"/>
+              <a:t>벽돌 깨짐</a:t>
+            </a:r>
+          </a:p>
+        </p:txBody>
+      </p:sp>
+      <p:sp>
+        <p:nvSpPr>
+          <p:cNvPr id="6" name="순서도: 판단 5">
+            <a:extLst>
+              <a:ext uri="{FF2B5EF4-FFF2-40B4-BE49-F238E27FC236}">
+                <a16:creationId xmlns:a16="http://schemas.microsoft.com/office/drawing/2014/main" id="{8914D9E1-58C0-447A-7F9B-466CAC858FAE}"/>
+              </a:ext>
+            </a:extLst>
+          </p:cNvPr>
+          <p:cNvSpPr/>
+          <p:nvPr/>
+        </p:nvSpPr>
+        <p:spPr>
+          <a:xfrm>
+            <a:off x="9306511" y="4319274"/>
+            <a:ext cx="1828954" cy="869658"/>
+          </a:xfrm>
+          <a:prstGeom prst="flowChartDecision">
+            <a:avLst/>
+          </a:prstGeom>
+          <a:ln>
+            <a:solidFill>
+              <a:schemeClr val="tx1"/>
+            </a:solidFill>
+          </a:ln>
+        </p:spPr>
+        <p:style>
+          <a:lnRef idx="2">
+            <a:schemeClr val="accent6"/>
+          </a:lnRef>
+          <a:fillRef idx="1">
+            <a:schemeClr val="lt1"/>
+          </a:fillRef>
+          <a:effectRef idx="0">
+            <a:schemeClr val="accent6"/>
+          </a:effectRef>
+          <a:fontRef idx="minor">
+            <a:schemeClr val="dk1"/>
+          </a:fontRef>
+        </p:style>
+        <p:txBody>
+          <a:bodyPr rtlCol="0" anchor="ctr"/>
+          <a:lstStyle/>
+          <a:p>
+            <a:pPr algn="ctr"/>
+            <a:r>
+              <a:rPr lang="en-US" altLang="ko-KR" sz="1000" dirty="0"/>
+              <a:t>5</a:t>
+            </a:r>
+            <a:r>
+              <a:rPr lang="ko-KR" altLang="en-US" sz="1000" dirty="0"/>
+              <a:t>스테이지</a:t>
+            </a:r>
+            <a:r>
+              <a:rPr lang="en-US" altLang="ko-KR" sz="1000" dirty="0"/>
+              <a:t>?</a:t>
+            </a:r>
+            <a:endParaRPr lang="ko-KR" altLang="en-US" sz="1000" dirty="0"/>
+          </a:p>
+        </p:txBody>
+      </p:sp>
+      <p:sp>
+        <p:nvSpPr>
+          <p:cNvPr id="8" name="직사각형 7">
+            <a:extLst>
+              <a:ext uri="{FF2B5EF4-FFF2-40B4-BE49-F238E27FC236}">
+                <a16:creationId xmlns:a16="http://schemas.microsoft.com/office/drawing/2014/main" id="{DADF37FA-1B59-E853-AA28-278CC90CDF20}"/>
+              </a:ext>
+            </a:extLst>
+          </p:cNvPr>
+          <p:cNvSpPr/>
+          <p:nvPr/>
+        </p:nvSpPr>
+        <p:spPr>
+          <a:xfrm>
+            <a:off x="9664664" y="6188706"/>
+            <a:ext cx="1112647" cy="429382"/>
+          </a:xfrm>
+          <a:prstGeom prst="rect">
+            <a:avLst/>
+          </a:prstGeom>
+          <a:ln>
+            <a:solidFill>
+              <a:schemeClr val="tx1"/>
+            </a:solidFill>
+          </a:ln>
+        </p:spPr>
+        <p:style>
+          <a:lnRef idx="2">
+            <a:schemeClr val="accent6"/>
+          </a:lnRef>
+          <a:fillRef idx="1">
+            <a:schemeClr val="lt1"/>
+          </a:fillRef>
+          <a:effectRef idx="0">
+            <a:schemeClr val="accent6"/>
+          </a:effectRef>
+          <a:fontRef idx="minor">
+            <a:schemeClr val="dk1"/>
+          </a:fontRef>
+        </p:style>
+        <p:txBody>
+          <a:bodyPr rtlCol="0" anchor="ctr"/>
+          <a:lstStyle/>
+          <a:p>
+            <a:pPr algn="ctr"/>
+            <a:r>
+              <a:rPr lang="ko-KR" altLang="en-US" sz="1000" dirty="0"/>
+              <a:t>스테이지</a:t>
+            </a:r>
+            <a:r>
+              <a:rPr lang="en-US" altLang="ko-KR" sz="1000" dirty="0"/>
+              <a:t>++</a:t>
+            </a:r>
+            <a:endParaRPr lang="ko-KR" altLang="en-US" sz="1000" dirty="0"/>
+          </a:p>
+        </p:txBody>
+      </p:sp>
+      <p:sp>
+        <p:nvSpPr>
+          <p:cNvPr id="12" name="직사각형 11">
+            <a:extLst>
+              <a:ext uri="{FF2B5EF4-FFF2-40B4-BE49-F238E27FC236}">
+                <a16:creationId xmlns:a16="http://schemas.microsoft.com/office/drawing/2014/main" id="{865FB82F-7614-C20F-66D0-612C196AD374}"/>
+              </a:ext>
+            </a:extLst>
+          </p:cNvPr>
+          <p:cNvSpPr/>
+          <p:nvPr/>
+        </p:nvSpPr>
+        <p:spPr>
+          <a:xfrm>
+            <a:off x="10806032" y="2069507"/>
+            <a:ext cx="1260140" cy="576064"/>
+          </a:xfrm>
+          <a:prstGeom prst="rect">
+            <a:avLst/>
+          </a:prstGeom>
+          <a:ln>
+            <a:solidFill>
+              <a:schemeClr val="tx1"/>
+            </a:solidFill>
+          </a:ln>
+        </p:spPr>
+        <p:style>
+          <a:lnRef idx="2">
+            <a:schemeClr val="accent6"/>
+          </a:lnRef>
+          <a:fillRef idx="1">
+            <a:schemeClr val="lt1"/>
+          </a:fillRef>
+          <a:effectRef idx="0">
+            <a:schemeClr val="accent6"/>
+          </a:effectRef>
+          <a:fontRef idx="minor">
+            <a:schemeClr val="dk1"/>
+          </a:fontRef>
+        </p:style>
+        <p:txBody>
+          <a:bodyPr rtlCol="0" anchor="ctr"/>
+          <a:lstStyle/>
+          <a:p>
+            <a:pPr algn="ctr"/>
+            <a:r>
+              <a:rPr lang="ko-KR" altLang="en-US" sz="1000"/>
+              <a:t>점수 및 순위 출력</a:t>
+            </a:r>
+            <a:endParaRPr lang="ko-KR" altLang="en-US" sz="1000" dirty="0"/>
+          </a:p>
+        </p:txBody>
+      </p:sp>
+      <p:cxnSp>
+        <p:nvCxnSpPr>
+          <p:cNvPr id="15" name="직선 화살표 연결선 14">
+            <a:extLst>
+              <a:ext uri="{FF2B5EF4-FFF2-40B4-BE49-F238E27FC236}">
+                <a16:creationId xmlns:a16="http://schemas.microsoft.com/office/drawing/2014/main" id="{60A105AE-8886-AC73-49F2-55B258FDC893}"/>
+              </a:ext>
+            </a:extLst>
+          </p:cNvPr>
+          <p:cNvCxnSpPr>
+            <a:stCxn id="17" idx="3"/>
+            <a:endCxn id="18" idx="1"/>
+          </p:cNvCxnSpPr>
+          <p:nvPr/>
+        </p:nvCxnSpPr>
+        <p:spPr>
+          <a:xfrm>
+            <a:off x="623125" y="3752268"/>
+            <a:ext cx="187375" cy="0"/>
+          </a:xfrm>
+          <a:prstGeom prst="straightConnector1">
+            <a:avLst/>
+          </a:prstGeom>
+          <a:ln>
+            <a:tailEnd type="triangle"/>
+          </a:ln>
+        </p:spPr>
+        <p:style>
+          <a:lnRef idx="1">
+            <a:schemeClr val="dk1"/>
+          </a:lnRef>
+          <a:fillRef idx="0">
+            <a:schemeClr val="dk1"/>
+          </a:fillRef>
+          <a:effectRef idx="0">
+            <a:schemeClr val="dk1"/>
+          </a:effectRef>
+          <a:fontRef idx="minor">
+            <a:schemeClr val="tx1"/>
+          </a:fontRef>
+        </p:style>
+      </p:cxnSp>
+      <p:cxnSp>
+        <p:nvCxnSpPr>
+          <p:cNvPr id="22" name="연결선: 꺾임 21">
+            <a:extLst>
+              <a:ext uri="{FF2B5EF4-FFF2-40B4-BE49-F238E27FC236}">
+                <a16:creationId xmlns:a16="http://schemas.microsoft.com/office/drawing/2014/main" id="{AEF4F07F-6413-6D5F-8F35-3F9C6DCBC7F2}"/>
+              </a:ext>
+            </a:extLst>
+          </p:cNvPr>
+          <p:cNvCxnSpPr>
+            <a:stCxn id="18" idx="3"/>
+            <a:endCxn id="41" idx="1"/>
+          </p:cNvCxnSpPr>
+          <p:nvPr/>
+        </p:nvCxnSpPr>
+        <p:spPr>
+          <a:xfrm flipV="1">
+            <a:off x="2079479" y="1776732"/>
+            <a:ext cx="267085" cy="1975536"/>
+          </a:xfrm>
+          <a:prstGeom prst="bentConnector3">
+            <a:avLst/>
+          </a:prstGeom>
+          <a:ln>
+            <a:tailEnd type="triangle"/>
+          </a:ln>
+        </p:spPr>
+        <p:style>
+          <a:lnRef idx="1">
+            <a:schemeClr val="dk1"/>
+          </a:lnRef>
+          <a:fillRef idx="0">
+            <a:schemeClr val="dk1"/>
+          </a:fillRef>
+          <a:effectRef idx="0">
+            <a:schemeClr val="dk1"/>
+          </a:effectRef>
+          <a:fontRef idx="minor">
+            <a:schemeClr val="tx1"/>
+          </a:fontRef>
+        </p:style>
+      </p:cxnSp>
+      <p:cxnSp>
+        <p:nvCxnSpPr>
+          <p:cNvPr id="24" name="연결선: 꺾임 23">
+            <a:extLst>
+              <a:ext uri="{FF2B5EF4-FFF2-40B4-BE49-F238E27FC236}">
+                <a16:creationId xmlns:a16="http://schemas.microsoft.com/office/drawing/2014/main" id="{C922DC91-CB2A-BBE5-C172-357DB5F5C5EE}"/>
+              </a:ext>
+            </a:extLst>
+          </p:cNvPr>
+          <p:cNvCxnSpPr>
+            <a:stCxn id="18" idx="3"/>
+            <a:endCxn id="19" idx="1"/>
+          </p:cNvCxnSpPr>
+          <p:nvPr/>
+        </p:nvCxnSpPr>
+        <p:spPr>
+          <a:xfrm flipV="1">
+            <a:off x="2079479" y="2736882"/>
+            <a:ext cx="275730" cy="1015386"/>
+          </a:xfrm>
+          <a:prstGeom prst="bentConnector3">
+            <a:avLst/>
+          </a:prstGeom>
+          <a:ln>
+            <a:tailEnd type="triangle"/>
+          </a:ln>
+        </p:spPr>
+        <p:style>
+          <a:lnRef idx="1">
+            <a:schemeClr val="dk1"/>
+          </a:lnRef>
+          <a:fillRef idx="0">
+            <a:schemeClr val="dk1"/>
+          </a:fillRef>
+          <a:effectRef idx="0">
+            <a:schemeClr val="dk1"/>
+          </a:effectRef>
+          <a:fontRef idx="minor">
+            <a:schemeClr val="tx1"/>
+          </a:fontRef>
+        </p:style>
+      </p:cxnSp>
+      <p:cxnSp>
+        <p:nvCxnSpPr>
+          <p:cNvPr id="26" name="직선 화살표 연결선 25">
+            <a:extLst>
+              <a:ext uri="{FF2B5EF4-FFF2-40B4-BE49-F238E27FC236}">
+                <a16:creationId xmlns:a16="http://schemas.microsoft.com/office/drawing/2014/main" id="{F0AE8A8C-E46F-3D4F-3817-272D66F9622C}"/>
+              </a:ext>
+            </a:extLst>
+          </p:cNvPr>
+          <p:cNvCxnSpPr>
+            <a:stCxn id="18" idx="3"/>
+            <a:endCxn id="42" idx="1"/>
+          </p:cNvCxnSpPr>
+          <p:nvPr/>
+        </p:nvCxnSpPr>
+        <p:spPr>
+          <a:xfrm flipV="1">
+            <a:off x="2079479" y="3733239"/>
+            <a:ext cx="257402" cy="19029"/>
+          </a:xfrm>
+          <a:prstGeom prst="straightConnector1">
+            <a:avLst/>
+          </a:prstGeom>
+          <a:ln>
+            <a:tailEnd type="triangle"/>
+          </a:ln>
+        </p:spPr>
+        <p:style>
+          <a:lnRef idx="1">
+            <a:schemeClr val="accent1"/>
+          </a:lnRef>
+          <a:fillRef idx="0">
+            <a:schemeClr val="accent1"/>
+          </a:fillRef>
+          <a:effectRef idx="0">
+            <a:schemeClr val="accent1"/>
+          </a:effectRef>
+          <a:fontRef idx="minor">
+            <a:schemeClr val="tx1"/>
+          </a:fontRef>
+        </p:style>
+      </p:cxnSp>
+      <p:cxnSp>
+        <p:nvCxnSpPr>
+          <p:cNvPr id="31" name="연결선: 꺾임 30">
+            <a:extLst>
+              <a:ext uri="{FF2B5EF4-FFF2-40B4-BE49-F238E27FC236}">
+                <a16:creationId xmlns:a16="http://schemas.microsoft.com/office/drawing/2014/main" id="{20358633-42F2-4800-E12E-64F73E7A4854}"/>
+              </a:ext>
+            </a:extLst>
+          </p:cNvPr>
+          <p:cNvCxnSpPr>
+            <a:stCxn id="18" idx="3"/>
+            <a:endCxn id="43" idx="1"/>
+          </p:cNvCxnSpPr>
+          <p:nvPr/>
+        </p:nvCxnSpPr>
+        <p:spPr>
+          <a:xfrm>
+            <a:off x="2079479" y="3752268"/>
+            <a:ext cx="262834" cy="1009914"/>
+          </a:xfrm>
+          <a:prstGeom prst="bentConnector3">
+            <a:avLst/>
+          </a:prstGeom>
+          <a:ln>
+            <a:tailEnd type="triangle"/>
+          </a:ln>
+        </p:spPr>
+        <p:style>
+          <a:lnRef idx="1">
+            <a:schemeClr val="accent1"/>
+          </a:lnRef>
+          <a:fillRef idx="0">
+            <a:schemeClr val="accent1"/>
+          </a:fillRef>
+          <a:effectRef idx="0">
+            <a:schemeClr val="accent1"/>
+          </a:effectRef>
+          <a:fontRef idx="minor">
+            <a:schemeClr val="tx1"/>
+          </a:fontRef>
+        </p:style>
+      </p:cxnSp>
+      <p:cxnSp>
+        <p:nvCxnSpPr>
+          <p:cNvPr id="37" name="연결선: 꺾임 36">
+            <a:extLst>
+              <a:ext uri="{FF2B5EF4-FFF2-40B4-BE49-F238E27FC236}">
+                <a16:creationId xmlns:a16="http://schemas.microsoft.com/office/drawing/2014/main" id="{50DAB2A2-6D54-E026-BA37-8B00A9502C96}"/>
+              </a:ext>
+            </a:extLst>
+          </p:cNvPr>
+          <p:cNvCxnSpPr>
+            <a:stCxn id="18" idx="3"/>
+            <a:endCxn id="44" idx="1"/>
+          </p:cNvCxnSpPr>
+          <p:nvPr/>
+        </p:nvCxnSpPr>
+        <p:spPr>
+          <a:xfrm>
+            <a:off x="2079479" y="3752268"/>
+            <a:ext cx="275730" cy="2075065"/>
+          </a:xfrm>
+          <a:prstGeom prst="bentConnector3">
+            <a:avLst/>
+          </a:prstGeom>
+          <a:ln>
+            <a:tailEnd type="triangle"/>
+          </a:ln>
+        </p:spPr>
+        <p:style>
+          <a:lnRef idx="1">
+            <a:schemeClr val="dk1"/>
+          </a:lnRef>
+          <a:fillRef idx="0">
+            <a:schemeClr val="dk1"/>
+          </a:fillRef>
+          <a:effectRef idx="0">
+            <a:schemeClr val="dk1"/>
+          </a:effectRef>
+          <a:fontRef idx="minor">
+            <a:schemeClr val="tx1"/>
+          </a:fontRef>
+        </p:style>
+      </p:cxnSp>
+      <p:cxnSp>
+        <p:nvCxnSpPr>
+          <p:cNvPr id="48" name="직선 화살표 연결선 47">
+            <a:extLst>
+              <a:ext uri="{FF2B5EF4-FFF2-40B4-BE49-F238E27FC236}">
+                <a16:creationId xmlns:a16="http://schemas.microsoft.com/office/drawing/2014/main" id="{058009D7-3C40-43FA-4174-A0A431359E9F}"/>
+              </a:ext>
+            </a:extLst>
+          </p:cNvPr>
+          <p:cNvCxnSpPr>
+            <a:stCxn id="41" idx="3"/>
+            <a:endCxn id="34" idx="1"/>
+          </p:cNvCxnSpPr>
+          <p:nvPr/>
+        </p:nvCxnSpPr>
+        <p:spPr>
+          <a:xfrm>
+            <a:off x="3750453" y="1776732"/>
+            <a:ext cx="256300" cy="3865"/>
+          </a:xfrm>
+          <a:prstGeom prst="straightConnector1">
+            <a:avLst/>
+          </a:prstGeom>
+          <a:ln>
+            <a:tailEnd type="triangle"/>
+          </a:ln>
+        </p:spPr>
+        <p:style>
+          <a:lnRef idx="1">
+            <a:schemeClr val="dk1"/>
+          </a:lnRef>
+          <a:fillRef idx="0">
+            <a:schemeClr val="dk1"/>
+          </a:fillRef>
+          <a:effectRef idx="0">
+            <a:schemeClr val="dk1"/>
+          </a:effectRef>
+          <a:fontRef idx="minor">
+            <a:schemeClr val="tx1"/>
+          </a:fontRef>
+        </p:style>
+      </p:cxnSp>
+      <p:cxnSp>
+        <p:nvCxnSpPr>
+          <p:cNvPr id="51" name="직선 화살표 연결선 50">
+            <a:extLst>
+              <a:ext uri="{FF2B5EF4-FFF2-40B4-BE49-F238E27FC236}">
+                <a16:creationId xmlns:a16="http://schemas.microsoft.com/office/drawing/2014/main" id="{0CDF2A4A-1320-9CAD-49E4-D7E7DB06C690}"/>
+              </a:ext>
+            </a:extLst>
+          </p:cNvPr>
+          <p:cNvCxnSpPr>
+            <a:stCxn id="19" idx="3"/>
+            <a:endCxn id="33" idx="1"/>
+          </p:cNvCxnSpPr>
+          <p:nvPr/>
+        </p:nvCxnSpPr>
+        <p:spPr>
+          <a:xfrm flipV="1">
+            <a:off x="3759098" y="2718233"/>
+            <a:ext cx="262511" cy="18649"/>
+          </a:xfrm>
+          <a:prstGeom prst="straightConnector1">
+            <a:avLst/>
+          </a:prstGeom>
+          <a:ln>
+            <a:tailEnd type="triangle"/>
+          </a:ln>
+        </p:spPr>
+        <p:style>
+          <a:lnRef idx="1">
+            <a:schemeClr val="dk1"/>
+          </a:lnRef>
+          <a:fillRef idx="0">
+            <a:schemeClr val="dk1"/>
+          </a:fillRef>
+          <a:effectRef idx="0">
+            <a:schemeClr val="dk1"/>
+          </a:effectRef>
+          <a:fontRef idx="minor">
+            <a:schemeClr val="tx1"/>
+          </a:fontRef>
+        </p:style>
+      </p:cxnSp>
+      <p:cxnSp>
+        <p:nvCxnSpPr>
+          <p:cNvPr id="57" name="직선 화살표 연결선 56">
+            <a:extLst>
+              <a:ext uri="{FF2B5EF4-FFF2-40B4-BE49-F238E27FC236}">
+                <a16:creationId xmlns:a16="http://schemas.microsoft.com/office/drawing/2014/main" id="{5367551C-CA87-EDBC-3B1D-42835E062936}"/>
+              </a:ext>
+            </a:extLst>
+          </p:cNvPr>
+          <p:cNvCxnSpPr>
+            <a:stCxn id="42" idx="3"/>
+            <a:endCxn id="35" idx="1"/>
+          </p:cNvCxnSpPr>
+          <p:nvPr/>
+        </p:nvCxnSpPr>
+        <p:spPr>
+          <a:xfrm>
+            <a:off x="3740770" y="3733239"/>
+            <a:ext cx="280838" cy="8875"/>
+          </a:xfrm>
+          <a:prstGeom prst="straightConnector1">
+            <a:avLst/>
+          </a:prstGeom>
+          <a:ln>
+            <a:tailEnd type="triangle"/>
+          </a:ln>
+        </p:spPr>
+        <p:style>
+          <a:lnRef idx="1">
+            <a:schemeClr val="dk1"/>
+          </a:lnRef>
+          <a:fillRef idx="0">
+            <a:schemeClr val="dk1"/>
+          </a:fillRef>
+          <a:effectRef idx="0">
+            <a:schemeClr val="dk1"/>
+          </a:effectRef>
+          <a:fontRef idx="minor">
+            <a:schemeClr val="tx1"/>
+          </a:fontRef>
+        </p:style>
+      </p:cxnSp>
+      <p:cxnSp>
+        <p:nvCxnSpPr>
+          <p:cNvPr id="60" name="직선 화살표 연결선 59">
+            <a:extLst>
+              <a:ext uri="{FF2B5EF4-FFF2-40B4-BE49-F238E27FC236}">
+                <a16:creationId xmlns:a16="http://schemas.microsoft.com/office/drawing/2014/main" id="{20A6347A-0DD4-833A-D207-DAEBFB83AFC4}"/>
+              </a:ext>
+            </a:extLst>
+          </p:cNvPr>
+          <p:cNvCxnSpPr>
+            <a:stCxn id="43" idx="3"/>
+            <a:endCxn id="36" idx="1"/>
+          </p:cNvCxnSpPr>
+          <p:nvPr/>
+        </p:nvCxnSpPr>
+        <p:spPr>
+          <a:xfrm>
+            <a:off x="3746202" y="4762182"/>
+            <a:ext cx="368364" cy="0"/>
+          </a:xfrm>
+          <a:prstGeom prst="straightConnector1">
+            <a:avLst/>
+          </a:prstGeom>
+          <a:ln>
+            <a:tailEnd type="triangle"/>
+          </a:ln>
+        </p:spPr>
+        <p:style>
+          <a:lnRef idx="1">
+            <a:schemeClr val="dk1"/>
+          </a:lnRef>
+          <a:fillRef idx="0">
+            <a:schemeClr val="dk1"/>
+          </a:fillRef>
+          <a:effectRef idx="0">
+            <a:schemeClr val="dk1"/>
+          </a:effectRef>
+          <a:fontRef idx="minor">
+            <a:schemeClr val="tx1"/>
+          </a:fontRef>
+        </p:style>
+      </p:cxnSp>
+      <p:cxnSp>
+        <p:nvCxnSpPr>
+          <p:cNvPr id="63" name="직선 화살표 연결선 62">
+            <a:extLst>
+              <a:ext uri="{FF2B5EF4-FFF2-40B4-BE49-F238E27FC236}">
+                <a16:creationId xmlns:a16="http://schemas.microsoft.com/office/drawing/2014/main" id="{17087294-FB21-0FC6-3BCC-BFDF00D304C9}"/>
+              </a:ext>
+            </a:extLst>
+          </p:cNvPr>
+          <p:cNvCxnSpPr>
+            <a:stCxn id="36" idx="3"/>
+            <a:endCxn id="40" idx="1"/>
+          </p:cNvCxnSpPr>
+          <p:nvPr/>
+        </p:nvCxnSpPr>
+        <p:spPr>
+          <a:xfrm>
+            <a:off x="5227213" y="4762182"/>
+            <a:ext cx="319455" cy="0"/>
+          </a:xfrm>
+          <a:prstGeom prst="straightConnector1">
+            <a:avLst/>
+          </a:prstGeom>
+          <a:ln>
+            <a:tailEnd type="triangle"/>
+          </a:ln>
+        </p:spPr>
+        <p:style>
+          <a:lnRef idx="1">
+            <a:schemeClr val="dk1"/>
+          </a:lnRef>
+          <a:fillRef idx="0">
+            <a:schemeClr val="dk1"/>
+          </a:fillRef>
+          <a:effectRef idx="0">
+            <a:schemeClr val="dk1"/>
+          </a:effectRef>
+          <a:fontRef idx="minor">
+            <a:schemeClr val="tx1"/>
+          </a:fontRef>
+        </p:style>
+      </p:cxnSp>
+      <p:cxnSp>
+        <p:nvCxnSpPr>
+          <p:cNvPr id="67" name="직선 화살표 연결선 66">
+            <a:extLst>
+              <a:ext uri="{FF2B5EF4-FFF2-40B4-BE49-F238E27FC236}">
+                <a16:creationId xmlns:a16="http://schemas.microsoft.com/office/drawing/2014/main" id="{083F9719-9856-E098-D1B5-9C13C791E49F}"/>
+              </a:ext>
+            </a:extLst>
+          </p:cNvPr>
+          <p:cNvCxnSpPr>
+            <a:stCxn id="40" idx="3"/>
+            <a:endCxn id="5" idx="1"/>
+          </p:cNvCxnSpPr>
+          <p:nvPr/>
+        </p:nvCxnSpPr>
+        <p:spPr>
+          <a:xfrm>
+            <a:off x="7375622" y="4762182"/>
+            <a:ext cx="394372" cy="0"/>
+          </a:xfrm>
+          <a:prstGeom prst="straightConnector1">
+            <a:avLst/>
+          </a:prstGeom>
+          <a:ln>
+            <a:tailEnd type="triangle"/>
+          </a:ln>
+        </p:spPr>
+        <p:style>
+          <a:lnRef idx="1">
+            <a:schemeClr val="dk1"/>
+          </a:lnRef>
+          <a:fillRef idx="0">
+            <a:schemeClr val="dk1"/>
+          </a:fillRef>
+          <a:effectRef idx="0">
+            <a:schemeClr val="dk1"/>
+          </a:effectRef>
+          <a:fontRef idx="minor">
+            <a:schemeClr val="tx1"/>
+          </a:fontRef>
+        </p:style>
+      </p:cxnSp>
+      <p:cxnSp>
+        <p:nvCxnSpPr>
+          <p:cNvPr id="69" name="직선 화살표 연결선 68">
+            <a:extLst>
+              <a:ext uri="{FF2B5EF4-FFF2-40B4-BE49-F238E27FC236}">
+                <a16:creationId xmlns:a16="http://schemas.microsoft.com/office/drawing/2014/main" id="{4FA4FF29-3ED1-3919-9CDE-B5109C150A51}"/>
+              </a:ext>
+            </a:extLst>
+          </p:cNvPr>
+          <p:cNvCxnSpPr>
+            <a:stCxn id="5" idx="3"/>
+            <a:endCxn id="6" idx="1"/>
+          </p:cNvCxnSpPr>
+          <p:nvPr/>
+        </p:nvCxnSpPr>
+        <p:spPr>
+          <a:xfrm flipV="1">
+            <a:off x="8882641" y="4754103"/>
+            <a:ext cx="423870" cy="8079"/>
+          </a:xfrm>
+          <a:prstGeom prst="straightConnector1">
+            <a:avLst/>
+          </a:prstGeom>
+          <a:ln>
+            <a:tailEnd type="triangle"/>
+          </a:ln>
+        </p:spPr>
+        <p:style>
+          <a:lnRef idx="1">
+            <a:schemeClr val="dk1"/>
+          </a:lnRef>
+          <a:fillRef idx="0">
+            <a:schemeClr val="dk1"/>
+          </a:fillRef>
+          <a:effectRef idx="0">
+            <a:schemeClr val="dk1"/>
+          </a:effectRef>
+          <a:fontRef idx="minor">
+            <a:schemeClr val="tx1"/>
+          </a:fontRef>
+        </p:style>
+      </p:cxnSp>
+      <p:cxnSp>
+        <p:nvCxnSpPr>
+          <p:cNvPr id="73" name="직선 화살표 연결선 72">
+            <a:extLst>
+              <a:ext uri="{FF2B5EF4-FFF2-40B4-BE49-F238E27FC236}">
+                <a16:creationId xmlns:a16="http://schemas.microsoft.com/office/drawing/2014/main" id="{E2086EF3-2850-CE8D-1237-707783AE664D}"/>
+              </a:ext>
+            </a:extLst>
+          </p:cNvPr>
+          <p:cNvCxnSpPr>
+            <a:stCxn id="45" idx="1"/>
+            <a:endCxn id="12" idx="2"/>
+          </p:cNvCxnSpPr>
+          <p:nvPr/>
+        </p:nvCxnSpPr>
+        <p:spPr>
+          <a:xfrm flipH="1" flipV="1">
+            <a:off x="11436102" y="2645571"/>
+            <a:ext cx="17406" cy="602366"/>
+          </a:xfrm>
+          <a:prstGeom prst="straightConnector1">
+            <a:avLst/>
+          </a:prstGeom>
+          <a:ln>
+            <a:tailEnd type="triangle"/>
+          </a:ln>
+        </p:spPr>
+        <p:style>
+          <a:lnRef idx="1">
+            <a:schemeClr val="dk1"/>
+          </a:lnRef>
+          <a:fillRef idx="0">
+            <a:schemeClr val="dk1"/>
+          </a:fillRef>
+          <a:effectRef idx="0">
+            <a:schemeClr val="dk1"/>
+          </a:effectRef>
+          <a:fontRef idx="minor">
+            <a:schemeClr val="tx1"/>
+          </a:fontRef>
+        </p:style>
+      </p:cxnSp>
+      <p:cxnSp>
+        <p:nvCxnSpPr>
+          <p:cNvPr id="76" name="직선 화살표 연결선 75">
+            <a:extLst>
+              <a:ext uri="{FF2B5EF4-FFF2-40B4-BE49-F238E27FC236}">
+                <a16:creationId xmlns:a16="http://schemas.microsoft.com/office/drawing/2014/main" id="{02D306A6-0C2A-1839-DEB2-A0B91BBEB21B}"/>
+              </a:ext>
+            </a:extLst>
+          </p:cNvPr>
+          <p:cNvCxnSpPr>
+            <a:stCxn id="6" idx="2"/>
+            <a:endCxn id="8" idx="0"/>
+          </p:cNvCxnSpPr>
+          <p:nvPr/>
+        </p:nvCxnSpPr>
+        <p:spPr>
+          <a:xfrm>
+            <a:off x="10220988" y="5188932"/>
+            <a:ext cx="0" cy="999774"/>
+          </a:xfrm>
+          <a:prstGeom prst="straightConnector1">
+            <a:avLst/>
+          </a:prstGeom>
+          <a:ln>
+            <a:tailEnd type="triangle"/>
+          </a:ln>
+        </p:spPr>
+        <p:style>
+          <a:lnRef idx="1">
+            <a:schemeClr val="dk1"/>
+          </a:lnRef>
+          <a:fillRef idx="0">
+            <a:schemeClr val="dk1"/>
+          </a:fillRef>
+          <a:effectRef idx="0">
+            <a:schemeClr val="dk1"/>
+          </a:effectRef>
+          <a:fontRef idx="minor">
+            <a:schemeClr val="tx1"/>
+          </a:fontRef>
+        </p:style>
+      </p:cxnSp>
+      <p:cxnSp>
+        <p:nvCxnSpPr>
+          <p:cNvPr id="83" name="연결선: 꺾임 82">
+            <a:extLst>
+              <a:ext uri="{FF2B5EF4-FFF2-40B4-BE49-F238E27FC236}">
+                <a16:creationId xmlns:a16="http://schemas.microsoft.com/office/drawing/2014/main" id="{87FF62AC-32EA-36DD-28D6-5B89D1F89BCB}"/>
+              </a:ext>
+            </a:extLst>
+          </p:cNvPr>
+          <p:cNvCxnSpPr>
+            <a:cxnSpLocks/>
+            <a:stCxn id="8" idx="1"/>
+            <a:endCxn id="18" idx="2"/>
+          </p:cNvCxnSpPr>
+          <p:nvPr/>
+        </p:nvCxnSpPr>
+        <p:spPr>
+          <a:xfrm rot="10800000">
+            <a:off x="1444990" y="3974467"/>
+            <a:ext cx="8219674" cy="2428930"/>
+          </a:xfrm>
+          <a:prstGeom prst="bentConnector2">
+            <a:avLst/>
+          </a:prstGeom>
+          <a:ln>
+            <a:tailEnd type="triangle"/>
+          </a:ln>
+        </p:spPr>
+        <p:style>
+          <a:lnRef idx="1">
+            <a:schemeClr val="dk1"/>
+          </a:lnRef>
+          <a:fillRef idx="0">
+            <a:schemeClr val="dk1"/>
+          </a:fillRef>
+          <a:effectRef idx="0">
+            <a:schemeClr val="dk1"/>
+          </a:effectRef>
+          <a:fontRef idx="minor">
+            <a:schemeClr val="tx1"/>
+          </a:fontRef>
+        </p:style>
+      </p:cxnSp>
+      <p:cxnSp>
+        <p:nvCxnSpPr>
+          <p:cNvPr id="108" name="연결선: 꺾임 107">
+            <a:extLst>
+              <a:ext uri="{FF2B5EF4-FFF2-40B4-BE49-F238E27FC236}">
+                <a16:creationId xmlns:a16="http://schemas.microsoft.com/office/drawing/2014/main" id="{AB5F9B42-F710-9942-552A-0C2660BFA682}"/>
+              </a:ext>
+            </a:extLst>
+          </p:cNvPr>
+          <p:cNvCxnSpPr>
+            <a:stCxn id="44" idx="3"/>
+            <a:endCxn id="45" idx="4"/>
+          </p:cNvCxnSpPr>
+          <p:nvPr/>
+        </p:nvCxnSpPr>
+        <p:spPr>
+          <a:xfrm flipV="1">
+            <a:off x="3759098" y="3824001"/>
+            <a:ext cx="7622402" cy="2003332"/>
+          </a:xfrm>
+          <a:prstGeom prst="bentConnector2">
+            <a:avLst/>
+          </a:prstGeom>
+          <a:ln>
+            <a:tailEnd type="triangle"/>
+          </a:ln>
+        </p:spPr>
+        <p:style>
+          <a:lnRef idx="1">
+            <a:schemeClr val="dk1"/>
+          </a:lnRef>
+          <a:fillRef idx="0">
+            <a:schemeClr val="dk1"/>
+          </a:fillRef>
+          <a:effectRef idx="0">
+            <a:schemeClr val="dk1"/>
+          </a:effectRef>
+          <a:fontRef idx="minor">
+            <a:schemeClr val="tx1"/>
+          </a:fontRef>
+        </p:style>
+      </p:cxnSp>
+      <p:cxnSp>
+        <p:nvCxnSpPr>
+          <p:cNvPr id="113" name="연결선: 꺾임 112">
+            <a:extLst>
+              <a:ext uri="{FF2B5EF4-FFF2-40B4-BE49-F238E27FC236}">
+                <a16:creationId xmlns:a16="http://schemas.microsoft.com/office/drawing/2014/main" id="{C830A1A1-D9C8-1C6C-FB4C-F2A5D94160B7}"/>
+              </a:ext>
+            </a:extLst>
+          </p:cNvPr>
+          <p:cNvCxnSpPr>
+            <a:stCxn id="6" idx="0"/>
+            <a:endCxn id="45" idx="5"/>
+          </p:cNvCxnSpPr>
+          <p:nvPr/>
+        </p:nvCxnSpPr>
+        <p:spPr>
+          <a:xfrm rot="5400000" flipH="1" flipV="1">
+            <a:off x="10130561" y="3626397"/>
+            <a:ext cx="783305" cy="602450"/>
+          </a:xfrm>
+          <a:prstGeom prst="bentConnector2">
+            <a:avLst/>
+          </a:prstGeom>
+          <a:ln>
+            <a:tailEnd type="triangle"/>
+          </a:ln>
+        </p:spPr>
+        <p:style>
+          <a:lnRef idx="1">
+            <a:schemeClr val="dk1"/>
+          </a:lnRef>
+          <a:fillRef idx="0">
+            <a:schemeClr val="dk1"/>
+          </a:fillRef>
+          <a:effectRef idx="0">
+            <a:schemeClr val="dk1"/>
+          </a:effectRef>
+          <a:fontRef idx="minor">
+            <a:schemeClr val="tx1"/>
+          </a:fontRef>
+        </p:style>
+      </p:cxnSp>
     </p:spTree>
     <p:extLst>
       <p:ext uri="{BB962C8B-B14F-4D97-AF65-F5344CB8AC3E}">
@@ -19062,6 +22454,1718 @@
 </file>
 
 <file path=ppt/slides/slide6.xml><?xml version="1.0" encoding="utf-8"?>
+<p:sld xmlns:a="http://schemas.openxmlformats.org/drawingml/2006/main" xmlns:r="http://schemas.openxmlformats.org/officeDocument/2006/relationships" xmlns:p="http://schemas.openxmlformats.org/presentationml/2006/main">
+  <p:cSld>
+    <p:spTree>
+      <p:nvGrpSpPr>
+        <p:cNvPr id="1" name=""/>
+        <p:cNvGrpSpPr/>
+        <p:nvPr/>
+      </p:nvGrpSpPr>
+      <p:grpSpPr>
+        <a:xfrm>
+          <a:off x="0" y="0"/>
+          <a:ext cx="0" cy="0"/>
+          <a:chOff x="0" y="0"/>
+          <a:chExt cx="0" cy="0"/>
+        </a:xfrm>
+      </p:grpSpPr>
+      <p:sp>
+        <p:nvSpPr>
+          <p:cNvPr id="39" name="사각형: 둥근 한쪽 모서리 38">
+            <a:extLst>
+              <a:ext uri="{FF2B5EF4-FFF2-40B4-BE49-F238E27FC236}">
+                <a16:creationId xmlns:a16="http://schemas.microsoft.com/office/drawing/2014/main" id="{5EADE06A-9DBC-11A8-5DF5-38CF63ECD050}"/>
+              </a:ext>
+            </a:extLst>
+          </p:cNvPr>
+          <p:cNvSpPr/>
+          <p:nvPr/>
+        </p:nvSpPr>
+        <p:spPr>
+          <a:xfrm flipH="1" flipV="1">
+            <a:off x="174169" y="70718"/>
+            <a:ext cx="12017829" cy="923257"/>
+          </a:xfrm>
+          <a:prstGeom prst="round1Rect">
+            <a:avLst>
+              <a:gd name="adj" fmla="val 23799"/>
+            </a:avLst>
+          </a:prstGeom>
+          <a:solidFill>
+            <a:schemeClr val="bg1">
+              <a:lumMod val="95000"/>
+              <a:alpha val="50000"/>
+            </a:schemeClr>
+          </a:solidFill>
+          <a:ln w="10818" cap="flat">
+            <a:noFill/>
+            <a:prstDash val="solid"/>
+            <a:miter/>
+          </a:ln>
+        </p:spPr>
+        <p:style>
+          <a:lnRef idx="2">
+            <a:schemeClr val="accent1">
+              <a:shade val="15000"/>
+            </a:schemeClr>
+          </a:lnRef>
+          <a:fillRef idx="1">
+            <a:schemeClr val="accent1"/>
+          </a:fillRef>
+          <a:effectRef idx="0">
+            <a:schemeClr val="accent1"/>
+          </a:effectRef>
+          <a:fontRef idx="minor">
+            <a:schemeClr val="lt1"/>
+          </a:fontRef>
+        </p:style>
+        <p:txBody>
+          <a:bodyPr rtlCol="0" anchor="ctr"/>
+          <a:lstStyle/>
+          <a:p>
+            <a:pPr algn="ctr"/>
+            <a:endParaRPr lang="ko-KR" altLang="en-US"/>
+          </a:p>
+        </p:txBody>
+      </p:sp>
+      <p:grpSp>
+        <p:nvGrpSpPr>
+          <p:cNvPr id="3" name="그룹 2">
+            <a:extLst>
+              <a:ext uri="{FF2B5EF4-FFF2-40B4-BE49-F238E27FC236}">
+                <a16:creationId xmlns:a16="http://schemas.microsoft.com/office/drawing/2014/main" id="{83D39D92-E66A-0690-755F-95170021E213}"/>
+              </a:ext>
+            </a:extLst>
+          </p:cNvPr>
+          <p:cNvGrpSpPr/>
+          <p:nvPr/>
+        </p:nvGrpSpPr>
+        <p:grpSpPr>
+          <a:xfrm>
+            <a:off x="371364" y="206484"/>
+            <a:ext cx="6336704" cy="787491"/>
+            <a:chOff x="376102" y="333243"/>
+            <a:chExt cx="6231760" cy="830997"/>
+          </a:xfrm>
+        </p:grpSpPr>
+        <p:sp>
+          <p:nvSpPr>
+            <p:cNvPr id="27" name="TextBox 26">
+              <a:extLst>
+                <a:ext uri="{FF2B5EF4-FFF2-40B4-BE49-F238E27FC236}">
+                  <a16:creationId xmlns:a16="http://schemas.microsoft.com/office/drawing/2014/main" id="{B3B4124F-4D0D-30C0-E721-EE580D127CC8}"/>
+                </a:ext>
+              </a:extLst>
+            </p:cNvPr>
+            <p:cNvSpPr txBox="1"/>
+            <p:nvPr/>
+          </p:nvSpPr>
+          <p:spPr>
+            <a:xfrm>
+              <a:off x="1461721" y="366114"/>
+              <a:ext cx="2252213" cy="276999"/>
+            </a:xfrm>
+            <a:prstGeom prst="rect">
+              <a:avLst/>
+            </a:prstGeom>
+            <a:noFill/>
+          </p:spPr>
+          <p:txBody>
+            <a:bodyPr wrap="square">
+              <a:spAutoFit/>
+            </a:bodyPr>
+            <a:lstStyle/>
+            <a:p>
+              <a:r>
+                <a:rPr lang="en-US" altLang="ko-KR" sz="1200" b="1" dirty="0">
+                  <a:ln>
+                    <a:solidFill>
+                      <a:schemeClr val="accent1">
+                        <a:shade val="15000"/>
+                        <a:alpha val="0"/>
+                      </a:schemeClr>
+                    </a:solidFill>
+                  </a:ln>
+                  <a:solidFill>
+                    <a:srgbClr val="3378C8">
+                      <a:alpha val="50000"/>
+                    </a:srgbClr>
+                  </a:solidFill>
+                  <a:latin typeface="맑은 고딕" panose="020B0503020000020004" pitchFamily="50" charset="-127"/>
+                  <a:ea typeface="맑은 고딕" panose="020B0503020000020004" pitchFamily="50" charset="-127"/>
+                </a:rPr>
+                <a:t>K-Digital Training</a:t>
+              </a:r>
+              <a:endParaRPr lang="ko-KR" altLang="en-US" sz="1200" b="1" dirty="0">
+                <a:ln>
+                  <a:solidFill>
+                    <a:schemeClr val="accent1">
+                      <a:shade val="15000"/>
+                      <a:alpha val="0"/>
+                    </a:schemeClr>
+                  </a:solidFill>
+                </a:ln>
+                <a:solidFill>
+                  <a:srgbClr val="3378C8">
+                    <a:alpha val="50000"/>
+                  </a:srgbClr>
+                </a:solidFill>
+                <a:latin typeface="맑은 고딕" panose="020B0503020000020004" pitchFamily="50" charset="-127"/>
+                <a:ea typeface="맑은 고딕" panose="020B0503020000020004" pitchFamily="50" charset="-127"/>
+              </a:endParaRPr>
+            </a:p>
+          </p:txBody>
+        </p:sp>
+        <p:sp>
+          <p:nvSpPr>
+            <p:cNvPr id="11" name="TextBox 10">
+              <a:extLst>
+                <a:ext uri="{FF2B5EF4-FFF2-40B4-BE49-F238E27FC236}">
+                  <a16:creationId xmlns:a16="http://schemas.microsoft.com/office/drawing/2014/main" id="{6C8DE4B1-0C6D-133C-80D8-F6968CBF60AC}"/>
+                </a:ext>
+              </a:extLst>
+            </p:cNvPr>
+            <p:cNvSpPr txBox="1"/>
+            <p:nvPr/>
+          </p:nvSpPr>
+          <p:spPr>
+            <a:xfrm>
+              <a:off x="1461721" y="585057"/>
+              <a:ext cx="5146141" cy="552126"/>
+            </a:xfrm>
+            <a:prstGeom prst="rect">
+              <a:avLst/>
+            </a:prstGeom>
+            <a:noFill/>
+          </p:spPr>
+          <p:txBody>
+            <a:bodyPr wrap="square">
+              <a:spAutoFit/>
+            </a:bodyPr>
+            <a:lstStyle/>
+            <a:p>
+              <a:pPr>
+                <a:defRPr/>
+              </a:pPr>
+              <a:r>
+                <a:rPr lang="ko-KR" altLang="en-US" sz="2800" b="1" dirty="0">
+                  <a:ln>
+                    <a:solidFill>
+                      <a:schemeClr val="accent1">
+                        <a:shade val="15000"/>
+                        <a:alpha val="0"/>
+                      </a:schemeClr>
+                    </a:solidFill>
+                  </a:ln>
+                  <a:solidFill>
+                    <a:schemeClr val="tx1">
+                      <a:lumMod val="75000"/>
+                      <a:lumOff val="25000"/>
+                    </a:schemeClr>
+                  </a:solidFill>
+                  <a:latin typeface="맑은 고딕" panose="020B0503020000020004" pitchFamily="50" charset="-127"/>
+                  <a:ea typeface="맑은 고딕" panose="020B0503020000020004" pitchFamily="50" charset="-127"/>
+                </a:rPr>
+                <a:t>점수 로직 순서도</a:t>
+              </a:r>
+              <a:r>
+                <a:rPr lang="en-US" altLang="ko-KR" sz="2800" b="1" dirty="0">
+                  <a:ln>
+                    <a:solidFill>
+                      <a:schemeClr val="accent1">
+                        <a:shade val="15000"/>
+                        <a:alpha val="0"/>
+                      </a:schemeClr>
+                    </a:solidFill>
+                  </a:ln>
+                  <a:solidFill>
+                    <a:schemeClr val="tx1">
+                      <a:lumMod val="75000"/>
+                      <a:lumOff val="25000"/>
+                    </a:schemeClr>
+                  </a:solidFill>
+                  <a:latin typeface="맑은 고딕" panose="020B0503020000020004" pitchFamily="50" charset="-127"/>
+                  <a:ea typeface="맑은 고딕" panose="020B0503020000020004" pitchFamily="50" charset="-127"/>
+                </a:rPr>
+                <a:t>(</a:t>
+              </a:r>
+              <a:r>
+                <a:rPr lang="ko-KR" altLang="en-US" sz="2800" b="1" dirty="0">
+                  <a:ln>
+                    <a:solidFill>
+                      <a:schemeClr val="accent1">
+                        <a:shade val="15000"/>
+                        <a:alpha val="0"/>
+                      </a:schemeClr>
+                    </a:solidFill>
+                  </a:ln>
+                  <a:solidFill>
+                    <a:schemeClr val="tx1">
+                      <a:lumMod val="75000"/>
+                      <a:lumOff val="25000"/>
+                    </a:schemeClr>
+                  </a:solidFill>
+                  <a:latin typeface="맑은 고딕" panose="020B0503020000020004" pitchFamily="50" charset="-127"/>
+                  <a:ea typeface="맑은 고딕" panose="020B0503020000020004" pitchFamily="50" charset="-127"/>
+                </a:rPr>
+                <a:t>삭제해주세요</a:t>
+              </a:r>
+              <a:r>
+                <a:rPr lang="en-US" altLang="ko-KR" sz="2800" b="1" dirty="0">
+                  <a:ln>
+                    <a:solidFill>
+                      <a:schemeClr val="accent1">
+                        <a:shade val="15000"/>
+                        <a:alpha val="0"/>
+                      </a:schemeClr>
+                    </a:solidFill>
+                  </a:ln>
+                  <a:solidFill>
+                    <a:schemeClr val="tx1">
+                      <a:lumMod val="75000"/>
+                      <a:lumOff val="25000"/>
+                    </a:schemeClr>
+                  </a:solidFill>
+                  <a:latin typeface="맑은 고딕" panose="020B0503020000020004" pitchFamily="50" charset="-127"/>
+                  <a:ea typeface="맑은 고딕" panose="020B0503020000020004" pitchFamily="50" charset="-127"/>
+                </a:rPr>
+                <a:t>)</a:t>
+              </a:r>
+              <a:endParaRPr lang="ko-KR" altLang="en-US" sz="2800" b="1" dirty="0">
+                <a:ln>
+                  <a:solidFill>
+                    <a:schemeClr val="accent1">
+                      <a:shade val="15000"/>
+                      <a:alpha val="0"/>
+                    </a:schemeClr>
+                  </a:solidFill>
+                </a:ln>
+                <a:solidFill>
+                  <a:schemeClr val="tx1">
+                    <a:lumMod val="75000"/>
+                    <a:lumOff val="25000"/>
+                  </a:schemeClr>
+                </a:solidFill>
+                <a:latin typeface="맑은 고딕" panose="020B0503020000020004" pitchFamily="50" charset="-127"/>
+                <a:ea typeface="맑은 고딕" panose="020B0503020000020004" pitchFamily="50" charset="-127"/>
+              </a:endParaRPr>
+            </a:p>
+          </p:txBody>
+        </p:sp>
+        <p:sp>
+          <p:nvSpPr>
+            <p:cNvPr id="13" name="TextBox 12">
+              <a:extLst>
+                <a:ext uri="{FF2B5EF4-FFF2-40B4-BE49-F238E27FC236}">
+                  <a16:creationId xmlns:a16="http://schemas.microsoft.com/office/drawing/2014/main" id="{E0E94AA3-A994-6AB2-870F-88DA16811E4D}"/>
+                </a:ext>
+              </a:extLst>
+            </p:cNvPr>
+            <p:cNvSpPr txBox="1"/>
+            <p:nvPr/>
+          </p:nvSpPr>
+          <p:spPr>
+            <a:xfrm>
+              <a:off x="376102" y="333243"/>
+              <a:ext cx="1266679" cy="830997"/>
+            </a:xfrm>
+            <a:prstGeom prst="rect">
+              <a:avLst/>
+            </a:prstGeom>
+            <a:noFill/>
+          </p:spPr>
+          <p:txBody>
+            <a:bodyPr wrap="square" tIns="0" bIns="0">
+              <a:spAutoFit/>
+            </a:bodyPr>
+            <a:lstStyle/>
+            <a:p>
+              <a:pPr eaLnBrk="1" fontAlgn="auto" latinLnBrk="1" hangingPunct="1">
+                <a:spcBef>
+                  <a:spcPts val="0"/>
+                </a:spcBef>
+                <a:spcAft>
+                  <a:spcPts val="0"/>
+                </a:spcAft>
+                <a:defRPr/>
+              </a:pPr>
+              <a:r>
+                <a:rPr lang="en-US" altLang="ko-KR" sz="5400" dirty="0">
+                  <a:ln>
+                    <a:solidFill>
+                      <a:schemeClr val="accent1">
+                        <a:shade val="15000"/>
+                        <a:alpha val="0"/>
+                      </a:schemeClr>
+                    </a:solidFill>
+                  </a:ln>
+                  <a:solidFill>
+                    <a:srgbClr val="3378C8"/>
+                  </a:solidFill>
+                  <a:latin typeface="세방고딕 Bold" panose="00000800000000000000" pitchFamily="2" charset="-127"/>
+                  <a:ea typeface="세방고딕 Bold" panose="00000800000000000000" pitchFamily="2" charset="-127"/>
+                </a:rPr>
+                <a:t>02</a:t>
+              </a:r>
+              <a:endParaRPr lang="ko-KR" altLang="en-US" sz="4400" b="1" dirty="0">
+                <a:ln>
+                  <a:solidFill>
+                    <a:schemeClr val="accent1">
+                      <a:shade val="15000"/>
+                      <a:alpha val="0"/>
+                    </a:schemeClr>
+                  </a:solidFill>
+                </a:ln>
+                <a:solidFill>
+                  <a:srgbClr val="3378C8"/>
+                </a:solidFill>
+                <a:latin typeface="세방고딕 Regular" panose="00000500000000000000" pitchFamily="2" charset="-127"/>
+                <a:ea typeface="세방고딕 Regular" panose="00000500000000000000" pitchFamily="2" charset="-127"/>
+              </a:endParaRPr>
+            </a:p>
+          </p:txBody>
+        </p:sp>
+      </p:grpSp>
+      <p:sp>
+        <p:nvSpPr>
+          <p:cNvPr id="2" name="TextBox 1">
+            <a:extLst>
+              <a:ext uri="{FF2B5EF4-FFF2-40B4-BE49-F238E27FC236}">
+                <a16:creationId xmlns:a16="http://schemas.microsoft.com/office/drawing/2014/main" id="{D2C2358E-3B03-27B5-CA0C-4BF0B1CDFADB}"/>
+              </a:ext>
+            </a:extLst>
+          </p:cNvPr>
+          <p:cNvSpPr txBox="1"/>
+          <p:nvPr/>
+        </p:nvSpPr>
+        <p:spPr>
+          <a:xfrm>
+            <a:off x="0" y="0"/>
+            <a:ext cx="12192000" cy="114300"/>
+          </a:xfrm>
+          <a:prstGeom prst="rect">
+            <a:avLst/>
+          </a:prstGeom>
+          <a:solidFill>
+            <a:srgbClr val="FFD85C"/>
+          </a:solidFill>
+          <a:effectLst/>
+        </p:spPr>
+        <p:txBody>
+          <a:bodyPr wrap="square" rtlCol="0" anchor="ctr">
+            <a:noAutofit/>
+          </a:bodyPr>
+          <a:lstStyle/>
+          <a:p>
+            <a:pPr algn="ctr"/>
+            <a:endParaRPr lang="ko-KR" altLang="en-US" sz="1600" b="1" spc="600" dirty="0">
+              <a:ln>
+                <a:solidFill>
+                  <a:schemeClr val="accent1">
+                    <a:shade val="15000"/>
+                    <a:alpha val="0"/>
+                  </a:schemeClr>
+                </a:solidFill>
+              </a:ln>
+              <a:solidFill>
+                <a:srgbClr val="3378C8"/>
+              </a:solidFill>
+              <a:latin typeface="세방고딕 Regular" panose="00000500000000000000" pitchFamily="2" charset="-127"/>
+              <a:ea typeface="세방고딕 Regular" panose="00000500000000000000" pitchFamily="2" charset="-127"/>
+            </a:endParaRPr>
+          </a:p>
+        </p:txBody>
+      </p:sp>
+      <p:sp>
+        <p:nvSpPr>
+          <p:cNvPr id="4" name="TextBox 3">
+            <a:extLst>
+              <a:ext uri="{FF2B5EF4-FFF2-40B4-BE49-F238E27FC236}">
+                <a16:creationId xmlns:a16="http://schemas.microsoft.com/office/drawing/2014/main" id="{487E27BB-6406-EC3A-3BF4-56C8615BDA14}"/>
+              </a:ext>
+            </a:extLst>
+          </p:cNvPr>
+          <p:cNvSpPr txBox="1"/>
+          <p:nvPr/>
+        </p:nvSpPr>
+        <p:spPr>
+          <a:xfrm>
+            <a:off x="0" y="0"/>
+            <a:ext cx="1336675" cy="114300"/>
+          </a:xfrm>
+          <a:prstGeom prst="rect">
+            <a:avLst/>
+          </a:prstGeom>
+          <a:solidFill>
+            <a:srgbClr val="3378C8"/>
+          </a:solidFill>
+          <a:effectLst/>
+        </p:spPr>
+        <p:txBody>
+          <a:bodyPr wrap="square" rtlCol="0" anchor="ctr">
+            <a:noAutofit/>
+          </a:bodyPr>
+          <a:lstStyle/>
+          <a:p>
+            <a:pPr algn="ctr"/>
+            <a:endParaRPr lang="ko-KR" altLang="en-US" sz="1600" b="1" spc="600" dirty="0">
+              <a:ln>
+                <a:solidFill>
+                  <a:schemeClr val="accent1">
+                    <a:shade val="15000"/>
+                    <a:alpha val="0"/>
+                  </a:schemeClr>
+                </a:solidFill>
+              </a:ln>
+              <a:solidFill>
+                <a:srgbClr val="3378C8"/>
+              </a:solidFill>
+              <a:latin typeface="세방고딕 Regular" panose="00000500000000000000" pitchFamily="2" charset="-127"/>
+              <a:ea typeface="세방고딕 Regular" panose="00000500000000000000" pitchFamily="2" charset="-127"/>
+            </a:endParaRPr>
+          </a:p>
+        </p:txBody>
+      </p:sp>
+      <p:pic>
+        <p:nvPicPr>
+          <p:cNvPr id="99" name="그래픽 98">
+            <a:extLst>
+              <a:ext uri="{FF2B5EF4-FFF2-40B4-BE49-F238E27FC236}">
+                <a16:creationId xmlns:a16="http://schemas.microsoft.com/office/drawing/2014/main" id="{5B63BFCA-250A-8794-3EEE-3E4B309735E8}"/>
+              </a:ext>
+            </a:extLst>
+          </p:cNvPr>
+          <p:cNvPicPr>
+            <a:picLocks noChangeAspect="1"/>
+          </p:cNvPicPr>
+          <p:nvPr/>
+        </p:nvPicPr>
+        <p:blipFill rotWithShape="1">
+          <a:blip r:embed="rId2">
+            <a:extLst>
+              <a:ext uri="{96DAC541-7B7A-43D3-8B79-37D633B846F1}">
+                <asvg:svgBlip xmlns:asvg="http://schemas.microsoft.com/office/drawing/2016/SVG/main" r:embed="rId3"/>
+              </a:ext>
+            </a:extLst>
+          </a:blip>
+          <a:srcRect l="34974"/>
+          <a:stretch/>
+        </p:blipFill>
+        <p:spPr>
+          <a:xfrm rot="14660350">
+            <a:off x="1714" y="5530566"/>
+            <a:ext cx="1452422" cy="917364"/>
+          </a:xfrm>
+          <a:prstGeom prst="rect">
+            <a:avLst/>
+          </a:prstGeom>
+        </p:spPr>
+      </p:pic>
+      <p:pic>
+        <p:nvPicPr>
+          <p:cNvPr id="52" name="그림 51">
+            <a:extLst>
+              <a:ext uri="{FF2B5EF4-FFF2-40B4-BE49-F238E27FC236}">
+                <a16:creationId xmlns:a16="http://schemas.microsoft.com/office/drawing/2014/main" id="{FE80A41B-F61E-4713-97AE-0B084B8425AD}"/>
+              </a:ext>
+            </a:extLst>
+          </p:cNvPr>
+          <p:cNvPicPr>
+            <a:picLocks noChangeAspect="1"/>
+          </p:cNvPicPr>
+          <p:nvPr/>
+        </p:nvPicPr>
+        <p:blipFill rotWithShape="1">
+          <a:blip r:embed="rId4" cstate="print">
+            <a:duotone>
+              <a:schemeClr val="accent5">
+                <a:shade val="45000"/>
+                <a:satMod val="135000"/>
+              </a:schemeClr>
+              <a:prstClr val="white"/>
+            </a:duotone>
+            <a:alphaModFix amt="27000"/>
+            <a:extLst>
+              <a:ext uri="{28A0092B-C50C-407E-A947-70E740481C1C}">
+                <a14:useLocalDpi xmlns:a14="http://schemas.microsoft.com/office/drawing/2010/main"/>
+              </a:ext>
+            </a:extLst>
+          </a:blip>
+          <a:srcRect/>
+          <a:stretch/>
+        </p:blipFill>
+        <p:spPr>
+          <a:xfrm rot="10800000" flipV="1">
+            <a:off x="87083" y="1208000"/>
+            <a:ext cx="12192000" cy="233580"/>
+          </a:xfrm>
+          <a:prstGeom prst="rect">
+            <a:avLst/>
+          </a:prstGeom>
+        </p:spPr>
+      </p:pic>
+      <p:sp>
+        <p:nvSpPr>
+          <p:cNvPr id="17" name="사각형: 둥근 모서리 16">
+            <a:extLst>
+              <a:ext uri="{FF2B5EF4-FFF2-40B4-BE49-F238E27FC236}">
+                <a16:creationId xmlns:a16="http://schemas.microsoft.com/office/drawing/2014/main" id="{B338D982-DB2C-0C32-1086-396C4C683D3F}"/>
+              </a:ext>
+            </a:extLst>
+          </p:cNvPr>
+          <p:cNvSpPr/>
+          <p:nvPr/>
+        </p:nvSpPr>
+        <p:spPr>
+          <a:xfrm>
+            <a:off x="83609" y="2737765"/>
+            <a:ext cx="554910" cy="931088"/>
+          </a:xfrm>
+          <a:prstGeom prst="roundRect">
+            <a:avLst>
+              <a:gd name="adj" fmla="val 50000"/>
+            </a:avLst>
+          </a:prstGeom>
+          <a:ln>
+            <a:solidFill>
+              <a:schemeClr val="tx1"/>
+            </a:solidFill>
+          </a:ln>
+        </p:spPr>
+        <p:style>
+          <a:lnRef idx="2">
+            <a:schemeClr val="accent6"/>
+          </a:lnRef>
+          <a:fillRef idx="1">
+            <a:schemeClr val="lt1"/>
+          </a:fillRef>
+          <a:effectRef idx="0">
+            <a:schemeClr val="accent6"/>
+          </a:effectRef>
+          <a:fontRef idx="minor">
+            <a:schemeClr val="dk1"/>
+          </a:fontRef>
+        </p:style>
+        <p:txBody>
+          <a:bodyPr rtlCol="0" anchor="ctr"/>
+          <a:lstStyle/>
+          <a:p>
+            <a:pPr algn="ctr"/>
+            <a:r>
+              <a:rPr lang="ko-KR" altLang="en-US" sz="1000" dirty="0"/>
+              <a:t>시작</a:t>
+            </a:r>
+          </a:p>
+        </p:txBody>
+      </p:sp>
+      <p:sp>
+        <p:nvSpPr>
+          <p:cNvPr id="18" name="직사각형 17">
+            <a:extLst>
+              <a:ext uri="{FF2B5EF4-FFF2-40B4-BE49-F238E27FC236}">
+                <a16:creationId xmlns:a16="http://schemas.microsoft.com/office/drawing/2014/main" id="{91EE2966-7D07-0EBF-5994-4EC3242D2145}"/>
+              </a:ext>
+            </a:extLst>
+          </p:cNvPr>
+          <p:cNvSpPr/>
+          <p:nvPr/>
+        </p:nvSpPr>
+        <p:spPr>
+          <a:xfrm>
+            <a:off x="825894" y="2981109"/>
+            <a:ext cx="1268979" cy="444399"/>
+          </a:xfrm>
+          <a:prstGeom prst="rect">
+            <a:avLst/>
+          </a:prstGeom>
+          <a:ln>
+            <a:solidFill>
+              <a:schemeClr val="tx1"/>
+            </a:solidFill>
+          </a:ln>
+        </p:spPr>
+        <p:style>
+          <a:lnRef idx="2">
+            <a:schemeClr val="accent6"/>
+          </a:lnRef>
+          <a:fillRef idx="1">
+            <a:schemeClr val="lt1"/>
+          </a:fillRef>
+          <a:effectRef idx="0">
+            <a:schemeClr val="accent6"/>
+          </a:effectRef>
+          <a:fontRef idx="minor">
+            <a:schemeClr val="dk1"/>
+          </a:fontRef>
+        </p:style>
+        <p:txBody>
+          <a:bodyPr rtlCol="0" anchor="ctr"/>
+          <a:lstStyle/>
+          <a:p>
+            <a:pPr algn="ctr"/>
+            <a:r>
+              <a:rPr lang="en-US" altLang="ko-KR" sz="1000" dirty="0"/>
+              <a:t>Bounce Count=0</a:t>
+            </a:r>
+          </a:p>
+        </p:txBody>
+      </p:sp>
+      <p:sp>
+        <p:nvSpPr>
+          <p:cNvPr id="41" name="순서도: 판단 40">
+            <a:extLst>
+              <a:ext uri="{FF2B5EF4-FFF2-40B4-BE49-F238E27FC236}">
+                <a16:creationId xmlns:a16="http://schemas.microsoft.com/office/drawing/2014/main" id="{5E079F83-19D8-1718-E38F-DF9D53050917}"/>
+              </a:ext>
+            </a:extLst>
+          </p:cNvPr>
+          <p:cNvSpPr/>
+          <p:nvPr/>
+        </p:nvSpPr>
+        <p:spPr>
+          <a:xfrm>
+            <a:off x="2372973" y="1449558"/>
+            <a:ext cx="1494153" cy="1045546"/>
+          </a:xfrm>
+          <a:prstGeom prst="flowChartDecision">
+            <a:avLst/>
+          </a:prstGeom>
+          <a:ln>
+            <a:solidFill>
+              <a:schemeClr val="tx1"/>
+            </a:solidFill>
+          </a:ln>
+        </p:spPr>
+        <p:style>
+          <a:lnRef idx="2">
+            <a:schemeClr val="accent6"/>
+          </a:lnRef>
+          <a:fillRef idx="1">
+            <a:schemeClr val="lt1"/>
+          </a:fillRef>
+          <a:effectRef idx="0">
+            <a:schemeClr val="accent6"/>
+          </a:effectRef>
+          <a:fontRef idx="minor">
+            <a:schemeClr val="dk1"/>
+          </a:fontRef>
+        </p:style>
+        <p:txBody>
+          <a:bodyPr rtlCol="0" anchor="ctr"/>
+          <a:lstStyle/>
+          <a:p>
+            <a:pPr algn="ctr"/>
+            <a:r>
+              <a:rPr lang="ko-KR" altLang="en-US" sz="1000" dirty="0"/>
+              <a:t>공이 </a:t>
+            </a:r>
+            <a:endParaRPr lang="en-US" altLang="ko-KR" sz="1000" dirty="0"/>
+          </a:p>
+          <a:p>
+            <a:pPr algn="ctr"/>
+            <a:r>
+              <a:rPr lang="ko-KR" altLang="en-US" sz="1000" dirty="0"/>
+              <a:t>받침대 밑 벽에 충돌</a:t>
+            </a:r>
+          </a:p>
+        </p:txBody>
+      </p:sp>
+      <p:sp>
+        <p:nvSpPr>
+          <p:cNvPr id="42" name="순서도: 판단 41">
+            <a:extLst>
+              <a:ext uri="{FF2B5EF4-FFF2-40B4-BE49-F238E27FC236}">
+                <a16:creationId xmlns:a16="http://schemas.microsoft.com/office/drawing/2014/main" id="{26EA633E-0338-A52D-40ED-86D58DA9195C}"/>
+              </a:ext>
+            </a:extLst>
+          </p:cNvPr>
+          <p:cNvSpPr/>
+          <p:nvPr/>
+        </p:nvSpPr>
+        <p:spPr>
+          <a:xfrm>
+            <a:off x="2330946" y="2681140"/>
+            <a:ext cx="1514851" cy="1028941"/>
+          </a:xfrm>
+          <a:prstGeom prst="flowChartDecision">
+            <a:avLst/>
+          </a:prstGeom>
+          <a:ln>
+            <a:solidFill>
+              <a:schemeClr val="tx1"/>
+            </a:solidFill>
+          </a:ln>
+        </p:spPr>
+        <p:style>
+          <a:lnRef idx="2">
+            <a:schemeClr val="accent6"/>
+          </a:lnRef>
+          <a:fillRef idx="1">
+            <a:schemeClr val="lt1"/>
+          </a:fillRef>
+          <a:effectRef idx="0">
+            <a:schemeClr val="accent6"/>
+          </a:effectRef>
+          <a:fontRef idx="minor">
+            <a:schemeClr val="dk1"/>
+          </a:fontRef>
+        </p:style>
+        <p:txBody>
+          <a:bodyPr rtlCol="0" anchor="ctr"/>
+          <a:lstStyle/>
+          <a:p>
+            <a:pPr algn="ctr"/>
+            <a:r>
+              <a:rPr lang="ko-KR" altLang="en-US" sz="1000" dirty="0"/>
+              <a:t>공이 벽에 </a:t>
+            </a:r>
+            <a:endParaRPr lang="en-US" altLang="ko-KR" sz="1000" dirty="0"/>
+          </a:p>
+          <a:p>
+            <a:pPr algn="ctr"/>
+            <a:r>
+              <a:rPr lang="ko-KR" altLang="en-US" sz="1000" dirty="0"/>
+              <a:t>충돌</a:t>
+            </a:r>
+          </a:p>
+        </p:txBody>
+      </p:sp>
+      <p:sp>
+        <p:nvSpPr>
+          <p:cNvPr id="43" name="순서도: 판단 42">
+            <a:extLst>
+              <a:ext uri="{FF2B5EF4-FFF2-40B4-BE49-F238E27FC236}">
+                <a16:creationId xmlns:a16="http://schemas.microsoft.com/office/drawing/2014/main" id="{5DD97ECD-940F-87A1-4A41-DA242A10034B}"/>
+              </a:ext>
+            </a:extLst>
+          </p:cNvPr>
+          <p:cNvSpPr/>
+          <p:nvPr/>
+        </p:nvSpPr>
+        <p:spPr>
+          <a:xfrm>
+            <a:off x="2336378" y="3806482"/>
+            <a:ext cx="1509419" cy="1028940"/>
+          </a:xfrm>
+          <a:prstGeom prst="flowChartDecision">
+            <a:avLst/>
+          </a:prstGeom>
+          <a:ln>
+            <a:solidFill>
+              <a:schemeClr val="tx1"/>
+            </a:solidFill>
+          </a:ln>
+        </p:spPr>
+        <p:style>
+          <a:lnRef idx="2">
+            <a:schemeClr val="accent6"/>
+          </a:lnRef>
+          <a:fillRef idx="1">
+            <a:schemeClr val="lt1"/>
+          </a:fillRef>
+          <a:effectRef idx="0">
+            <a:schemeClr val="accent6"/>
+          </a:effectRef>
+          <a:fontRef idx="minor">
+            <a:schemeClr val="dk1"/>
+          </a:fontRef>
+        </p:style>
+        <p:txBody>
+          <a:bodyPr rtlCol="0" anchor="ctr"/>
+          <a:lstStyle/>
+          <a:p>
+            <a:pPr algn="ctr"/>
+            <a:r>
+              <a:rPr lang="ko-KR" altLang="en-US" sz="1000" dirty="0"/>
+              <a:t>공이</a:t>
+            </a:r>
+            <a:endParaRPr lang="en-US" altLang="ko-KR" sz="1000" dirty="0"/>
+          </a:p>
+          <a:p>
+            <a:pPr algn="ctr"/>
+            <a:r>
+              <a:rPr lang="ko-KR" altLang="en-US" sz="1000" dirty="0"/>
+              <a:t>벽돌에</a:t>
+            </a:r>
+            <a:endParaRPr lang="en-US" altLang="ko-KR" sz="1000" dirty="0"/>
+          </a:p>
+          <a:p>
+            <a:pPr algn="ctr"/>
+            <a:r>
+              <a:rPr lang="ko-KR" altLang="en-US" sz="1000" dirty="0"/>
+              <a:t>충돌</a:t>
+            </a:r>
+          </a:p>
+        </p:txBody>
+      </p:sp>
+      <p:cxnSp>
+        <p:nvCxnSpPr>
+          <p:cNvPr id="15" name="직선 화살표 연결선 14">
+            <a:extLst>
+              <a:ext uri="{FF2B5EF4-FFF2-40B4-BE49-F238E27FC236}">
+                <a16:creationId xmlns:a16="http://schemas.microsoft.com/office/drawing/2014/main" id="{60A105AE-8886-AC73-49F2-55B258FDC893}"/>
+              </a:ext>
+            </a:extLst>
+          </p:cNvPr>
+          <p:cNvCxnSpPr>
+            <a:stCxn id="17" idx="3"/>
+            <a:endCxn id="18" idx="1"/>
+          </p:cNvCxnSpPr>
+          <p:nvPr/>
+        </p:nvCxnSpPr>
+        <p:spPr>
+          <a:xfrm>
+            <a:off x="638519" y="3203309"/>
+            <a:ext cx="187375" cy="0"/>
+          </a:xfrm>
+          <a:prstGeom prst="straightConnector1">
+            <a:avLst/>
+          </a:prstGeom>
+          <a:ln>
+            <a:tailEnd type="triangle"/>
+          </a:ln>
+        </p:spPr>
+        <p:style>
+          <a:lnRef idx="1">
+            <a:schemeClr val="dk1"/>
+          </a:lnRef>
+          <a:fillRef idx="0">
+            <a:schemeClr val="dk1"/>
+          </a:fillRef>
+          <a:effectRef idx="0">
+            <a:schemeClr val="dk1"/>
+          </a:effectRef>
+          <a:fontRef idx="minor">
+            <a:schemeClr val="tx1"/>
+          </a:fontRef>
+        </p:style>
+      </p:cxnSp>
+      <p:cxnSp>
+        <p:nvCxnSpPr>
+          <p:cNvPr id="22" name="연결선: 꺾임 21">
+            <a:extLst>
+              <a:ext uri="{FF2B5EF4-FFF2-40B4-BE49-F238E27FC236}">
+                <a16:creationId xmlns:a16="http://schemas.microsoft.com/office/drawing/2014/main" id="{AEF4F07F-6413-6D5F-8F35-3F9C6DCBC7F2}"/>
+              </a:ext>
+            </a:extLst>
+          </p:cNvPr>
+          <p:cNvCxnSpPr>
+            <a:cxnSpLocks/>
+            <a:stCxn id="18" idx="3"/>
+            <a:endCxn id="41" idx="1"/>
+          </p:cNvCxnSpPr>
+          <p:nvPr/>
+        </p:nvCxnSpPr>
+        <p:spPr>
+          <a:xfrm flipV="1">
+            <a:off x="2094873" y="1972331"/>
+            <a:ext cx="278100" cy="1230978"/>
+          </a:xfrm>
+          <a:prstGeom prst="bentConnector3">
+            <a:avLst/>
+          </a:prstGeom>
+          <a:ln>
+            <a:tailEnd type="triangle"/>
+          </a:ln>
+        </p:spPr>
+        <p:style>
+          <a:lnRef idx="1">
+            <a:schemeClr val="dk1"/>
+          </a:lnRef>
+          <a:fillRef idx="0">
+            <a:schemeClr val="dk1"/>
+          </a:fillRef>
+          <a:effectRef idx="0">
+            <a:schemeClr val="dk1"/>
+          </a:effectRef>
+          <a:fontRef idx="minor">
+            <a:schemeClr val="tx1"/>
+          </a:fontRef>
+        </p:style>
+      </p:cxnSp>
+      <p:cxnSp>
+        <p:nvCxnSpPr>
+          <p:cNvPr id="26" name="직선 화살표 연결선 25">
+            <a:extLst>
+              <a:ext uri="{FF2B5EF4-FFF2-40B4-BE49-F238E27FC236}">
+                <a16:creationId xmlns:a16="http://schemas.microsoft.com/office/drawing/2014/main" id="{F0AE8A8C-E46F-3D4F-3817-272D66F9622C}"/>
+              </a:ext>
+            </a:extLst>
+          </p:cNvPr>
+          <p:cNvCxnSpPr>
+            <a:cxnSpLocks/>
+            <a:stCxn id="18" idx="3"/>
+            <a:endCxn id="42" idx="1"/>
+          </p:cNvCxnSpPr>
+          <p:nvPr/>
+        </p:nvCxnSpPr>
+        <p:spPr>
+          <a:xfrm flipV="1">
+            <a:off x="2094873" y="3195611"/>
+            <a:ext cx="236073" cy="7698"/>
+          </a:xfrm>
+          <a:prstGeom prst="straightConnector1">
+            <a:avLst/>
+          </a:prstGeom>
+          <a:ln>
+            <a:tailEnd type="triangle"/>
+          </a:ln>
+        </p:spPr>
+        <p:style>
+          <a:lnRef idx="1">
+            <a:schemeClr val="dk1"/>
+          </a:lnRef>
+          <a:fillRef idx="0">
+            <a:schemeClr val="dk1"/>
+          </a:fillRef>
+          <a:effectRef idx="0">
+            <a:schemeClr val="dk1"/>
+          </a:effectRef>
+          <a:fontRef idx="minor">
+            <a:schemeClr val="tx1"/>
+          </a:fontRef>
+        </p:style>
+      </p:cxnSp>
+      <p:cxnSp>
+        <p:nvCxnSpPr>
+          <p:cNvPr id="31" name="연결선: 꺾임 30">
+            <a:extLst>
+              <a:ext uri="{FF2B5EF4-FFF2-40B4-BE49-F238E27FC236}">
+                <a16:creationId xmlns:a16="http://schemas.microsoft.com/office/drawing/2014/main" id="{20358633-42F2-4800-E12E-64F73E7A4854}"/>
+              </a:ext>
+            </a:extLst>
+          </p:cNvPr>
+          <p:cNvCxnSpPr>
+            <a:cxnSpLocks/>
+            <a:stCxn id="18" idx="3"/>
+            <a:endCxn id="43" idx="1"/>
+          </p:cNvCxnSpPr>
+          <p:nvPr/>
+        </p:nvCxnSpPr>
+        <p:spPr>
+          <a:xfrm>
+            <a:off x="2094873" y="3203309"/>
+            <a:ext cx="241505" cy="1117643"/>
+          </a:xfrm>
+          <a:prstGeom prst="bentConnector3">
+            <a:avLst/>
+          </a:prstGeom>
+          <a:ln>
+            <a:tailEnd type="triangle"/>
+          </a:ln>
+        </p:spPr>
+        <p:style>
+          <a:lnRef idx="1">
+            <a:schemeClr val="dk1"/>
+          </a:lnRef>
+          <a:fillRef idx="0">
+            <a:schemeClr val="dk1"/>
+          </a:fillRef>
+          <a:effectRef idx="0">
+            <a:schemeClr val="dk1"/>
+          </a:effectRef>
+          <a:fontRef idx="minor">
+            <a:schemeClr val="tx1"/>
+          </a:fontRef>
+        </p:style>
+      </p:cxnSp>
+      <p:sp>
+        <p:nvSpPr>
+          <p:cNvPr id="16" name="직사각형 15">
+            <a:extLst>
+              <a:ext uri="{FF2B5EF4-FFF2-40B4-BE49-F238E27FC236}">
+                <a16:creationId xmlns:a16="http://schemas.microsoft.com/office/drawing/2014/main" id="{2A2BA7C3-9020-29F9-EE04-E42E2CD9679B}"/>
+              </a:ext>
+            </a:extLst>
+          </p:cNvPr>
+          <p:cNvSpPr/>
+          <p:nvPr/>
+        </p:nvSpPr>
+        <p:spPr>
+          <a:xfrm>
+            <a:off x="4663383" y="3546586"/>
+            <a:ext cx="1509419" cy="500091"/>
+          </a:xfrm>
+          <a:prstGeom prst="rect">
+            <a:avLst/>
+          </a:prstGeom>
+          <a:ln>
+            <a:solidFill>
+              <a:schemeClr val="tx1"/>
+            </a:solidFill>
+          </a:ln>
+        </p:spPr>
+        <p:style>
+          <a:lnRef idx="2">
+            <a:schemeClr val="accent6"/>
+          </a:lnRef>
+          <a:fillRef idx="1">
+            <a:schemeClr val="lt1"/>
+          </a:fillRef>
+          <a:effectRef idx="0">
+            <a:schemeClr val="accent6"/>
+          </a:effectRef>
+          <a:fontRef idx="minor">
+            <a:schemeClr val="dk1"/>
+          </a:fontRef>
+        </p:style>
+        <p:txBody>
+          <a:bodyPr rtlCol="0" anchor="ctr"/>
+          <a:lstStyle/>
+          <a:p>
+            <a:pPr algn="ctr"/>
+            <a:r>
+              <a:rPr lang="en-US" altLang="ko-KR" sz="1000" dirty="0"/>
+              <a:t>Bounce Count++</a:t>
+            </a:r>
+            <a:endParaRPr lang="ko-KR" altLang="en-US" sz="1000" dirty="0"/>
+          </a:p>
+        </p:txBody>
+      </p:sp>
+      <p:cxnSp>
+        <p:nvCxnSpPr>
+          <p:cNvPr id="54" name="연결선: 꺾임 53">
+            <a:extLst>
+              <a:ext uri="{FF2B5EF4-FFF2-40B4-BE49-F238E27FC236}">
+                <a16:creationId xmlns:a16="http://schemas.microsoft.com/office/drawing/2014/main" id="{9B43BB83-AF81-33F1-C862-CE8193D63100}"/>
+              </a:ext>
+            </a:extLst>
+          </p:cNvPr>
+          <p:cNvCxnSpPr>
+            <a:cxnSpLocks/>
+            <a:stCxn id="43" idx="3"/>
+            <a:endCxn id="16" idx="1"/>
+          </p:cNvCxnSpPr>
+          <p:nvPr/>
+        </p:nvCxnSpPr>
+        <p:spPr>
+          <a:xfrm flipV="1">
+            <a:off x="3845797" y="3796632"/>
+            <a:ext cx="817586" cy="524320"/>
+          </a:xfrm>
+          <a:prstGeom prst="bentConnector3">
+            <a:avLst/>
+          </a:prstGeom>
+          <a:ln>
+            <a:tailEnd type="triangle"/>
+          </a:ln>
+        </p:spPr>
+        <p:style>
+          <a:lnRef idx="1">
+            <a:schemeClr val="dk1"/>
+          </a:lnRef>
+          <a:fillRef idx="0">
+            <a:schemeClr val="dk1"/>
+          </a:fillRef>
+          <a:effectRef idx="0">
+            <a:schemeClr val="dk1"/>
+          </a:effectRef>
+          <a:fontRef idx="minor">
+            <a:schemeClr val="tx1"/>
+          </a:fontRef>
+        </p:style>
+      </p:cxnSp>
+      <p:cxnSp>
+        <p:nvCxnSpPr>
+          <p:cNvPr id="56" name="연결선: 꺾임 55">
+            <a:extLst>
+              <a:ext uri="{FF2B5EF4-FFF2-40B4-BE49-F238E27FC236}">
+                <a16:creationId xmlns:a16="http://schemas.microsoft.com/office/drawing/2014/main" id="{73E4D4F2-8197-97C5-5BBB-8DE259FF4243}"/>
+              </a:ext>
+            </a:extLst>
+          </p:cNvPr>
+          <p:cNvCxnSpPr>
+            <a:cxnSpLocks/>
+            <a:stCxn id="42" idx="3"/>
+            <a:endCxn id="16" idx="1"/>
+          </p:cNvCxnSpPr>
+          <p:nvPr/>
+        </p:nvCxnSpPr>
+        <p:spPr>
+          <a:xfrm>
+            <a:off x="3845797" y="3195611"/>
+            <a:ext cx="817586" cy="601021"/>
+          </a:xfrm>
+          <a:prstGeom prst="bentConnector3">
+            <a:avLst/>
+          </a:prstGeom>
+          <a:ln>
+            <a:tailEnd type="triangle"/>
+          </a:ln>
+        </p:spPr>
+        <p:style>
+          <a:lnRef idx="1">
+            <a:schemeClr val="dk1"/>
+          </a:lnRef>
+          <a:fillRef idx="0">
+            <a:schemeClr val="dk1"/>
+          </a:fillRef>
+          <a:effectRef idx="0">
+            <a:schemeClr val="dk1"/>
+          </a:effectRef>
+          <a:fontRef idx="minor">
+            <a:schemeClr val="tx1"/>
+          </a:fontRef>
+        </p:style>
+      </p:cxnSp>
+      <p:sp>
+        <p:nvSpPr>
+          <p:cNvPr id="65" name="순서도: 판단 64">
+            <a:extLst>
+              <a:ext uri="{FF2B5EF4-FFF2-40B4-BE49-F238E27FC236}">
+                <a16:creationId xmlns:a16="http://schemas.microsoft.com/office/drawing/2014/main" id="{0E69DB07-19CA-AE18-A416-0A136CAC626B}"/>
+              </a:ext>
+            </a:extLst>
+          </p:cNvPr>
+          <p:cNvSpPr/>
+          <p:nvPr/>
+        </p:nvSpPr>
+        <p:spPr>
+          <a:xfrm>
+            <a:off x="6708068" y="3282161"/>
+            <a:ext cx="1509419" cy="1028940"/>
+          </a:xfrm>
+          <a:prstGeom prst="flowChartDecision">
+            <a:avLst/>
+          </a:prstGeom>
+          <a:ln>
+            <a:solidFill>
+              <a:schemeClr val="tx1"/>
+            </a:solidFill>
+          </a:ln>
+        </p:spPr>
+        <p:style>
+          <a:lnRef idx="2">
+            <a:schemeClr val="accent6"/>
+          </a:lnRef>
+          <a:fillRef idx="1">
+            <a:schemeClr val="lt1"/>
+          </a:fillRef>
+          <a:effectRef idx="0">
+            <a:schemeClr val="accent6"/>
+          </a:effectRef>
+          <a:fontRef idx="minor">
+            <a:schemeClr val="dk1"/>
+          </a:fontRef>
+        </p:style>
+        <p:txBody>
+          <a:bodyPr rtlCol="0" anchor="ctr"/>
+          <a:lstStyle/>
+          <a:p>
+            <a:pPr algn="ctr"/>
+            <a:r>
+              <a:rPr lang="ko-KR" altLang="en-US" sz="1000" dirty="0"/>
+              <a:t>공이</a:t>
+            </a:r>
+            <a:endParaRPr lang="en-US" altLang="ko-KR" sz="1000" dirty="0"/>
+          </a:p>
+          <a:p>
+            <a:pPr algn="ctr"/>
+            <a:r>
+              <a:rPr lang="ko-KR" altLang="en-US" sz="1000" dirty="0"/>
+              <a:t>벽돌을</a:t>
+            </a:r>
+            <a:endParaRPr lang="en-US" altLang="ko-KR" sz="1000" dirty="0"/>
+          </a:p>
+          <a:p>
+            <a:pPr algn="ctr"/>
+            <a:r>
+              <a:rPr lang="ko-KR" altLang="en-US" sz="1000" dirty="0"/>
+              <a:t>부심</a:t>
+            </a:r>
+            <a:endParaRPr lang="en-US" altLang="ko-KR" sz="1000" dirty="0"/>
+          </a:p>
+        </p:txBody>
+      </p:sp>
+      <p:sp>
+        <p:nvSpPr>
+          <p:cNvPr id="72" name="직사각형 71">
+            <a:extLst>
+              <a:ext uri="{FF2B5EF4-FFF2-40B4-BE49-F238E27FC236}">
+                <a16:creationId xmlns:a16="http://schemas.microsoft.com/office/drawing/2014/main" id="{AF76CEA6-E3E8-766B-52E8-16015F45386D}"/>
+              </a:ext>
+            </a:extLst>
+          </p:cNvPr>
+          <p:cNvSpPr/>
+          <p:nvPr/>
+        </p:nvSpPr>
+        <p:spPr>
+          <a:xfrm>
+            <a:off x="8452327" y="3546585"/>
+            <a:ext cx="1749801" cy="500092"/>
+          </a:xfrm>
+          <a:prstGeom prst="rect">
+            <a:avLst/>
+          </a:prstGeom>
+          <a:ln>
+            <a:solidFill>
+              <a:schemeClr val="tx1"/>
+            </a:solidFill>
+          </a:ln>
+        </p:spPr>
+        <p:style>
+          <a:lnRef idx="2">
+            <a:schemeClr val="accent6"/>
+          </a:lnRef>
+          <a:fillRef idx="1">
+            <a:schemeClr val="lt1"/>
+          </a:fillRef>
+          <a:effectRef idx="0">
+            <a:schemeClr val="accent6"/>
+          </a:effectRef>
+          <a:fontRef idx="minor">
+            <a:schemeClr val="dk1"/>
+          </a:fontRef>
+        </p:style>
+        <p:txBody>
+          <a:bodyPr rtlCol="0" anchor="ctr"/>
+          <a:lstStyle/>
+          <a:p>
+            <a:pPr algn="ctr"/>
+            <a:r>
+              <a:rPr lang="ko-KR" altLang="en-US" sz="1000" dirty="0"/>
+              <a:t>점수 </a:t>
+            </a:r>
+            <a:r>
+              <a:rPr lang="en-US" altLang="ko-KR" sz="1000" dirty="0"/>
+              <a:t>+= 1+ </a:t>
+            </a:r>
+            <a:r>
+              <a:rPr lang="ko-KR" altLang="en-US" sz="1000" dirty="0" err="1"/>
+              <a:t>튕김카운트</a:t>
+            </a:r>
+            <a:endParaRPr lang="ko-KR" altLang="en-US" sz="1000" dirty="0"/>
+          </a:p>
+        </p:txBody>
+      </p:sp>
+      <p:cxnSp>
+        <p:nvCxnSpPr>
+          <p:cNvPr id="89" name="연결선: 꺾임 88">
+            <a:extLst>
+              <a:ext uri="{FF2B5EF4-FFF2-40B4-BE49-F238E27FC236}">
+                <a16:creationId xmlns:a16="http://schemas.microsoft.com/office/drawing/2014/main" id="{62B9D024-6F9D-0554-6D92-4D4372497895}"/>
+              </a:ext>
+            </a:extLst>
+          </p:cNvPr>
+          <p:cNvCxnSpPr>
+            <a:stCxn id="16" idx="3"/>
+            <a:endCxn id="65" idx="1"/>
+          </p:cNvCxnSpPr>
+          <p:nvPr/>
+        </p:nvCxnSpPr>
+        <p:spPr>
+          <a:xfrm flipV="1">
+            <a:off x="6172802" y="3796631"/>
+            <a:ext cx="535266" cy="1"/>
+          </a:xfrm>
+          <a:prstGeom prst="bentConnector3">
+            <a:avLst/>
+          </a:prstGeom>
+          <a:ln>
+            <a:tailEnd type="triangle"/>
+          </a:ln>
+        </p:spPr>
+        <p:style>
+          <a:lnRef idx="1">
+            <a:schemeClr val="dk1"/>
+          </a:lnRef>
+          <a:fillRef idx="0">
+            <a:schemeClr val="dk1"/>
+          </a:fillRef>
+          <a:effectRef idx="0">
+            <a:schemeClr val="dk1"/>
+          </a:effectRef>
+          <a:fontRef idx="minor">
+            <a:schemeClr val="tx1"/>
+          </a:fontRef>
+        </p:style>
+      </p:cxnSp>
+      <p:cxnSp>
+        <p:nvCxnSpPr>
+          <p:cNvPr id="95" name="직선 화살표 연결선 94">
+            <a:extLst>
+              <a:ext uri="{FF2B5EF4-FFF2-40B4-BE49-F238E27FC236}">
+                <a16:creationId xmlns:a16="http://schemas.microsoft.com/office/drawing/2014/main" id="{037772EB-E13E-840D-A622-BB23AF2E2470}"/>
+              </a:ext>
+            </a:extLst>
+          </p:cNvPr>
+          <p:cNvCxnSpPr>
+            <a:stCxn id="65" idx="3"/>
+            <a:endCxn id="72" idx="1"/>
+          </p:cNvCxnSpPr>
+          <p:nvPr/>
+        </p:nvCxnSpPr>
+        <p:spPr>
+          <a:xfrm>
+            <a:off x="8217487" y="3796631"/>
+            <a:ext cx="234840" cy="0"/>
+          </a:xfrm>
+          <a:prstGeom prst="straightConnector1">
+            <a:avLst/>
+          </a:prstGeom>
+          <a:ln>
+            <a:tailEnd type="triangle"/>
+          </a:ln>
+        </p:spPr>
+        <p:style>
+          <a:lnRef idx="1">
+            <a:schemeClr val="dk1"/>
+          </a:lnRef>
+          <a:fillRef idx="0">
+            <a:schemeClr val="dk1"/>
+          </a:fillRef>
+          <a:effectRef idx="0">
+            <a:schemeClr val="dk1"/>
+          </a:effectRef>
+          <a:fontRef idx="minor">
+            <a:schemeClr val="tx1"/>
+          </a:fontRef>
+        </p:style>
+      </p:cxnSp>
+      <p:sp>
+        <p:nvSpPr>
+          <p:cNvPr id="101" name="순서도: 판단 100">
+            <a:extLst>
+              <a:ext uri="{FF2B5EF4-FFF2-40B4-BE49-F238E27FC236}">
+                <a16:creationId xmlns:a16="http://schemas.microsoft.com/office/drawing/2014/main" id="{F9957AF9-2B70-E4AC-C97A-BDF64D1B09F0}"/>
+              </a:ext>
+            </a:extLst>
+          </p:cNvPr>
+          <p:cNvSpPr/>
+          <p:nvPr/>
+        </p:nvSpPr>
+        <p:spPr>
+          <a:xfrm>
+            <a:off x="2336378" y="4960308"/>
+            <a:ext cx="1509419" cy="1028940"/>
+          </a:xfrm>
+          <a:prstGeom prst="flowChartDecision">
+            <a:avLst/>
+          </a:prstGeom>
+          <a:ln>
+            <a:solidFill>
+              <a:schemeClr val="tx1"/>
+            </a:solidFill>
+          </a:ln>
+        </p:spPr>
+        <p:style>
+          <a:lnRef idx="2">
+            <a:schemeClr val="accent6"/>
+          </a:lnRef>
+          <a:fillRef idx="1">
+            <a:schemeClr val="lt1"/>
+          </a:fillRef>
+          <a:effectRef idx="0">
+            <a:schemeClr val="accent6"/>
+          </a:effectRef>
+          <a:fontRef idx="minor">
+            <a:schemeClr val="dk1"/>
+          </a:fontRef>
+        </p:style>
+        <p:txBody>
+          <a:bodyPr rtlCol="0" anchor="ctr"/>
+          <a:lstStyle/>
+          <a:p>
+            <a:pPr algn="ctr"/>
+            <a:r>
+              <a:rPr lang="ko-KR" altLang="en-US" sz="1000" dirty="0"/>
+              <a:t>스테이지 클리어</a:t>
+            </a:r>
+          </a:p>
+        </p:txBody>
+      </p:sp>
+      <p:cxnSp>
+        <p:nvCxnSpPr>
+          <p:cNvPr id="105" name="연결선: 꺾임 104">
+            <a:extLst>
+              <a:ext uri="{FF2B5EF4-FFF2-40B4-BE49-F238E27FC236}">
+                <a16:creationId xmlns:a16="http://schemas.microsoft.com/office/drawing/2014/main" id="{9A1F79EC-B82A-68EB-FE53-0533DE55596D}"/>
+              </a:ext>
+            </a:extLst>
+          </p:cNvPr>
+          <p:cNvCxnSpPr>
+            <a:stCxn id="18" idx="3"/>
+            <a:endCxn id="101" idx="1"/>
+          </p:cNvCxnSpPr>
+          <p:nvPr/>
+        </p:nvCxnSpPr>
+        <p:spPr>
+          <a:xfrm>
+            <a:off x="2094873" y="3203309"/>
+            <a:ext cx="241505" cy="2271469"/>
+          </a:xfrm>
+          <a:prstGeom prst="bentConnector3">
+            <a:avLst/>
+          </a:prstGeom>
+          <a:ln>
+            <a:tailEnd type="triangle"/>
+          </a:ln>
+        </p:spPr>
+        <p:style>
+          <a:lnRef idx="1">
+            <a:schemeClr val="dk1"/>
+          </a:lnRef>
+          <a:fillRef idx="0">
+            <a:schemeClr val="dk1"/>
+          </a:fillRef>
+          <a:effectRef idx="0">
+            <a:schemeClr val="dk1"/>
+          </a:effectRef>
+          <a:fontRef idx="minor">
+            <a:schemeClr val="tx1"/>
+          </a:fontRef>
+        </p:style>
+      </p:cxnSp>
+      <p:sp>
+        <p:nvSpPr>
+          <p:cNvPr id="107" name="직사각형 106">
+            <a:extLst>
+              <a:ext uri="{FF2B5EF4-FFF2-40B4-BE49-F238E27FC236}">
+                <a16:creationId xmlns:a16="http://schemas.microsoft.com/office/drawing/2014/main" id="{CA96F75A-497A-6B55-5CC2-F35ACF95BAD8}"/>
+              </a:ext>
+            </a:extLst>
+          </p:cNvPr>
+          <p:cNvSpPr/>
+          <p:nvPr/>
+        </p:nvSpPr>
+        <p:spPr>
+          <a:xfrm>
+            <a:off x="4597076" y="5224732"/>
+            <a:ext cx="1586007" cy="500091"/>
+          </a:xfrm>
+          <a:prstGeom prst="rect">
+            <a:avLst/>
+          </a:prstGeom>
+          <a:ln>
+            <a:solidFill>
+              <a:schemeClr val="tx1"/>
+            </a:solidFill>
+          </a:ln>
+        </p:spPr>
+        <p:style>
+          <a:lnRef idx="2">
+            <a:schemeClr val="accent6"/>
+          </a:lnRef>
+          <a:fillRef idx="1">
+            <a:schemeClr val="lt1"/>
+          </a:fillRef>
+          <a:effectRef idx="0">
+            <a:schemeClr val="accent6"/>
+          </a:effectRef>
+          <a:fontRef idx="minor">
+            <a:schemeClr val="dk1"/>
+          </a:fontRef>
+        </p:style>
+        <p:txBody>
+          <a:bodyPr rtlCol="0" anchor="ctr"/>
+          <a:lstStyle/>
+          <a:p>
+            <a:pPr algn="ctr"/>
+            <a:r>
+              <a:rPr lang="ko-KR" altLang="en-US" sz="1000"/>
+              <a:t>점수 </a:t>
+            </a:r>
+            <a:r>
+              <a:rPr lang="en-US" altLang="ko-KR" sz="1000" dirty="0"/>
+              <a:t>*= </a:t>
+            </a:r>
+            <a:r>
+              <a:rPr lang="ko-KR" altLang="en-US" sz="1000" dirty="0"/>
+              <a:t>현재 생명력</a:t>
+            </a:r>
+          </a:p>
+        </p:txBody>
+      </p:sp>
+      <p:cxnSp>
+        <p:nvCxnSpPr>
+          <p:cNvPr id="111" name="직선 화살표 연결선 110">
+            <a:extLst>
+              <a:ext uri="{FF2B5EF4-FFF2-40B4-BE49-F238E27FC236}">
+                <a16:creationId xmlns:a16="http://schemas.microsoft.com/office/drawing/2014/main" id="{24C9DE29-E0C0-8429-BB79-31199CE15B9F}"/>
+              </a:ext>
+            </a:extLst>
+          </p:cNvPr>
+          <p:cNvCxnSpPr>
+            <a:stCxn id="101" idx="3"/>
+            <a:endCxn id="107" idx="1"/>
+          </p:cNvCxnSpPr>
+          <p:nvPr/>
+        </p:nvCxnSpPr>
+        <p:spPr>
+          <a:xfrm>
+            <a:off x="3845797" y="5474778"/>
+            <a:ext cx="751279" cy="0"/>
+          </a:xfrm>
+          <a:prstGeom prst="straightConnector1">
+            <a:avLst/>
+          </a:prstGeom>
+          <a:ln>
+            <a:tailEnd type="triangle"/>
+          </a:ln>
+        </p:spPr>
+        <p:style>
+          <a:lnRef idx="1">
+            <a:schemeClr val="dk1"/>
+          </a:lnRef>
+          <a:fillRef idx="0">
+            <a:schemeClr val="dk1"/>
+          </a:fillRef>
+          <a:effectRef idx="0">
+            <a:schemeClr val="dk1"/>
+          </a:effectRef>
+          <a:fontRef idx="minor">
+            <a:schemeClr val="tx1"/>
+          </a:fontRef>
+        </p:style>
+      </p:cxnSp>
+      <p:cxnSp>
+        <p:nvCxnSpPr>
+          <p:cNvPr id="125" name="연결선: 꺾임 124">
+            <a:extLst>
+              <a:ext uri="{FF2B5EF4-FFF2-40B4-BE49-F238E27FC236}">
+                <a16:creationId xmlns:a16="http://schemas.microsoft.com/office/drawing/2014/main" id="{8D974642-0154-407B-29C9-54B39632F815}"/>
+              </a:ext>
+            </a:extLst>
+          </p:cNvPr>
+          <p:cNvCxnSpPr>
+            <a:cxnSpLocks/>
+            <a:stCxn id="72" idx="2"/>
+            <a:endCxn id="18" idx="2"/>
+          </p:cNvCxnSpPr>
+          <p:nvPr/>
+        </p:nvCxnSpPr>
+        <p:spPr>
+          <a:xfrm rot="5400000" flipH="1">
+            <a:off x="5083221" y="-197329"/>
+            <a:ext cx="621169" cy="7866844"/>
+          </a:xfrm>
+          <a:prstGeom prst="bentConnector3">
+            <a:avLst>
+              <a:gd name="adj1" fmla="val -418743"/>
+            </a:avLst>
+          </a:prstGeom>
+          <a:ln>
+            <a:tailEnd type="triangle"/>
+          </a:ln>
+        </p:spPr>
+        <p:style>
+          <a:lnRef idx="1">
+            <a:schemeClr val="dk1"/>
+          </a:lnRef>
+          <a:fillRef idx="0">
+            <a:schemeClr val="dk1"/>
+          </a:fillRef>
+          <a:effectRef idx="0">
+            <a:schemeClr val="dk1"/>
+          </a:effectRef>
+          <a:fontRef idx="minor">
+            <a:schemeClr val="tx1"/>
+          </a:fontRef>
+        </p:style>
+      </p:cxnSp>
+      <p:cxnSp>
+        <p:nvCxnSpPr>
+          <p:cNvPr id="132" name="연결선: 꺾임 131">
+            <a:extLst>
+              <a:ext uri="{FF2B5EF4-FFF2-40B4-BE49-F238E27FC236}">
+                <a16:creationId xmlns:a16="http://schemas.microsoft.com/office/drawing/2014/main" id="{AC50B4E6-9EC5-9E15-6E64-FC206B076EB3}"/>
+              </a:ext>
+            </a:extLst>
+          </p:cNvPr>
+          <p:cNvCxnSpPr>
+            <a:stCxn id="107" idx="2"/>
+            <a:endCxn id="18" idx="2"/>
+          </p:cNvCxnSpPr>
+          <p:nvPr/>
+        </p:nvCxnSpPr>
+        <p:spPr>
+          <a:xfrm rot="5400000" flipH="1">
+            <a:off x="2275574" y="2610318"/>
+            <a:ext cx="2299315" cy="3929696"/>
+          </a:xfrm>
+          <a:prstGeom prst="bentConnector3">
+            <a:avLst>
+              <a:gd name="adj1" fmla="val -39500"/>
+            </a:avLst>
+          </a:prstGeom>
+          <a:ln>
+            <a:tailEnd type="triangle"/>
+          </a:ln>
+        </p:spPr>
+        <p:style>
+          <a:lnRef idx="1">
+            <a:schemeClr val="dk1"/>
+          </a:lnRef>
+          <a:fillRef idx="0">
+            <a:schemeClr val="dk1"/>
+          </a:fillRef>
+          <a:effectRef idx="0">
+            <a:schemeClr val="dk1"/>
+          </a:effectRef>
+          <a:fontRef idx="minor">
+            <a:schemeClr val="tx1"/>
+          </a:fontRef>
+        </p:style>
+      </p:cxnSp>
+      <p:cxnSp>
+        <p:nvCxnSpPr>
+          <p:cNvPr id="141" name="연결선: 꺾임 140">
+            <a:extLst>
+              <a:ext uri="{FF2B5EF4-FFF2-40B4-BE49-F238E27FC236}">
+                <a16:creationId xmlns:a16="http://schemas.microsoft.com/office/drawing/2014/main" id="{CD65FCC0-EA2A-A5AB-7228-C52F4D4963D7}"/>
+              </a:ext>
+            </a:extLst>
+          </p:cNvPr>
+          <p:cNvCxnSpPr>
+            <a:stCxn id="41" idx="0"/>
+            <a:endCxn id="18" idx="0"/>
+          </p:cNvCxnSpPr>
+          <p:nvPr/>
+        </p:nvCxnSpPr>
+        <p:spPr>
+          <a:xfrm rot="16200000" flipH="1" flipV="1">
+            <a:off x="1524441" y="1385500"/>
+            <a:ext cx="1531551" cy="1659666"/>
+          </a:xfrm>
+          <a:prstGeom prst="bentConnector3">
+            <a:avLst>
+              <a:gd name="adj1" fmla="val -8471"/>
+            </a:avLst>
+          </a:prstGeom>
+          <a:ln>
+            <a:tailEnd type="triangle"/>
+          </a:ln>
+        </p:spPr>
+        <p:style>
+          <a:lnRef idx="1">
+            <a:schemeClr val="dk1"/>
+          </a:lnRef>
+          <a:fillRef idx="0">
+            <a:schemeClr val="dk1"/>
+          </a:fillRef>
+          <a:effectRef idx="0">
+            <a:schemeClr val="dk1"/>
+          </a:effectRef>
+          <a:fontRef idx="minor">
+            <a:schemeClr val="tx1"/>
+          </a:fontRef>
+        </p:style>
+      </p:cxnSp>
+    </p:spTree>
+    <p:extLst>
+      <p:ext uri="{BB962C8B-B14F-4D97-AF65-F5344CB8AC3E}">
+        <p14:creationId xmlns:p14="http://schemas.microsoft.com/office/powerpoint/2010/main" val="1193668229"/>
+      </p:ext>
+    </p:extLst>
+  </p:cSld>
+  <p:clrMapOvr>
+    <a:masterClrMapping/>
+  </p:clrMapOvr>
+</p:sld>
+</file>
+
+<file path=ppt/slides/slide7.xml><?xml version="1.0" encoding="utf-8"?>
 <p:sld xmlns:a="http://schemas.openxmlformats.org/drawingml/2006/main" xmlns:r="http://schemas.openxmlformats.org/officeDocument/2006/relationships" xmlns:p="http://schemas.openxmlformats.org/presentationml/2006/main">
   <p:cSld>
     <p:spTree>
@@ -19712,8 +24816,8 @@
         </p:blipFill>
         <p:spPr>
           <a:xfrm>
-            <a:off x="0" y="5934670"/>
-            <a:ext cx="12192000" cy="923330"/>
+            <a:off x="0" y="6272942"/>
+            <a:ext cx="12192000" cy="585057"/>
           </a:xfrm>
           <a:prstGeom prst="rect">
             <a:avLst/>
@@ -19722,10 +24826,10 @@
       </p:pic>
       <p:pic>
         <p:nvPicPr>
-          <p:cNvPr id="10" name="그림 9">
-            <a:extLst>
-              <a:ext uri="{FF2B5EF4-FFF2-40B4-BE49-F238E27FC236}">
-                <a16:creationId xmlns:a16="http://schemas.microsoft.com/office/drawing/2014/main" id="{53A68EE5-8EC7-44D3-CFAB-53C1D62F675A}"/>
+          <p:cNvPr id="3" name="그림 2">
+            <a:extLst>
+              <a:ext uri="{FF2B5EF4-FFF2-40B4-BE49-F238E27FC236}">
+                <a16:creationId xmlns:a16="http://schemas.microsoft.com/office/drawing/2014/main" id="{7C5753E8-9CF1-E653-60C1-254D3B650A11}"/>
               </a:ext>
             </a:extLst>
           </p:cNvPr>
@@ -19742,14 +24846,72 @@
         </p:blipFill>
         <p:spPr>
           <a:xfrm>
-            <a:off x="3713934" y="1790126"/>
-            <a:ext cx="4363059" cy="4029637"/>
+            <a:off x="3704002" y="2075115"/>
+            <a:ext cx="4471216" cy="4222383"/>
           </a:xfrm>
           <a:prstGeom prst="rect">
             <a:avLst/>
           </a:prstGeom>
         </p:spPr>
       </p:pic>
+      <p:sp>
+        <p:nvSpPr>
+          <p:cNvPr id="4" name="직사각형 3">
+            <a:extLst>
+              <a:ext uri="{FF2B5EF4-FFF2-40B4-BE49-F238E27FC236}">
+                <a16:creationId xmlns:a16="http://schemas.microsoft.com/office/drawing/2014/main" id="{70C6B4EB-717D-E1CB-7D23-8110AC7BCAA6}"/>
+              </a:ext>
+            </a:extLst>
+          </p:cNvPr>
+          <p:cNvSpPr/>
+          <p:nvPr/>
+        </p:nvSpPr>
+        <p:spPr>
+          <a:xfrm>
+            <a:off x="4362555" y="1651270"/>
+            <a:ext cx="3154110" cy="400110"/>
+          </a:xfrm>
+          <a:prstGeom prst="rect">
+            <a:avLst/>
+          </a:prstGeom>
+          <a:noFill/>
+        </p:spPr>
+        <p:txBody>
+          <a:bodyPr wrap="square" lIns="91440" tIns="45720" rIns="91440" bIns="45720">
+            <a:spAutoFit/>
+          </a:bodyPr>
+          <a:lstStyle/>
+          <a:p>
+            <a:pPr algn="ctr"/>
+            <a:r>
+              <a:rPr lang="ko-KR" altLang="en-US" sz="2000">
+                <a:ln w="0"/>
+                <a:effectLst>
+                  <a:outerShdw blurRad="38100" dist="19050" dir="2700000" algn="tl" rotWithShape="0">
+                    <a:schemeClr val="dk1">
+                      <a:alpha val="40000"/>
+                    </a:schemeClr>
+                  </a:outerShdw>
+                </a:effectLst>
+              </a:rPr>
+              <a:t>스테이지 시작 씬</a:t>
+            </a:r>
+            <a:endParaRPr lang="en-US" altLang="ko-KR" sz="2000" b="0" cap="none" spc="0" dirty="0">
+              <a:ln w="0"/>
+              <a:solidFill>
+                <a:schemeClr val="tx1"/>
+              </a:solidFill>
+              <a:effectLst>
+                <a:outerShdw blurRad="38100" dist="19050" dir="2700000" algn="tl" rotWithShape="0">
+                  <a:schemeClr val="dk1">
+                    <a:alpha val="40000"/>
+                  </a:schemeClr>
+                </a:outerShdw>
+              </a:effectLst>
+            </a:endParaRPr>
+          </a:p>
+        </p:txBody>
+      </p:sp>
     </p:spTree>
     <p:extLst>
       <p:ext uri="{BB962C8B-B14F-4D97-AF65-F5344CB8AC3E}">
@@ -19763,7 +24925,7 @@
 </p:sld>
 </file>
 
-<file path=ppt/slides/slide7.xml><?xml version="1.0" encoding="utf-8"?>
+<file path=ppt/slides/slide8.xml><?xml version="1.0" encoding="utf-8"?>
 <p:sld xmlns:a="http://schemas.openxmlformats.org/drawingml/2006/main" xmlns:r="http://schemas.openxmlformats.org/officeDocument/2006/relationships" xmlns:p="http://schemas.openxmlformats.org/presentationml/2006/main">
   <p:cSld>
     <p:spTree>
@@ -19782,10 +24944,10 @@
       </p:grpSpPr>
       <p:pic>
         <p:nvPicPr>
-          <p:cNvPr id="11" name="그림 10">
-            <a:extLst>
-              <a:ext uri="{FF2B5EF4-FFF2-40B4-BE49-F238E27FC236}">
-                <a16:creationId xmlns:a16="http://schemas.microsoft.com/office/drawing/2014/main" id="{D3F41102-56CF-5CB2-02A6-04B71715AEC0}"/>
+          <p:cNvPr id="14" name="그림 13">
+            <a:extLst>
+              <a:ext uri="{FF2B5EF4-FFF2-40B4-BE49-F238E27FC236}">
+                <a16:creationId xmlns:a16="http://schemas.microsoft.com/office/drawing/2014/main" id="{EA90EF0E-5B26-74AA-B972-2174A481E4DD}"/>
               </a:ext>
             </a:extLst>
           </p:cNvPr>
@@ -19802,8 +24964,8 @@
         </p:blipFill>
         <p:spPr>
           <a:xfrm>
-            <a:off x="4024822" y="1807451"/>
-            <a:ext cx="4048690" cy="3972479"/>
+            <a:off x="3952357" y="1579034"/>
+            <a:ext cx="4143953" cy="4448796"/>
           </a:xfrm>
           <a:prstGeom prst="rect">
             <a:avLst/>
@@ -20466,7 +25628,7 @@
         </p:nvSpPr>
         <p:spPr>
           <a:xfrm>
-            <a:off x="8134633" y="1983070"/>
+            <a:off x="8480970" y="2028735"/>
             <a:ext cx="2016224" cy="684076"/>
           </a:xfrm>
           <a:prstGeom prst="wedgeRoundRectCallout">
@@ -20533,7 +25695,7 @@
           <a:prstGeom prst="wedgeRoundRectCallout">
             <a:avLst>
               <a:gd name="adj1" fmla="val 87515"/>
-              <a:gd name="adj2" fmla="val -30796"/>
+              <a:gd name="adj2" fmla="val -43440"/>
               <a:gd name="adj3" fmla="val 16667"/>
             </a:avLst>
           </a:prstGeom>
@@ -20591,7 +25753,7 @@
         </p:nvSpPr>
         <p:spPr>
           <a:xfrm>
-            <a:off x="8256240" y="4088314"/>
+            <a:off x="8621620" y="3915530"/>
             <a:ext cx="2711130" cy="707886"/>
           </a:xfrm>
           <a:prstGeom prst="rect">
@@ -20769,8 +25931,8 @@
           </a:xfrm>
           <a:prstGeom prst="wedgeRoundRectCallout">
             <a:avLst>
-              <a:gd name="adj1" fmla="val 116424"/>
-              <a:gd name="adj2" fmla="val -166279"/>
+              <a:gd name="adj1" fmla="val 121935"/>
+              <a:gd name="adj2" fmla="val -169871"/>
               <a:gd name="adj3" fmla="val 16667"/>
             </a:avLst>
           </a:prstGeom>
@@ -20819,7 +25981,7 @@
 </p:sld>
 </file>
 
-<file path=ppt/slides/slide8.xml><?xml version="1.0" encoding="utf-8"?>
+<file path=ppt/slides/slide9.xml><?xml version="1.0" encoding="utf-8"?>
 <p:sld xmlns:a="http://schemas.openxmlformats.org/drawingml/2006/main" xmlns:r="http://schemas.openxmlformats.org/officeDocument/2006/relationships" xmlns:p="http://schemas.openxmlformats.org/presentationml/2006/main">
   <p:cSld>
     <p:spTree>
@@ -21704,1411 +26866,6 @@
     <p:extLst>
       <p:ext uri="{BB962C8B-B14F-4D97-AF65-F5344CB8AC3E}">
         <p14:creationId xmlns:p14="http://schemas.microsoft.com/office/powerpoint/2010/main" val="1595474381"/>
-      </p:ext>
-    </p:extLst>
-  </p:cSld>
-  <p:clrMapOvr>
-    <a:masterClrMapping/>
-  </p:clrMapOvr>
-</p:sld>
-</file>
-
-<file path=ppt/slides/slide9.xml><?xml version="1.0" encoding="utf-8"?>
-<p:sld xmlns:a="http://schemas.openxmlformats.org/drawingml/2006/main" xmlns:r="http://schemas.openxmlformats.org/officeDocument/2006/relationships" xmlns:p="http://schemas.openxmlformats.org/presentationml/2006/main">
-  <p:cSld>
-    <p:spTree>
-      <p:nvGrpSpPr>
-        <p:cNvPr id="1" name=""/>
-        <p:cNvGrpSpPr/>
-        <p:nvPr/>
-      </p:nvGrpSpPr>
-      <p:grpSpPr>
-        <a:xfrm>
-          <a:off x="0" y="0"/>
-          <a:ext cx="0" cy="0"/>
-          <a:chOff x="0" y="0"/>
-          <a:chExt cx="0" cy="0"/>
-        </a:xfrm>
-      </p:grpSpPr>
-      <p:sp>
-        <p:nvSpPr>
-          <p:cNvPr id="18" name="사각형: 둥근 한쪽 모서리 17">
-            <a:extLst>
-              <a:ext uri="{FF2B5EF4-FFF2-40B4-BE49-F238E27FC236}">
-                <a16:creationId xmlns:a16="http://schemas.microsoft.com/office/drawing/2014/main" id="{2EAF6D58-084F-2DED-DF2E-AAB0DF464557}"/>
-              </a:ext>
-            </a:extLst>
-          </p:cNvPr>
-          <p:cNvSpPr/>
-          <p:nvPr/>
-        </p:nvSpPr>
-        <p:spPr>
-          <a:xfrm flipH="1" flipV="1">
-            <a:off x="174170" y="70719"/>
-            <a:ext cx="12017829" cy="1221051"/>
-          </a:xfrm>
-          <a:prstGeom prst="round1Rect">
-            <a:avLst>
-              <a:gd name="adj" fmla="val 23799"/>
-            </a:avLst>
-          </a:prstGeom>
-          <a:solidFill>
-            <a:schemeClr val="bg1">
-              <a:lumMod val="95000"/>
-              <a:alpha val="50000"/>
-            </a:schemeClr>
-          </a:solidFill>
-          <a:ln w="10818" cap="flat">
-            <a:noFill/>
-            <a:prstDash val="solid"/>
-            <a:miter/>
-          </a:ln>
-        </p:spPr>
-        <p:style>
-          <a:lnRef idx="2">
-            <a:schemeClr val="accent1">
-              <a:shade val="15000"/>
-            </a:schemeClr>
-          </a:lnRef>
-          <a:fillRef idx="1">
-            <a:schemeClr val="accent1"/>
-          </a:fillRef>
-          <a:effectRef idx="0">
-            <a:schemeClr val="accent1"/>
-          </a:effectRef>
-          <a:fontRef idx="minor">
-            <a:schemeClr val="lt1"/>
-          </a:fontRef>
-        </p:style>
-        <p:txBody>
-          <a:bodyPr rtlCol="0" anchor="ctr"/>
-          <a:lstStyle/>
-          <a:p>
-            <a:pPr algn="ctr"/>
-            <a:endParaRPr lang="ko-KR" altLang="en-US"/>
-          </a:p>
-        </p:txBody>
-      </p:sp>
-      <p:grpSp>
-        <p:nvGrpSpPr>
-          <p:cNvPr id="20" name="그룹 19">
-            <a:extLst>
-              <a:ext uri="{FF2B5EF4-FFF2-40B4-BE49-F238E27FC236}">
-                <a16:creationId xmlns:a16="http://schemas.microsoft.com/office/drawing/2014/main" id="{739452E3-2013-66BF-2EBE-F0EC960C4077}"/>
-              </a:ext>
-            </a:extLst>
-          </p:cNvPr>
-          <p:cNvGrpSpPr/>
-          <p:nvPr/>
-        </p:nvGrpSpPr>
-        <p:grpSpPr>
-          <a:xfrm>
-            <a:off x="376102" y="333243"/>
-            <a:ext cx="6836022" cy="830997"/>
-            <a:chOff x="376102" y="333243"/>
-            <a:chExt cx="6836022" cy="830997"/>
-          </a:xfrm>
-        </p:grpSpPr>
-        <p:sp>
-          <p:nvSpPr>
-            <p:cNvPr id="22" name="TextBox 21">
-              <a:extLst>
-                <a:ext uri="{FF2B5EF4-FFF2-40B4-BE49-F238E27FC236}">
-                  <a16:creationId xmlns:a16="http://schemas.microsoft.com/office/drawing/2014/main" id="{92519771-A232-D9CF-4769-EBFF2F8CFBB1}"/>
-                </a:ext>
-              </a:extLst>
-            </p:cNvPr>
-            <p:cNvSpPr txBox="1"/>
-            <p:nvPr/>
-          </p:nvSpPr>
-          <p:spPr>
-            <a:xfrm>
-              <a:off x="1461721" y="366114"/>
-              <a:ext cx="2252213" cy="276999"/>
-            </a:xfrm>
-            <a:prstGeom prst="rect">
-              <a:avLst/>
-            </a:prstGeom>
-            <a:noFill/>
-          </p:spPr>
-          <p:txBody>
-            <a:bodyPr wrap="square">
-              <a:spAutoFit/>
-            </a:bodyPr>
-            <a:lstStyle/>
-            <a:p>
-              <a:r>
-                <a:rPr lang="en-US" altLang="ko-KR" sz="1200" b="1" dirty="0">
-                  <a:ln>
-                    <a:solidFill>
-                      <a:schemeClr val="accent1">
-                        <a:shade val="15000"/>
-                        <a:alpha val="0"/>
-                      </a:schemeClr>
-                    </a:solidFill>
-                  </a:ln>
-                  <a:solidFill>
-                    <a:srgbClr val="3378C8">
-                      <a:alpha val="50000"/>
-                    </a:srgbClr>
-                  </a:solidFill>
-                  <a:latin typeface="맑은 고딕" panose="020B0503020000020004" pitchFamily="50" charset="-127"/>
-                  <a:ea typeface="맑은 고딕" panose="020B0503020000020004" pitchFamily="50" charset="-127"/>
-                </a:rPr>
-                <a:t>K-Digital Training</a:t>
-              </a:r>
-              <a:endParaRPr lang="ko-KR" altLang="en-US" sz="1200" b="1" dirty="0">
-                <a:ln>
-                  <a:solidFill>
-                    <a:schemeClr val="accent1">
-                      <a:shade val="15000"/>
-                      <a:alpha val="0"/>
-                    </a:schemeClr>
-                  </a:solidFill>
-                </a:ln>
-                <a:solidFill>
-                  <a:srgbClr val="3378C8">
-                    <a:alpha val="50000"/>
-                  </a:srgbClr>
-                </a:solidFill>
-                <a:latin typeface="맑은 고딕" panose="020B0503020000020004" pitchFamily="50" charset="-127"/>
-                <a:ea typeface="맑은 고딕" panose="020B0503020000020004" pitchFamily="50" charset="-127"/>
-              </a:endParaRPr>
-            </a:p>
-          </p:txBody>
-        </p:sp>
-        <p:sp>
-          <p:nvSpPr>
-            <p:cNvPr id="23" name="TextBox 22">
-              <a:extLst>
-                <a:ext uri="{FF2B5EF4-FFF2-40B4-BE49-F238E27FC236}">
-                  <a16:creationId xmlns:a16="http://schemas.microsoft.com/office/drawing/2014/main" id="{EE109AB5-00CA-F0E8-7FD9-645FB6E912A9}"/>
-                </a:ext>
-              </a:extLst>
-            </p:cNvPr>
-            <p:cNvSpPr txBox="1"/>
-            <p:nvPr/>
-          </p:nvSpPr>
-          <p:spPr>
-            <a:xfrm>
-              <a:off x="1461721" y="585057"/>
-              <a:ext cx="5750403" cy="523220"/>
-            </a:xfrm>
-            <a:prstGeom prst="rect">
-              <a:avLst/>
-            </a:prstGeom>
-            <a:noFill/>
-          </p:spPr>
-          <p:txBody>
-            <a:bodyPr wrap="square">
-              <a:spAutoFit/>
-            </a:bodyPr>
-            <a:lstStyle/>
-            <a:p>
-              <a:pPr>
-                <a:defRPr/>
-              </a:pPr>
-              <a:r>
-                <a:rPr lang="ko-KR" altLang="en-US" sz="2800" b="1" dirty="0">
-                  <a:ln>
-                    <a:solidFill>
-                      <a:schemeClr val="accent1">
-                        <a:shade val="15000"/>
-                        <a:alpha val="0"/>
-                      </a:schemeClr>
-                    </a:solidFill>
-                  </a:ln>
-                  <a:solidFill>
-                    <a:schemeClr val="tx1">
-                      <a:lumMod val="75000"/>
-                      <a:lumOff val="25000"/>
-                    </a:schemeClr>
-                  </a:solidFill>
-                  <a:latin typeface="맑은 고딕" panose="020B0503020000020004" pitchFamily="50" charset="-127"/>
-                  <a:ea typeface="맑은 고딕" panose="020B0503020000020004" pitchFamily="50" charset="-127"/>
-                </a:rPr>
-                <a:t>프로젝트 결과화면</a:t>
-              </a:r>
-              <a:r>
-                <a:rPr lang="en-US" altLang="ko-KR" sz="2800" b="1" dirty="0">
-                  <a:ln>
-                    <a:solidFill>
-                      <a:schemeClr val="accent1">
-                        <a:shade val="15000"/>
-                        <a:alpha val="0"/>
-                      </a:schemeClr>
-                    </a:solidFill>
-                  </a:ln>
-                  <a:solidFill>
-                    <a:schemeClr val="tx1">
-                      <a:lumMod val="75000"/>
-                      <a:lumOff val="25000"/>
-                    </a:schemeClr>
-                  </a:solidFill>
-                  <a:latin typeface="맑은 고딕" panose="020B0503020000020004" pitchFamily="50" charset="-127"/>
-                  <a:ea typeface="맑은 고딕" panose="020B0503020000020004" pitchFamily="50" charset="-127"/>
-                </a:rPr>
-                <a:t>(</a:t>
-              </a:r>
-              <a:r>
-                <a:rPr lang="ko-KR" altLang="en-US" sz="2800" b="1" dirty="0">
-                  <a:ln>
-                    <a:solidFill>
-                      <a:schemeClr val="accent1">
-                        <a:shade val="15000"/>
-                        <a:alpha val="0"/>
-                      </a:schemeClr>
-                    </a:solidFill>
-                  </a:ln>
-                  <a:solidFill>
-                    <a:schemeClr val="tx1">
-                      <a:lumMod val="75000"/>
-                      <a:lumOff val="25000"/>
-                    </a:schemeClr>
-                  </a:solidFill>
-                  <a:latin typeface="맑은 고딕" panose="020B0503020000020004" pitchFamily="50" charset="-127"/>
-                  <a:ea typeface="맑은 고딕" panose="020B0503020000020004" pitchFamily="50" charset="-127"/>
-                </a:rPr>
-                <a:t>벽돌의 생명력</a:t>
-              </a:r>
-              <a:r>
-                <a:rPr lang="en-US" altLang="ko-KR" sz="2800" b="1" dirty="0">
-                  <a:ln>
-                    <a:solidFill>
-                      <a:schemeClr val="accent1">
-                        <a:shade val="15000"/>
-                        <a:alpha val="0"/>
-                      </a:schemeClr>
-                    </a:solidFill>
-                  </a:ln>
-                  <a:solidFill>
-                    <a:schemeClr val="tx1">
-                      <a:lumMod val="75000"/>
-                      <a:lumOff val="25000"/>
-                    </a:schemeClr>
-                  </a:solidFill>
-                  <a:latin typeface="맑은 고딕" panose="020B0503020000020004" pitchFamily="50" charset="-127"/>
-                  <a:ea typeface="맑은 고딕" panose="020B0503020000020004" pitchFamily="50" charset="-127"/>
-                </a:rPr>
-                <a:t>)</a:t>
-              </a:r>
-              <a:endParaRPr lang="ko-KR" altLang="en-US" sz="2800" b="1" dirty="0">
-                <a:ln>
-                  <a:solidFill>
-                    <a:schemeClr val="accent1">
-                      <a:shade val="15000"/>
-                      <a:alpha val="0"/>
-                    </a:schemeClr>
-                  </a:solidFill>
-                </a:ln>
-                <a:solidFill>
-                  <a:schemeClr val="tx1">
-                    <a:lumMod val="75000"/>
-                    <a:lumOff val="25000"/>
-                  </a:schemeClr>
-                </a:solidFill>
-                <a:latin typeface="맑은 고딕" panose="020B0503020000020004" pitchFamily="50" charset="-127"/>
-                <a:ea typeface="맑은 고딕" panose="020B0503020000020004" pitchFamily="50" charset="-127"/>
-              </a:endParaRPr>
-            </a:p>
-          </p:txBody>
-        </p:sp>
-        <p:sp>
-          <p:nvSpPr>
-            <p:cNvPr id="25" name="TextBox 24">
-              <a:extLst>
-                <a:ext uri="{FF2B5EF4-FFF2-40B4-BE49-F238E27FC236}">
-                  <a16:creationId xmlns:a16="http://schemas.microsoft.com/office/drawing/2014/main" id="{093CAA92-4EAE-8A8B-E8EE-0F5B51065B1A}"/>
-                </a:ext>
-              </a:extLst>
-            </p:cNvPr>
-            <p:cNvSpPr txBox="1"/>
-            <p:nvPr/>
-          </p:nvSpPr>
-          <p:spPr>
-            <a:xfrm>
-              <a:off x="376102" y="333243"/>
-              <a:ext cx="1266679" cy="830997"/>
-            </a:xfrm>
-            <a:prstGeom prst="rect">
-              <a:avLst/>
-            </a:prstGeom>
-            <a:noFill/>
-          </p:spPr>
-          <p:txBody>
-            <a:bodyPr wrap="square" tIns="0" bIns="0">
-              <a:spAutoFit/>
-            </a:bodyPr>
-            <a:lstStyle/>
-            <a:p>
-              <a:pPr eaLnBrk="1" fontAlgn="auto" latinLnBrk="1" hangingPunct="1">
-                <a:spcBef>
-                  <a:spcPts val="0"/>
-                </a:spcBef>
-                <a:spcAft>
-                  <a:spcPts val="0"/>
-                </a:spcAft>
-                <a:defRPr/>
-              </a:pPr>
-              <a:r>
-                <a:rPr lang="en-US" altLang="ko-KR" sz="5400" dirty="0">
-                  <a:ln>
-                    <a:solidFill>
-                      <a:schemeClr val="accent1">
-                        <a:shade val="15000"/>
-                        <a:alpha val="0"/>
-                      </a:schemeClr>
-                    </a:solidFill>
-                  </a:ln>
-                  <a:solidFill>
-                    <a:srgbClr val="3378C8"/>
-                  </a:solidFill>
-                  <a:latin typeface="세방고딕 Bold" panose="00000800000000000000" pitchFamily="2" charset="-127"/>
-                  <a:ea typeface="세방고딕 Bold" panose="00000800000000000000" pitchFamily="2" charset="-127"/>
-                </a:rPr>
-                <a:t>01</a:t>
-              </a:r>
-              <a:endParaRPr lang="ko-KR" altLang="en-US" sz="4400" b="1" dirty="0">
-                <a:ln>
-                  <a:solidFill>
-                    <a:schemeClr val="accent1">
-                      <a:shade val="15000"/>
-                      <a:alpha val="0"/>
-                    </a:schemeClr>
-                  </a:solidFill>
-                </a:ln>
-                <a:solidFill>
-                  <a:srgbClr val="3378C8"/>
-                </a:solidFill>
-                <a:latin typeface="세방고딕 Regular" panose="00000500000000000000" pitchFamily="2" charset="-127"/>
-                <a:ea typeface="세방고딕 Regular" panose="00000500000000000000" pitchFamily="2" charset="-127"/>
-              </a:endParaRPr>
-            </a:p>
-          </p:txBody>
-        </p:sp>
-      </p:grpSp>
-      <p:pic>
-        <p:nvPicPr>
-          <p:cNvPr id="26" name="그림 25">
-            <a:extLst>
-              <a:ext uri="{FF2B5EF4-FFF2-40B4-BE49-F238E27FC236}">
-                <a16:creationId xmlns:a16="http://schemas.microsoft.com/office/drawing/2014/main" id="{FE80A41B-F61E-4713-97AE-0B084B8425AD}"/>
-              </a:ext>
-            </a:extLst>
-          </p:cNvPr>
-          <p:cNvPicPr>
-            <a:picLocks noChangeAspect="1"/>
-          </p:cNvPicPr>
-          <p:nvPr/>
-        </p:nvPicPr>
-        <p:blipFill rotWithShape="1">
-          <a:blip r:embed="rId2" cstate="print">
-            <a:duotone>
-              <a:schemeClr val="accent5">
-                <a:shade val="45000"/>
-                <a:satMod val="135000"/>
-              </a:schemeClr>
-              <a:prstClr val="white"/>
-            </a:duotone>
-            <a:alphaModFix amt="27000"/>
-            <a:extLst>
-              <a:ext uri="{28A0092B-C50C-407E-A947-70E740481C1C}">
-                <a14:useLocalDpi xmlns:a14="http://schemas.microsoft.com/office/drawing/2010/main"/>
-              </a:ext>
-            </a:extLst>
-          </a:blip>
-          <a:srcRect/>
-          <a:stretch/>
-        </p:blipFill>
-        <p:spPr>
-          <a:xfrm rot="10800000" flipV="1">
-            <a:off x="-1" y="1673336"/>
-            <a:ext cx="12192000" cy="233580"/>
-          </a:xfrm>
-          <a:prstGeom prst="rect">
-            <a:avLst/>
-          </a:prstGeom>
-        </p:spPr>
-      </p:pic>
-      <p:sp>
-        <p:nvSpPr>
-          <p:cNvPr id="31" name="TextBox 30">
-            <a:extLst>
-              <a:ext uri="{FF2B5EF4-FFF2-40B4-BE49-F238E27FC236}">
-                <a16:creationId xmlns:a16="http://schemas.microsoft.com/office/drawing/2014/main" id="{F3F47CD5-B807-B83F-61E9-F4274413B9B9}"/>
-              </a:ext>
-            </a:extLst>
-          </p:cNvPr>
-          <p:cNvSpPr txBox="1"/>
-          <p:nvPr/>
-        </p:nvSpPr>
-        <p:spPr>
-          <a:xfrm>
-            <a:off x="0" y="0"/>
-            <a:ext cx="12192000" cy="114300"/>
-          </a:xfrm>
-          <a:prstGeom prst="rect">
-            <a:avLst/>
-          </a:prstGeom>
-          <a:solidFill>
-            <a:srgbClr val="FFD85C"/>
-          </a:solidFill>
-          <a:effectLst/>
-        </p:spPr>
-        <p:txBody>
-          <a:bodyPr wrap="square" rtlCol="0" anchor="ctr">
-            <a:noAutofit/>
-          </a:bodyPr>
-          <a:lstStyle/>
-          <a:p>
-            <a:pPr algn="ctr"/>
-            <a:endParaRPr lang="ko-KR" altLang="en-US" sz="1600" b="1" spc="600" dirty="0">
-              <a:ln>
-                <a:solidFill>
-                  <a:schemeClr val="accent1">
-                    <a:shade val="15000"/>
-                    <a:alpha val="0"/>
-                  </a:schemeClr>
-                </a:solidFill>
-              </a:ln>
-              <a:solidFill>
-                <a:srgbClr val="3378C8"/>
-              </a:solidFill>
-              <a:latin typeface="세방고딕 Regular" panose="00000500000000000000" pitchFamily="2" charset="-127"/>
-              <a:ea typeface="세방고딕 Regular" panose="00000500000000000000" pitchFamily="2" charset="-127"/>
-            </a:endParaRPr>
-          </a:p>
-        </p:txBody>
-      </p:sp>
-      <p:sp>
-        <p:nvSpPr>
-          <p:cNvPr id="32" name="TextBox 31">
-            <a:extLst>
-              <a:ext uri="{FF2B5EF4-FFF2-40B4-BE49-F238E27FC236}">
-                <a16:creationId xmlns:a16="http://schemas.microsoft.com/office/drawing/2014/main" id="{33D5EC40-66CF-4031-0B6C-BB0FF72B95AC}"/>
-              </a:ext>
-            </a:extLst>
-          </p:cNvPr>
-          <p:cNvSpPr txBox="1"/>
-          <p:nvPr/>
-        </p:nvSpPr>
-        <p:spPr>
-          <a:xfrm>
-            <a:off x="0" y="0"/>
-            <a:ext cx="1336675" cy="114300"/>
-          </a:xfrm>
-          <a:prstGeom prst="rect">
-            <a:avLst/>
-          </a:prstGeom>
-          <a:solidFill>
-            <a:srgbClr val="3378C8"/>
-          </a:solidFill>
-          <a:effectLst/>
-        </p:spPr>
-        <p:txBody>
-          <a:bodyPr wrap="square" rtlCol="0" anchor="ctr">
-            <a:noAutofit/>
-          </a:bodyPr>
-          <a:lstStyle/>
-          <a:p>
-            <a:pPr algn="ctr"/>
-            <a:endParaRPr lang="ko-KR" altLang="en-US" sz="1600" b="1" spc="600" dirty="0">
-              <a:ln>
-                <a:solidFill>
-                  <a:schemeClr val="accent1">
-                    <a:shade val="15000"/>
-                    <a:alpha val="0"/>
-                  </a:schemeClr>
-                </a:solidFill>
-              </a:ln>
-              <a:solidFill>
-                <a:srgbClr val="3378C8"/>
-              </a:solidFill>
-              <a:latin typeface="세방고딕 Regular" panose="00000500000000000000" pitchFamily="2" charset="-127"/>
-              <a:ea typeface="세방고딕 Regular" panose="00000500000000000000" pitchFamily="2" charset="-127"/>
-            </a:endParaRPr>
-          </a:p>
-        </p:txBody>
-      </p:sp>
-      <p:pic>
-        <p:nvPicPr>
-          <p:cNvPr id="38" name="그래픽 37">
-            <a:extLst>
-              <a:ext uri="{FF2B5EF4-FFF2-40B4-BE49-F238E27FC236}">
-                <a16:creationId xmlns:a16="http://schemas.microsoft.com/office/drawing/2014/main" id="{52169E4C-2799-F656-9DE1-1585D60362A7}"/>
-              </a:ext>
-            </a:extLst>
-          </p:cNvPr>
-          <p:cNvPicPr>
-            <a:picLocks noChangeAspect="1"/>
-          </p:cNvPicPr>
-          <p:nvPr/>
-        </p:nvPicPr>
-        <p:blipFill rotWithShape="1">
-          <a:blip r:embed="rId3">
-            <a:extLst>
-              <a:ext uri="{96DAC541-7B7A-43D3-8B79-37D633B846F1}">
-                <asvg:svgBlip xmlns:asvg="http://schemas.microsoft.com/office/drawing/2016/SVG/main" r:embed="rId4"/>
-              </a:ext>
-            </a:extLst>
-          </a:blip>
-          <a:srcRect l="34974"/>
-          <a:stretch/>
-        </p:blipFill>
-        <p:spPr>
-          <a:xfrm rot="14660350">
-            <a:off x="1714" y="5530566"/>
-            <a:ext cx="1452422" cy="917364"/>
-          </a:xfrm>
-          <a:prstGeom prst="rect">
-            <a:avLst/>
-          </a:prstGeom>
-        </p:spPr>
-      </p:pic>
-      <p:pic>
-        <p:nvPicPr>
-          <p:cNvPr id="77" name="그래픽 76">
-            <a:extLst>
-              <a:ext uri="{FF2B5EF4-FFF2-40B4-BE49-F238E27FC236}">
-                <a16:creationId xmlns:a16="http://schemas.microsoft.com/office/drawing/2014/main" id="{07A591E4-A623-F9E5-1D76-C87CC8D6F30F}"/>
-              </a:ext>
-            </a:extLst>
-          </p:cNvPr>
-          <p:cNvPicPr>
-            <a:picLocks noChangeAspect="1"/>
-          </p:cNvPicPr>
-          <p:nvPr/>
-        </p:nvPicPr>
-        <p:blipFill>
-          <a:blip r:embed="rId5">
-            <a:extLst>
-              <a:ext uri="{96DAC541-7B7A-43D3-8B79-37D633B846F1}">
-                <asvg:svgBlip xmlns:asvg="http://schemas.microsoft.com/office/drawing/2016/SVG/main" r:embed="rId6"/>
-              </a:ext>
-            </a:extLst>
-          </a:blip>
-          <a:stretch>
-            <a:fillRect/>
-          </a:stretch>
-        </p:blipFill>
-        <p:spPr>
-          <a:xfrm rot="21165700">
-            <a:off x="8621099" y="4762217"/>
-            <a:ext cx="3710393" cy="1869483"/>
-          </a:xfrm>
-          <a:prstGeom prst="rect">
-            <a:avLst/>
-          </a:prstGeom>
-        </p:spPr>
-      </p:pic>
-      <p:pic>
-        <p:nvPicPr>
-          <p:cNvPr id="5" name="그래픽 4">
-            <a:extLst>
-              <a:ext uri="{FF2B5EF4-FFF2-40B4-BE49-F238E27FC236}">
-                <a16:creationId xmlns:a16="http://schemas.microsoft.com/office/drawing/2014/main" id="{F78E59B9-5F04-49C5-1722-52369FFA7F3C}"/>
-              </a:ext>
-            </a:extLst>
-          </p:cNvPr>
-          <p:cNvPicPr>
-            <a:picLocks noChangeAspect="1"/>
-          </p:cNvPicPr>
-          <p:nvPr/>
-        </p:nvPicPr>
-        <p:blipFill rotWithShape="1">
-          <a:blip r:embed="rId7">
-            <a:extLst>
-              <a:ext uri="{96DAC541-7B7A-43D3-8B79-37D633B846F1}">
-                <asvg:svgBlip xmlns:asvg="http://schemas.microsoft.com/office/drawing/2016/SVG/main" r:embed="rId8"/>
-              </a:ext>
-            </a:extLst>
-          </a:blip>
-          <a:srcRect l="45412"/>
-          <a:stretch/>
-        </p:blipFill>
-        <p:spPr>
-          <a:xfrm>
-            <a:off x="-1" y="3018378"/>
-            <a:ext cx="2914927" cy="2847758"/>
-          </a:xfrm>
-          <a:prstGeom prst="rect">
-            <a:avLst/>
-          </a:prstGeom>
-        </p:spPr>
-      </p:pic>
-      <p:pic>
-        <p:nvPicPr>
-          <p:cNvPr id="7" name="그래픽 6">
-            <a:extLst>
-              <a:ext uri="{FF2B5EF4-FFF2-40B4-BE49-F238E27FC236}">
-                <a16:creationId xmlns:a16="http://schemas.microsoft.com/office/drawing/2014/main" id="{83FBC032-B6AF-A79B-5B30-F603859AE362}"/>
-              </a:ext>
-            </a:extLst>
-          </p:cNvPr>
-          <p:cNvPicPr>
-            <a:picLocks noChangeAspect="1"/>
-          </p:cNvPicPr>
-          <p:nvPr/>
-        </p:nvPicPr>
-        <p:blipFill>
-          <a:blip r:embed="rId9">
-            <a:extLst>
-              <a:ext uri="{96DAC541-7B7A-43D3-8B79-37D633B846F1}">
-                <asvg:svgBlip xmlns:asvg="http://schemas.microsoft.com/office/drawing/2016/SVG/main" r:embed="rId10"/>
-              </a:ext>
-            </a:extLst>
-          </a:blip>
-          <a:stretch>
-            <a:fillRect/>
-          </a:stretch>
-        </p:blipFill>
-        <p:spPr>
-          <a:xfrm>
-            <a:off x="0" y="5934670"/>
-            <a:ext cx="12192000" cy="923330"/>
-          </a:xfrm>
-          <a:prstGeom prst="rect">
-            <a:avLst/>
-          </a:prstGeom>
-        </p:spPr>
-      </p:pic>
-      <p:pic>
-        <p:nvPicPr>
-          <p:cNvPr id="3" name="그림 2">
-            <a:extLst>
-              <a:ext uri="{FF2B5EF4-FFF2-40B4-BE49-F238E27FC236}">
-                <a16:creationId xmlns:a16="http://schemas.microsoft.com/office/drawing/2014/main" id="{832AF514-862C-C0CE-2C90-C7F34F58DB87}"/>
-              </a:ext>
-            </a:extLst>
-          </p:cNvPr>
-          <p:cNvPicPr>
-            <a:picLocks noChangeAspect="1"/>
-          </p:cNvPicPr>
-          <p:nvPr/>
-        </p:nvPicPr>
-        <p:blipFill>
-          <a:blip r:embed="rId11"/>
-          <a:stretch>
-            <a:fillRect/>
-          </a:stretch>
-        </p:blipFill>
-        <p:spPr>
-          <a:xfrm>
-            <a:off x="1704165" y="1712285"/>
-            <a:ext cx="4086795" cy="3905795"/>
-          </a:xfrm>
-          <a:prstGeom prst="rect">
-            <a:avLst/>
-          </a:prstGeom>
-        </p:spPr>
-      </p:pic>
-      <p:pic>
-        <p:nvPicPr>
-          <p:cNvPr id="6" name="그림 5">
-            <a:extLst>
-              <a:ext uri="{FF2B5EF4-FFF2-40B4-BE49-F238E27FC236}">
-                <a16:creationId xmlns:a16="http://schemas.microsoft.com/office/drawing/2014/main" id="{E4918CF5-C7D5-D355-5008-79DA8900B388}"/>
-              </a:ext>
-            </a:extLst>
-          </p:cNvPr>
-          <p:cNvPicPr>
-            <a:picLocks noChangeAspect="1"/>
-          </p:cNvPicPr>
-          <p:nvPr/>
-        </p:nvPicPr>
-        <p:blipFill>
-          <a:blip r:embed="rId12"/>
-          <a:stretch>
-            <a:fillRect/>
-          </a:stretch>
-        </p:blipFill>
-        <p:spPr>
-          <a:xfrm>
-            <a:off x="6319758" y="2043489"/>
-            <a:ext cx="3267531" cy="419158"/>
-          </a:xfrm>
-          <a:prstGeom prst="rect">
-            <a:avLst/>
-          </a:prstGeom>
-        </p:spPr>
-      </p:pic>
-      <p:pic>
-        <p:nvPicPr>
-          <p:cNvPr id="9" name="그림 8">
-            <a:extLst>
-              <a:ext uri="{FF2B5EF4-FFF2-40B4-BE49-F238E27FC236}">
-                <a16:creationId xmlns:a16="http://schemas.microsoft.com/office/drawing/2014/main" id="{28C7BF37-A9F2-864C-7247-CFCE18DC9FE1}"/>
-              </a:ext>
-            </a:extLst>
-          </p:cNvPr>
-          <p:cNvPicPr>
-            <a:picLocks noChangeAspect="1"/>
-          </p:cNvPicPr>
-          <p:nvPr/>
-        </p:nvPicPr>
-        <p:blipFill>
-          <a:blip r:embed="rId13"/>
-          <a:stretch>
-            <a:fillRect/>
-          </a:stretch>
-        </p:blipFill>
-        <p:spPr>
-          <a:xfrm>
-            <a:off x="6285273" y="2686812"/>
-            <a:ext cx="3362794" cy="352474"/>
-          </a:xfrm>
-          <a:prstGeom prst="rect">
-            <a:avLst/>
-          </a:prstGeom>
-        </p:spPr>
-      </p:pic>
-      <p:pic>
-        <p:nvPicPr>
-          <p:cNvPr id="12" name="그림 11">
-            <a:extLst>
-              <a:ext uri="{FF2B5EF4-FFF2-40B4-BE49-F238E27FC236}">
-                <a16:creationId xmlns:a16="http://schemas.microsoft.com/office/drawing/2014/main" id="{A6684EC2-ADE1-E7C0-4EE0-0F50FF80730D}"/>
-              </a:ext>
-            </a:extLst>
-          </p:cNvPr>
-          <p:cNvPicPr>
-            <a:picLocks noChangeAspect="1"/>
-          </p:cNvPicPr>
-          <p:nvPr/>
-        </p:nvPicPr>
-        <p:blipFill>
-          <a:blip r:embed="rId14"/>
-          <a:stretch>
-            <a:fillRect/>
-          </a:stretch>
-        </p:blipFill>
-        <p:spPr>
-          <a:xfrm>
-            <a:off x="6273311" y="3236498"/>
-            <a:ext cx="3362794" cy="428685"/>
-          </a:xfrm>
-          <a:prstGeom prst="rect">
-            <a:avLst/>
-          </a:prstGeom>
-        </p:spPr>
-      </p:pic>
-      <p:pic>
-        <p:nvPicPr>
-          <p:cNvPr id="14" name="그림 13">
-            <a:extLst>
-              <a:ext uri="{FF2B5EF4-FFF2-40B4-BE49-F238E27FC236}">
-                <a16:creationId xmlns:a16="http://schemas.microsoft.com/office/drawing/2014/main" id="{7374ADB1-8C50-31DA-ABBD-CC0F66033738}"/>
-              </a:ext>
-            </a:extLst>
-          </p:cNvPr>
-          <p:cNvPicPr>
-            <a:picLocks noChangeAspect="1"/>
-          </p:cNvPicPr>
-          <p:nvPr/>
-        </p:nvPicPr>
-        <p:blipFill>
-          <a:blip r:embed="rId15"/>
-          <a:stretch>
-            <a:fillRect/>
-          </a:stretch>
-        </p:blipFill>
-        <p:spPr>
-          <a:xfrm>
-            <a:off x="6451069" y="3919119"/>
-            <a:ext cx="3124636" cy="409632"/>
-          </a:xfrm>
-          <a:prstGeom prst="rect">
-            <a:avLst/>
-          </a:prstGeom>
-        </p:spPr>
-      </p:pic>
-      <p:pic>
-        <p:nvPicPr>
-          <p:cNvPr id="16" name="그림 15">
-            <a:extLst>
-              <a:ext uri="{FF2B5EF4-FFF2-40B4-BE49-F238E27FC236}">
-                <a16:creationId xmlns:a16="http://schemas.microsoft.com/office/drawing/2014/main" id="{290447AA-B8A4-EB63-259C-A5B78EF88B49}"/>
-              </a:ext>
-            </a:extLst>
-          </p:cNvPr>
-          <p:cNvPicPr>
-            <a:picLocks noChangeAspect="1"/>
-          </p:cNvPicPr>
-          <p:nvPr/>
-        </p:nvPicPr>
-        <p:blipFill>
-          <a:blip r:embed="rId16"/>
-          <a:stretch>
-            <a:fillRect/>
-          </a:stretch>
-        </p:blipFill>
-        <p:spPr>
-          <a:xfrm>
-            <a:off x="6330469" y="4545924"/>
-            <a:ext cx="3248478" cy="323895"/>
-          </a:xfrm>
-          <a:prstGeom prst="rect">
-            <a:avLst/>
-          </a:prstGeom>
-        </p:spPr>
-      </p:pic>
-      <p:sp>
-        <p:nvSpPr>
-          <p:cNvPr id="17" name="직사각형 16">
-            <a:extLst>
-              <a:ext uri="{FF2B5EF4-FFF2-40B4-BE49-F238E27FC236}">
-                <a16:creationId xmlns:a16="http://schemas.microsoft.com/office/drawing/2014/main" id="{FA9F5B4A-72BD-2DA3-FD24-DCAC9BE771F7}"/>
-              </a:ext>
-            </a:extLst>
-          </p:cNvPr>
-          <p:cNvSpPr/>
-          <p:nvPr/>
-        </p:nvSpPr>
-        <p:spPr>
-          <a:xfrm>
-            <a:off x="6132964" y="5025455"/>
-            <a:ext cx="5088427" cy="707886"/>
-          </a:xfrm>
-          <a:prstGeom prst="rect">
-            <a:avLst/>
-          </a:prstGeom>
-          <a:noFill/>
-        </p:spPr>
-        <p:txBody>
-          <a:bodyPr wrap="square" lIns="91440" tIns="45720" rIns="91440" bIns="45720">
-            <a:spAutoFit/>
-          </a:bodyPr>
-          <a:lstStyle/>
-          <a:p>
-            <a:pPr algn="ctr"/>
-            <a:r>
-              <a:rPr lang="ko-KR" altLang="en-US" sz="2000" dirty="0">
-                <a:ln w="0"/>
-                <a:effectLst>
-                  <a:outerShdw blurRad="38100" dist="19050" dir="2700000" algn="tl" rotWithShape="0">
-                    <a:schemeClr val="dk1">
-                      <a:alpha val="40000"/>
-                    </a:schemeClr>
-                  </a:outerShdw>
-                </a:effectLst>
-              </a:rPr>
-              <a:t>벽돌의 생명력 </a:t>
-            </a:r>
-            <a:r>
-              <a:rPr lang="en-US" altLang="ko-KR" sz="2000" dirty="0">
-                <a:ln w="0"/>
-                <a:effectLst>
-                  <a:outerShdw blurRad="38100" dist="19050" dir="2700000" algn="tl" rotWithShape="0">
-                    <a:schemeClr val="dk1">
-                      <a:alpha val="40000"/>
-                    </a:schemeClr>
-                  </a:outerShdw>
-                </a:effectLst>
-              </a:rPr>
-              <a:t>= </a:t>
-            </a:r>
-            <a:r>
-              <a:rPr lang="ko-KR" altLang="en-US" sz="2000" dirty="0">
-                <a:ln w="0"/>
-                <a:effectLst>
-                  <a:outerShdw blurRad="38100" dist="19050" dir="2700000" algn="tl" rotWithShape="0">
-                    <a:schemeClr val="dk1">
-                      <a:alpha val="40000"/>
-                    </a:schemeClr>
-                  </a:outerShdw>
-                </a:effectLst>
-              </a:rPr>
-              <a:t>스테이지 번호</a:t>
-            </a:r>
-            <a:endParaRPr lang="en-US" altLang="ko-KR" sz="2000" dirty="0">
-              <a:ln w="0"/>
-              <a:effectLst>
-                <a:outerShdw blurRad="38100" dist="19050" dir="2700000" algn="tl" rotWithShape="0">
-                  <a:schemeClr val="dk1">
-                    <a:alpha val="40000"/>
-                  </a:schemeClr>
-                </a:outerShdw>
-              </a:effectLst>
-            </a:endParaRPr>
-          </a:p>
-          <a:p>
-            <a:pPr algn="ctr"/>
-            <a:r>
-              <a:rPr lang="ko-KR" altLang="en-US" sz="2000" b="0" cap="none" spc="0" dirty="0">
-                <a:ln w="0"/>
-                <a:solidFill>
-                  <a:schemeClr val="tx1"/>
-                </a:solidFill>
-                <a:effectLst>
-                  <a:outerShdw blurRad="38100" dist="19050" dir="2700000" algn="tl" rotWithShape="0">
-                    <a:schemeClr val="dk1">
-                      <a:alpha val="40000"/>
-                    </a:schemeClr>
-                  </a:outerShdw>
-                </a:effectLst>
-              </a:rPr>
-              <a:t>공이 벽돌의 생명력 만큼 충돌해야 파괴됨</a:t>
-            </a:r>
-            <a:r>
-              <a:rPr lang="en-US" altLang="ko-KR" sz="2000" b="0" cap="none" spc="0" dirty="0">
-                <a:ln w="0"/>
-                <a:solidFill>
-                  <a:schemeClr val="tx1"/>
-                </a:solidFill>
-                <a:effectLst>
-                  <a:outerShdw blurRad="38100" dist="19050" dir="2700000" algn="tl" rotWithShape="0">
-                    <a:schemeClr val="dk1">
-                      <a:alpha val="40000"/>
-                    </a:schemeClr>
-                  </a:outerShdw>
-                </a:effectLst>
-              </a:rPr>
-              <a:t>.</a:t>
-            </a:r>
-          </a:p>
-        </p:txBody>
-      </p:sp>
-      <p:sp>
-        <p:nvSpPr>
-          <p:cNvPr id="19" name="직사각형 18">
-            <a:extLst>
-              <a:ext uri="{FF2B5EF4-FFF2-40B4-BE49-F238E27FC236}">
-                <a16:creationId xmlns:a16="http://schemas.microsoft.com/office/drawing/2014/main" id="{27F4C92D-FC09-F126-988B-4A29683F23DC}"/>
-              </a:ext>
-            </a:extLst>
-          </p:cNvPr>
-          <p:cNvSpPr/>
-          <p:nvPr/>
-        </p:nvSpPr>
-        <p:spPr>
-          <a:xfrm>
-            <a:off x="9575705" y="2006105"/>
-            <a:ext cx="1811424" cy="400110"/>
-          </a:xfrm>
-          <a:prstGeom prst="rect">
-            <a:avLst/>
-          </a:prstGeom>
-          <a:noFill/>
-        </p:spPr>
-        <p:txBody>
-          <a:bodyPr wrap="square" lIns="91440" tIns="45720" rIns="91440" bIns="45720">
-            <a:spAutoFit/>
-          </a:bodyPr>
-          <a:lstStyle/>
-          <a:p>
-            <a:pPr algn="ctr"/>
-            <a:r>
-              <a:rPr lang="en-US" altLang="ko-KR" sz="2000" b="0" cap="none" spc="0" dirty="0">
-                <a:ln w="0"/>
-                <a:solidFill>
-                  <a:schemeClr val="tx1"/>
-                </a:solidFill>
-                <a:effectLst>
-                  <a:outerShdw blurRad="38100" dist="19050" dir="2700000" algn="tl" rotWithShape="0">
-                    <a:schemeClr val="dk1">
-                      <a:alpha val="40000"/>
-                    </a:schemeClr>
-                  </a:outerShdw>
-                </a:effectLst>
-              </a:rPr>
-              <a:t>1 </a:t>
-            </a:r>
-            <a:r>
-              <a:rPr lang="ko-KR" altLang="en-US" sz="2000" b="0" cap="none" spc="0" dirty="0">
-                <a:ln w="0"/>
-                <a:solidFill>
-                  <a:schemeClr val="tx1"/>
-                </a:solidFill>
-                <a:effectLst>
-                  <a:outerShdw blurRad="38100" dist="19050" dir="2700000" algn="tl" rotWithShape="0">
-                    <a:schemeClr val="dk1">
-                      <a:alpha val="40000"/>
-                    </a:schemeClr>
-                  </a:outerShdw>
-                </a:effectLst>
-              </a:rPr>
-              <a:t>스테이지</a:t>
-            </a:r>
-            <a:endParaRPr lang="en-US" altLang="ko-KR" sz="2000" b="0" cap="none" spc="0" dirty="0">
-              <a:ln w="0"/>
-              <a:solidFill>
-                <a:schemeClr val="tx1"/>
-              </a:solidFill>
-              <a:effectLst>
-                <a:outerShdw blurRad="38100" dist="19050" dir="2700000" algn="tl" rotWithShape="0">
-                  <a:schemeClr val="dk1">
-                    <a:alpha val="40000"/>
-                  </a:schemeClr>
-                </a:outerShdw>
-              </a:effectLst>
-            </a:endParaRPr>
-          </a:p>
-        </p:txBody>
-      </p:sp>
-      <p:sp>
-        <p:nvSpPr>
-          <p:cNvPr id="21" name="직사각형 20">
-            <a:extLst>
-              <a:ext uri="{FF2B5EF4-FFF2-40B4-BE49-F238E27FC236}">
-                <a16:creationId xmlns:a16="http://schemas.microsoft.com/office/drawing/2014/main" id="{9E6362D2-4906-F158-01A9-F5ECE94E824C}"/>
-              </a:ext>
-            </a:extLst>
-          </p:cNvPr>
-          <p:cNvSpPr/>
-          <p:nvPr/>
-        </p:nvSpPr>
-        <p:spPr>
-          <a:xfrm>
-            <a:off x="9575705" y="2612223"/>
-            <a:ext cx="1811424" cy="400110"/>
-          </a:xfrm>
-          <a:prstGeom prst="rect">
-            <a:avLst/>
-          </a:prstGeom>
-          <a:noFill/>
-        </p:spPr>
-        <p:txBody>
-          <a:bodyPr wrap="square" lIns="91440" tIns="45720" rIns="91440" bIns="45720">
-            <a:spAutoFit/>
-          </a:bodyPr>
-          <a:lstStyle/>
-          <a:p>
-            <a:pPr algn="ctr"/>
-            <a:r>
-              <a:rPr lang="en-US" altLang="ko-KR" sz="2000" dirty="0">
-                <a:ln w="0"/>
-                <a:effectLst>
-                  <a:outerShdw blurRad="38100" dist="19050" dir="2700000" algn="tl" rotWithShape="0">
-                    <a:schemeClr val="dk1">
-                      <a:alpha val="40000"/>
-                    </a:schemeClr>
-                  </a:outerShdw>
-                </a:effectLst>
-              </a:rPr>
-              <a:t>2</a:t>
-            </a:r>
-            <a:r>
-              <a:rPr lang="en-US" altLang="ko-KR" sz="2000" b="0" cap="none" spc="0" dirty="0">
-                <a:ln w="0"/>
-                <a:solidFill>
-                  <a:schemeClr val="tx1"/>
-                </a:solidFill>
-                <a:effectLst>
-                  <a:outerShdw blurRad="38100" dist="19050" dir="2700000" algn="tl" rotWithShape="0">
-                    <a:schemeClr val="dk1">
-                      <a:alpha val="40000"/>
-                    </a:schemeClr>
-                  </a:outerShdw>
-                </a:effectLst>
-              </a:rPr>
-              <a:t> </a:t>
-            </a:r>
-            <a:r>
-              <a:rPr lang="ko-KR" altLang="en-US" sz="2000" b="0" cap="none" spc="0" dirty="0">
-                <a:ln w="0"/>
-                <a:solidFill>
-                  <a:schemeClr val="tx1"/>
-                </a:solidFill>
-                <a:effectLst>
-                  <a:outerShdw blurRad="38100" dist="19050" dir="2700000" algn="tl" rotWithShape="0">
-                    <a:schemeClr val="dk1">
-                      <a:alpha val="40000"/>
-                    </a:schemeClr>
-                  </a:outerShdw>
-                </a:effectLst>
-              </a:rPr>
-              <a:t>스테이지</a:t>
-            </a:r>
-            <a:endParaRPr lang="en-US" altLang="ko-KR" sz="2000" b="0" cap="none" spc="0" dirty="0">
-              <a:ln w="0"/>
-              <a:solidFill>
-                <a:schemeClr val="tx1"/>
-              </a:solidFill>
-              <a:effectLst>
-                <a:outerShdw blurRad="38100" dist="19050" dir="2700000" algn="tl" rotWithShape="0">
-                  <a:schemeClr val="dk1">
-                    <a:alpha val="40000"/>
-                  </a:schemeClr>
-                </a:outerShdw>
-              </a:effectLst>
-            </a:endParaRPr>
-          </a:p>
-        </p:txBody>
-      </p:sp>
-      <p:sp>
-        <p:nvSpPr>
-          <p:cNvPr id="24" name="직사각형 23">
-            <a:extLst>
-              <a:ext uri="{FF2B5EF4-FFF2-40B4-BE49-F238E27FC236}">
-                <a16:creationId xmlns:a16="http://schemas.microsoft.com/office/drawing/2014/main" id="{A2310716-ED50-7E34-476B-158AF4C45EB1}"/>
-              </a:ext>
-            </a:extLst>
-          </p:cNvPr>
-          <p:cNvSpPr/>
-          <p:nvPr/>
-        </p:nvSpPr>
-        <p:spPr>
-          <a:xfrm>
-            <a:off x="9575705" y="3265073"/>
-            <a:ext cx="1811424" cy="400110"/>
-          </a:xfrm>
-          <a:prstGeom prst="rect">
-            <a:avLst/>
-          </a:prstGeom>
-          <a:noFill/>
-        </p:spPr>
-        <p:txBody>
-          <a:bodyPr wrap="square" lIns="91440" tIns="45720" rIns="91440" bIns="45720">
-            <a:spAutoFit/>
-          </a:bodyPr>
-          <a:lstStyle/>
-          <a:p>
-            <a:pPr algn="ctr"/>
-            <a:r>
-              <a:rPr lang="en-US" altLang="ko-KR" sz="2000" dirty="0">
-                <a:ln w="0"/>
-                <a:effectLst>
-                  <a:outerShdw blurRad="38100" dist="19050" dir="2700000" algn="tl" rotWithShape="0">
-                    <a:schemeClr val="dk1">
-                      <a:alpha val="40000"/>
-                    </a:schemeClr>
-                  </a:outerShdw>
-                </a:effectLst>
-              </a:rPr>
-              <a:t>3</a:t>
-            </a:r>
-            <a:r>
-              <a:rPr lang="en-US" altLang="ko-KR" sz="2000" b="0" cap="none" spc="0" dirty="0">
-                <a:ln w="0"/>
-                <a:solidFill>
-                  <a:schemeClr val="tx1"/>
-                </a:solidFill>
-                <a:effectLst>
-                  <a:outerShdw blurRad="38100" dist="19050" dir="2700000" algn="tl" rotWithShape="0">
-                    <a:schemeClr val="dk1">
-                      <a:alpha val="40000"/>
-                    </a:schemeClr>
-                  </a:outerShdw>
-                </a:effectLst>
-              </a:rPr>
-              <a:t> </a:t>
-            </a:r>
-            <a:r>
-              <a:rPr lang="ko-KR" altLang="en-US" sz="2000" b="0" cap="none" spc="0" dirty="0">
-                <a:ln w="0"/>
-                <a:solidFill>
-                  <a:schemeClr val="tx1"/>
-                </a:solidFill>
-                <a:effectLst>
-                  <a:outerShdw blurRad="38100" dist="19050" dir="2700000" algn="tl" rotWithShape="0">
-                    <a:schemeClr val="dk1">
-                      <a:alpha val="40000"/>
-                    </a:schemeClr>
-                  </a:outerShdw>
-                </a:effectLst>
-              </a:rPr>
-              <a:t>스테이지</a:t>
-            </a:r>
-            <a:endParaRPr lang="en-US" altLang="ko-KR" sz="2000" b="0" cap="none" spc="0" dirty="0">
-              <a:ln w="0"/>
-              <a:solidFill>
-                <a:schemeClr val="tx1"/>
-              </a:solidFill>
-              <a:effectLst>
-                <a:outerShdw blurRad="38100" dist="19050" dir="2700000" algn="tl" rotWithShape="0">
-                  <a:schemeClr val="dk1">
-                    <a:alpha val="40000"/>
-                  </a:schemeClr>
-                </a:outerShdw>
-              </a:effectLst>
-            </a:endParaRPr>
-          </a:p>
-        </p:txBody>
-      </p:sp>
-      <p:sp>
-        <p:nvSpPr>
-          <p:cNvPr id="27" name="직사각형 26">
-            <a:extLst>
-              <a:ext uri="{FF2B5EF4-FFF2-40B4-BE49-F238E27FC236}">
-                <a16:creationId xmlns:a16="http://schemas.microsoft.com/office/drawing/2014/main" id="{E933E10C-2E6D-DB96-2667-B41CE8DD36F1}"/>
-              </a:ext>
-            </a:extLst>
-          </p:cNvPr>
-          <p:cNvSpPr/>
-          <p:nvPr/>
-        </p:nvSpPr>
-        <p:spPr>
-          <a:xfrm>
-            <a:off x="9575705" y="3899020"/>
-            <a:ext cx="1811424" cy="400110"/>
-          </a:xfrm>
-          <a:prstGeom prst="rect">
-            <a:avLst/>
-          </a:prstGeom>
-          <a:noFill/>
-        </p:spPr>
-        <p:txBody>
-          <a:bodyPr wrap="square" lIns="91440" tIns="45720" rIns="91440" bIns="45720">
-            <a:spAutoFit/>
-          </a:bodyPr>
-          <a:lstStyle/>
-          <a:p>
-            <a:pPr algn="ctr"/>
-            <a:r>
-              <a:rPr lang="en-US" altLang="ko-KR" sz="2000" dirty="0">
-                <a:ln w="0"/>
-                <a:effectLst>
-                  <a:outerShdw blurRad="38100" dist="19050" dir="2700000" algn="tl" rotWithShape="0">
-                    <a:schemeClr val="dk1">
-                      <a:alpha val="40000"/>
-                    </a:schemeClr>
-                  </a:outerShdw>
-                </a:effectLst>
-              </a:rPr>
-              <a:t>4</a:t>
-            </a:r>
-            <a:r>
-              <a:rPr lang="en-US" altLang="ko-KR" sz="2000" b="0" cap="none" spc="0" dirty="0">
-                <a:ln w="0"/>
-                <a:solidFill>
-                  <a:schemeClr val="tx1"/>
-                </a:solidFill>
-                <a:effectLst>
-                  <a:outerShdw blurRad="38100" dist="19050" dir="2700000" algn="tl" rotWithShape="0">
-                    <a:schemeClr val="dk1">
-                      <a:alpha val="40000"/>
-                    </a:schemeClr>
-                  </a:outerShdw>
-                </a:effectLst>
-              </a:rPr>
-              <a:t> </a:t>
-            </a:r>
-            <a:r>
-              <a:rPr lang="ko-KR" altLang="en-US" sz="2000" b="0" cap="none" spc="0" dirty="0">
-                <a:ln w="0"/>
-                <a:solidFill>
-                  <a:schemeClr val="tx1"/>
-                </a:solidFill>
-                <a:effectLst>
-                  <a:outerShdw blurRad="38100" dist="19050" dir="2700000" algn="tl" rotWithShape="0">
-                    <a:schemeClr val="dk1">
-                      <a:alpha val="40000"/>
-                    </a:schemeClr>
-                  </a:outerShdw>
-                </a:effectLst>
-              </a:rPr>
-              <a:t>스테이지</a:t>
-            </a:r>
-            <a:endParaRPr lang="en-US" altLang="ko-KR" sz="2000" b="0" cap="none" spc="0" dirty="0">
-              <a:ln w="0"/>
-              <a:solidFill>
-                <a:schemeClr val="tx1"/>
-              </a:solidFill>
-              <a:effectLst>
-                <a:outerShdw blurRad="38100" dist="19050" dir="2700000" algn="tl" rotWithShape="0">
-                  <a:schemeClr val="dk1">
-                    <a:alpha val="40000"/>
-                  </a:schemeClr>
-                </a:outerShdw>
-              </a:effectLst>
-            </a:endParaRPr>
-          </a:p>
-        </p:txBody>
-      </p:sp>
-      <p:sp>
-        <p:nvSpPr>
-          <p:cNvPr id="28" name="직사각형 27">
-            <a:extLst>
-              <a:ext uri="{FF2B5EF4-FFF2-40B4-BE49-F238E27FC236}">
-                <a16:creationId xmlns:a16="http://schemas.microsoft.com/office/drawing/2014/main" id="{45B96D85-70A7-FA73-2417-164DD5C31279}"/>
-              </a:ext>
-            </a:extLst>
-          </p:cNvPr>
-          <p:cNvSpPr/>
-          <p:nvPr/>
-        </p:nvSpPr>
-        <p:spPr>
-          <a:xfrm>
-            <a:off x="9575705" y="4500917"/>
-            <a:ext cx="1811424" cy="400110"/>
-          </a:xfrm>
-          <a:prstGeom prst="rect">
-            <a:avLst/>
-          </a:prstGeom>
-          <a:noFill/>
-        </p:spPr>
-        <p:txBody>
-          <a:bodyPr wrap="square" lIns="91440" tIns="45720" rIns="91440" bIns="45720">
-            <a:spAutoFit/>
-          </a:bodyPr>
-          <a:lstStyle/>
-          <a:p>
-            <a:pPr algn="ctr"/>
-            <a:r>
-              <a:rPr lang="en-US" altLang="ko-KR" sz="2000" dirty="0">
-                <a:ln w="0"/>
-                <a:effectLst>
-                  <a:outerShdw blurRad="38100" dist="19050" dir="2700000" algn="tl" rotWithShape="0">
-                    <a:schemeClr val="dk1">
-                      <a:alpha val="40000"/>
-                    </a:schemeClr>
-                  </a:outerShdw>
-                </a:effectLst>
-              </a:rPr>
-              <a:t>5</a:t>
-            </a:r>
-            <a:r>
-              <a:rPr lang="en-US" altLang="ko-KR" sz="2000" b="0" cap="none" spc="0" dirty="0">
-                <a:ln w="0"/>
-                <a:solidFill>
-                  <a:schemeClr val="tx1"/>
-                </a:solidFill>
-                <a:effectLst>
-                  <a:outerShdw blurRad="38100" dist="19050" dir="2700000" algn="tl" rotWithShape="0">
-                    <a:schemeClr val="dk1">
-                      <a:alpha val="40000"/>
-                    </a:schemeClr>
-                  </a:outerShdw>
-                </a:effectLst>
-              </a:rPr>
-              <a:t> </a:t>
-            </a:r>
-            <a:r>
-              <a:rPr lang="ko-KR" altLang="en-US" sz="2000" b="0" cap="none" spc="0" dirty="0">
-                <a:ln w="0"/>
-                <a:solidFill>
-                  <a:schemeClr val="tx1"/>
-                </a:solidFill>
-                <a:effectLst>
-                  <a:outerShdw blurRad="38100" dist="19050" dir="2700000" algn="tl" rotWithShape="0">
-                    <a:schemeClr val="dk1">
-                      <a:alpha val="40000"/>
-                    </a:schemeClr>
-                  </a:outerShdw>
-                </a:effectLst>
-              </a:rPr>
-              <a:t>스테이지</a:t>
-            </a:r>
-            <a:endParaRPr lang="en-US" altLang="ko-KR" sz="2000" b="0" cap="none" spc="0" dirty="0">
-              <a:ln w="0"/>
-              <a:solidFill>
-                <a:schemeClr val="tx1"/>
-              </a:solidFill>
-              <a:effectLst>
-                <a:outerShdw blurRad="38100" dist="19050" dir="2700000" algn="tl" rotWithShape="0">
-                  <a:schemeClr val="dk1">
-                    <a:alpha val="40000"/>
-                  </a:schemeClr>
-                </a:outerShdw>
-              </a:effectLst>
-            </a:endParaRPr>
-          </a:p>
-        </p:txBody>
-      </p:sp>
-    </p:spTree>
-    <p:extLst>
-      <p:ext uri="{BB962C8B-B14F-4D97-AF65-F5344CB8AC3E}">
-        <p14:creationId xmlns:p14="http://schemas.microsoft.com/office/powerpoint/2010/main" val="611105691"/>
       </p:ext>
     </p:extLst>
   </p:cSld>

--- a/보고서/PPT/결과보고서_6조(벽돌깨기게임).pptx
+++ b/보고서/PPT/결과보고서_6조(벽돌깨기게임).pptx
@@ -9,11 +9,11 @@
     <p:sldId id="291" r:id="rId3"/>
     <p:sldId id="294" r:id="rId4"/>
     <p:sldId id="333" r:id="rId5"/>
-    <p:sldId id="342" r:id="rId6"/>
-    <p:sldId id="343" r:id="rId7"/>
-    <p:sldId id="335" r:id="rId8"/>
-    <p:sldId id="336" r:id="rId9"/>
-    <p:sldId id="338" r:id="rId10"/>
+    <p:sldId id="338" r:id="rId6"/>
+    <p:sldId id="346" r:id="rId7"/>
+    <p:sldId id="342" r:id="rId8"/>
+    <p:sldId id="335" r:id="rId9"/>
+    <p:sldId id="336" r:id="rId10"/>
     <p:sldId id="340" r:id="rId11"/>
     <p:sldId id="337" r:id="rId12"/>
     <p:sldId id="339" r:id="rId13"/>
@@ -5712,7 +5712,7 @@
                   <a:latin typeface="세방고딕 Bold" panose="00000800000000000000" pitchFamily="2" charset="-127"/>
                   <a:ea typeface="세방고딕 Bold" panose="00000800000000000000" pitchFamily="2" charset="-127"/>
                 </a:rPr>
-                <a:t>01</a:t>
+                <a:t>04</a:t>
               </a:r>
               <a:endParaRPr lang="ko-KR" altLang="en-US" sz="4400" b="1" dirty="0">
                 <a:ln>
@@ -7117,7 +7117,7 @@
                   <a:latin typeface="세방고딕 Bold" panose="00000800000000000000" pitchFamily="2" charset="-127"/>
                   <a:ea typeface="세방고딕 Bold" panose="00000800000000000000" pitchFamily="2" charset="-127"/>
                 </a:rPr>
-                <a:t>01</a:t>
+                <a:t>04</a:t>
               </a:r>
               <a:endParaRPr lang="ko-KR" altLang="en-US" sz="4400" b="1" dirty="0">
                 <a:ln>
@@ -7532,7 +7532,7 @@
             </a:r>
             <a:r>
               <a:rPr lang="ko-KR" altLang="en-US" dirty="0"/>
-              <a:t>받침대로 아이템과 충돌발생시 공의 위치를 초기상태로</a:t>
+              <a:t>받침대로 아이템과 충돌발생시 공의 위치를 초기상태로 되돌림</a:t>
             </a:r>
           </a:p>
         </p:txBody>
@@ -8119,7 +8119,7 @@
                   <a:latin typeface="세방고딕 Bold" panose="00000800000000000000" pitchFamily="2" charset="-127"/>
                   <a:ea typeface="세방고딕 Bold" panose="00000800000000000000" pitchFamily="2" charset="-127"/>
                 </a:rPr>
-                <a:t>01</a:t>
+                <a:t>04</a:t>
               </a:r>
               <a:endParaRPr lang="ko-KR" altLang="en-US" sz="4400" b="1" dirty="0">
                 <a:ln>
@@ -9027,7 +9027,7 @@
                   <a:latin typeface="세방고딕 Bold" panose="00000800000000000000" pitchFamily="2" charset="-127"/>
                   <a:ea typeface="세방고딕 Bold" panose="00000800000000000000" pitchFamily="2" charset="-127"/>
                 </a:rPr>
-                <a:t>01</a:t>
+                <a:t>04</a:t>
               </a:r>
               <a:endParaRPr lang="ko-KR" altLang="en-US" sz="4400" b="1" dirty="0">
                 <a:ln>
@@ -10680,6 +10680,48 @@
               <a:pPr>
                 <a:defRPr/>
               </a:pPr>
+              <a:r>
+                <a:rPr lang="ko-KR" altLang="en-US" sz="2000" b="1" dirty="0">
+                  <a:ln>
+                    <a:solidFill>
+                      <a:schemeClr val="accent1">
+                        <a:shade val="15000"/>
+                        <a:alpha val="0"/>
+                      </a:schemeClr>
+                    </a:solidFill>
+                  </a:ln>
+                  <a:solidFill>
+                    <a:schemeClr val="tx1">
+                      <a:lumMod val="75000"/>
+                      <a:lumOff val="25000"/>
+                    </a:schemeClr>
+                  </a:solidFill>
+                  <a:latin typeface="맑은 고딕" panose="020B0503020000020004" pitchFamily="50" charset="-127"/>
+                  <a:ea typeface="맑은 고딕" panose="020B0503020000020004" pitchFamily="50" charset="-127"/>
+                </a:rPr>
+                <a:t>구현</a:t>
+              </a:r>
+              <a:r>
+                <a:rPr lang="en-US" altLang="ko-KR" sz="2000" b="1" dirty="0">
+                  <a:ln>
+                    <a:solidFill>
+                      <a:schemeClr val="accent1">
+                        <a:shade val="15000"/>
+                        <a:alpha val="0"/>
+                      </a:schemeClr>
+                    </a:solidFill>
+                  </a:ln>
+                  <a:solidFill>
+                    <a:schemeClr val="tx1">
+                      <a:lumMod val="75000"/>
+                      <a:lumOff val="25000"/>
+                    </a:schemeClr>
+                  </a:solidFill>
+                  <a:latin typeface="맑은 고딕" panose="020B0503020000020004" pitchFamily="50" charset="-127"/>
+                  <a:ea typeface="맑은 고딕" panose="020B0503020000020004" pitchFamily="50" charset="-127"/>
+                </a:rPr>
+                <a:t>&amp;</a:t>
+              </a:r>
               <a:r>
                 <a:rPr lang="ko-KR" altLang="en-US" sz="2000" b="1" dirty="0">
                   <a:ln>
@@ -20270,6 +20312,900 @@
       </p:grpSpPr>
       <p:sp>
         <p:nvSpPr>
+          <p:cNvPr id="18" name="사각형: 둥근 한쪽 모서리 17">
+            <a:extLst>
+              <a:ext uri="{FF2B5EF4-FFF2-40B4-BE49-F238E27FC236}">
+                <a16:creationId xmlns:a16="http://schemas.microsoft.com/office/drawing/2014/main" id="{2EAF6D58-084F-2DED-DF2E-AAB0DF464557}"/>
+              </a:ext>
+            </a:extLst>
+          </p:cNvPr>
+          <p:cNvSpPr/>
+          <p:nvPr/>
+        </p:nvSpPr>
+        <p:spPr>
+          <a:xfrm flipH="1" flipV="1">
+            <a:off x="174170" y="70719"/>
+            <a:ext cx="12017829" cy="1221051"/>
+          </a:xfrm>
+          <a:prstGeom prst="round1Rect">
+            <a:avLst>
+              <a:gd name="adj" fmla="val 23799"/>
+            </a:avLst>
+          </a:prstGeom>
+          <a:solidFill>
+            <a:schemeClr val="bg1">
+              <a:lumMod val="95000"/>
+              <a:alpha val="50000"/>
+            </a:schemeClr>
+          </a:solidFill>
+          <a:ln w="10818" cap="flat">
+            <a:noFill/>
+            <a:prstDash val="solid"/>
+            <a:miter/>
+          </a:ln>
+        </p:spPr>
+        <p:style>
+          <a:lnRef idx="2">
+            <a:schemeClr val="accent1">
+              <a:shade val="15000"/>
+            </a:schemeClr>
+          </a:lnRef>
+          <a:fillRef idx="1">
+            <a:schemeClr val="accent1"/>
+          </a:fillRef>
+          <a:effectRef idx="0">
+            <a:schemeClr val="accent1"/>
+          </a:effectRef>
+          <a:fontRef idx="minor">
+            <a:schemeClr val="lt1"/>
+          </a:fontRef>
+        </p:style>
+        <p:txBody>
+          <a:bodyPr rtlCol="0" anchor="ctr"/>
+          <a:lstStyle/>
+          <a:p>
+            <a:pPr algn="ctr"/>
+            <a:endParaRPr lang="ko-KR" altLang="en-US"/>
+          </a:p>
+        </p:txBody>
+      </p:sp>
+      <p:grpSp>
+        <p:nvGrpSpPr>
+          <p:cNvPr id="20" name="그룹 19">
+            <a:extLst>
+              <a:ext uri="{FF2B5EF4-FFF2-40B4-BE49-F238E27FC236}">
+                <a16:creationId xmlns:a16="http://schemas.microsoft.com/office/drawing/2014/main" id="{739452E3-2013-66BF-2EBE-F0EC960C4077}"/>
+              </a:ext>
+            </a:extLst>
+          </p:cNvPr>
+          <p:cNvGrpSpPr/>
+          <p:nvPr/>
+        </p:nvGrpSpPr>
+        <p:grpSpPr>
+          <a:xfrm>
+            <a:off x="376102" y="333243"/>
+            <a:ext cx="9932366" cy="830997"/>
+            <a:chOff x="376102" y="333243"/>
+            <a:chExt cx="9932366" cy="830997"/>
+          </a:xfrm>
+        </p:grpSpPr>
+        <p:sp>
+          <p:nvSpPr>
+            <p:cNvPr id="22" name="TextBox 21">
+              <a:extLst>
+                <a:ext uri="{FF2B5EF4-FFF2-40B4-BE49-F238E27FC236}">
+                  <a16:creationId xmlns:a16="http://schemas.microsoft.com/office/drawing/2014/main" id="{92519771-A232-D9CF-4769-EBFF2F8CFBB1}"/>
+                </a:ext>
+              </a:extLst>
+            </p:cNvPr>
+            <p:cNvSpPr txBox="1"/>
+            <p:nvPr/>
+          </p:nvSpPr>
+          <p:spPr>
+            <a:xfrm>
+              <a:off x="1461721" y="366114"/>
+              <a:ext cx="2252213" cy="276999"/>
+            </a:xfrm>
+            <a:prstGeom prst="rect">
+              <a:avLst/>
+            </a:prstGeom>
+            <a:noFill/>
+          </p:spPr>
+          <p:txBody>
+            <a:bodyPr wrap="square">
+              <a:spAutoFit/>
+            </a:bodyPr>
+            <a:lstStyle/>
+            <a:p>
+              <a:r>
+                <a:rPr lang="en-US" altLang="ko-KR" sz="1200" b="1" dirty="0">
+                  <a:ln>
+                    <a:solidFill>
+                      <a:schemeClr val="accent1">
+                        <a:shade val="15000"/>
+                        <a:alpha val="0"/>
+                      </a:schemeClr>
+                    </a:solidFill>
+                  </a:ln>
+                  <a:solidFill>
+                    <a:srgbClr val="3378C8">
+                      <a:alpha val="50000"/>
+                    </a:srgbClr>
+                  </a:solidFill>
+                  <a:latin typeface="맑은 고딕" panose="020B0503020000020004" pitchFamily="50" charset="-127"/>
+                  <a:ea typeface="맑은 고딕" panose="020B0503020000020004" pitchFamily="50" charset="-127"/>
+                </a:rPr>
+                <a:t>K-Digital Training</a:t>
+              </a:r>
+              <a:endParaRPr lang="ko-KR" altLang="en-US" sz="1200" b="1" dirty="0">
+                <a:ln>
+                  <a:solidFill>
+                    <a:schemeClr val="accent1">
+                      <a:shade val="15000"/>
+                      <a:alpha val="0"/>
+                    </a:schemeClr>
+                  </a:solidFill>
+                </a:ln>
+                <a:solidFill>
+                  <a:srgbClr val="3378C8">
+                    <a:alpha val="50000"/>
+                  </a:srgbClr>
+                </a:solidFill>
+                <a:latin typeface="맑은 고딕" panose="020B0503020000020004" pitchFamily="50" charset="-127"/>
+                <a:ea typeface="맑은 고딕" panose="020B0503020000020004" pitchFamily="50" charset="-127"/>
+              </a:endParaRPr>
+            </a:p>
+          </p:txBody>
+        </p:sp>
+        <p:sp>
+          <p:nvSpPr>
+            <p:cNvPr id="23" name="TextBox 22">
+              <a:extLst>
+                <a:ext uri="{FF2B5EF4-FFF2-40B4-BE49-F238E27FC236}">
+                  <a16:creationId xmlns:a16="http://schemas.microsoft.com/office/drawing/2014/main" id="{EE109AB5-00CA-F0E8-7FD9-645FB6E912A9}"/>
+                </a:ext>
+              </a:extLst>
+            </p:cNvPr>
+            <p:cNvSpPr txBox="1"/>
+            <p:nvPr/>
+          </p:nvSpPr>
+          <p:spPr>
+            <a:xfrm>
+              <a:off x="1461721" y="585057"/>
+              <a:ext cx="8846747" cy="523220"/>
+            </a:xfrm>
+            <a:prstGeom prst="rect">
+              <a:avLst/>
+            </a:prstGeom>
+            <a:noFill/>
+          </p:spPr>
+          <p:txBody>
+            <a:bodyPr wrap="square">
+              <a:spAutoFit/>
+            </a:bodyPr>
+            <a:lstStyle/>
+            <a:p>
+              <a:pPr>
+                <a:defRPr/>
+              </a:pPr>
+              <a:r>
+                <a:rPr lang="ko-KR" altLang="en-US" sz="2800" b="1" dirty="0">
+                  <a:ln>
+                    <a:solidFill>
+                      <a:schemeClr val="accent1">
+                        <a:shade val="15000"/>
+                        <a:alpha val="0"/>
+                      </a:schemeClr>
+                    </a:solidFill>
+                  </a:ln>
+                  <a:solidFill>
+                    <a:schemeClr val="tx1">
+                      <a:lumMod val="75000"/>
+                      <a:lumOff val="25000"/>
+                    </a:schemeClr>
+                  </a:solidFill>
+                  <a:latin typeface="맑은 고딕" panose="020B0503020000020004" pitchFamily="50" charset="-127"/>
+                  <a:ea typeface="맑은 고딕" panose="020B0503020000020004" pitchFamily="50" charset="-127"/>
+                </a:rPr>
+                <a:t>구현</a:t>
+              </a:r>
+              <a:r>
+                <a:rPr lang="en-US" altLang="ko-KR" sz="2800" b="1" dirty="0">
+                  <a:ln>
+                    <a:solidFill>
+                      <a:schemeClr val="accent1">
+                        <a:shade val="15000"/>
+                        <a:alpha val="0"/>
+                      </a:schemeClr>
+                    </a:solidFill>
+                  </a:ln>
+                  <a:solidFill>
+                    <a:schemeClr val="tx1">
+                      <a:lumMod val="75000"/>
+                      <a:lumOff val="25000"/>
+                    </a:schemeClr>
+                  </a:solidFill>
+                  <a:latin typeface="맑은 고딕" panose="020B0503020000020004" pitchFamily="50" charset="-127"/>
+                  <a:ea typeface="맑은 고딕" panose="020B0503020000020004" pitchFamily="50" charset="-127"/>
+                </a:rPr>
+                <a:t>(</a:t>
+              </a:r>
+              <a:r>
+                <a:rPr lang="ko-KR" altLang="en-US" sz="2800" b="1" dirty="0">
+                  <a:ln>
+                    <a:solidFill>
+                      <a:schemeClr val="accent1">
+                        <a:shade val="15000"/>
+                        <a:alpha val="0"/>
+                      </a:schemeClr>
+                    </a:solidFill>
+                  </a:ln>
+                  <a:solidFill>
+                    <a:schemeClr val="tx1">
+                      <a:lumMod val="75000"/>
+                      <a:lumOff val="25000"/>
+                    </a:schemeClr>
+                  </a:solidFill>
+                  <a:latin typeface="맑은 고딕" panose="020B0503020000020004" pitchFamily="50" charset="-127"/>
+                  <a:ea typeface="맑은 고딕" panose="020B0503020000020004" pitchFamily="50" charset="-127"/>
+                </a:rPr>
+                <a:t>벡터연산과 오브젝트의 클래스화</a:t>
+              </a:r>
+              <a:r>
+                <a:rPr lang="en-US" altLang="ko-KR" sz="2800" b="1" dirty="0">
+                  <a:ln>
+                    <a:solidFill>
+                      <a:schemeClr val="accent1">
+                        <a:shade val="15000"/>
+                        <a:alpha val="0"/>
+                      </a:schemeClr>
+                    </a:solidFill>
+                  </a:ln>
+                  <a:solidFill>
+                    <a:schemeClr val="tx1">
+                      <a:lumMod val="75000"/>
+                      <a:lumOff val="25000"/>
+                    </a:schemeClr>
+                  </a:solidFill>
+                  <a:latin typeface="맑은 고딕" panose="020B0503020000020004" pitchFamily="50" charset="-127"/>
+                  <a:ea typeface="맑은 고딕" panose="020B0503020000020004" pitchFamily="50" charset="-127"/>
+                </a:rPr>
+                <a:t>)</a:t>
+              </a:r>
+              <a:endParaRPr lang="ko-KR" altLang="en-US" sz="2800" b="1" dirty="0">
+                <a:ln>
+                  <a:solidFill>
+                    <a:schemeClr val="accent1">
+                      <a:shade val="15000"/>
+                      <a:alpha val="0"/>
+                    </a:schemeClr>
+                  </a:solidFill>
+                </a:ln>
+                <a:solidFill>
+                  <a:schemeClr val="tx1">
+                    <a:lumMod val="75000"/>
+                    <a:lumOff val="25000"/>
+                  </a:schemeClr>
+                </a:solidFill>
+                <a:latin typeface="맑은 고딕" panose="020B0503020000020004" pitchFamily="50" charset="-127"/>
+                <a:ea typeface="맑은 고딕" panose="020B0503020000020004" pitchFamily="50" charset="-127"/>
+              </a:endParaRPr>
+            </a:p>
+          </p:txBody>
+        </p:sp>
+        <p:sp>
+          <p:nvSpPr>
+            <p:cNvPr id="25" name="TextBox 24">
+              <a:extLst>
+                <a:ext uri="{FF2B5EF4-FFF2-40B4-BE49-F238E27FC236}">
+                  <a16:creationId xmlns:a16="http://schemas.microsoft.com/office/drawing/2014/main" id="{093CAA92-4EAE-8A8B-E8EE-0F5B51065B1A}"/>
+                </a:ext>
+              </a:extLst>
+            </p:cNvPr>
+            <p:cNvSpPr txBox="1"/>
+            <p:nvPr/>
+          </p:nvSpPr>
+          <p:spPr>
+            <a:xfrm>
+              <a:off x="376102" y="333243"/>
+              <a:ext cx="1266679" cy="830997"/>
+            </a:xfrm>
+            <a:prstGeom prst="rect">
+              <a:avLst/>
+            </a:prstGeom>
+            <a:noFill/>
+          </p:spPr>
+          <p:txBody>
+            <a:bodyPr wrap="square" tIns="0" bIns="0">
+              <a:spAutoFit/>
+            </a:bodyPr>
+            <a:lstStyle/>
+            <a:p>
+              <a:pPr eaLnBrk="1" fontAlgn="auto" latinLnBrk="1" hangingPunct="1">
+                <a:spcBef>
+                  <a:spcPts val="0"/>
+                </a:spcBef>
+                <a:spcAft>
+                  <a:spcPts val="0"/>
+                </a:spcAft>
+                <a:defRPr/>
+              </a:pPr>
+              <a:r>
+                <a:rPr lang="en-US" altLang="ko-KR" sz="5400" dirty="0">
+                  <a:ln>
+                    <a:solidFill>
+                      <a:schemeClr val="accent1">
+                        <a:shade val="15000"/>
+                        <a:alpha val="0"/>
+                      </a:schemeClr>
+                    </a:solidFill>
+                  </a:ln>
+                  <a:solidFill>
+                    <a:srgbClr val="3378C8"/>
+                  </a:solidFill>
+                  <a:latin typeface="세방고딕 Bold" panose="00000800000000000000" pitchFamily="2" charset="-127"/>
+                  <a:ea typeface="세방고딕 Bold" panose="00000800000000000000" pitchFamily="2" charset="-127"/>
+                </a:rPr>
+                <a:t>03</a:t>
+              </a:r>
+              <a:endParaRPr lang="ko-KR" altLang="en-US" sz="4400" b="1" dirty="0">
+                <a:ln>
+                  <a:solidFill>
+                    <a:schemeClr val="accent1">
+                      <a:shade val="15000"/>
+                      <a:alpha val="0"/>
+                    </a:schemeClr>
+                  </a:solidFill>
+                </a:ln>
+                <a:solidFill>
+                  <a:srgbClr val="3378C8"/>
+                </a:solidFill>
+                <a:latin typeface="세방고딕 Regular" panose="00000500000000000000" pitchFamily="2" charset="-127"/>
+                <a:ea typeface="세방고딕 Regular" panose="00000500000000000000" pitchFamily="2" charset="-127"/>
+              </a:endParaRPr>
+            </a:p>
+          </p:txBody>
+        </p:sp>
+      </p:grpSp>
+      <p:pic>
+        <p:nvPicPr>
+          <p:cNvPr id="26" name="그림 25">
+            <a:extLst>
+              <a:ext uri="{FF2B5EF4-FFF2-40B4-BE49-F238E27FC236}">
+                <a16:creationId xmlns:a16="http://schemas.microsoft.com/office/drawing/2014/main" id="{FE80A41B-F61E-4713-97AE-0B084B8425AD}"/>
+              </a:ext>
+            </a:extLst>
+          </p:cNvPr>
+          <p:cNvPicPr>
+            <a:picLocks noChangeAspect="1"/>
+          </p:cNvPicPr>
+          <p:nvPr/>
+        </p:nvPicPr>
+        <p:blipFill rotWithShape="1">
+          <a:blip r:embed="rId2" cstate="print">
+            <a:duotone>
+              <a:schemeClr val="accent5">
+                <a:shade val="45000"/>
+                <a:satMod val="135000"/>
+              </a:schemeClr>
+              <a:prstClr val="white"/>
+            </a:duotone>
+            <a:alphaModFix amt="27000"/>
+            <a:extLst>
+              <a:ext uri="{28A0092B-C50C-407E-A947-70E740481C1C}">
+                <a14:useLocalDpi xmlns:a14="http://schemas.microsoft.com/office/drawing/2010/main"/>
+              </a:ext>
+            </a:extLst>
+          </a:blip>
+          <a:srcRect/>
+          <a:stretch/>
+        </p:blipFill>
+        <p:spPr>
+          <a:xfrm rot="10800000" flipV="1">
+            <a:off x="-1" y="1673336"/>
+            <a:ext cx="12192000" cy="233580"/>
+          </a:xfrm>
+          <a:prstGeom prst="rect">
+            <a:avLst/>
+          </a:prstGeom>
+        </p:spPr>
+      </p:pic>
+      <p:sp>
+        <p:nvSpPr>
+          <p:cNvPr id="31" name="TextBox 30">
+            <a:extLst>
+              <a:ext uri="{FF2B5EF4-FFF2-40B4-BE49-F238E27FC236}">
+                <a16:creationId xmlns:a16="http://schemas.microsoft.com/office/drawing/2014/main" id="{F3F47CD5-B807-B83F-61E9-F4274413B9B9}"/>
+              </a:ext>
+            </a:extLst>
+          </p:cNvPr>
+          <p:cNvSpPr txBox="1"/>
+          <p:nvPr/>
+        </p:nvSpPr>
+        <p:spPr>
+          <a:xfrm>
+            <a:off x="0" y="0"/>
+            <a:ext cx="12192000" cy="114300"/>
+          </a:xfrm>
+          <a:prstGeom prst="rect">
+            <a:avLst/>
+          </a:prstGeom>
+          <a:solidFill>
+            <a:srgbClr val="FFD85C"/>
+          </a:solidFill>
+          <a:effectLst/>
+        </p:spPr>
+        <p:txBody>
+          <a:bodyPr wrap="square" rtlCol="0" anchor="ctr">
+            <a:noAutofit/>
+          </a:bodyPr>
+          <a:lstStyle/>
+          <a:p>
+            <a:pPr algn="ctr"/>
+            <a:endParaRPr lang="ko-KR" altLang="en-US" sz="1600" b="1" spc="600" dirty="0">
+              <a:ln>
+                <a:solidFill>
+                  <a:schemeClr val="accent1">
+                    <a:shade val="15000"/>
+                    <a:alpha val="0"/>
+                  </a:schemeClr>
+                </a:solidFill>
+              </a:ln>
+              <a:solidFill>
+                <a:srgbClr val="3378C8"/>
+              </a:solidFill>
+              <a:latin typeface="세방고딕 Regular" panose="00000500000000000000" pitchFamily="2" charset="-127"/>
+              <a:ea typeface="세방고딕 Regular" panose="00000500000000000000" pitchFamily="2" charset="-127"/>
+            </a:endParaRPr>
+          </a:p>
+        </p:txBody>
+      </p:sp>
+      <p:sp>
+        <p:nvSpPr>
+          <p:cNvPr id="32" name="TextBox 31">
+            <a:extLst>
+              <a:ext uri="{FF2B5EF4-FFF2-40B4-BE49-F238E27FC236}">
+                <a16:creationId xmlns:a16="http://schemas.microsoft.com/office/drawing/2014/main" id="{33D5EC40-66CF-4031-0B6C-BB0FF72B95AC}"/>
+              </a:ext>
+            </a:extLst>
+          </p:cNvPr>
+          <p:cNvSpPr txBox="1"/>
+          <p:nvPr/>
+        </p:nvSpPr>
+        <p:spPr>
+          <a:xfrm>
+            <a:off x="0" y="0"/>
+            <a:ext cx="1336675" cy="114300"/>
+          </a:xfrm>
+          <a:prstGeom prst="rect">
+            <a:avLst/>
+          </a:prstGeom>
+          <a:solidFill>
+            <a:srgbClr val="3378C8"/>
+          </a:solidFill>
+          <a:effectLst/>
+        </p:spPr>
+        <p:txBody>
+          <a:bodyPr wrap="square" rtlCol="0" anchor="ctr">
+            <a:noAutofit/>
+          </a:bodyPr>
+          <a:lstStyle/>
+          <a:p>
+            <a:pPr algn="ctr"/>
+            <a:endParaRPr lang="ko-KR" altLang="en-US" sz="1600" b="1" spc="600" dirty="0">
+              <a:ln>
+                <a:solidFill>
+                  <a:schemeClr val="accent1">
+                    <a:shade val="15000"/>
+                    <a:alpha val="0"/>
+                  </a:schemeClr>
+                </a:solidFill>
+              </a:ln>
+              <a:solidFill>
+                <a:srgbClr val="3378C8"/>
+              </a:solidFill>
+              <a:latin typeface="세방고딕 Regular" panose="00000500000000000000" pitchFamily="2" charset="-127"/>
+              <a:ea typeface="세방고딕 Regular" panose="00000500000000000000" pitchFamily="2" charset="-127"/>
+            </a:endParaRPr>
+          </a:p>
+        </p:txBody>
+      </p:sp>
+      <p:pic>
+        <p:nvPicPr>
+          <p:cNvPr id="38" name="그래픽 37">
+            <a:extLst>
+              <a:ext uri="{FF2B5EF4-FFF2-40B4-BE49-F238E27FC236}">
+                <a16:creationId xmlns:a16="http://schemas.microsoft.com/office/drawing/2014/main" id="{52169E4C-2799-F656-9DE1-1585D60362A7}"/>
+              </a:ext>
+            </a:extLst>
+          </p:cNvPr>
+          <p:cNvPicPr>
+            <a:picLocks noChangeAspect="1"/>
+          </p:cNvPicPr>
+          <p:nvPr/>
+        </p:nvPicPr>
+        <p:blipFill rotWithShape="1">
+          <a:blip r:embed="rId3">
+            <a:extLst>
+              <a:ext uri="{96DAC541-7B7A-43D3-8B79-37D633B846F1}">
+                <asvg:svgBlip xmlns:asvg="http://schemas.microsoft.com/office/drawing/2016/SVG/main" r:embed="rId4"/>
+              </a:ext>
+            </a:extLst>
+          </a:blip>
+          <a:srcRect l="34974"/>
+          <a:stretch/>
+        </p:blipFill>
+        <p:spPr>
+          <a:xfrm rot="14660350">
+            <a:off x="1714" y="5530566"/>
+            <a:ext cx="1452422" cy="917364"/>
+          </a:xfrm>
+          <a:prstGeom prst="rect">
+            <a:avLst/>
+          </a:prstGeom>
+        </p:spPr>
+      </p:pic>
+      <p:pic>
+        <p:nvPicPr>
+          <p:cNvPr id="5" name="그래픽 4">
+            <a:extLst>
+              <a:ext uri="{FF2B5EF4-FFF2-40B4-BE49-F238E27FC236}">
+                <a16:creationId xmlns:a16="http://schemas.microsoft.com/office/drawing/2014/main" id="{F78E59B9-5F04-49C5-1722-52369FFA7F3C}"/>
+              </a:ext>
+            </a:extLst>
+          </p:cNvPr>
+          <p:cNvPicPr>
+            <a:picLocks noChangeAspect="1"/>
+          </p:cNvPicPr>
+          <p:nvPr/>
+        </p:nvPicPr>
+        <p:blipFill rotWithShape="1">
+          <a:blip r:embed="rId5">
+            <a:extLst>
+              <a:ext uri="{96DAC541-7B7A-43D3-8B79-37D633B846F1}">
+                <asvg:svgBlip xmlns:asvg="http://schemas.microsoft.com/office/drawing/2016/SVG/main" r:embed="rId6"/>
+              </a:ext>
+            </a:extLst>
+          </a:blip>
+          <a:srcRect l="45412"/>
+          <a:stretch/>
+        </p:blipFill>
+        <p:spPr>
+          <a:xfrm>
+            <a:off x="-1" y="3018378"/>
+            <a:ext cx="2914927" cy="2847758"/>
+          </a:xfrm>
+          <a:prstGeom prst="rect">
+            <a:avLst/>
+          </a:prstGeom>
+        </p:spPr>
+      </p:pic>
+      <p:pic>
+        <p:nvPicPr>
+          <p:cNvPr id="7" name="그래픽 6">
+            <a:extLst>
+              <a:ext uri="{FF2B5EF4-FFF2-40B4-BE49-F238E27FC236}">
+                <a16:creationId xmlns:a16="http://schemas.microsoft.com/office/drawing/2014/main" id="{83FBC032-B6AF-A79B-5B30-F603859AE362}"/>
+              </a:ext>
+            </a:extLst>
+          </p:cNvPr>
+          <p:cNvPicPr>
+            <a:picLocks noChangeAspect="1"/>
+          </p:cNvPicPr>
+          <p:nvPr/>
+        </p:nvPicPr>
+        <p:blipFill>
+          <a:blip r:embed="rId7">
+            <a:extLst>
+              <a:ext uri="{96DAC541-7B7A-43D3-8B79-37D633B846F1}">
+                <asvg:svgBlip xmlns:asvg="http://schemas.microsoft.com/office/drawing/2016/SVG/main" r:embed="rId8"/>
+              </a:ext>
+            </a:extLst>
+          </a:blip>
+          <a:stretch>
+            <a:fillRect/>
+          </a:stretch>
+        </p:blipFill>
+        <p:spPr>
+          <a:xfrm>
+            <a:off x="0" y="5934670"/>
+            <a:ext cx="12192000" cy="923330"/>
+          </a:xfrm>
+          <a:prstGeom prst="rect">
+            <a:avLst/>
+          </a:prstGeom>
+        </p:spPr>
+      </p:pic>
+      <p:pic>
+        <p:nvPicPr>
+          <p:cNvPr id="3" name="그림 2">
+            <a:extLst>
+              <a:ext uri="{FF2B5EF4-FFF2-40B4-BE49-F238E27FC236}">
+                <a16:creationId xmlns:a16="http://schemas.microsoft.com/office/drawing/2014/main" id="{E7D09214-7FAC-FD07-A5B4-2B1EEFFDBA12}"/>
+              </a:ext>
+            </a:extLst>
+          </p:cNvPr>
+          <p:cNvPicPr>
+            <a:picLocks noChangeAspect="1"/>
+          </p:cNvPicPr>
+          <p:nvPr/>
+        </p:nvPicPr>
+        <p:blipFill>
+          <a:blip r:embed="rId9"/>
+          <a:stretch>
+            <a:fillRect/>
+          </a:stretch>
+        </p:blipFill>
+        <p:spPr>
+          <a:xfrm>
+            <a:off x="372360" y="1780875"/>
+            <a:ext cx="3341574" cy="3802480"/>
+          </a:xfrm>
+          <a:prstGeom prst="rect">
+            <a:avLst/>
+          </a:prstGeom>
+        </p:spPr>
+      </p:pic>
+      <p:sp>
+        <p:nvSpPr>
+          <p:cNvPr id="4" name="직사각형 3">
+            <a:extLst>
+              <a:ext uri="{FF2B5EF4-FFF2-40B4-BE49-F238E27FC236}">
+                <a16:creationId xmlns:a16="http://schemas.microsoft.com/office/drawing/2014/main" id="{F95671EB-9BF9-09E5-E345-B8D87F7EDFDC}"/>
+              </a:ext>
+            </a:extLst>
+          </p:cNvPr>
+          <p:cNvSpPr/>
+          <p:nvPr/>
+        </p:nvSpPr>
+        <p:spPr>
+          <a:xfrm>
+            <a:off x="274810" y="5595073"/>
+            <a:ext cx="3369654" cy="1015663"/>
+          </a:xfrm>
+          <a:prstGeom prst="rect">
+            <a:avLst/>
+          </a:prstGeom>
+          <a:noFill/>
+        </p:spPr>
+        <p:txBody>
+          <a:bodyPr wrap="square" lIns="91440" tIns="45720" rIns="91440" bIns="45720">
+            <a:spAutoFit/>
+          </a:bodyPr>
+          <a:lstStyle/>
+          <a:p>
+            <a:pPr algn="ctr"/>
+            <a:r>
+              <a:rPr lang="en-US" altLang="ko-KR" sz="2000" b="0" cap="none" spc="0" dirty="0">
+                <a:ln w="0"/>
+                <a:solidFill>
+                  <a:schemeClr val="tx1"/>
+                </a:solidFill>
+                <a:effectLst>
+                  <a:outerShdw blurRad="38100" dist="19050" dir="2700000" algn="tl" rotWithShape="0">
+                    <a:schemeClr val="dk1">
+                      <a:alpha val="40000"/>
+                    </a:schemeClr>
+                  </a:outerShdw>
+                </a:effectLst>
+              </a:rPr>
+              <a:t>Vector </a:t>
+            </a:r>
+            <a:r>
+              <a:rPr lang="ko-KR" altLang="en-US" sz="2000" b="0" cap="none" spc="0" dirty="0">
+                <a:ln w="0"/>
+                <a:solidFill>
+                  <a:schemeClr val="tx1"/>
+                </a:solidFill>
+                <a:effectLst>
+                  <a:outerShdw blurRad="38100" dist="19050" dir="2700000" algn="tl" rotWithShape="0">
+                    <a:schemeClr val="dk1">
+                      <a:alpha val="40000"/>
+                    </a:schemeClr>
+                  </a:outerShdw>
+                </a:effectLst>
+              </a:rPr>
+              <a:t>연산으로 직접 공의 움직임과 충돌을 구현하여 물리법칙을 적용시킴</a:t>
+            </a:r>
+            <a:endParaRPr lang="en-US" altLang="ko-KR" sz="2000" b="0" cap="none" spc="0" dirty="0">
+              <a:ln w="0"/>
+              <a:solidFill>
+                <a:schemeClr val="tx1"/>
+              </a:solidFill>
+              <a:effectLst>
+                <a:outerShdw blurRad="38100" dist="19050" dir="2700000" algn="tl" rotWithShape="0">
+                  <a:schemeClr val="dk1">
+                    <a:alpha val="40000"/>
+                  </a:schemeClr>
+                </a:outerShdw>
+              </a:effectLst>
+            </a:endParaRPr>
+          </a:p>
+        </p:txBody>
+      </p:sp>
+      <p:pic>
+        <p:nvPicPr>
+          <p:cNvPr id="8" name="그림 7">
+            <a:extLst>
+              <a:ext uri="{FF2B5EF4-FFF2-40B4-BE49-F238E27FC236}">
+                <a16:creationId xmlns:a16="http://schemas.microsoft.com/office/drawing/2014/main" id="{8D576345-58AE-00CC-97BB-5A9CDDA9B6B9}"/>
+              </a:ext>
+            </a:extLst>
+          </p:cNvPr>
+          <p:cNvPicPr>
+            <a:picLocks noChangeAspect="1"/>
+          </p:cNvPicPr>
+          <p:nvPr/>
+        </p:nvPicPr>
+        <p:blipFill>
+          <a:blip r:embed="rId10"/>
+          <a:stretch>
+            <a:fillRect/>
+          </a:stretch>
+        </p:blipFill>
+        <p:spPr>
+          <a:xfrm>
+            <a:off x="5228457" y="1816880"/>
+            <a:ext cx="3433712" cy="3367785"/>
+          </a:xfrm>
+          <a:prstGeom prst="rect">
+            <a:avLst/>
+          </a:prstGeom>
+        </p:spPr>
+      </p:pic>
+      <p:pic>
+        <p:nvPicPr>
+          <p:cNvPr id="11" name="그림 10">
+            <a:extLst>
+              <a:ext uri="{FF2B5EF4-FFF2-40B4-BE49-F238E27FC236}">
+                <a16:creationId xmlns:a16="http://schemas.microsoft.com/office/drawing/2014/main" id="{9C497904-0BA3-06A7-AB33-FEC3CF30DA6D}"/>
+              </a:ext>
+            </a:extLst>
+          </p:cNvPr>
+          <p:cNvPicPr>
+            <a:picLocks noChangeAspect="1"/>
+          </p:cNvPicPr>
+          <p:nvPr/>
+        </p:nvPicPr>
+        <p:blipFill>
+          <a:blip r:embed="rId11"/>
+          <a:stretch>
+            <a:fillRect/>
+          </a:stretch>
+        </p:blipFill>
+        <p:spPr>
+          <a:xfrm>
+            <a:off x="8794327" y="2369153"/>
+            <a:ext cx="3172003" cy="1635911"/>
+          </a:xfrm>
+          <a:prstGeom prst="rect">
+            <a:avLst/>
+          </a:prstGeom>
+        </p:spPr>
+      </p:pic>
+      <p:pic>
+        <p:nvPicPr>
+          <p:cNvPr id="13" name="그림 12">
+            <a:extLst>
+              <a:ext uri="{FF2B5EF4-FFF2-40B4-BE49-F238E27FC236}">
+                <a16:creationId xmlns:a16="http://schemas.microsoft.com/office/drawing/2014/main" id="{A62B4838-C542-5026-80FC-CFADDDF28950}"/>
+              </a:ext>
+            </a:extLst>
+          </p:cNvPr>
+          <p:cNvPicPr>
+            <a:picLocks noChangeAspect="1"/>
+          </p:cNvPicPr>
+          <p:nvPr/>
+        </p:nvPicPr>
+        <p:blipFill>
+          <a:blip r:embed="rId12"/>
+          <a:stretch>
+            <a:fillRect/>
+          </a:stretch>
+        </p:blipFill>
+        <p:spPr>
+          <a:xfrm>
+            <a:off x="6315736" y="4013576"/>
+            <a:ext cx="2700715" cy="2629267"/>
+          </a:xfrm>
+          <a:prstGeom prst="rect">
+            <a:avLst/>
+          </a:prstGeom>
+        </p:spPr>
+      </p:pic>
+      <p:sp>
+        <p:nvSpPr>
+          <p:cNvPr id="14" name="직사각형 13">
+            <a:extLst>
+              <a:ext uri="{FF2B5EF4-FFF2-40B4-BE49-F238E27FC236}">
+                <a16:creationId xmlns:a16="http://schemas.microsoft.com/office/drawing/2014/main" id="{43F3CF22-4DF2-82F4-8554-FC19B0EFB5FE}"/>
+              </a:ext>
+            </a:extLst>
+          </p:cNvPr>
+          <p:cNvSpPr/>
+          <p:nvPr/>
+        </p:nvSpPr>
+        <p:spPr>
+          <a:xfrm>
+            <a:off x="8594805" y="4635129"/>
+            <a:ext cx="3571049" cy="400110"/>
+          </a:xfrm>
+          <a:prstGeom prst="rect">
+            <a:avLst/>
+          </a:prstGeom>
+          <a:noFill/>
+        </p:spPr>
+        <p:txBody>
+          <a:bodyPr wrap="square" lIns="91440" tIns="45720" rIns="91440" bIns="45720">
+            <a:spAutoFit/>
+          </a:bodyPr>
+          <a:lstStyle/>
+          <a:p>
+            <a:pPr algn="ctr"/>
+            <a:r>
+              <a:rPr lang="ko-KR" altLang="en-US" sz="2000" b="0" cap="none" spc="0" dirty="0">
+                <a:ln w="0"/>
+                <a:solidFill>
+                  <a:schemeClr val="tx1"/>
+                </a:solidFill>
+                <a:effectLst>
+                  <a:outerShdw blurRad="38100" dist="19050" dir="2700000" algn="tl" rotWithShape="0">
+                    <a:schemeClr val="dk1">
+                      <a:alpha val="40000"/>
+                    </a:schemeClr>
+                  </a:outerShdw>
+                </a:effectLst>
+              </a:rPr>
+              <a:t>오브젝트들의 클래스화</a:t>
+            </a:r>
+            <a:endParaRPr lang="en-US" altLang="ko-KR" sz="2000" b="0" cap="none" spc="0" dirty="0">
+              <a:ln w="0"/>
+              <a:solidFill>
+                <a:schemeClr val="tx1"/>
+              </a:solidFill>
+              <a:effectLst>
+                <a:outerShdw blurRad="38100" dist="19050" dir="2700000" algn="tl" rotWithShape="0">
+                  <a:schemeClr val="dk1">
+                    <a:alpha val="40000"/>
+                  </a:schemeClr>
+                </a:outerShdw>
+              </a:effectLst>
+            </a:endParaRPr>
+          </a:p>
+        </p:txBody>
+      </p:sp>
+    </p:spTree>
+    <p:extLst>
+      <p:ext uri="{BB962C8B-B14F-4D97-AF65-F5344CB8AC3E}">
+        <p14:creationId xmlns:p14="http://schemas.microsoft.com/office/powerpoint/2010/main" val="1595474381"/>
+      </p:ext>
+    </p:extLst>
+  </p:cSld>
+  <p:clrMapOvr>
+    <a:masterClrMapping/>
+  </p:clrMapOvr>
+</p:sld>
+</file>
+
+<file path=ppt/slides/slide6.xml><?xml version="1.0" encoding="utf-8"?>
+<p:sld xmlns:a="http://schemas.openxmlformats.org/drawingml/2006/main" xmlns:r="http://schemas.openxmlformats.org/officeDocument/2006/relationships" xmlns:p="http://schemas.openxmlformats.org/presentationml/2006/main">
+  <p:cSld>
+    <p:spTree>
+      <p:nvGrpSpPr>
+        <p:cNvPr id="1" name=""/>
+        <p:cNvGrpSpPr/>
+        <p:nvPr/>
+      </p:nvGrpSpPr>
+      <p:grpSpPr>
+        <a:xfrm>
+          <a:off x="0" y="0"/>
+          <a:ext cx="0" cy="0"/>
+          <a:chOff x="0" y="0"/>
+          <a:chExt cx="0" cy="0"/>
+        </a:xfrm>
+      </p:grpSpPr>
+      <p:sp>
+        <p:nvSpPr>
           <p:cNvPr id="39" name="사각형: 둥근 한쪽 모서리 38">
             <a:extLst>
               <a:ext uri="{FF2B5EF4-FFF2-40B4-BE49-F238E27FC236}">
@@ -20342,9 +21278,9 @@
         <p:grpSpPr>
           <a:xfrm>
             <a:off x="371364" y="206484"/>
-            <a:ext cx="6048672" cy="787491"/>
+            <a:ext cx="6048672" cy="830997"/>
             <a:chOff x="376102" y="333243"/>
-            <a:chExt cx="5948498" cy="830997"/>
+            <a:chExt cx="5948498" cy="876907"/>
           </a:xfrm>
         </p:grpSpPr>
         <p:sp>
@@ -20467,6 +21403,87 @@
                 </a:rPr>
                 <a:t>순서도</a:t>
               </a:r>
+              <a:r>
+                <a:rPr lang="en-US" altLang="ko-KR" sz="2800" b="1" dirty="0">
+                  <a:ln>
+                    <a:solidFill>
+                      <a:schemeClr val="accent1">
+                        <a:shade val="15000"/>
+                        <a:alpha val="0"/>
+                      </a:schemeClr>
+                    </a:solidFill>
+                  </a:ln>
+                  <a:solidFill>
+                    <a:schemeClr val="tx1">
+                      <a:lumMod val="75000"/>
+                      <a:lumOff val="25000"/>
+                    </a:schemeClr>
+                  </a:solidFill>
+                  <a:latin typeface="맑은 고딕" panose="020B0503020000020004" pitchFamily="50" charset="-127"/>
+                  <a:ea typeface="맑은 고딕" panose="020B0503020000020004" pitchFamily="50" charset="-127"/>
+                </a:rPr>
+                <a:t>(</a:t>
+              </a:r>
+              <a:r>
+                <a:rPr lang="ko-KR" altLang="en-US" sz="2800" b="1" dirty="0">
+                  <a:ln>
+                    <a:solidFill>
+                      <a:schemeClr val="accent1">
+                        <a:shade val="15000"/>
+                        <a:alpha val="0"/>
+                      </a:schemeClr>
+                    </a:solidFill>
+                  </a:ln>
+                  <a:solidFill>
+                    <a:schemeClr val="tx1">
+                      <a:lumMod val="75000"/>
+                      <a:lumOff val="25000"/>
+                    </a:schemeClr>
+                  </a:solidFill>
+                  <a:latin typeface="맑은 고딕" panose="020B0503020000020004" pitchFamily="50" charset="-127"/>
+                  <a:ea typeface="맑은 고딕" panose="020B0503020000020004" pitchFamily="50" charset="-127"/>
+                </a:rPr>
+                <a:t>동작 과정 요약</a:t>
+              </a:r>
+              <a:r>
+                <a:rPr lang="en-US" altLang="ko-KR" sz="2800" b="1" dirty="0">
+                  <a:ln>
+                    <a:solidFill>
+                      <a:schemeClr val="accent1">
+                        <a:shade val="15000"/>
+                        <a:alpha val="0"/>
+                      </a:schemeClr>
+                    </a:solidFill>
+                  </a:ln>
+                  <a:solidFill>
+                    <a:schemeClr val="tx1">
+                      <a:lumMod val="75000"/>
+                      <a:lumOff val="25000"/>
+                    </a:schemeClr>
+                  </a:solidFill>
+                  <a:latin typeface="맑은 고딕" panose="020B0503020000020004" pitchFamily="50" charset="-127"/>
+                  <a:ea typeface="맑은 고딕" panose="020B0503020000020004" pitchFamily="50" charset="-127"/>
+                </a:rPr>
+                <a:t>)</a:t>
+              </a:r>
+              <a:endParaRPr lang="ko-KR" altLang="en-US" sz="2800" b="1" dirty="0">
+                <a:ln>
+                  <a:solidFill>
+                    <a:schemeClr val="accent1">
+                      <a:shade val="15000"/>
+                      <a:alpha val="0"/>
+                    </a:schemeClr>
+                  </a:solidFill>
+                </a:ln>
+                <a:solidFill>
+                  <a:schemeClr val="tx1">
+                    <a:lumMod val="75000"/>
+                    <a:lumOff val="25000"/>
+                  </a:schemeClr>
+                </a:solidFill>
+                <a:latin typeface="맑은 고딕" panose="020B0503020000020004" pitchFamily="50" charset="-127"/>
+                <a:ea typeface="맑은 고딕" panose="020B0503020000020004" pitchFamily="50" charset="-127"/>
+              </a:endParaRPr>
             </a:p>
           </p:txBody>
         </p:sp>
@@ -20485,7 +21502,7 @@
           <p:spPr>
             <a:xfrm>
               <a:off x="376102" y="333243"/>
-              <a:ext cx="1266679" cy="830997"/>
+              <a:ext cx="1266679" cy="876907"/>
             </a:xfrm>
             <a:prstGeom prst="rect">
               <a:avLst/>
@@ -20523,7 +21540,7 @@
                   <a:latin typeface="세방고딕 Bold" panose="00000800000000000000" pitchFamily="2" charset="-127"/>
                   <a:ea typeface="세방고딕 Bold" panose="00000800000000000000" pitchFamily="2" charset="-127"/>
                 </a:rPr>
-                <a:t>02</a:t>
+                <a:t>03</a:t>
               </a:r>
               <a:endParaRPr lang="ko-KR" altLang="en-US" sz="4400" b="1" dirty="0">
                 <a:ln>
@@ -20722,1728 +21739,46 @@
           </a:prstGeom>
         </p:spPr>
       </p:pic>
-      <p:sp>
-        <p:nvSpPr>
-          <p:cNvPr id="17" name="사각형: 둥근 모서리 16">
-            <a:extLst>
-              <a:ext uri="{FF2B5EF4-FFF2-40B4-BE49-F238E27FC236}">
-                <a16:creationId xmlns:a16="http://schemas.microsoft.com/office/drawing/2014/main" id="{B338D982-DB2C-0C32-1086-396C4C683D3F}"/>
-              </a:ext>
-            </a:extLst>
-          </p:cNvPr>
-          <p:cNvSpPr/>
+      <p:pic>
+        <p:nvPicPr>
+          <p:cNvPr id="9" name="그림 8" descr="도표, 기술 도면, 평면도, 라인이(가) 표시된 사진&#10;&#10;자동 생성된 설명">
+            <a:extLst>
+              <a:ext uri="{FF2B5EF4-FFF2-40B4-BE49-F238E27FC236}">
+                <a16:creationId xmlns:a16="http://schemas.microsoft.com/office/drawing/2014/main" id="{43F208E0-57CD-4B6D-32CA-5450830AF852}"/>
+              </a:ext>
+            </a:extLst>
+          </p:cNvPr>
+          <p:cNvPicPr>
+            <a:picLocks noChangeAspect="1"/>
+          </p:cNvPicPr>
           <p:nvPr/>
-        </p:nvSpPr>
+        </p:nvPicPr>
+        <p:blipFill>
+          <a:blip r:embed="rId5">
+            <a:extLst>
+              <a:ext uri="{28A0092B-C50C-407E-A947-70E740481C1C}">
+                <a14:useLocalDpi xmlns:a14="http://schemas.microsoft.com/office/drawing/2010/main" val="0"/>
+              </a:ext>
+            </a:extLst>
+          </a:blip>
+          <a:stretch>
+            <a:fillRect/>
+          </a:stretch>
+        </p:blipFill>
         <p:spPr>
           <a:xfrm>
-            <a:off x="68215" y="3286724"/>
-            <a:ext cx="554910" cy="931088"/>
-          </a:xfrm>
-          <a:prstGeom prst="roundRect">
-            <a:avLst>
-              <a:gd name="adj" fmla="val 50000"/>
-            </a:avLst>
-          </a:prstGeom>
-          <a:ln>
-            <a:solidFill>
-              <a:schemeClr val="tx1"/>
-            </a:solidFill>
-          </a:ln>
-        </p:spPr>
-        <p:style>
-          <a:lnRef idx="2">
-            <a:schemeClr val="accent6"/>
-          </a:lnRef>
-          <a:fillRef idx="1">
-            <a:schemeClr val="lt1"/>
-          </a:fillRef>
-          <a:effectRef idx="0">
-            <a:schemeClr val="accent6"/>
-          </a:effectRef>
-          <a:fontRef idx="minor">
-            <a:schemeClr val="dk1"/>
-          </a:fontRef>
-        </p:style>
-        <p:txBody>
-          <a:bodyPr rtlCol="0" anchor="ctr"/>
-          <a:lstStyle/>
-          <a:p>
-            <a:pPr algn="ctr"/>
-            <a:r>
-              <a:rPr lang="ko-KR" altLang="en-US" sz="1000" dirty="0"/>
-              <a:t>시작</a:t>
-            </a:r>
-          </a:p>
-        </p:txBody>
-      </p:sp>
-      <p:sp>
-        <p:nvSpPr>
-          <p:cNvPr id="18" name="직사각형 17">
-            <a:extLst>
-              <a:ext uri="{FF2B5EF4-FFF2-40B4-BE49-F238E27FC236}">
-                <a16:creationId xmlns:a16="http://schemas.microsoft.com/office/drawing/2014/main" id="{91EE2966-7D07-0EBF-5994-4EC3242D2145}"/>
-              </a:ext>
-            </a:extLst>
-          </p:cNvPr>
-          <p:cNvSpPr/>
-          <p:nvPr/>
-        </p:nvSpPr>
-        <p:spPr>
-          <a:xfrm>
-            <a:off x="810500" y="3530068"/>
-            <a:ext cx="1268979" cy="444399"/>
+            <a:off x="1127448" y="1389822"/>
+            <a:ext cx="3472918" cy="5199102"/>
           </a:xfrm>
           <a:prstGeom prst="rect">
             <a:avLst/>
           </a:prstGeom>
-          <a:ln>
-            <a:solidFill>
-              <a:schemeClr val="tx1"/>
-            </a:solidFill>
-          </a:ln>
         </p:spPr>
-        <p:style>
-          <a:lnRef idx="2">
-            <a:schemeClr val="accent6"/>
-          </a:lnRef>
-          <a:fillRef idx="1">
-            <a:schemeClr val="lt1"/>
-          </a:fillRef>
-          <a:effectRef idx="0">
-            <a:schemeClr val="accent6"/>
-          </a:effectRef>
-          <a:fontRef idx="minor">
-            <a:schemeClr val="dk1"/>
-          </a:fontRef>
-        </p:style>
-        <p:txBody>
-          <a:bodyPr rtlCol="0" anchor="ctr"/>
-          <a:lstStyle/>
-          <a:p>
-            <a:pPr algn="ctr"/>
-            <a:r>
-              <a:rPr lang="ko-KR" altLang="en-US" sz="1000" dirty="0"/>
-              <a:t>스테이지</a:t>
-            </a:r>
-          </a:p>
-        </p:txBody>
-      </p:sp>
-      <p:sp>
-        <p:nvSpPr>
-          <p:cNvPr id="19" name="순서도: 판단 18">
-            <a:extLst>
-              <a:ext uri="{FF2B5EF4-FFF2-40B4-BE49-F238E27FC236}">
-                <a16:creationId xmlns:a16="http://schemas.microsoft.com/office/drawing/2014/main" id="{3A5FBDCD-C60A-EDED-5990-7EA1D6EDEE12}"/>
-              </a:ext>
-            </a:extLst>
-          </p:cNvPr>
-          <p:cNvSpPr/>
-          <p:nvPr/>
-        </p:nvSpPr>
-        <p:spPr>
-          <a:xfrm>
-            <a:off x="2355209" y="2284940"/>
-            <a:ext cx="1403889" cy="903884"/>
-          </a:xfrm>
-          <a:prstGeom prst="flowChartDecision">
-            <a:avLst/>
-          </a:prstGeom>
-          <a:ln>
-            <a:solidFill>
-              <a:schemeClr val="tx1"/>
-            </a:solidFill>
-          </a:ln>
-        </p:spPr>
-        <p:style>
-          <a:lnRef idx="2">
-            <a:schemeClr val="accent6"/>
-          </a:lnRef>
-          <a:fillRef idx="1">
-            <a:schemeClr val="lt1"/>
-          </a:fillRef>
-          <a:effectRef idx="0">
-            <a:schemeClr val="accent6"/>
-          </a:effectRef>
-          <a:fontRef idx="minor">
-            <a:schemeClr val="dk1"/>
-          </a:fontRef>
-        </p:style>
-        <p:txBody>
-          <a:bodyPr rtlCol="0" anchor="ctr"/>
-          <a:lstStyle/>
-          <a:p>
-            <a:pPr algn="ctr"/>
-            <a:r>
-              <a:rPr lang="ko-KR" altLang="en-US" sz="1000" dirty="0"/>
-              <a:t>생명력 회복</a:t>
-            </a:r>
-            <a:endParaRPr lang="en-US" altLang="ko-KR" sz="1000" dirty="0"/>
-          </a:p>
-          <a:p>
-            <a:pPr algn="ctr"/>
-            <a:r>
-              <a:rPr lang="ko-KR" altLang="en-US" sz="1000" dirty="0"/>
-              <a:t>아이템 습득</a:t>
-            </a:r>
-          </a:p>
-        </p:txBody>
-      </p:sp>
-      <p:sp>
-        <p:nvSpPr>
-          <p:cNvPr id="33" name="직사각형 32">
-            <a:extLst>
-              <a:ext uri="{FF2B5EF4-FFF2-40B4-BE49-F238E27FC236}">
-                <a16:creationId xmlns:a16="http://schemas.microsoft.com/office/drawing/2014/main" id="{04C428E2-47CC-99FA-EA0A-5966E4368B8C}"/>
-              </a:ext>
-            </a:extLst>
-          </p:cNvPr>
-          <p:cNvSpPr/>
-          <p:nvPr/>
-        </p:nvSpPr>
-        <p:spPr>
-          <a:xfrm>
-            <a:off x="4021609" y="2503542"/>
-            <a:ext cx="1112647" cy="429382"/>
-          </a:xfrm>
-          <a:prstGeom prst="rect">
-            <a:avLst/>
-          </a:prstGeom>
-          <a:ln>
-            <a:solidFill>
-              <a:schemeClr val="tx1"/>
-            </a:solidFill>
-          </a:ln>
-        </p:spPr>
-        <p:style>
-          <a:lnRef idx="2">
-            <a:schemeClr val="accent6"/>
-          </a:lnRef>
-          <a:fillRef idx="1">
-            <a:schemeClr val="lt1"/>
-          </a:fillRef>
-          <a:effectRef idx="0">
-            <a:schemeClr val="accent6"/>
-          </a:effectRef>
-          <a:fontRef idx="minor">
-            <a:schemeClr val="dk1"/>
-          </a:fontRef>
-        </p:style>
-        <p:txBody>
-          <a:bodyPr rtlCol="0" anchor="ctr"/>
-          <a:lstStyle/>
-          <a:p>
-            <a:pPr algn="ctr"/>
-            <a:r>
-              <a:rPr lang="ko-KR" altLang="en-US" sz="1000" dirty="0"/>
-              <a:t>생명력 </a:t>
-            </a:r>
-            <a:r>
-              <a:rPr lang="en-US" altLang="ko-KR" sz="1000" dirty="0"/>
-              <a:t>+1</a:t>
-            </a:r>
-            <a:endParaRPr lang="ko-KR" altLang="en-US" sz="1000" dirty="0"/>
-          </a:p>
-        </p:txBody>
-      </p:sp>
-      <p:sp>
-        <p:nvSpPr>
-          <p:cNvPr id="34" name="직사각형 33">
-            <a:extLst>
-              <a:ext uri="{FF2B5EF4-FFF2-40B4-BE49-F238E27FC236}">
-                <a16:creationId xmlns:a16="http://schemas.microsoft.com/office/drawing/2014/main" id="{A2B0CFB7-6E92-D483-944B-91ECAE6806D4}"/>
-              </a:ext>
-            </a:extLst>
-          </p:cNvPr>
-          <p:cNvSpPr/>
-          <p:nvPr/>
-        </p:nvSpPr>
-        <p:spPr>
-          <a:xfrm>
-            <a:off x="4006753" y="1565906"/>
-            <a:ext cx="1112647" cy="429382"/>
-          </a:xfrm>
-          <a:prstGeom prst="rect">
-            <a:avLst/>
-          </a:prstGeom>
-          <a:ln>
-            <a:solidFill>
-              <a:schemeClr val="tx1"/>
-            </a:solidFill>
-          </a:ln>
-        </p:spPr>
-        <p:style>
-          <a:lnRef idx="2">
-            <a:schemeClr val="accent6"/>
-          </a:lnRef>
-          <a:fillRef idx="1">
-            <a:schemeClr val="lt1"/>
-          </a:fillRef>
-          <a:effectRef idx="0">
-            <a:schemeClr val="accent6"/>
-          </a:effectRef>
-          <a:fontRef idx="minor">
-            <a:schemeClr val="dk1"/>
-          </a:fontRef>
-        </p:style>
-        <p:txBody>
-          <a:bodyPr rtlCol="0" anchor="ctr"/>
-          <a:lstStyle/>
-          <a:p>
-            <a:pPr algn="ctr"/>
-            <a:r>
-              <a:rPr lang="ko-KR" altLang="en-US" sz="1000" dirty="0"/>
-              <a:t>공 위치 초기화</a:t>
-            </a:r>
-          </a:p>
-        </p:txBody>
-      </p:sp>
-      <p:sp>
-        <p:nvSpPr>
-          <p:cNvPr id="35" name="직사각형 34">
-            <a:extLst>
-              <a:ext uri="{FF2B5EF4-FFF2-40B4-BE49-F238E27FC236}">
-                <a16:creationId xmlns:a16="http://schemas.microsoft.com/office/drawing/2014/main" id="{90B4B28B-9A43-5355-E1F7-487EDB0D9A7E}"/>
-              </a:ext>
-            </a:extLst>
-          </p:cNvPr>
-          <p:cNvSpPr/>
-          <p:nvPr/>
-        </p:nvSpPr>
-        <p:spPr>
-          <a:xfrm>
-            <a:off x="4021608" y="3527423"/>
-            <a:ext cx="1112647" cy="429382"/>
-          </a:xfrm>
-          <a:prstGeom prst="rect">
-            <a:avLst/>
-          </a:prstGeom>
-          <a:ln>
-            <a:solidFill>
-              <a:schemeClr val="tx1"/>
-            </a:solidFill>
-          </a:ln>
-        </p:spPr>
-        <p:style>
-          <a:lnRef idx="2">
-            <a:schemeClr val="accent6"/>
-          </a:lnRef>
-          <a:fillRef idx="1">
-            <a:schemeClr val="lt1"/>
-          </a:fillRef>
-          <a:effectRef idx="0">
-            <a:schemeClr val="accent6"/>
-          </a:effectRef>
-          <a:fontRef idx="minor">
-            <a:schemeClr val="dk1"/>
-          </a:fontRef>
-        </p:style>
-        <p:txBody>
-          <a:bodyPr rtlCol="0" anchor="ctr"/>
-          <a:lstStyle/>
-          <a:p>
-            <a:pPr algn="ctr"/>
-            <a:r>
-              <a:rPr lang="ko-KR" altLang="en-US" sz="1000" dirty="0"/>
-              <a:t>생명력 </a:t>
-            </a:r>
-            <a:r>
-              <a:rPr lang="en-US" altLang="ko-KR" sz="1000" dirty="0"/>
-              <a:t>-1</a:t>
-            </a:r>
-            <a:endParaRPr lang="ko-KR" altLang="en-US" sz="1000" dirty="0"/>
-          </a:p>
-        </p:txBody>
-      </p:sp>
-      <p:sp>
-        <p:nvSpPr>
-          <p:cNvPr id="36" name="직사각형 35">
-            <a:extLst>
-              <a:ext uri="{FF2B5EF4-FFF2-40B4-BE49-F238E27FC236}">
-                <a16:creationId xmlns:a16="http://schemas.microsoft.com/office/drawing/2014/main" id="{A069573E-4C56-568E-0865-626F94D70A74}"/>
-              </a:ext>
-            </a:extLst>
-          </p:cNvPr>
-          <p:cNvSpPr/>
-          <p:nvPr/>
-        </p:nvSpPr>
-        <p:spPr>
-          <a:xfrm>
-            <a:off x="4114566" y="4547491"/>
-            <a:ext cx="1112647" cy="429382"/>
-          </a:xfrm>
-          <a:prstGeom prst="rect">
-            <a:avLst/>
-          </a:prstGeom>
-          <a:ln>
-            <a:solidFill>
-              <a:schemeClr val="tx1"/>
-            </a:solidFill>
-          </a:ln>
-        </p:spPr>
-        <p:style>
-          <a:lnRef idx="2">
-            <a:schemeClr val="accent6"/>
-          </a:lnRef>
-          <a:fillRef idx="1">
-            <a:schemeClr val="lt1"/>
-          </a:fillRef>
-          <a:effectRef idx="0">
-            <a:schemeClr val="accent6"/>
-          </a:effectRef>
-          <a:fontRef idx="minor">
-            <a:schemeClr val="dk1"/>
-          </a:fontRef>
-        </p:style>
-        <p:txBody>
-          <a:bodyPr rtlCol="0" anchor="ctr"/>
-          <a:lstStyle/>
-          <a:p>
-            <a:pPr algn="ctr"/>
-            <a:r>
-              <a:rPr lang="ko-KR" altLang="en-US" sz="1000" dirty="0"/>
-              <a:t>벽돌 생명력 </a:t>
-            </a:r>
-            <a:r>
-              <a:rPr lang="en-US" altLang="ko-KR" sz="1000" dirty="0"/>
-              <a:t>-1</a:t>
-            </a:r>
-            <a:endParaRPr lang="ko-KR" altLang="en-US" sz="1000" dirty="0"/>
-          </a:p>
-        </p:txBody>
-      </p:sp>
-      <p:sp>
-        <p:nvSpPr>
-          <p:cNvPr id="40" name="순서도: 판단 39">
-            <a:extLst>
-              <a:ext uri="{FF2B5EF4-FFF2-40B4-BE49-F238E27FC236}">
-                <a16:creationId xmlns:a16="http://schemas.microsoft.com/office/drawing/2014/main" id="{65A4DECB-F8F1-5600-49D0-CD20A9B43F79}"/>
-              </a:ext>
-            </a:extLst>
-          </p:cNvPr>
-          <p:cNvSpPr/>
-          <p:nvPr/>
-        </p:nvSpPr>
-        <p:spPr>
-          <a:xfrm>
-            <a:off x="5546668" y="4327353"/>
-            <a:ext cx="1828954" cy="869658"/>
-          </a:xfrm>
-          <a:prstGeom prst="flowChartDecision">
-            <a:avLst/>
-          </a:prstGeom>
-          <a:ln>
-            <a:solidFill>
-              <a:schemeClr val="tx1"/>
-            </a:solidFill>
-          </a:ln>
-        </p:spPr>
-        <p:style>
-          <a:lnRef idx="2">
-            <a:schemeClr val="accent6"/>
-          </a:lnRef>
-          <a:fillRef idx="1">
-            <a:schemeClr val="lt1"/>
-          </a:fillRef>
-          <a:effectRef idx="0">
-            <a:schemeClr val="accent6"/>
-          </a:effectRef>
-          <a:fontRef idx="minor">
-            <a:schemeClr val="dk1"/>
-          </a:fontRef>
-        </p:style>
-        <p:txBody>
-          <a:bodyPr rtlCol="0" anchor="ctr"/>
-          <a:lstStyle/>
-          <a:p>
-            <a:pPr algn="ctr"/>
-            <a:r>
-              <a:rPr lang="ko-KR" altLang="en-US" sz="1000" dirty="0"/>
-              <a:t>모든 벽돌을 부셨는가</a:t>
-            </a:r>
-            <a:r>
-              <a:rPr lang="en-US" altLang="ko-KR" sz="1000" dirty="0"/>
-              <a:t>?</a:t>
-            </a:r>
-            <a:endParaRPr lang="ko-KR" altLang="en-US" sz="1000" dirty="0"/>
-          </a:p>
-        </p:txBody>
-      </p:sp>
-      <p:sp>
-        <p:nvSpPr>
-          <p:cNvPr id="41" name="순서도: 판단 40">
-            <a:extLst>
-              <a:ext uri="{FF2B5EF4-FFF2-40B4-BE49-F238E27FC236}">
-                <a16:creationId xmlns:a16="http://schemas.microsoft.com/office/drawing/2014/main" id="{5E079F83-19D8-1718-E38F-DF9D53050917}"/>
-              </a:ext>
-            </a:extLst>
-          </p:cNvPr>
-          <p:cNvSpPr/>
-          <p:nvPr/>
-        </p:nvSpPr>
-        <p:spPr>
-          <a:xfrm>
-            <a:off x="2346564" y="1324790"/>
-            <a:ext cx="1403889" cy="903884"/>
-          </a:xfrm>
-          <a:prstGeom prst="flowChartDecision">
-            <a:avLst/>
-          </a:prstGeom>
-          <a:ln>
-            <a:solidFill>
-              <a:schemeClr val="tx1"/>
-            </a:solidFill>
-          </a:ln>
-        </p:spPr>
-        <p:style>
-          <a:lnRef idx="2">
-            <a:schemeClr val="accent6"/>
-          </a:lnRef>
-          <a:fillRef idx="1">
-            <a:schemeClr val="lt1"/>
-          </a:fillRef>
-          <a:effectRef idx="0">
-            <a:schemeClr val="accent6"/>
-          </a:effectRef>
-          <a:fontRef idx="minor">
-            <a:schemeClr val="dk1"/>
-          </a:fontRef>
-        </p:style>
-        <p:txBody>
-          <a:bodyPr rtlCol="0" anchor="ctr"/>
-          <a:lstStyle/>
-          <a:p>
-            <a:pPr algn="ctr"/>
-            <a:r>
-              <a:rPr lang="ko-KR" altLang="en-US" sz="1000" dirty="0"/>
-              <a:t>공 위치 초기화 아이템 습득</a:t>
-            </a:r>
-          </a:p>
-        </p:txBody>
-      </p:sp>
-      <p:sp>
-        <p:nvSpPr>
-          <p:cNvPr id="42" name="순서도: 판단 41">
-            <a:extLst>
-              <a:ext uri="{FF2B5EF4-FFF2-40B4-BE49-F238E27FC236}">
-                <a16:creationId xmlns:a16="http://schemas.microsoft.com/office/drawing/2014/main" id="{26EA633E-0338-A52D-40ED-86D58DA9195C}"/>
-              </a:ext>
-            </a:extLst>
-          </p:cNvPr>
-          <p:cNvSpPr/>
-          <p:nvPr/>
-        </p:nvSpPr>
-        <p:spPr>
-          <a:xfrm>
-            <a:off x="2336881" y="3281297"/>
-            <a:ext cx="1403889" cy="903884"/>
-          </a:xfrm>
-          <a:prstGeom prst="flowChartDecision">
-            <a:avLst/>
-          </a:prstGeom>
-          <a:ln>
-            <a:solidFill>
-              <a:schemeClr val="tx1"/>
-            </a:solidFill>
-          </a:ln>
-        </p:spPr>
-        <p:style>
-          <a:lnRef idx="2">
-            <a:schemeClr val="accent6"/>
-          </a:lnRef>
-          <a:fillRef idx="1">
-            <a:schemeClr val="lt1"/>
-          </a:fillRef>
-          <a:effectRef idx="0">
-            <a:schemeClr val="accent6"/>
-          </a:effectRef>
-          <a:fontRef idx="minor">
-            <a:schemeClr val="dk1"/>
-          </a:fontRef>
-        </p:style>
-        <p:txBody>
-          <a:bodyPr rtlCol="0" anchor="ctr"/>
-          <a:lstStyle/>
-          <a:p>
-            <a:pPr algn="ctr"/>
-            <a:r>
-              <a:rPr lang="ko-KR" altLang="en-US" sz="1000" dirty="0"/>
-              <a:t>공이 </a:t>
-            </a:r>
-            <a:endParaRPr lang="en-US" altLang="ko-KR" sz="1000" dirty="0"/>
-          </a:p>
-          <a:p>
-            <a:pPr algn="ctr"/>
-            <a:r>
-              <a:rPr lang="ko-KR" altLang="en-US" sz="1000" dirty="0"/>
-              <a:t>받침대 밑 벽에 충돌</a:t>
-            </a:r>
-          </a:p>
-        </p:txBody>
-      </p:sp>
-      <p:sp>
-        <p:nvSpPr>
-          <p:cNvPr id="43" name="순서도: 판단 42">
-            <a:extLst>
-              <a:ext uri="{FF2B5EF4-FFF2-40B4-BE49-F238E27FC236}">
-                <a16:creationId xmlns:a16="http://schemas.microsoft.com/office/drawing/2014/main" id="{5DD97ECD-940F-87A1-4A41-DA242A10034B}"/>
-              </a:ext>
-            </a:extLst>
-          </p:cNvPr>
-          <p:cNvSpPr/>
-          <p:nvPr/>
-        </p:nvSpPr>
-        <p:spPr>
-          <a:xfrm>
-            <a:off x="2342313" y="4310240"/>
-            <a:ext cx="1403889" cy="903884"/>
-          </a:xfrm>
-          <a:prstGeom prst="flowChartDecision">
-            <a:avLst/>
-          </a:prstGeom>
-          <a:ln>
-            <a:solidFill>
-              <a:schemeClr val="tx1"/>
-            </a:solidFill>
-          </a:ln>
-        </p:spPr>
-        <p:style>
-          <a:lnRef idx="2">
-            <a:schemeClr val="accent6"/>
-          </a:lnRef>
-          <a:fillRef idx="1">
-            <a:schemeClr val="lt1"/>
-          </a:fillRef>
-          <a:effectRef idx="0">
-            <a:schemeClr val="accent6"/>
-          </a:effectRef>
-          <a:fontRef idx="minor">
-            <a:schemeClr val="dk1"/>
-          </a:fontRef>
-        </p:style>
-        <p:txBody>
-          <a:bodyPr rtlCol="0" anchor="ctr"/>
-          <a:lstStyle/>
-          <a:p>
-            <a:pPr algn="ctr"/>
-            <a:r>
-              <a:rPr lang="ko-KR" altLang="en-US" sz="1000" dirty="0"/>
-              <a:t>공이</a:t>
-            </a:r>
-            <a:endParaRPr lang="en-US" altLang="ko-KR" sz="1000" dirty="0"/>
-          </a:p>
-          <a:p>
-            <a:pPr algn="ctr"/>
-            <a:r>
-              <a:rPr lang="ko-KR" altLang="en-US" sz="1000" dirty="0"/>
-              <a:t>벽돌에</a:t>
-            </a:r>
-            <a:endParaRPr lang="en-US" altLang="ko-KR" sz="1000" dirty="0"/>
-          </a:p>
-          <a:p>
-            <a:pPr algn="ctr"/>
-            <a:r>
-              <a:rPr lang="ko-KR" altLang="en-US" sz="1000" dirty="0"/>
-              <a:t>충돌</a:t>
-            </a:r>
-          </a:p>
-        </p:txBody>
-      </p:sp>
-      <p:sp>
-        <p:nvSpPr>
-          <p:cNvPr id="44" name="순서도: 판단 43">
-            <a:extLst>
-              <a:ext uri="{FF2B5EF4-FFF2-40B4-BE49-F238E27FC236}">
-                <a16:creationId xmlns:a16="http://schemas.microsoft.com/office/drawing/2014/main" id="{C60A3F7A-8684-6464-ADBC-B7500F7AD268}"/>
-              </a:ext>
-            </a:extLst>
-          </p:cNvPr>
-          <p:cNvSpPr/>
-          <p:nvPr/>
-        </p:nvSpPr>
-        <p:spPr>
-          <a:xfrm>
-            <a:off x="2355209" y="5375391"/>
-            <a:ext cx="1403889" cy="903884"/>
-          </a:xfrm>
-          <a:prstGeom prst="flowChartDecision">
-            <a:avLst/>
-          </a:prstGeom>
-          <a:ln>
-            <a:solidFill>
-              <a:schemeClr val="tx1"/>
-            </a:solidFill>
-          </a:ln>
-        </p:spPr>
-        <p:style>
-          <a:lnRef idx="2">
-            <a:schemeClr val="accent6"/>
-          </a:lnRef>
-          <a:fillRef idx="1">
-            <a:schemeClr val="lt1"/>
-          </a:fillRef>
-          <a:effectRef idx="0">
-            <a:schemeClr val="accent6"/>
-          </a:effectRef>
-          <a:fontRef idx="minor">
-            <a:schemeClr val="dk1"/>
-          </a:fontRef>
-        </p:style>
-        <p:txBody>
-          <a:bodyPr rtlCol="0" anchor="ctr"/>
-          <a:lstStyle/>
-          <a:p>
-            <a:pPr algn="ctr"/>
-            <a:r>
-              <a:rPr lang="ko-KR" altLang="en-US" sz="1000" dirty="0"/>
-              <a:t>생명력이 </a:t>
-            </a:r>
-            <a:r>
-              <a:rPr lang="en-US" altLang="ko-KR" sz="1000" dirty="0"/>
-              <a:t>0</a:t>
-            </a:r>
-            <a:r>
-              <a:rPr lang="ko-KR" altLang="en-US" sz="1000" dirty="0"/>
-              <a:t>인가</a:t>
-            </a:r>
-          </a:p>
-        </p:txBody>
-      </p:sp>
-      <p:sp>
-        <p:nvSpPr>
-          <p:cNvPr id="45" name="평행 사변형 44">
-            <a:extLst>
-              <a:ext uri="{FF2B5EF4-FFF2-40B4-BE49-F238E27FC236}">
-                <a16:creationId xmlns:a16="http://schemas.microsoft.com/office/drawing/2014/main" id="{483203EE-AA21-484F-F0C3-9FE5EDA55E65}"/>
-              </a:ext>
-            </a:extLst>
-          </p:cNvPr>
-          <p:cNvSpPr/>
-          <p:nvPr/>
-        </p:nvSpPr>
-        <p:spPr>
-          <a:xfrm>
-            <a:off x="10751430" y="3247937"/>
-            <a:ext cx="1260140" cy="576064"/>
-          </a:xfrm>
-          <a:prstGeom prst="parallelogram">
-            <a:avLst/>
-          </a:prstGeom>
-          <a:ln>
-            <a:solidFill>
-              <a:schemeClr val="tx1"/>
-            </a:solidFill>
-          </a:ln>
-        </p:spPr>
-        <p:style>
-          <a:lnRef idx="2">
-            <a:schemeClr val="accent6"/>
-          </a:lnRef>
-          <a:fillRef idx="1">
-            <a:schemeClr val="lt1"/>
-          </a:fillRef>
-          <a:effectRef idx="0">
-            <a:schemeClr val="accent6"/>
-          </a:effectRef>
-          <a:fontRef idx="minor">
-            <a:schemeClr val="dk1"/>
-          </a:fontRef>
-        </p:style>
-        <p:txBody>
-          <a:bodyPr rtlCol="0" anchor="ctr"/>
-          <a:lstStyle/>
-          <a:p>
-            <a:pPr algn="ctr"/>
-            <a:r>
-              <a:rPr lang="ko-KR" altLang="en-US" sz="1300" dirty="0"/>
-              <a:t>게임종료</a:t>
-            </a:r>
-          </a:p>
-        </p:txBody>
-      </p:sp>
-      <p:sp>
-        <p:nvSpPr>
-          <p:cNvPr id="5" name="직사각형 4">
-            <a:extLst>
-              <a:ext uri="{FF2B5EF4-FFF2-40B4-BE49-F238E27FC236}">
-                <a16:creationId xmlns:a16="http://schemas.microsoft.com/office/drawing/2014/main" id="{4A51CE0C-25D5-EC59-8F0A-FB140FD0E3A9}"/>
-              </a:ext>
-            </a:extLst>
-          </p:cNvPr>
-          <p:cNvSpPr/>
-          <p:nvPr/>
-        </p:nvSpPr>
-        <p:spPr>
-          <a:xfrm>
-            <a:off x="7769994" y="4547491"/>
-            <a:ext cx="1112647" cy="429382"/>
-          </a:xfrm>
-          <a:prstGeom prst="rect">
-            <a:avLst/>
-          </a:prstGeom>
-          <a:ln>
-            <a:solidFill>
-              <a:schemeClr val="tx1"/>
-            </a:solidFill>
-          </a:ln>
-        </p:spPr>
-        <p:style>
-          <a:lnRef idx="2">
-            <a:schemeClr val="accent6"/>
-          </a:lnRef>
-          <a:fillRef idx="1">
-            <a:schemeClr val="lt1"/>
-          </a:fillRef>
-          <a:effectRef idx="0">
-            <a:schemeClr val="accent6"/>
-          </a:effectRef>
-          <a:fontRef idx="minor">
-            <a:schemeClr val="dk1"/>
-          </a:fontRef>
-        </p:style>
-        <p:txBody>
-          <a:bodyPr rtlCol="0" anchor="ctr"/>
-          <a:lstStyle/>
-          <a:p>
-            <a:pPr algn="ctr"/>
-            <a:r>
-              <a:rPr lang="ko-KR" altLang="en-US" sz="1000" dirty="0"/>
-              <a:t>벽돌 깨짐</a:t>
-            </a:r>
-          </a:p>
-        </p:txBody>
-      </p:sp>
-      <p:sp>
-        <p:nvSpPr>
-          <p:cNvPr id="6" name="순서도: 판단 5">
-            <a:extLst>
-              <a:ext uri="{FF2B5EF4-FFF2-40B4-BE49-F238E27FC236}">
-                <a16:creationId xmlns:a16="http://schemas.microsoft.com/office/drawing/2014/main" id="{8914D9E1-58C0-447A-7F9B-466CAC858FAE}"/>
-              </a:ext>
-            </a:extLst>
-          </p:cNvPr>
-          <p:cNvSpPr/>
-          <p:nvPr/>
-        </p:nvSpPr>
-        <p:spPr>
-          <a:xfrm>
-            <a:off x="9306511" y="4319274"/>
-            <a:ext cx="1828954" cy="869658"/>
-          </a:xfrm>
-          <a:prstGeom prst="flowChartDecision">
-            <a:avLst/>
-          </a:prstGeom>
-          <a:ln>
-            <a:solidFill>
-              <a:schemeClr val="tx1"/>
-            </a:solidFill>
-          </a:ln>
-        </p:spPr>
-        <p:style>
-          <a:lnRef idx="2">
-            <a:schemeClr val="accent6"/>
-          </a:lnRef>
-          <a:fillRef idx="1">
-            <a:schemeClr val="lt1"/>
-          </a:fillRef>
-          <a:effectRef idx="0">
-            <a:schemeClr val="accent6"/>
-          </a:effectRef>
-          <a:fontRef idx="minor">
-            <a:schemeClr val="dk1"/>
-          </a:fontRef>
-        </p:style>
-        <p:txBody>
-          <a:bodyPr rtlCol="0" anchor="ctr"/>
-          <a:lstStyle/>
-          <a:p>
-            <a:pPr algn="ctr"/>
-            <a:r>
-              <a:rPr lang="en-US" altLang="ko-KR" sz="1000" dirty="0"/>
-              <a:t>5</a:t>
-            </a:r>
-            <a:r>
-              <a:rPr lang="ko-KR" altLang="en-US" sz="1000" dirty="0"/>
-              <a:t>스테이지</a:t>
-            </a:r>
-            <a:r>
-              <a:rPr lang="en-US" altLang="ko-KR" sz="1000" dirty="0"/>
-              <a:t>?</a:t>
-            </a:r>
-            <a:endParaRPr lang="ko-KR" altLang="en-US" sz="1000" dirty="0"/>
-          </a:p>
-        </p:txBody>
-      </p:sp>
-      <p:sp>
-        <p:nvSpPr>
-          <p:cNvPr id="8" name="직사각형 7">
-            <a:extLst>
-              <a:ext uri="{FF2B5EF4-FFF2-40B4-BE49-F238E27FC236}">
-                <a16:creationId xmlns:a16="http://schemas.microsoft.com/office/drawing/2014/main" id="{DADF37FA-1B59-E853-AA28-278CC90CDF20}"/>
-              </a:ext>
-            </a:extLst>
-          </p:cNvPr>
-          <p:cNvSpPr/>
-          <p:nvPr/>
-        </p:nvSpPr>
-        <p:spPr>
-          <a:xfrm>
-            <a:off x="9664664" y="6188706"/>
-            <a:ext cx="1112647" cy="429382"/>
-          </a:xfrm>
-          <a:prstGeom prst="rect">
-            <a:avLst/>
-          </a:prstGeom>
-          <a:ln>
-            <a:solidFill>
-              <a:schemeClr val="tx1"/>
-            </a:solidFill>
-          </a:ln>
-        </p:spPr>
-        <p:style>
-          <a:lnRef idx="2">
-            <a:schemeClr val="accent6"/>
-          </a:lnRef>
-          <a:fillRef idx="1">
-            <a:schemeClr val="lt1"/>
-          </a:fillRef>
-          <a:effectRef idx="0">
-            <a:schemeClr val="accent6"/>
-          </a:effectRef>
-          <a:fontRef idx="minor">
-            <a:schemeClr val="dk1"/>
-          </a:fontRef>
-        </p:style>
-        <p:txBody>
-          <a:bodyPr rtlCol="0" anchor="ctr"/>
-          <a:lstStyle/>
-          <a:p>
-            <a:pPr algn="ctr"/>
-            <a:r>
-              <a:rPr lang="ko-KR" altLang="en-US" sz="1000" dirty="0"/>
-              <a:t>스테이지</a:t>
-            </a:r>
-            <a:r>
-              <a:rPr lang="en-US" altLang="ko-KR" sz="1000" dirty="0"/>
-              <a:t>++</a:t>
-            </a:r>
-            <a:endParaRPr lang="ko-KR" altLang="en-US" sz="1000" dirty="0"/>
-          </a:p>
-        </p:txBody>
-      </p:sp>
-      <p:sp>
-        <p:nvSpPr>
-          <p:cNvPr id="12" name="직사각형 11">
-            <a:extLst>
-              <a:ext uri="{FF2B5EF4-FFF2-40B4-BE49-F238E27FC236}">
-                <a16:creationId xmlns:a16="http://schemas.microsoft.com/office/drawing/2014/main" id="{865FB82F-7614-C20F-66D0-612C196AD374}"/>
-              </a:ext>
-            </a:extLst>
-          </p:cNvPr>
-          <p:cNvSpPr/>
-          <p:nvPr/>
-        </p:nvSpPr>
-        <p:spPr>
-          <a:xfrm>
-            <a:off x="10806032" y="2069507"/>
-            <a:ext cx="1260140" cy="576064"/>
-          </a:xfrm>
-          <a:prstGeom prst="rect">
-            <a:avLst/>
-          </a:prstGeom>
-          <a:ln>
-            <a:solidFill>
-              <a:schemeClr val="tx1"/>
-            </a:solidFill>
-          </a:ln>
-        </p:spPr>
-        <p:style>
-          <a:lnRef idx="2">
-            <a:schemeClr val="accent6"/>
-          </a:lnRef>
-          <a:fillRef idx="1">
-            <a:schemeClr val="lt1"/>
-          </a:fillRef>
-          <a:effectRef idx="0">
-            <a:schemeClr val="accent6"/>
-          </a:effectRef>
-          <a:fontRef idx="minor">
-            <a:schemeClr val="dk1"/>
-          </a:fontRef>
-        </p:style>
-        <p:txBody>
-          <a:bodyPr rtlCol="0" anchor="ctr"/>
-          <a:lstStyle/>
-          <a:p>
-            <a:pPr algn="ctr"/>
-            <a:r>
-              <a:rPr lang="ko-KR" altLang="en-US" sz="1000"/>
-              <a:t>점수 및 순위 출력</a:t>
-            </a:r>
-            <a:endParaRPr lang="ko-KR" altLang="en-US" sz="1000" dirty="0"/>
-          </a:p>
-        </p:txBody>
-      </p:sp>
-      <p:cxnSp>
-        <p:nvCxnSpPr>
-          <p:cNvPr id="15" name="직선 화살표 연결선 14">
-            <a:extLst>
-              <a:ext uri="{FF2B5EF4-FFF2-40B4-BE49-F238E27FC236}">
-                <a16:creationId xmlns:a16="http://schemas.microsoft.com/office/drawing/2014/main" id="{60A105AE-8886-AC73-49F2-55B258FDC893}"/>
-              </a:ext>
-            </a:extLst>
-          </p:cNvPr>
-          <p:cNvCxnSpPr>
-            <a:stCxn id="17" idx="3"/>
-            <a:endCxn id="18" idx="1"/>
-          </p:cNvCxnSpPr>
-          <p:nvPr/>
-        </p:nvCxnSpPr>
-        <p:spPr>
-          <a:xfrm>
-            <a:off x="623125" y="3752268"/>
-            <a:ext cx="187375" cy="0"/>
-          </a:xfrm>
-          <a:prstGeom prst="straightConnector1">
-            <a:avLst/>
-          </a:prstGeom>
-          <a:ln>
-            <a:tailEnd type="triangle"/>
-          </a:ln>
-        </p:spPr>
-        <p:style>
-          <a:lnRef idx="1">
-            <a:schemeClr val="dk1"/>
-          </a:lnRef>
-          <a:fillRef idx="0">
-            <a:schemeClr val="dk1"/>
-          </a:fillRef>
-          <a:effectRef idx="0">
-            <a:schemeClr val="dk1"/>
-          </a:effectRef>
-          <a:fontRef idx="minor">
-            <a:schemeClr val="tx1"/>
-          </a:fontRef>
-        </p:style>
-      </p:cxnSp>
-      <p:cxnSp>
-        <p:nvCxnSpPr>
-          <p:cNvPr id="22" name="연결선: 꺾임 21">
-            <a:extLst>
-              <a:ext uri="{FF2B5EF4-FFF2-40B4-BE49-F238E27FC236}">
-                <a16:creationId xmlns:a16="http://schemas.microsoft.com/office/drawing/2014/main" id="{AEF4F07F-6413-6D5F-8F35-3F9C6DCBC7F2}"/>
-              </a:ext>
-            </a:extLst>
-          </p:cNvPr>
-          <p:cNvCxnSpPr>
-            <a:stCxn id="18" idx="3"/>
-            <a:endCxn id="41" idx="1"/>
-          </p:cNvCxnSpPr>
-          <p:nvPr/>
-        </p:nvCxnSpPr>
-        <p:spPr>
-          <a:xfrm flipV="1">
-            <a:off x="2079479" y="1776732"/>
-            <a:ext cx="267085" cy="1975536"/>
-          </a:xfrm>
-          <a:prstGeom prst="bentConnector3">
-            <a:avLst/>
-          </a:prstGeom>
-          <a:ln>
-            <a:tailEnd type="triangle"/>
-          </a:ln>
-        </p:spPr>
-        <p:style>
-          <a:lnRef idx="1">
-            <a:schemeClr val="dk1"/>
-          </a:lnRef>
-          <a:fillRef idx="0">
-            <a:schemeClr val="dk1"/>
-          </a:fillRef>
-          <a:effectRef idx="0">
-            <a:schemeClr val="dk1"/>
-          </a:effectRef>
-          <a:fontRef idx="minor">
-            <a:schemeClr val="tx1"/>
-          </a:fontRef>
-        </p:style>
-      </p:cxnSp>
-      <p:cxnSp>
-        <p:nvCxnSpPr>
-          <p:cNvPr id="24" name="연결선: 꺾임 23">
-            <a:extLst>
-              <a:ext uri="{FF2B5EF4-FFF2-40B4-BE49-F238E27FC236}">
-                <a16:creationId xmlns:a16="http://schemas.microsoft.com/office/drawing/2014/main" id="{C922DC91-CB2A-BBE5-C172-357DB5F5C5EE}"/>
-              </a:ext>
-            </a:extLst>
-          </p:cNvPr>
-          <p:cNvCxnSpPr>
-            <a:stCxn id="18" idx="3"/>
-            <a:endCxn id="19" idx="1"/>
-          </p:cNvCxnSpPr>
-          <p:nvPr/>
-        </p:nvCxnSpPr>
-        <p:spPr>
-          <a:xfrm flipV="1">
-            <a:off x="2079479" y="2736882"/>
-            <a:ext cx="275730" cy="1015386"/>
-          </a:xfrm>
-          <a:prstGeom prst="bentConnector3">
-            <a:avLst/>
-          </a:prstGeom>
-          <a:ln>
-            <a:tailEnd type="triangle"/>
-          </a:ln>
-        </p:spPr>
-        <p:style>
-          <a:lnRef idx="1">
-            <a:schemeClr val="dk1"/>
-          </a:lnRef>
-          <a:fillRef idx="0">
-            <a:schemeClr val="dk1"/>
-          </a:fillRef>
-          <a:effectRef idx="0">
-            <a:schemeClr val="dk1"/>
-          </a:effectRef>
-          <a:fontRef idx="minor">
-            <a:schemeClr val="tx1"/>
-          </a:fontRef>
-        </p:style>
-      </p:cxnSp>
-      <p:cxnSp>
-        <p:nvCxnSpPr>
-          <p:cNvPr id="26" name="직선 화살표 연결선 25">
-            <a:extLst>
-              <a:ext uri="{FF2B5EF4-FFF2-40B4-BE49-F238E27FC236}">
-                <a16:creationId xmlns:a16="http://schemas.microsoft.com/office/drawing/2014/main" id="{F0AE8A8C-E46F-3D4F-3817-272D66F9622C}"/>
-              </a:ext>
-            </a:extLst>
-          </p:cNvPr>
-          <p:cNvCxnSpPr>
-            <a:stCxn id="18" idx="3"/>
-            <a:endCxn id="42" idx="1"/>
-          </p:cNvCxnSpPr>
-          <p:nvPr/>
-        </p:nvCxnSpPr>
-        <p:spPr>
-          <a:xfrm flipV="1">
-            <a:off x="2079479" y="3733239"/>
-            <a:ext cx="257402" cy="19029"/>
-          </a:xfrm>
-          <a:prstGeom prst="straightConnector1">
-            <a:avLst/>
-          </a:prstGeom>
-          <a:ln>
-            <a:tailEnd type="triangle"/>
-          </a:ln>
-        </p:spPr>
-        <p:style>
-          <a:lnRef idx="1">
-            <a:schemeClr val="accent1"/>
-          </a:lnRef>
-          <a:fillRef idx="0">
-            <a:schemeClr val="accent1"/>
-          </a:fillRef>
-          <a:effectRef idx="0">
-            <a:schemeClr val="accent1"/>
-          </a:effectRef>
-          <a:fontRef idx="minor">
-            <a:schemeClr val="tx1"/>
-          </a:fontRef>
-        </p:style>
-      </p:cxnSp>
-      <p:cxnSp>
-        <p:nvCxnSpPr>
-          <p:cNvPr id="31" name="연결선: 꺾임 30">
-            <a:extLst>
-              <a:ext uri="{FF2B5EF4-FFF2-40B4-BE49-F238E27FC236}">
-                <a16:creationId xmlns:a16="http://schemas.microsoft.com/office/drawing/2014/main" id="{20358633-42F2-4800-E12E-64F73E7A4854}"/>
-              </a:ext>
-            </a:extLst>
-          </p:cNvPr>
-          <p:cNvCxnSpPr>
-            <a:stCxn id="18" idx="3"/>
-            <a:endCxn id="43" idx="1"/>
-          </p:cNvCxnSpPr>
-          <p:nvPr/>
-        </p:nvCxnSpPr>
-        <p:spPr>
-          <a:xfrm>
-            <a:off x="2079479" y="3752268"/>
-            <a:ext cx="262834" cy="1009914"/>
-          </a:xfrm>
-          <a:prstGeom prst="bentConnector3">
-            <a:avLst/>
-          </a:prstGeom>
-          <a:ln>
-            <a:tailEnd type="triangle"/>
-          </a:ln>
-        </p:spPr>
-        <p:style>
-          <a:lnRef idx="1">
-            <a:schemeClr val="accent1"/>
-          </a:lnRef>
-          <a:fillRef idx="0">
-            <a:schemeClr val="accent1"/>
-          </a:fillRef>
-          <a:effectRef idx="0">
-            <a:schemeClr val="accent1"/>
-          </a:effectRef>
-          <a:fontRef idx="minor">
-            <a:schemeClr val="tx1"/>
-          </a:fontRef>
-        </p:style>
-      </p:cxnSp>
-      <p:cxnSp>
-        <p:nvCxnSpPr>
-          <p:cNvPr id="37" name="연결선: 꺾임 36">
-            <a:extLst>
-              <a:ext uri="{FF2B5EF4-FFF2-40B4-BE49-F238E27FC236}">
-                <a16:creationId xmlns:a16="http://schemas.microsoft.com/office/drawing/2014/main" id="{50DAB2A2-6D54-E026-BA37-8B00A9502C96}"/>
-              </a:ext>
-            </a:extLst>
-          </p:cNvPr>
-          <p:cNvCxnSpPr>
-            <a:stCxn id="18" idx="3"/>
-            <a:endCxn id="44" idx="1"/>
-          </p:cNvCxnSpPr>
-          <p:nvPr/>
-        </p:nvCxnSpPr>
-        <p:spPr>
-          <a:xfrm>
-            <a:off x="2079479" y="3752268"/>
-            <a:ext cx="275730" cy="2075065"/>
-          </a:xfrm>
-          <a:prstGeom prst="bentConnector3">
-            <a:avLst/>
-          </a:prstGeom>
-          <a:ln>
-            <a:tailEnd type="triangle"/>
-          </a:ln>
-        </p:spPr>
-        <p:style>
-          <a:lnRef idx="1">
-            <a:schemeClr val="dk1"/>
-          </a:lnRef>
-          <a:fillRef idx="0">
-            <a:schemeClr val="dk1"/>
-          </a:fillRef>
-          <a:effectRef idx="0">
-            <a:schemeClr val="dk1"/>
-          </a:effectRef>
-          <a:fontRef idx="minor">
-            <a:schemeClr val="tx1"/>
-          </a:fontRef>
-        </p:style>
-      </p:cxnSp>
-      <p:cxnSp>
-        <p:nvCxnSpPr>
-          <p:cNvPr id="48" name="직선 화살표 연결선 47">
-            <a:extLst>
-              <a:ext uri="{FF2B5EF4-FFF2-40B4-BE49-F238E27FC236}">
-                <a16:creationId xmlns:a16="http://schemas.microsoft.com/office/drawing/2014/main" id="{058009D7-3C40-43FA-4174-A0A431359E9F}"/>
-              </a:ext>
-            </a:extLst>
-          </p:cNvPr>
-          <p:cNvCxnSpPr>
-            <a:stCxn id="41" idx="3"/>
-            <a:endCxn id="34" idx="1"/>
-          </p:cNvCxnSpPr>
-          <p:nvPr/>
-        </p:nvCxnSpPr>
-        <p:spPr>
-          <a:xfrm>
-            <a:off x="3750453" y="1776732"/>
-            <a:ext cx="256300" cy="3865"/>
-          </a:xfrm>
-          <a:prstGeom prst="straightConnector1">
-            <a:avLst/>
-          </a:prstGeom>
-          <a:ln>
-            <a:tailEnd type="triangle"/>
-          </a:ln>
-        </p:spPr>
-        <p:style>
-          <a:lnRef idx="1">
-            <a:schemeClr val="dk1"/>
-          </a:lnRef>
-          <a:fillRef idx="0">
-            <a:schemeClr val="dk1"/>
-          </a:fillRef>
-          <a:effectRef idx="0">
-            <a:schemeClr val="dk1"/>
-          </a:effectRef>
-          <a:fontRef idx="minor">
-            <a:schemeClr val="tx1"/>
-          </a:fontRef>
-        </p:style>
-      </p:cxnSp>
-      <p:cxnSp>
-        <p:nvCxnSpPr>
-          <p:cNvPr id="51" name="직선 화살표 연결선 50">
-            <a:extLst>
-              <a:ext uri="{FF2B5EF4-FFF2-40B4-BE49-F238E27FC236}">
-                <a16:creationId xmlns:a16="http://schemas.microsoft.com/office/drawing/2014/main" id="{0CDF2A4A-1320-9CAD-49E4-D7E7DB06C690}"/>
-              </a:ext>
-            </a:extLst>
-          </p:cNvPr>
-          <p:cNvCxnSpPr>
-            <a:stCxn id="19" idx="3"/>
-            <a:endCxn id="33" idx="1"/>
-          </p:cNvCxnSpPr>
-          <p:nvPr/>
-        </p:nvCxnSpPr>
-        <p:spPr>
-          <a:xfrm flipV="1">
-            <a:off x="3759098" y="2718233"/>
-            <a:ext cx="262511" cy="18649"/>
-          </a:xfrm>
-          <a:prstGeom prst="straightConnector1">
-            <a:avLst/>
-          </a:prstGeom>
-          <a:ln>
-            <a:tailEnd type="triangle"/>
-          </a:ln>
-        </p:spPr>
-        <p:style>
-          <a:lnRef idx="1">
-            <a:schemeClr val="dk1"/>
-          </a:lnRef>
-          <a:fillRef idx="0">
-            <a:schemeClr val="dk1"/>
-          </a:fillRef>
-          <a:effectRef idx="0">
-            <a:schemeClr val="dk1"/>
-          </a:effectRef>
-          <a:fontRef idx="minor">
-            <a:schemeClr val="tx1"/>
-          </a:fontRef>
-        </p:style>
-      </p:cxnSp>
-      <p:cxnSp>
-        <p:nvCxnSpPr>
-          <p:cNvPr id="57" name="직선 화살표 연결선 56">
-            <a:extLst>
-              <a:ext uri="{FF2B5EF4-FFF2-40B4-BE49-F238E27FC236}">
-                <a16:creationId xmlns:a16="http://schemas.microsoft.com/office/drawing/2014/main" id="{5367551C-CA87-EDBC-3B1D-42835E062936}"/>
-              </a:ext>
-            </a:extLst>
-          </p:cNvPr>
-          <p:cNvCxnSpPr>
-            <a:stCxn id="42" idx="3"/>
-            <a:endCxn id="35" idx="1"/>
-          </p:cNvCxnSpPr>
-          <p:nvPr/>
-        </p:nvCxnSpPr>
-        <p:spPr>
-          <a:xfrm>
-            <a:off x="3740770" y="3733239"/>
-            <a:ext cx="280838" cy="8875"/>
-          </a:xfrm>
-          <a:prstGeom prst="straightConnector1">
-            <a:avLst/>
-          </a:prstGeom>
-          <a:ln>
-            <a:tailEnd type="triangle"/>
-          </a:ln>
-        </p:spPr>
-        <p:style>
-          <a:lnRef idx="1">
-            <a:schemeClr val="dk1"/>
-          </a:lnRef>
-          <a:fillRef idx="0">
-            <a:schemeClr val="dk1"/>
-          </a:fillRef>
-          <a:effectRef idx="0">
-            <a:schemeClr val="dk1"/>
-          </a:effectRef>
-          <a:fontRef idx="minor">
-            <a:schemeClr val="tx1"/>
-          </a:fontRef>
-        </p:style>
-      </p:cxnSp>
-      <p:cxnSp>
-        <p:nvCxnSpPr>
-          <p:cNvPr id="60" name="직선 화살표 연결선 59">
-            <a:extLst>
-              <a:ext uri="{FF2B5EF4-FFF2-40B4-BE49-F238E27FC236}">
-                <a16:creationId xmlns:a16="http://schemas.microsoft.com/office/drawing/2014/main" id="{20A6347A-0DD4-833A-D207-DAEBFB83AFC4}"/>
-              </a:ext>
-            </a:extLst>
-          </p:cNvPr>
-          <p:cNvCxnSpPr>
-            <a:stCxn id="43" idx="3"/>
-            <a:endCxn id="36" idx="1"/>
-          </p:cNvCxnSpPr>
-          <p:nvPr/>
-        </p:nvCxnSpPr>
-        <p:spPr>
-          <a:xfrm>
-            <a:off x="3746202" y="4762182"/>
-            <a:ext cx="368364" cy="0"/>
-          </a:xfrm>
-          <a:prstGeom prst="straightConnector1">
-            <a:avLst/>
-          </a:prstGeom>
-          <a:ln>
-            <a:tailEnd type="triangle"/>
-          </a:ln>
-        </p:spPr>
-        <p:style>
-          <a:lnRef idx="1">
-            <a:schemeClr val="dk1"/>
-          </a:lnRef>
-          <a:fillRef idx="0">
-            <a:schemeClr val="dk1"/>
-          </a:fillRef>
-          <a:effectRef idx="0">
-            <a:schemeClr val="dk1"/>
-          </a:effectRef>
-          <a:fontRef idx="minor">
-            <a:schemeClr val="tx1"/>
-          </a:fontRef>
-        </p:style>
-      </p:cxnSp>
-      <p:cxnSp>
-        <p:nvCxnSpPr>
-          <p:cNvPr id="63" name="직선 화살표 연결선 62">
-            <a:extLst>
-              <a:ext uri="{FF2B5EF4-FFF2-40B4-BE49-F238E27FC236}">
-                <a16:creationId xmlns:a16="http://schemas.microsoft.com/office/drawing/2014/main" id="{17087294-FB21-0FC6-3BCC-BFDF00D304C9}"/>
-              </a:ext>
-            </a:extLst>
-          </p:cNvPr>
-          <p:cNvCxnSpPr>
-            <a:stCxn id="36" idx="3"/>
-            <a:endCxn id="40" idx="1"/>
-          </p:cNvCxnSpPr>
-          <p:nvPr/>
-        </p:nvCxnSpPr>
-        <p:spPr>
-          <a:xfrm>
-            <a:off x="5227213" y="4762182"/>
-            <a:ext cx="319455" cy="0"/>
-          </a:xfrm>
-          <a:prstGeom prst="straightConnector1">
-            <a:avLst/>
-          </a:prstGeom>
-          <a:ln>
-            <a:tailEnd type="triangle"/>
-          </a:ln>
-        </p:spPr>
-        <p:style>
-          <a:lnRef idx="1">
-            <a:schemeClr val="dk1"/>
-          </a:lnRef>
-          <a:fillRef idx="0">
-            <a:schemeClr val="dk1"/>
-          </a:fillRef>
-          <a:effectRef idx="0">
-            <a:schemeClr val="dk1"/>
-          </a:effectRef>
-          <a:fontRef idx="minor">
-            <a:schemeClr val="tx1"/>
-          </a:fontRef>
-        </p:style>
-      </p:cxnSp>
-      <p:cxnSp>
-        <p:nvCxnSpPr>
-          <p:cNvPr id="67" name="직선 화살표 연결선 66">
-            <a:extLst>
-              <a:ext uri="{FF2B5EF4-FFF2-40B4-BE49-F238E27FC236}">
-                <a16:creationId xmlns:a16="http://schemas.microsoft.com/office/drawing/2014/main" id="{083F9719-9856-E098-D1B5-9C13C791E49F}"/>
-              </a:ext>
-            </a:extLst>
-          </p:cNvPr>
-          <p:cNvCxnSpPr>
-            <a:stCxn id="40" idx="3"/>
-            <a:endCxn id="5" idx="1"/>
-          </p:cNvCxnSpPr>
-          <p:nvPr/>
-        </p:nvCxnSpPr>
-        <p:spPr>
-          <a:xfrm>
-            <a:off x="7375622" y="4762182"/>
-            <a:ext cx="394372" cy="0"/>
-          </a:xfrm>
-          <a:prstGeom prst="straightConnector1">
-            <a:avLst/>
-          </a:prstGeom>
-          <a:ln>
-            <a:tailEnd type="triangle"/>
-          </a:ln>
-        </p:spPr>
-        <p:style>
-          <a:lnRef idx="1">
-            <a:schemeClr val="dk1"/>
-          </a:lnRef>
-          <a:fillRef idx="0">
-            <a:schemeClr val="dk1"/>
-          </a:fillRef>
-          <a:effectRef idx="0">
-            <a:schemeClr val="dk1"/>
-          </a:effectRef>
-          <a:fontRef idx="minor">
-            <a:schemeClr val="tx1"/>
-          </a:fontRef>
-        </p:style>
-      </p:cxnSp>
-      <p:cxnSp>
-        <p:nvCxnSpPr>
-          <p:cNvPr id="69" name="직선 화살표 연결선 68">
-            <a:extLst>
-              <a:ext uri="{FF2B5EF4-FFF2-40B4-BE49-F238E27FC236}">
-                <a16:creationId xmlns:a16="http://schemas.microsoft.com/office/drawing/2014/main" id="{4FA4FF29-3ED1-3919-9CDE-B5109C150A51}"/>
-              </a:ext>
-            </a:extLst>
-          </p:cNvPr>
-          <p:cNvCxnSpPr>
-            <a:stCxn id="5" idx="3"/>
-            <a:endCxn id="6" idx="1"/>
-          </p:cNvCxnSpPr>
-          <p:nvPr/>
-        </p:nvCxnSpPr>
-        <p:spPr>
-          <a:xfrm flipV="1">
-            <a:off x="8882641" y="4754103"/>
-            <a:ext cx="423870" cy="8079"/>
-          </a:xfrm>
-          <a:prstGeom prst="straightConnector1">
-            <a:avLst/>
-          </a:prstGeom>
-          <a:ln>
-            <a:tailEnd type="triangle"/>
-          </a:ln>
-        </p:spPr>
-        <p:style>
-          <a:lnRef idx="1">
-            <a:schemeClr val="dk1"/>
-          </a:lnRef>
-          <a:fillRef idx="0">
-            <a:schemeClr val="dk1"/>
-          </a:fillRef>
-          <a:effectRef idx="0">
-            <a:schemeClr val="dk1"/>
-          </a:effectRef>
-          <a:fontRef idx="minor">
-            <a:schemeClr val="tx1"/>
-          </a:fontRef>
-        </p:style>
-      </p:cxnSp>
-      <p:cxnSp>
-        <p:nvCxnSpPr>
-          <p:cNvPr id="73" name="직선 화살표 연결선 72">
-            <a:extLst>
-              <a:ext uri="{FF2B5EF4-FFF2-40B4-BE49-F238E27FC236}">
-                <a16:creationId xmlns:a16="http://schemas.microsoft.com/office/drawing/2014/main" id="{E2086EF3-2850-CE8D-1237-707783AE664D}"/>
-              </a:ext>
-            </a:extLst>
-          </p:cNvPr>
-          <p:cNvCxnSpPr>
-            <a:stCxn id="45" idx="1"/>
-            <a:endCxn id="12" idx="2"/>
-          </p:cNvCxnSpPr>
-          <p:nvPr/>
-        </p:nvCxnSpPr>
-        <p:spPr>
-          <a:xfrm flipH="1" flipV="1">
-            <a:off x="11436102" y="2645571"/>
-            <a:ext cx="17406" cy="602366"/>
-          </a:xfrm>
-          <a:prstGeom prst="straightConnector1">
-            <a:avLst/>
-          </a:prstGeom>
-          <a:ln>
-            <a:tailEnd type="triangle"/>
-          </a:ln>
-        </p:spPr>
-        <p:style>
-          <a:lnRef idx="1">
-            <a:schemeClr val="dk1"/>
-          </a:lnRef>
-          <a:fillRef idx="0">
-            <a:schemeClr val="dk1"/>
-          </a:fillRef>
-          <a:effectRef idx="0">
-            <a:schemeClr val="dk1"/>
-          </a:effectRef>
-          <a:fontRef idx="minor">
-            <a:schemeClr val="tx1"/>
-          </a:fontRef>
-        </p:style>
-      </p:cxnSp>
-      <p:cxnSp>
-        <p:nvCxnSpPr>
-          <p:cNvPr id="76" name="직선 화살표 연결선 75">
-            <a:extLst>
-              <a:ext uri="{FF2B5EF4-FFF2-40B4-BE49-F238E27FC236}">
-                <a16:creationId xmlns:a16="http://schemas.microsoft.com/office/drawing/2014/main" id="{02D306A6-0C2A-1839-DEB2-A0B91BBEB21B}"/>
-              </a:ext>
-            </a:extLst>
-          </p:cNvPr>
-          <p:cNvCxnSpPr>
-            <a:stCxn id="6" idx="2"/>
-            <a:endCxn id="8" idx="0"/>
-          </p:cNvCxnSpPr>
-          <p:nvPr/>
-        </p:nvCxnSpPr>
-        <p:spPr>
-          <a:xfrm>
-            <a:off x="10220988" y="5188932"/>
-            <a:ext cx="0" cy="999774"/>
-          </a:xfrm>
-          <a:prstGeom prst="straightConnector1">
-            <a:avLst/>
-          </a:prstGeom>
-          <a:ln>
-            <a:tailEnd type="triangle"/>
-          </a:ln>
-        </p:spPr>
-        <p:style>
-          <a:lnRef idx="1">
-            <a:schemeClr val="dk1"/>
-          </a:lnRef>
-          <a:fillRef idx="0">
-            <a:schemeClr val="dk1"/>
-          </a:fillRef>
-          <a:effectRef idx="0">
-            <a:schemeClr val="dk1"/>
-          </a:effectRef>
-          <a:fontRef idx="minor">
-            <a:schemeClr val="tx1"/>
-          </a:fontRef>
-        </p:style>
-      </p:cxnSp>
-      <p:cxnSp>
-        <p:nvCxnSpPr>
-          <p:cNvPr id="83" name="연결선: 꺾임 82">
-            <a:extLst>
-              <a:ext uri="{FF2B5EF4-FFF2-40B4-BE49-F238E27FC236}">
-                <a16:creationId xmlns:a16="http://schemas.microsoft.com/office/drawing/2014/main" id="{87FF62AC-32EA-36DD-28D6-5B89D1F89BCB}"/>
-              </a:ext>
-            </a:extLst>
-          </p:cNvPr>
-          <p:cNvCxnSpPr>
-            <a:cxnSpLocks/>
-            <a:stCxn id="8" idx="1"/>
-            <a:endCxn id="18" idx="2"/>
-          </p:cNvCxnSpPr>
-          <p:nvPr/>
-        </p:nvCxnSpPr>
-        <p:spPr>
-          <a:xfrm rot="10800000">
-            <a:off x="1444990" y="3974467"/>
-            <a:ext cx="8219674" cy="2428930"/>
-          </a:xfrm>
-          <a:prstGeom prst="bentConnector2">
-            <a:avLst/>
-          </a:prstGeom>
-          <a:ln>
-            <a:tailEnd type="triangle"/>
-          </a:ln>
-        </p:spPr>
-        <p:style>
-          <a:lnRef idx="1">
-            <a:schemeClr val="dk1"/>
-          </a:lnRef>
-          <a:fillRef idx="0">
-            <a:schemeClr val="dk1"/>
-          </a:fillRef>
-          <a:effectRef idx="0">
-            <a:schemeClr val="dk1"/>
-          </a:effectRef>
-          <a:fontRef idx="minor">
-            <a:schemeClr val="tx1"/>
-          </a:fontRef>
-        </p:style>
-      </p:cxnSp>
-      <p:cxnSp>
-        <p:nvCxnSpPr>
-          <p:cNvPr id="108" name="연결선: 꺾임 107">
-            <a:extLst>
-              <a:ext uri="{FF2B5EF4-FFF2-40B4-BE49-F238E27FC236}">
-                <a16:creationId xmlns:a16="http://schemas.microsoft.com/office/drawing/2014/main" id="{AB5F9B42-F710-9942-552A-0C2660BFA682}"/>
-              </a:ext>
-            </a:extLst>
-          </p:cNvPr>
-          <p:cNvCxnSpPr>
-            <a:stCxn id="44" idx="3"/>
-            <a:endCxn id="45" idx="4"/>
-          </p:cNvCxnSpPr>
-          <p:nvPr/>
-        </p:nvCxnSpPr>
-        <p:spPr>
-          <a:xfrm flipV="1">
-            <a:off x="3759098" y="3824001"/>
-            <a:ext cx="7622402" cy="2003332"/>
-          </a:xfrm>
-          <a:prstGeom prst="bentConnector2">
-            <a:avLst/>
-          </a:prstGeom>
-          <a:ln>
-            <a:tailEnd type="triangle"/>
-          </a:ln>
-        </p:spPr>
-        <p:style>
-          <a:lnRef idx="1">
-            <a:schemeClr val="dk1"/>
-          </a:lnRef>
-          <a:fillRef idx="0">
-            <a:schemeClr val="dk1"/>
-          </a:fillRef>
-          <a:effectRef idx="0">
-            <a:schemeClr val="dk1"/>
-          </a:effectRef>
-          <a:fontRef idx="minor">
-            <a:schemeClr val="tx1"/>
-          </a:fontRef>
-        </p:style>
-      </p:cxnSp>
-      <p:cxnSp>
-        <p:nvCxnSpPr>
-          <p:cNvPr id="113" name="연결선: 꺾임 112">
-            <a:extLst>
-              <a:ext uri="{FF2B5EF4-FFF2-40B4-BE49-F238E27FC236}">
-                <a16:creationId xmlns:a16="http://schemas.microsoft.com/office/drawing/2014/main" id="{C830A1A1-D9C8-1C6C-FB4C-F2A5D94160B7}"/>
-              </a:ext>
-            </a:extLst>
-          </p:cNvPr>
-          <p:cNvCxnSpPr>
-            <a:stCxn id="6" idx="0"/>
-            <a:endCxn id="45" idx="5"/>
-          </p:cNvCxnSpPr>
-          <p:nvPr/>
-        </p:nvCxnSpPr>
-        <p:spPr>
-          <a:xfrm rot="5400000" flipH="1" flipV="1">
-            <a:off x="10130561" y="3626397"/>
-            <a:ext cx="783305" cy="602450"/>
-          </a:xfrm>
-          <a:prstGeom prst="bentConnector2">
-            <a:avLst/>
-          </a:prstGeom>
-          <a:ln>
-            <a:tailEnd type="triangle"/>
-          </a:ln>
-        </p:spPr>
-        <p:style>
-          <a:lnRef idx="1">
-            <a:schemeClr val="dk1"/>
-          </a:lnRef>
-          <a:fillRef idx="0">
-            <a:schemeClr val="dk1"/>
-          </a:fillRef>
-          <a:effectRef idx="0">
-            <a:schemeClr val="dk1"/>
-          </a:effectRef>
-          <a:fontRef idx="minor">
-            <a:schemeClr val="tx1"/>
-          </a:fontRef>
-        </p:style>
-      </p:cxnSp>
+      </p:pic>
     </p:spTree>
     <p:extLst>
       <p:ext uri="{BB962C8B-B14F-4D97-AF65-F5344CB8AC3E}">
-        <p14:creationId xmlns:p14="http://schemas.microsoft.com/office/powerpoint/2010/main" val="3877969412"/>
+        <p14:creationId xmlns:p14="http://schemas.microsoft.com/office/powerpoint/2010/main" val="4196288358"/>
       </p:ext>
     </p:extLst>
   </p:cSld>
@@ -22453,7 +21788,7 @@
 </p:sld>
 </file>
 
-<file path=ppt/slides/slide6.xml><?xml version="1.0" encoding="utf-8"?>
+<file path=ppt/slides/slide7.xml><?xml version="1.0" encoding="utf-8"?>
 <p:sld xmlns:a="http://schemas.openxmlformats.org/drawingml/2006/main" xmlns:r="http://schemas.openxmlformats.org/officeDocument/2006/relationships" xmlns:p="http://schemas.openxmlformats.org/presentationml/2006/main">
   <p:cSld>
     <p:spTree>
@@ -22544,9 +21879,9 @@
         <p:grpSpPr>
           <a:xfrm>
             <a:off x="371364" y="206484"/>
-            <a:ext cx="6336704" cy="787491"/>
+            <a:ext cx="6048672" cy="830997"/>
             <a:chOff x="376102" y="333243"/>
-            <a:chExt cx="6231760" cy="830997"/>
+            <a:chExt cx="5948498" cy="876907"/>
           </a:xfrm>
         </p:grpSpPr>
         <p:sp>
@@ -22632,7 +21967,7 @@
           <p:spPr>
             <a:xfrm>
               <a:off x="1461721" y="585057"/>
-              <a:ext cx="5146141" cy="552126"/>
+              <a:ext cx="4862879" cy="552126"/>
             </a:xfrm>
             <a:prstGeom prst="rect">
               <a:avLst/>
@@ -22667,7 +22002,7 @@
                   <a:latin typeface="맑은 고딕" panose="020B0503020000020004" pitchFamily="50" charset="-127"/>
                   <a:ea typeface="맑은 고딕" panose="020B0503020000020004" pitchFamily="50" charset="-127"/>
                 </a:rPr>
-                <a:t>점수 로직 순서도</a:t>
+                <a:t>순서도</a:t>
               </a:r>
               <a:r>
                 <a:rPr lang="en-US" altLang="ko-KR" sz="2800" b="1" dirty="0">
@@ -22709,7 +22044,7 @@
                   <a:latin typeface="맑은 고딕" panose="020B0503020000020004" pitchFamily="50" charset="-127"/>
                   <a:ea typeface="맑은 고딕" panose="020B0503020000020004" pitchFamily="50" charset="-127"/>
                 </a:rPr>
-                <a:t>삭제해주세요</a:t>
+                <a:t>시나리오</a:t>
               </a:r>
               <a:r>
                 <a:rPr lang="en-US" altLang="ko-KR" sz="2800" b="1" dirty="0">
@@ -22768,7 +22103,7 @@
           <p:spPr>
             <a:xfrm>
               <a:off x="376102" y="333243"/>
-              <a:ext cx="1266679" cy="830997"/>
+              <a:ext cx="1266679" cy="876907"/>
             </a:xfrm>
             <a:prstGeom prst="rect">
               <a:avLst/>
@@ -22806,7 +22141,7 @@
                   <a:latin typeface="세방고딕 Bold" panose="00000800000000000000" pitchFamily="2" charset="-127"/>
                   <a:ea typeface="세방고딕 Bold" panose="00000800000000000000" pitchFamily="2" charset="-127"/>
                 </a:rPr>
-                <a:t>02</a:t>
+                <a:t>03</a:t>
               </a:r>
               <a:endParaRPr lang="ko-KR" altLang="en-US" sz="4400" b="1" dirty="0">
                 <a:ln>
@@ -23019,7 +22354,7 @@
         </p:nvSpPr>
         <p:spPr>
           <a:xfrm>
-            <a:off x="83609" y="2737765"/>
+            <a:off x="68215" y="3286724"/>
             <a:ext cx="554910" cy="931088"/>
           </a:xfrm>
           <a:prstGeom prst="roundRect">
@@ -23073,7 +22408,7 @@
         </p:nvSpPr>
         <p:spPr>
           <a:xfrm>
-            <a:off x="825894" y="2981109"/>
+            <a:off x="810500" y="3530068"/>
             <a:ext cx="1268979" cy="444399"/>
           </a:xfrm>
           <a:prstGeom prst="rect">
@@ -23105,18 +22440,18 @@
           <a:p>
             <a:pPr algn="ctr"/>
             <a:r>
-              <a:rPr lang="en-US" altLang="ko-KR" sz="1000" dirty="0"/>
-              <a:t>Bounce Count=0</a:t>
+              <a:rPr lang="ko-KR" altLang="en-US" sz="1000" dirty="0"/>
+              <a:t>스테이지</a:t>
             </a:r>
           </a:p>
         </p:txBody>
       </p:sp>
       <p:sp>
         <p:nvSpPr>
-          <p:cNvPr id="41" name="순서도: 판단 40">
-            <a:extLst>
-              <a:ext uri="{FF2B5EF4-FFF2-40B4-BE49-F238E27FC236}">
-                <a16:creationId xmlns:a16="http://schemas.microsoft.com/office/drawing/2014/main" id="{5E079F83-19D8-1718-E38F-DF9D53050917}"/>
+          <p:cNvPr id="19" name="순서도: 판단 18">
+            <a:extLst>
+              <a:ext uri="{FF2B5EF4-FFF2-40B4-BE49-F238E27FC236}">
+                <a16:creationId xmlns:a16="http://schemas.microsoft.com/office/drawing/2014/main" id="{3A5FBDCD-C60A-EDED-5990-7EA1D6EDEE12}"/>
               </a:ext>
             </a:extLst>
           </p:cNvPr>
@@ -23125,8 +22460,400 @@
         </p:nvSpPr>
         <p:spPr>
           <a:xfrm>
-            <a:off x="2372973" y="1449558"/>
-            <a:ext cx="1494153" cy="1045546"/>
+            <a:off x="2355209" y="2284940"/>
+            <a:ext cx="1403889" cy="903884"/>
+          </a:xfrm>
+          <a:prstGeom prst="flowChartDecision">
+            <a:avLst/>
+          </a:prstGeom>
+          <a:ln>
+            <a:solidFill>
+              <a:schemeClr val="tx1"/>
+            </a:solidFill>
+          </a:ln>
+        </p:spPr>
+        <p:style>
+          <a:lnRef idx="2">
+            <a:schemeClr val="accent6"/>
+          </a:lnRef>
+          <a:fillRef idx="1">
+            <a:schemeClr val="lt1"/>
+          </a:fillRef>
+          <a:effectRef idx="0">
+            <a:schemeClr val="accent6"/>
+          </a:effectRef>
+          <a:fontRef idx="minor">
+            <a:schemeClr val="dk1"/>
+          </a:fontRef>
+        </p:style>
+        <p:txBody>
+          <a:bodyPr rtlCol="0" anchor="ctr"/>
+          <a:lstStyle/>
+          <a:p>
+            <a:pPr algn="ctr"/>
+            <a:r>
+              <a:rPr lang="ko-KR" altLang="en-US" sz="1000" dirty="0"/>
+              <a:t>생명력 회복</a:t>
+            </a:r>
+            <a:endParaRPr lang="en-US" altLang="ko-KR" sz="1000" dirty="0"/>
+          </a:p>
+          <a:p>
+            <a:pPr algn="ctr"/>
+            <a:r>
+              <a:rPr lang="ko-KR" altLang="en-US" sz="1000" dirty="0"/>
+              <a:t>아이템 습득</a:t>
+            </a:r>
+          </a:p>
+        </p:txBody>
+      </p:sp>
+      <p:sp>
+        <p:nvSpPr>
+          <p:cNvPr id="33" name="직사각형 32">
+            <a:extLst>
+              <a:ext uri="{FF2B5EF4-FFF2-40B4-BE49-F238E27FC236}">
+                <a16:creationId xmlns:a16="http://schemas.microsoft.com/office/drawing/2014/main" id="{04C428E2-47CC-99FA-EA0A-5966E4368B8C}"/>
+              </a:ext>
+            </a:extLst>
+          </p:cNvPr>
+          <p:cNvSpPr/>
+          <p:nvPr/>
+        </p:nvSpPr>
+        <p:spPr>
+          <a:xfrm>
+            <a:off x="4021609" y="2503542"/>
+            <a:ext cx="1112647" cy="429382"/>
+          </a:xfrm>
+          <a:prstGeom prst="rect">
+            <a:avLst/>
+          </a:prstGeom>
+          <a:ln>
+            <a:solidFill>
+              <a:schemeClr val="tx1"/>
+            </a:solidFill>
+          </a:ln>
+        </p:spPr>
+        <p:style>
+          <a:lnRef idx="2">
+            <a:schemeClr val="accent6"/>
+          </a:lnRef>
+          <a:fillRef idx="1">
+            <a:schemeClr val="lt1"/>
+          </a:fillRef>
+          <a:effectRef idx="0">
+            <a:schemeClr val="accent6"/>
+          </a:effectRef>
+          <a:fontRef idx="minor">
+            <a:schemeClr val="dk1"/>
+          </a:fontRef>
+        </p:style>
+        <p:txBody>
+          <a:bodyPr rtlCol="0" anchor="ctr"/>
+          <a:lstStyle/>
+          <a:p>
+            <a:pPr algn="ctr"/>
+            <a:r>
+              <a:rPr lang="ko-KR" altLang="en-US" sz="1000" dirty="0"/>
+              <a:t>생명력 </a:t>
+            </a:r>
+            <a:r>
+              <a:rPr lang="en-US" altLang="ko-KR" sz="1000" dirty="0"/>
+              <a:t>+1</a:t>
+            </a:r>
+            <a:endParaRPr lang="ko-KR" altLang="en-US" sz="1000" dirty="0"/>
+          </a:p>
+        </p:txBody>
+      </p:sp>
+      <p:sp>
+        <p:nvSpPr>
+          <p:cNvPr id="34" name="직사각형 33">
+            <a:extLst>
+              <a:ext uri="{FF2B5EF4-FFF2-40B4-BE49-F238E27FC236}">
+                <a16:creationId xmlns:a16="http://schemas.microsoft.com/office/drawing/2014/main" id="{A2B0CFB7-6E92-D483-944B-91ECAE6806D4}"/>
+              </a:ext>
+            </a:extLst>
+          </p:cNvPr>
+          <p:cNvSpPr/>
+          <p:nvPr/>
+        </p:nvSpPr>
+        <p:spPr>
+          <a:xfrm>
+            <a:off x="4006753" y="1565906"/>
+            <a:ext cx="1112647" cy="429382"/>
+          </a:xfrm>
+          <a:prstGeom prst="rect">
+            <a:avLst/>
+          </a:prstGeom>
+          <a:ln>
+            <a:solidFill>
+              <a:schemeClr val="tx1"/>
+            </a:solidFill>
+          </a:ln>
+        </p:spPr>
+        <p:style>
+          <a:lnRef idx="2">
+            <a:schemeClr val="accent6"/>
+          </a:lnRef>
+          <a:fillRef idx="1">
+            <a:schemeClr val="lt1"/>
+          </a:fillRef>
+          <a:effectRef idx="0">
+            <a:schemeClr val="accent6"/>
+          </a:effectRef>
+          <a:fontRef idx="minor">
+            <a:schemeClr val="dk1"/>
+          </a:fontRef>
+        </p:style>
+        <p:txBody>
+          <a:bodyPr rtlCol="0" anchor="ctr"/>
+          <a:lstStyle/>
+          <a:p>
+            <a:pPr algn="ctr"/>
+            <a:r>
+              <a:rPr lang="ko-KR" altLang="en-US" sz="1000" dirty="0"/>
+              <a:t>공 위치 초기화</a:t>
+            </a:r>
+          </a:p>
+        </p:txBody>
+      </p:sp>
+      <p:sp>
+        <p:nvSpPr>
+          <p:cNvPr id="35" name="직사각형 34">
+            <a:extLst>
+              <a:ext uri="{FF2B5EF4-FFF2-40B4-BE49-F238E27FC236}">
+                <a16:creationId xmlns:a16="http://schemas.microsoft.com/office/drawing/2014/main" id="{90B4B28B-9A43-5355-E1F7-487EDB0D9A7E}"/>
+              </a:ext>
+            </a:extLst>
+          </p:cNvPr>
+          <p:cNvSpPr/>
+          <p:nvPr/>
+        </p:nvSpPr>
+        <p:spPr>
+          <a:xfrm>
+            <a:off x="4021608" y="3527423"/>
+            <a:ext cx="1112647" cy="429382"/>
+          </a:xfrm>
+          <a:prstGeom prst="rect">
+            <a:avLst/>
+          </a:prstGeom>
+          <a:ln>
+            <a:solidFill>
+              <a:schemeClr val="tx1"/>
+            </a:solidFill>
+          </a:ln>
+        </p:spPr>
+        <p:style>
+          <a:lnRef idx="2">
+            <a:schemeClr val="accent6"/>
+          </a:lnRef>
+          <a:fillRef idx="1">
+            <a:schemeClr val="lt1"/>
+          </a:fillRef>
+          <a:effectRef idx="0">
+            <a:schemeClr val="accent6"/>
+          </a:effectRef>
+          <a:fontRef idx="minor">
+            <a:schemeClr val="dk1"/>
+          </a:fontRef>
+        </p:style>
+        <p:txBody>
+          <a:bodyPr rtlCol="0" anchor="ctr"/>
+          <a:lstStyle/>
+          <a:p>
+            <a:pPr algn="ctr"/>
+            <a:r>
+              <a:rPr lang="ko-KR" altLang="en-US" sz="1000" dirty="0"/>
+              <a:t>생명력 </a:t>
+            </a:r>
+            <a:r>
+              <a:rPr lang="en-US" altLang="ko-KR" sz="1000" dirty="0"/>
+              <a:t>-1</a:t>
+            </a:r>
+            <a:endParaRPr lang="ko-KR" altLang="en-US" sz="1000" dirty="0"/>
+          </a:p>
+        </p:txBody>
+      </p:sp>
+      <p:sp>
+        <p:nvSpPr>
+          <p:cNvPr id="36" name="직사각형 35">
+            <a:extLst>
+              <a:ext uri="{FF2B5EF4-FFF2-40B4-BE49-F238E27FC236}">
+                <a16:creationId xmlns:a16="http://schemas.microsoft.com/office/drawing/2014/main" id="{A069573E-4C56-568E-0865-626F94D70A74}"/>
+              </a:ext>
+            </a:extLst>
+          </p:cNvPr>
+          <p:cNvSpPr/>
+          <p:nvPr/>
+        </p:nvSpPr>
+        <p:spPr>
+          <a:xfrm>
+            <a:off x="4114566" y="4547491"/>
+            <a:ext cx="1112647" cy="429382"/>
+          </a:xfrm>
+          <a:prstGeom prst="rect">
+            <a:avLst/>
+          </a:prstGeom>
+          <a:ln>
+            <a:solidFill>
+              <a:schemeClr val="tx1"/>
+            </a:solidFill>
+          </a:ln>
+        </p:spPr>
+        <p:style>
+          <a:lnRef idx="2">
+            <a:schemeClr val="accent6"/>
+          </a:lnRef>
+          <a:fillRef idx="1">
+            <a:schemeClr val="lt1"/>
+          </a:fillRef>
+          <a:effectRef idx="0">
+            <a:schemeClr val="accent6"/>
+          </a:effectRef>
+          <a:fontRef idx="minor">
+            <a:schemeClr val="dk1"/>
+          </a:fontRef>
+        </p:style>
+        <p:txBody>
+          <a:bodyPr rtlCol="0" anchor="ctr"/>
+          <a:lstStyle/>
+          <a:p>
+            <a:pPr algn="ctr"/>
+            <a:r>
+              <a:rPr lang="ko-KR" altLang="en-US" sz="1000" dirty="0"/>
+              <a:t>벽돌 생명력 </a:t>
+            </a:r>
+            <a:r>
+              <a:rPr lang="en-US" altLang="ko-KR" sz="1000" dirty="0"/>
+              <a:t>-1</a:t>
+            </a:r>
+            <a:endParaRPr lang="ko-KR" altLang="en-US" sz="1000" dirty="0"/>
+          </a:p>
+        </p:txBody>
+      </p:sp>
+      <p:sp>
+        <p:nvSpPr>
+          <p:cNvPr id="40" name="순서도: 판단 39">
+            <a:extLst>
+              <a:ext uri="{FF2B5EF4-FFF2-40B4-BE49-F238E27FC236}">
+                <a16:creationId xmlns:a16="http://schemas.microsoft.com/office/drawing/2014/main" id="{65A4DECB-F8F1-5600-49D0-CD20A9B43F79}"/>
+              </a:ext>
+            </a:extLst>
+          </p:cNvPr>
+          <p:cNvSpPr/>
+          <p:nvPr/>
+        </p:nvSpPr>
+        <p:spPr>
+          <a:xfrm>
+            <a:off x="5546668" y="4327353"/>
+            <a:ext cx="1828954" cy="869658"/>
+          </a:xfrm>
+          <a:prstGeom prst="flowChartDecision">
+            <a:avLst/>
+          </a:prstGeom>
+          <a:ln>
+            <a:solidFill>
+              <a:schemeClr val="tx1"/>
+            </a:solidFill>
+          </a:ln>
+        </p:spPr>
+        <p:style>
+          <a:lnRef idx="2">
+            <a:schemeClr val="accent6"/>
+          </a:lnRef>
+          <a:fillRef idx="1">
+            <a:schemeClr val="lt1"/>
+          </a:fillRef>
+          <a:effectRef idx="0">
+            <a:schemeClr val="accent6"/>
+          </a:effectRef>
+          <a:fontRef idx="minor">
+            <a:schemeClr val="dk1"/>
+          </a:fontRef>
+        </p:style>
+        <p:txBody>
+          <a:bodyPr rtlCol="0" anchor="ctr"/>
+          <a:lstStyle/>
+          <a:p>
+            <a:pPr algn="ctr"/>
+            <a:r>
+              <a:rPr lang="ko-KR" altLang="en-US" sz="1000" dirty="0"/>
+              <a:t>모든 벽돌을 부셨는가</a:t>
+            </a:r>
+            <a:r>
+              <a:rPr lang="en-US" altLang="ko-KR" sz="1000" dirty="0"/>
+              <a:t>?</a:t>
+            </a:r>
+            <a:endParaRPr lang="ko-KR" altLang="en-US" sz="1000" dirty="0"/>
+          </a:p>
+        </p:txBody>
+      </p:sp>
+      <p:sp>
+        <p:nvSpPr>
+          <p:cNvPr id="41" name="순서도: 판단 40">
+            <a:extLst>
+              <a:ext uri="{FF2B5EF4-FFF2-40B4-BE49-F238E27FC236}">
+                <a16:creationId xmlns:a16="http://schemas.microsoft.com/office/drawing/2014/main" id="{5E079F83-19D8-1718-E38F-DF9D53050917}"/>
+              </a:ext>
+            </a:extLst>
+          </p:cNvPr>
+          <p:cNvSpPr/>
+          <p:nvPr/>
+        </p:nvSpPr>
+        <p:spPr>
+          <a:xfrm>
+            <a:off x="2346564" y="1324790"/>
+            <a:ext cx="1403889" cy="903884"/>
+          </a:xfrm>
+          <a:prstGeom prst="flowChartDecision">
+            <a:avLst/>
+          </a:prstGeom>
+          <a:ln>
+            <a:solidFill>
+              <a:schemeClr val="tx1"/>
+            </a:solidFill>
+          </a:ln>
+        </p:spPr>
+        <p:style>
+          <a:lnRef idx="2">
+            <a:schemeClr val="accent6"/>
+          </a:lnRef>
+          <a:fillRef idx="1">
+            <a:schemeClr val="lt1"/>
+          </a:fillRef>
+          <a:effectRef idx="0">
+            <a:schemeClr val="accent6"/>
+          </a:effectRef>
+          <a:fontRef idx="minor">
+            <a:schemeClr val="dk1"/>
+          </a:fontRef>
+        </p:style>
+        <p:txBody>
+          <a:bodyPr rtlCol="0" anchor="ctr"/>
+          <a:lstStyle/>
+          <a:p>
+            <a:pPr algn="ctr"/>
+            <a:r>
+              <a:rPr lang="ko-KR" altLang="en-US" sz="1000" dirty="0"/>
+              <a:t>공 위치 초기화 아이템 습득</a:t>
+            </a:r>
+          </a:p>
+        </p:txBody>
+      </p:sp>
+      <p:sp>
+        <p:nvSpPr>
+          <p:cNvPr id="42" name="순서도: 판단 41">
+            <a:extLst>
+              <a:ext uri="{FF2B5EF4-FFF2-40B4-BE49-F238E27FC236}">
+                <a16:creationId xmlns:a16="http://schemas.microsoft.com/office/drawing/2014/main" id="{26EA633E-0338-A52D-40ED-86D58DA9195C}"/>
+              </a:ext>
+            </a:extLst>
+          </p:cNvPr>
+          <p:cNvSpPr/>
+          <p:nvPr/>
+        </p:nvSpPr>
+        <p:spPr>
+          <a:xfrm>
+            <a:off x="2336881" y="3281297"/>
+            <a:ext cx="1403889" cy="903884"/>
           </a:xfrm>
           <a:prstGeom prst="flowChartDecision">
             <a:avLst/>
@@ -23173,10 +22900,10 @@
       </p:sp>
       <p:sp>
         <p:nvSpPr>
-          <p:cNvPr id="42" name="순서도: 판단 41">
-            <a:extLst>
-              <a:ext uri="{FF2B5EF4-FFF2-40B4-BE49-F238E27FC236}">
-                <a16:creationId xmlns:a16="http://schemas.microsoft.com/office/drawing/2014/main" id="{26EA633E-0338-A52D-40ED-86D58DA9195C}"/>
+          <p:cNvPr id="43" name="순서도: 판단 42">
+            <a:extLst>
+              <a:ext uri="{FF2B5EF4-FFF2-40B4-BE49-F238E27FC236}">
+                <a16:creationId xmlns:a16="http://schemas.microsoft.com/office/drawing/2014/main" id="{5DD97ECD-940F-87A1-4A41-DA242A10034B}"/>
               </a:ext>
             </a:extLst>
           </p:cNvPr>
@@ -23185,68 +22912,8 @@
         </p:nvSpPr>
         <p:spPr>
           <a:xfrm>
-            <a:off x="2330946" y="2681140"/>
-            <a:ext cx="1514851" cy="1028941"/>
-          </a:xfrm>
-          <a:prstGeom prst="flowChartDecision">
-            <a:avLst/>
-          </a:prstGeom>
-          <a:ln>
-            <a:solidFill>
-              <a:schemeClr val="tx1"/>
-            </a:solidFill>
-          </a:ln>
-        </p:spPr>
-        <p:style>
-          <a:lnRef idx="2">
-            <a:schemeClr val="accent6"/>
-          </a:lnRef>
-          <a:fillRef idx="1">
-            <a:schemeClr val="lt1"/>
-          </a:fillRef>
-          <a:effectRef idx="0">
-            <a:schemeClr val="accent6"/>
-          </a:effectRef>
-          <a:fontRef idx="minor">
-            <a:schemeClr val="dk1"/>
-          </a:fontRef>
-        </p:style>
-        <p:txBody>
-          <a:bodyPr rtlCol="0" anchor="ctr"/>
-          <a:lstStyle/>
-          <a:p>
-            <a:pPr algn="ctr"/>
-            <a:r>
-              <a:rPr lang="ko-KR" altLang="en-US" sz="1000" dirty="0"/>
-              <a:t>공이 벽에 </a:t>
-            </a:r>
-            <a:endParaRPr lang="en-US" altLang="ko-KR" sz="1000" dirty="0"/>
-          </a:p>
-          <a:p>
-            <a:pPr algn="ctr"/>
-            <a:r>
-              <a:rPr lang="ko-KR" altLang="en-US" sz="1000" dirty="0"/>
-              <a:t>충돌</a:t>
-            </a:r>
-          </a:p>
-        </p:txBody>
-      </p:sp>
-      <p:sp>
-        <p:nvSpPr>
-          <p:cNvPr id="43" name="순서도: 판단 42">
-            <a:extLst>
-              <a:ext uri="{FF2B5EF4-FFF2-40B4-BE49-F238E27FC236}">
-                <a16:creationId xmlns:a16="http://schemas.microsoft.com/office/drawing/2014/main" id="{5DD97ECD-940F-87A1-4A41-DA242A10034B}"/>
-              </a:ext>
-            </a:extLst>
-          </p:cNvPr>
-          <p:cNvSpPr/>
-          <p:nvPr/>
-        </p:nvSpPr>
-        <p:spPr>
-          <a:xfrm>
-            <a:off x="2336378" y="3806482"/>
-            <a:ext cx="1509419" cy="1028940"/>
+            <a:off x="2342313" y="4310240"/>
+            <a:ext cx="1403889" cy="903884"/>
           </a:xfrm>
           <a:prstGeom prst="flowChartDecision">
             <a:avLst/>
@@ -23299,183 +22966,12 @@
           </a:p>
         </p:txBody>
       </p:sp>
-      <p:cxnSp>
-        <p:nvCxnSpPr>
-          <p:cNvPr id="15" name="직선 화살표 연결선 14">
-            <a:extLst>
-              <a:ext uri="{FF2B5EF4-FFF2-40B4-BE49-F238E27FC236}">
-                <a16:creationId xmlns:a16="http://schemas.microsoft.com/office/drawing/2014/main" id="{60A105AE-8886-AC73-49F2-55B258FDC893}"/>
-              </a:ext>
-            </a:extLst>
-          </p:cNvPr>
-          <p:cNvCxnSpPr>
-            <a:stCxn id="17" idx="3"/>
-            <a:endCxn id="18" idx="1"/>
-          </p:cNvCxnSpPr>
-          <p:nvPr/>
-        </p:nvCxnSpPr>
-        <p:spPr>
-          <a:xfrm>
-            <a:off x="638519" y="3203309"/>
-            <a:ext cx="187375" cy="0"/>
-          </a:xfrm>
-          <a:prstGeom prst="straightConnector1">
-            <a:avLst/>
-          </a:prstGeom>
-          <a:ln>
-            <a:tailEnd type="triangle"/>
-          </a:ln>
-        </p:spPr>
-        <p:style>
-          <a:lnRef idx="1">
-            <a:schemeClr val="dk1"/>
-          </a:lnRef>
-          <a:fillRef idx="0">
-            <a:schemeClr val="dk1"/>
-          </a:fillRef>
-          <a:effectRef idx="0">
-            <a:schemeClr val="dk1"/>
-          </a:effectRef>
-          <a:fontRef idx="minor">
-            <a:schemeClr val="tx1"/>
-          </a:fontRef>
-        </p:style>
-      </p:cxnSp>
-      <p:cxnSp>
-        <p:nvCxnSpPr>
-          <p:cNvPr id="22" name="연결선: 꺾임 21">
-            <a:extLst>
-              <a:ext uri="{FF2B5EF4-FFF2-40B4-BE49-F238E27FC236}">
-                <a16:creationId xmlns:a16="http://schemas.microsoft.com/office/drawing/2014/main" id="{AEF4F07F-6413-6D5F-8F35-3F9C6DCBC7F2}"/>
-              </a:ext>
-            </a:extLst>
-          </p:cNvPr>
-          <p:cNvCxnSpPr>
-            <a:cxnSpLocks/>
-            <a:stCxn id="18" idx="3"/>
-            <a:endCxn id="41" idx="1"/>
-          </p:cNvCxnSpPr>
-          <p:nvPr/>
-        </p:nvCxnSpPr>
-        <p:spPr>
-          <a:xfrm flipV="1">
-            <a:off x="2094873" y="1972331"/>
-            <a:ext cx="278100" cy="1230978"/>
-          </a:xfrm>
-          <a:prstGeom prst="bentConnector3">
-            <a:avLst/>
-          </a:prstGeom>
-          <a:ln>
-            <a:tailEnd type="triangle"/>
-          </a:ln>
-        </p:spPr>
-        <p:style>
-          <a:lnRef idx="1">
-            <a:schemeClr val="dk1"/>
-          </a:lnRef>
-          <a:fillRef idx="0">
-            <a:schemeClr val="dk1"/>
-          </a:fillRef>
-          <a:effectRef idx="0">
-            <a:schemeClr val="dk1"/>
-          </a:effectRef>
-          <a:fontRef idx="minor">
-            <a:schemeClr val="tx1"/>
-          </a:fontRef>
-        </p:style>
-      </p:cxnSp>
-      <p:cxnSp>
-        <p:nvCxnSpPr>
-          <p:cNvPr id="26" name="직선 화살표 연결선 25">
-            <a:extLst>
-              <a:ext uri="{FF2B5EF4-FFF2-40B4-BE49-F238E27FC236}">
-                <a16:creationId xmlns:a16="http://schemas.microsoft.com/office/drawing/2014/main" id="{F0AE8A8C-E46F-3D4F-3817-272D66F9622C}"/>
-              </a:ext>
-            </a:extLst>
-          </p:cNvPr>
-          <p:cNvCxnSpPr>
-            <a:cxnSpLocks/>
-            <a:stCxn id="18" idx="3"/>
-            <a:endCxn id="42" idx="1"/>
-          </p:cNvCxnSpPr>
-          <p:nvPr/>
-        </p:nvCxnSpPr>
-        <p:spPr>
-          <a:xfrm flipV="1">
-            <a:off x="2094873" y="3195611"/>
-            <a:ext cx="236073" cy="7698"/>
-          </a:xfrm>
-          <a:prstGeom prst="straightConnector1">
-            <a:avLst/>
-          </a:prstGeom>
-          <a:ln>
-            <a:tailEnd type="triangle"/>
-          </a:ln>
-        </p:spPr>
-        <p:style>
-          <a:lnRef idx="1">
-            <a:schemeClr val="dk1"/>
-          </a:lnRef>
-          <a:fillRef idx="0">
-            <a:schemeClr val="dk1"/>
-          </a:fillRef>
-          <a:effectRef idx="0">
-            <a:schemeClr val="dk1"/>
-          </a:effectRef>
-          <a:fontRef idx="minor">
-            <a:schemeClr val="tx1"/>
-          </a:fontRef>
-        </p:style>
-      </p:cxnSp>
-      <p:cxnSp>
-        <p:nvCxnSpPr>
-          <p:cNvPr id="31" name="연결선: 꺾임 30">
-            <a:extLst>
-              <a:ext uri="{FF2B5EF4-FFF2-40B4-BE49-F238E27FC236}">
-                <a16:creationId xmlns:a16="http://schemas.microsoft.com/office/drawing/2014/main" id="{20358633-42F2-4800-E12E-64F73E7A4854}"/>
-              </a:ext>
-            </a:extLst>
-          </p:cNvPr>
-          <p:cNvCxnSpPr>
-            <a:cxnSpLocks/>
-            <a:stCxn id="18" idx="3"/>
-            <a:endCxn id="43" idx="1"/>
-          </p:cNvCxnSpPr>
-          <p:nvPr/>
-        </p:nvCxnSpPr>
-        <p:spPr>
-          <a:xfrm>
-            <a:off x="2094873" y="3203309"/>
-            <a:ext cx="241505" cy="1117643"/>
-          </a:xfrm>
-          <a:prstGeom prst="bentConnector3">
-            <a:avLst/>
-          </a:prstGeom>
-          <a:ln>
-            <a:tailEnd type="triangle"/>
-          </a:ln>
-        </p:spPr>
-        <p:style>
-          <a:lnRef idx="1">
-            <a:schemeClr val="dk1"/>
-          </a:lnRef>
-          <a:fillRef idx="0">
-            <a:schemeClr val="dk1"/>
-          </a:fillRef>
-          <a:effectRef idx="0">
-            <a:schemeClr val="dk1"/>
-          </a:effectRef>
-          <a:fontRef idx="minor">
-            <a:schemeClr val="tx1"/>
-          </a:fontRef>
-        </p:style>
-      </p:cxnSp>
       <p:sp>
         <p:nvSpPr>
-          <p:cNvPr id="16" name="직사각형 15">
-            <a:extLst>
-              <a:ext uri="{FF2B5EF4-FFF2-40B4-BE49-F238E27FC236}">
-                <a16:creationId xmlns:a16="http://schemas.microsoft.com/office/drawing/2014/main" id="{2A2BA7C3-9020-29F9-EE04-E42E2CD9679B}"/>
+          <p:cNvPr id="44" name="순서도: 판단 43">
+            <a:extLst>
+              <a:ext uri="{FF2B5EF4-FFF2-40B4-BE49-F238E27FC236}">
+                <a16:creationId xmlns:a16="http://schemas.microsoft.com/office/drawing/2014/main" id="{C60A3F7A-8684-6464-ADBC-B7500F7AD268}"/>
               </a:ext>
             </a:extLst>
           </p:cNvPr>
@@ -23484,147 +22980,8 @@
         </p:nvSpPr>
         <p:spPr>
           <a:xfrm>
-            <a:off x="4663383" y="3546586"/>
-            <a:ext cx="1509419" cy="500091"/>
-          </a:xfrm>
-          <a:prstGeom prst="rect">
-            <a:avLst/>
-          </a:prstGeom>
-          <a:ln>
-            <a:solidFill>
-              <a:schemeClr val="tx1"/>
-            </a:solidFill>
-          </a:ln>
-        </p:spPr>
-        <p:style>
-          <a:lnRef idx="2">
-            <a:schemeClr val="accent6"/>
-          </a:lnRef>
-          <a:fillRef idx="1">
-            <a:schemeClr val="lt1"/>
-          </a:fillRef>
-          <a:effectRef idx="0">
-            <a:schemeClr val="accent6"/>
-          </a:effectRef>
-          <a:fontRef idx="minor">
-            <a:schemeClr val="dk1"/>
-          </a:fontRef>
-        </p:style>
-        <p:txBody>
-          <a:bodyPr rtlCol="0" anchor="ctr"/>
-          <a:lstStyle/>
-          <a:p>
-            <a:pPr algn="ctr"/>
-            <a:r>
-              <a:rPr lang="en-US" altLang="ko-KR" sz="1000" dirty="0"/>
-              <a:t>Bounce Count++</a:t>
-            </a:r>
-            <a:endParaRPr lang="ko-KR" altLang="en-US" sz="1000" dirty="0"/>
-          </a:p>
-        </p:txBody>
-      </p:sp>
-      <p:cxnSp>
-        <p:nvCxnSpPr>
-          <p:cNvPr id="54" name="연결선: 꺾임 53">
-            <a:extLst>
-              <a:ext uri="{FF2B5EF4-FFF2-40B4-BE49-F238E27FC236}">
-                <a16:creationId xmlns:a16="http://schemas.microsoft.com/office/drawing/2014/main" id="{9B43BB83-AF81-33F1-C862-CE8193D63100}"/>
-              </a:ext>
-            </a:extLst>
-          </p:cNvPr>
-          <p:cNvCxnSpPr>
-            <a:cxnSpLocks/>
-            <a:stCxn id="43" idx="3"/>
-            <a:endCxn id="16" idx="1"/>
-          </p:cNvCxnSpPr>
-          <p:nvPr/>
-        </p:nvCxnSpPr>
-        <p:spPr>
-          <a:xfrm flipV="1">
-            <a:off x="3845797" y="3796632"/>
-            <a:ext cx="817586" cy="524320"/>
-          </a:xfrm>
-          <a:prstGeom prst="bentConnector3">
-            <a:avLst/>
-          </a:prstGeom>
-          <a:ln>
-            <a:tailEnd type="triangle"/>
-          </a:ln>
-        </p:spPr>
-        <p:style>
-          <a:lnRef idx="1">
-            <a:schemeClr val="dk1"/>
-          </a:lnRef>
-          <a:fillRef idx="0">
-            <a:schemeClr val="dk1"/>
-          </a:fillRef>
-          <a:effectRef idx="0">
-            <a:schemeClr val="dk1"/>
-          </a:effectRef>
-          <a:fontRef idx="minor">
-            <a:schemeClr val="tx1"/>
-          </a:fontRef>
-        </p:style>
-      </p:cxnSp>
-      <p:cxnSp>
-        <p:nvCxnSpPr>
-          <p:cNvPr id="56" name="연결선: 꺾임 55">
-            <a:extLst>
-              <a:ext uri="{FF2B5EF4-FFF2-40B4-BE49-F238E27FC236}">
-                <a16:creationId xmlns:a16="http://schemas.microsoft.com/office/drawing/2014/main" id="{73E4D4F2-8197-97C5-5BBB-8DE259FF4243}"/>
-              </a:ext>
-            </a:extLst>
-          </p:cNvPr>
-          <p:cNvCxnSpPr>
-            <a:cxnSpLocks/>
-            <a:stCxn id="42" idx="3"/>
-            <a:endCxn id="16" idx="1"/>
-          </p:cNvCxnSpPr>
-          <p:nvPr/>
-        </p:nvCxnSpPr>
-        <p:spPr>
-          <a:xfrm>
-            <a:off x="3845797" y="3195611"/>
-            <a:ext cx="817586" cy="601021"/>
-          </a:xfrm>
-          <a:prstGeom prst="bentConnector3">
-            <a:avLst/>
-          </a:prstGeom>
-          <a:ln>
-            <a:tailEnd type="triangle"/>
-          </a:ln>
-        </p:spPr>
-        <p:style>
-          <a:lnRef idx="1">
-            <a:schemeClr val="dk1"/>
-          </a:lnRef>
-          <a:fillRef idx="0">
-            <a:schemeClr val="dk1"/>
-          </a:fillRef>
-          <a:effectRef idx="0">
-            <a:schemeClr val="dk1"/>
-          </a:effectRef>
-          <a:fontRef idx="minor">
-            <a:schemeClr val="tx1"/>
-          </a:fontRef>
-        </p:style>
-      </p:cxnSp>
-      <p:sp>
-        <p:nvSpPr>
-          <p:cNvPr id="65" name="순서도: 판단 64">
-            <a:extLst>
-              <a:ext uri="{FF2B5EF4-FFF2-40B4-BE49-F238E27FC236}">
-                <a16:creationId xmlns:a16="http://schemas.microsoft.com/office/drawing/2014/main" id="{0E69DB07-19CA-AE18-A416-0A136CAC626B}"/>
-              </a:ext>
-            </a:extLst>
-          </p:cNvPr>
-          <p:cNvSpPr/>
-          <p:nvPr/>
-        </p:nvSpPr>
-        <p:spPr>
-          <a:xfrm>
-            <a:off x="6708068" y="3282161"/>
-            <a:ext cx="1509419" cy="1028940"/>
+            <a:off x="2355209" y="5375391"/>
+            <a:ext cx="1403889" cy="903884"/>
           </a:xfrm>
           <a:prstGeom prst="flowChartDecision">
             <a:avLst/>
@@ -23656,34 +23013,25 @@
             <a:pPr algn="ctr"/>
             <a:r>
               <a:rPr lang="ko-KR" altLang="en-US" sz="1000" dirty="0"/>
-              <a:t>공이</a:t>
+              <a:t>생명력이 </a:t>
             </a:r>
-            <a:endParaRPr lang="en-US" altLang="ko-KR" sz="1000" dirty="0"/>
-          </a:p>
-          <a:p>
-            <a:pPr algn="ctr"/>
+            <a:r>
+              <a:rPr lang="en-US" altLang="ko-KR" sz="1000" dirty="0"/>
+              <a:t>0</a:t>
+            </a:r>
             <a:r>
               <a:rPr lang="ko-KR" altLang="en-US" sz="1000" dirty="0"/>
-              <a:t>벽돌을</a:t>
+              <a:t>인가</a:t>
             </a:r>
-            <a:endParaRPr lang="en-US" altLang="ko-KR" sz="1000" dirty="0"/>
-          </a:p>
-          <a:p>
-            <a:pPr algn="ctr"/>
-            <a:r>
-              <a:rPr lang="ko-KR" altLang="en-US" sz="1000" dirty="0"/>
-              <a:t>부심</a:t>
-            </a:r>
-            <a:endParaRPr lang="en-US" altLang="ko-KR" sz="1000" dirty="0"/>
           </a:p>
         </p:txBody>
       </p:sp>
       <p:sp>
         <p:nvSpPr>
-          <p:cNvPr id="72" name="직사각형 71">
-            <a:extLst>
-              <a:ext uri="{FF2B5EF4-FFF2-40B4-BE49-F238E27FC236}">
-                <a16:creationId xmlns:a16="http://schemas.microsoft.com/office/drawing/2014/main" id="{AF76CEA6-E3E8-766B-52E8-16015F45386D}"/>
+          <p:cNvPr id="45" name="평행 사변형 44">
+            <a:extLst>
+              <a:ext uri="{FF2B5EF4-FFF2-40B4-BE49-F238E27FC236}">
+                <a16:creationId xmlns:a16="http://schemas.microsoft.com/office/drawing/2014/main" id="{483203EE-AA21-484F-F0C3-9FE5EDA55E65}"/>
               </a:ext>
             </a:extLst>
           </p:cNvPr>
@@ -23692,8 +23040,60 @@
         </p:nvSpPr>
         <p:spPr>
           <a:xfrm>
-            <a:off x="8452327" y="3546585"/>
-            <a:ext cx="1749801" cy="500092"/>
+            <a:off x="10751430" y="3247937"/>
+            <a:ext cx="1260140" cy="576064"/>
+          </a:xfrm>
+          <a:prstGeom prst="parallelogram">
+            <a:avLst/>
+          </a:prstGeom>
+          <a:ln>
+            <a:solidFill>
+              <a:schemeClr val="tx1"/>
+            </a:solidFill>
+          </a:ln>
+        </p:spPr>
+        <p:style>
+          <a:lnRef idx="2">
+            <a:schemeClr val="accent6"/>
+          </a:lnRef>
+          <a:fillRef idx="1">
+            <a:schemeClr val="lt1"/>
+          </a:fillRef>
+          <a:effectRef idx="0">
+            <a:schemeClr val="accent6"/>
+          </a:effectRef>
+          <a:fontRef idx="minor">
+            <a:schemeClr val="dk1"/>
+          </a:fontRef>
+        </p:style>
+        <p:txBody>
+          <a:bodyPr rtlCol="0" anchor="ctr"/>
+          <a:lstStyle/>
+          <a:p>
+            <a:pPr algn="ctr"/>
+            <a:r>
+              <a:rPr lang="ko-KR" altLang="en-US" sz="1300" dirty="0"/>
+              <a:t>게임종료</a:t>
+            </a:r>
+          </a:p>
+        </p:txBody>
+      </p:sp>
+      <p:sp>
+        <p:nvSpPr>
+          <p:cNvPr id="5" name="직사각형 4">
+            <a:extLst>
+              <a:ext uri="{FF2B5EF4-FFF2-40B4-BE49-F238E27FC236}">
+                <a16:creationId xmlns:a16="http://schemas.microsoft.com/office/drawing/2014/main" id="{4A51CE0C-25D5-EC59-8F0A-FB140FD0E3A9}"/>
+              </a:ext>
+            </a:extLst>
+          </p:cNvPr>
+          <p:cNvSpPr/>
+          <p:nvPr/>
+        </p:nvSpPr>
+        <p:spPr>
+          <a:xfrm>
+            <a:off x="7769994" y="4547491"/>
+            <a:ext cx="1112647" cy="429382"/>
           </a:xfrm>
           <a:prstGeom prst="rect">
             <a:avLst/>
@@ -23725,110 +23125,17 @@
             <a:pPr algn="ctr"/>
             <a:r>
               <a:rPr lang="ko-KR" altLang="en-US" sz="1000" dirty="0"/>
-              <a:t>점수 </a:t>
+              <a:t>벽돌 깨짐</a:t>
             </a:r>
-            <a:r>
-              <a:rPr lang="en-US" altLang="ko-KR" sz="1000" dirty="0"/>
-              <a:t>+= 1+ </a:t>
-            </a:r>
-            <a:r>
-              <a:rPr lang="ko-KR" altLang="en-US" sz="1000" dirty="0" err="1"/>
-              <a:t>튕김카운트</a:t>
-            </a:r>
-            <a:endParaRPr lang="ko-KR" altLang="en-US" sz="1000" dirty="0"/>
           </a:p>
         </p:txBody>
       </p:sp>
-      <p:cxnSp>
-        <p:nvCxnSpPr>
-          <p:cNvPr id="89" name="연결선: 꺾임 88">
-            <a:extLst>
-              <a:ext uri="{FF2B5EF4-FFF2-40B4-BE49-F238E27FC236}">
-                <a16:creationId xmlns:a16="http://schemas.microsoft.com/office/drawing/2014/main" id="{62B9D024-6F9D-0554-6D92-4D4372497895}"/>
-              </a:ext>
-            </a:extLst>
-          </p:cNvPr>
-          <p:cNvCxnSpPr>
-            <a:stCxn id="16" idx="3"/>
-            <a:endCxn id="65" idx="1"/>
-          </p:cNvCxnSpPr>
-          <p:nvPr/>
-        </p:nvCxnSpPr>
-        <p:spPr>
-          <a:xfrm flipV="1">
-            <a:off x="6172802" y="3796631"/>
-            <a:ext cx="535266" cy="1"/>
-          </a:xfrm>
-          <a:prstGeom prst="bentConnector3">
-            <a:avLst/>
-          </a:prstGeom>
-          <a:ln>
-            <a:tailEnd type="triangle"/>
-          </a:ln>
-        </p:spPr>
-        <p:style>
-          <a:lnRef idx="1">
-            <a:schemeClr val="dk1"/>
-          </a:lnRef>
-          <a:fillRef idx="0">
-            <a:schemeClr val="dk1"/>
-          </a:fillRef>
-          <a:effectRef idx="0">
-            <a:schemeClr val="dk1"/>
-          </a:effectRef>
-          <a:fontRef idx="minor">
-            <a:schemeClr val="tx1"/>
-          </a:fontRef>
-        </p:style>
-      </p:cxnSp>
-      <p:cxnSp>
-        <p:nvCxnSpPr>
-          <p:cNvPr id="95" name="직선 화살표 연결선 94">
-            <a:extLst>
-              <a:ext uri="{FF2B5EF4-FFF2-40B4-BE49-F238E27FC236}">
-                <a16:creationId xmlns:a16="http://schemas.microsoft.com/office/drawing/2014/main" id="{037772EB-E13E-840D-A622-BB23AF2E2470}"/>
-              </a:ext>
-            </a:extLst>
-          </p:cNvPr>
-          <p:cNvCxnSpPr>
-            <a:stCxn id="65" idx="3"/>
-            <a:endCxn id="72" idx="1"/>
-          </p:cNvCxnSpPr>
-          <p:nvPr/>
-        </p:nvCxnSpPr>
-        <p:spPr>
-          <a:xfrm>
-            <a:off x="8217487" y="3796631"/>
-            <a:ext cx="234840" cy="0"/>
-          </a:xfrm>
-          <a:prstGeom prst="straightConnector1">
-            <a:avLst/>
-          </a:prstGeom>
-          <a:ln>
-            <a:tailEnd type="triangle"/>
-          </a:ln>
-        </p:spPr>
-        <p:style>
-          <a:lnRef idx="1">
-            <a:schemeClr val="dk1"/>
-          </a:lnRef>
-          <a:fillRef idx="0">
-            <a:schemeClr val="dk1"/>
-          </a:fillRef>
-          <a:effectRef idx="0">
-            <a:schemeClr val="dk1"/>
-          </a:effectRef>
-          <a:fontRef idx="minor">
-            <a:schemeClr val="tx1"/>
-          </a:fontRef>
-        </p:style>
-      </p:cxnSp>
       <p:sp>
         <p:nvSpPr>
-          <p:cNvPr id="101" name="순서도: 판단 100">
-            <a:extLst>
-              <a:ext uri="{FF2B5EF4-FFF2-40B4-BE49-F238E27FC236}">
-                <a16:creationId xmlns:a16="http://schemas.microsoft.com/office/drawing/2014/main" id="{F9957AF9-2B70-E4AC-C97A-BDF64D1B09F0}"/>
+          <p:cNvPr id="6" name="순서도: 판단 5">
+            <a:extLst>
+              <a:ext uri="{FF2B5EF4-FFF2-40B4-BE49-F238E27FC236}">
+                <a16:creationId xmlns:a16="http://schemas.microsoft.com/office/drawing/2014/main" id="{8914D9E1-58C0-447A-7F9B-466CAC858FAE}"/>
               </a:ext>
             </a:extLst>
           </p:cNvPr>
@@ -23837,8 +23144,8 @@
         </p:nvSpPr>
         <p:spPr>
           <a:xfrm>
-            <a:off x="2336378" y="4960308"/>
-            <a:ext cx="1509419" cy="1028940"/>
+            <a:off x="9306511" y="4319274"/>
+            <a:ext cx="1828954" cy="869658"/>
           </a:xfrm>
           <a:prstGeom prst="flowChartDecision">
             <a:avLst/>
@@ -23869,60 +23176,27 @@
           <a:p>
             <a:pPr algn="ctr"/>
             <a:r>
+              <a:rPr lang="en-US" altLang="ko-KR" sz="1000" dirty="0"/>
+              <a:t>5</a:t>
+            </a:r>
+            <a:r>
               <a:rPr lang="ko-KR" altLang="en-US" sz="1000" dirty="0"/>
-              <a:t>스테이지 클리어</a:t>
+              <a:t>스테이지</a:t>
             </a:r>
+            <a:r>
+              <a:rPr lang="en-US" altLang="ko-KR" sz="1000" dirty="0"/>
+              <a:t>?</a:t>
+            </a:r>
+            <a:endParaRPr lang="ko-KR" altLang="en-US" sz="1000" dirty="0"/>
           </a:p>
         </p:txBody>
       </p:sp>
-      <p:cxnSp>
-        <p:nvCxnSpPr>
-          <p:cNvPr id="105" name="연결선: 꺾임 104">
-            <a:extLst>
-              <a:ext uri="{FF2B5EF4-FFF2-40B4-BE49-F238E27FC236}">
-                <a16:creationId xmlns:a16="http://schemas.microsoft.com/office/drawing/2014/main" id="{9A1F79EC-B82A-68EB-FE53-0533DE55596D}"/>
-              </a:ext>
-            </a:extLst>
-          </p:cNvPr>
-          <p:cNvCxnSpPr>
-            <a:stCxn id="18" idx="3"/>
-            <a:endCxn id="101" idx="1"/>
-          </p:cNvCxnSpPr>
-          <p:nvPr/>
-        </p:nvCxnSpPr>
-        <p:spPr>
-          <a:xfrm>
-            <a:off x="2094873" y="3203309"/>
-            <a:ext cx="241505" cy="2271469"/>
-          </a:xfrm>
-          <a:prstGeom prst="bentConnector3">
-            <a:avLst/>
-          </a:prstGeom>
-          <a:ln>
-            <a:tailEnd type="triangle"/>
-          </a:ln>
-        </p:spPr>
-        <p:style>
-          <a:lnRef idx="1">
-            <a:schemeClr val="dk1"/>
-          </a:lnRef>
-          <a:fillRef idx="0">
-            <a:schemeClr val="dk1"/>
-          </a:fillRef>
-          <a:effectRef idx="0">
-            <a:schemeClr val="dk1"/>
-          </a:effectRef>
-          <a:fontRef idx="minor">
-            <a:schemeClr val="tx1"/>
-          </a:fontRef>
-        </p:style>
-      </p:cxnSp>
       <p:sp>
         <p:nvSpPr>
-          <p:cNvPr id="107" name="직사각형 106">
-            <a:extLst>
-              <a:ext uri="{FF2B5EF4-FFF2-40B4-BE49-F238E27FC236}">
-                <a16:creationId xmlns:a16="http://schemas.microsoft.com/office/drawing/2014/main" id="{CA96F75A-497A-6B55-5CC2-F35ACF95BAD8}"/>
+          <p:cNvPr id="8" name="직사각형 7">
+            <a:extLst>
+              <a:ext uri="{FF2B5EF4-FFF2-40B4-BE49-F238E27FC236}">
+                <a16:creationId xmlns:a16="http://schemas.microsoft.com/office/drawing/2014/main" id="{DADF37FA-1B59-E853-AA28-278CC90CDF20}"/>
               </a:ext>
             </a:extLst>
           </p:cNvPr>
@@ -23931,8 +23205,65 @@
         </p:nvSpPr>
         <p:spPr>
           <a:xfrm>
-            <a:off x="4597076" y="5224732"/>
-            <a:ext cx="1586007" cy="500091"/>
+            <a:off x="9664664" y="6188706"/>
+            <a:ext cx="1112647" cy="429382"/>
+          </a:xfrm>
+          <a:prstGeom prst="rect">
+            <a:avLst/>
+          </a:prstGeom>
+          <a:ln>
+            <a:solidFill>
+              <a:schemeClr val="tx1"/>
+            </a:solidFill>
+          </a:ln>
+        </p:spPr>
+        <p:style>
+          <a:lnRef idx="2">
+            <a:schemeClr val="accent6"/>
+          </a:lnRef>
+          <a:fillRef idx="1">
+            <a:schemeClr val="lt1"/>
+          </a:fillRef>
+          <a:effectRef idx="0">
+            <a:schemeClr val="accent6"/>
+          </a:effectRef>
+          <a:fontRef idx="minor">
+            <a:schemeClr val="dk1"/>
+          </a:fontRef>
+        </p:style>
+        <p:txBody>
+          <a:bodyPr rtlCol="0" anchor="ctr"/>
+          <a:lstStyle/>
+          <a:p>
+            <a:pPr algn="ctr"/>
+            <a:r>
+              <a:rPr lang="ko-KR" altLang="en-US" sz="1000" dirty="0"/>
+              <a:t>스테이지</a:t>
+            </a:r>
+            <a:r>
+              <a:rPr lang="en-US" altLang="ko-KR" sz="1000" dirty="0"/>
+              <a:t>++</a:t>
+            </a:r>
+            <a:endParaRPr lang="ko-KR" altLang="en-US" sz="1000" dirty="0"/>
+          </a:p>
+        </p:txBody>
+      </p:sp>
+      <p:sp>
+        <p:nvSpPr>
+          <p:cNvPr id="12" name="직사각형 11">
+            <a:extLst>
+              <a:ext uri="{FF2B5EF4-FFF2-40B4-BE49-F238E27FC236}">
+                <a16:creationId xmlns:a16="http://schemas.microsoft.com/office/drawing/2014/main" id="{865FB82F-7614-C20F-66D0-612C196AD374}"/>
+              </a:ext>
+            </a:extLst>
+          </p:cNvPr>
+          <p:cNvSpPr/>
+          <p:nvPr/>
+        </p:nvSpPr>
+        <p:spPr>
+          <a:xfrm>
+            <a:off x="10806032" y="2069507"/>
+            <a:ext cx="1260140" cy="576064"/>
           </a:xfrm>
           <a:prstGeom prst="rect">
             <a:avLst/>
@@ -23964,38 +23295,31 @@
             <a:pPr algn="ctr"/>
             <a:r>
               <a:rPr lang="ko-KR" altLang="en-US" sz="1000"/>
-              <a:t>점수 </a:t>
+              <a:t>점수 및 순위 출력</a:t>
             </a:r>
-            <a:r>
-              <a:rPr lang="en-US" altLang="ko-KR" sz="1000" dirty="0"/>
-              <a:t>*= </a:t>
-            </a:r>
-            <a:r>
-              <a:rPr lang="ko-KR" altLang="en-US" sz="1000" dirty="0"/>
-              <a:t>현재 생명력</a:t>
-            </a:r>
+            <a:endParaRPr lang="ko-KR" altLang="en-US" sz="1000" dirty="0"/>
           </a:p>
         </p:txBody>
       </p:sp>
       <p:cxnSp>
         <p:nvCxnSpPr>
-          <p:cNvPr id="111" name="직선 화살표 연결선 110">
-            <a:extLst>
-              <a:ext uri="{FF2B5EF4-FFF2-40B4-BE49-F238E27FC236}">
-                <a16:creationId xmlns:a16="http://schemas.microsoft.com/office/drawing/2014/main" id="{24C9DE29-E0C0-8429-BB79-31199CE15B9F}"/>
+          <p:cNvPr id="15" name="직선 화살표 연결선 14">
+            <a:extLst>
+              <a:ext uri="{FF2B5EF4-FFF2-40B4-BE49-F238E27FC236}">
+                <a16:creationId xmlns:a16="http://schemas.microsoft.com/office/drawing/2014/main" id="{60A105AE-8886-AC73-49F2-55B258FDC893}"/>
               </a:ext>
             </a:extLst>
           </p:cNvPr>
           <p:cNvCxnSpPr>
-            <a:stCxn id="101" idx="3"/>
-            <a:endCxn id="107" idx="1"/>
+            <a:stCxn id="17" idx="3"/>
+            <a:endCxn id="18" idx="1"/>
           </p:cNvCxnSpPr>
           <p:nvPr/>
         </p:nvCxnSpPr>
         <p:spPr>
           <a:xfrm>
-            <a:off x="3845797" y="5474778"/>
-            <a:ext cx="751279" cy="0"/>
+            <a:off x="623125" y="3752268"/>
+            <a:ext cx="187375" cy="0"/>
           </a:xfrm>
           <a:prstGeom prst="straightConnector1">
             <a:avLst/>
@@ -24021,29 +23345,26 @@
       </p:cxnSp>
       <p:cxnSp>
         <p:nvCxnSpPr>
-          <p:cNvPr id="125" name="연결선: 꺾임 124">
-            <a:extLst>
-              <a:ext uri="{FF2B5EF4-FFF2-40B4-BE49-F238E27FC236}">
-                <a16:creationId xmlns:a16="http://schemas.microsoft.com/office/drawing/2014/main" id="{8D974642-0154-407B-29C9-54B39632F815}"/>
+          <p:cNvPr id="22" name="연결선: 꺾임 21">
+            <a:extLst>
+              <a:ext uri="{FF2B5EF4-FFF2-40B4-BE49-F238E27FC236}">
+                <a16:creationId xmlns:a16="http://schemas.microsoft.com/office/drawing/2014/main" id="{AEF4F07F-6413-6D5F-8F35-3F9C6DCBC7F2}"/>
               </a:ext>
             </a:extLst>
           </p:cNvPr>
           <p:cNvCxnSpPr>
-            <a:cxnSpLocks/>
-            <a:stCxn id="72" idx="2"/>
-            <a:endCxn id="18" idx="2"/>
+            <a:stCxn id="18" idx="3"/>
+            <a:endCxn id="41" idx="1"/>
           </p:cNvCxnSpPr>
           <p:nvPr/>
         </p:nvCxnSpPr>
         <p:spPr>
-          <a:xfrm rot="5400000" flipH="1">
-            <a:off x="5083221" y="-197329"/>
-            <a:ext cx="621169" cy="7866844"/>
+          <a:xfrm flipV="1">
+            <a:off x="2079479" y="1776732"/>
+            <a:ext cx="267085" cy="1975536"/>
           </a:xfrm>
           <a:prstGeom prst="bentConnector3">
-            <a:avLst>
-              <a:gd name="adj1" fmla="val -418743"/>
-            </a:avLst>
+            <a:avLst/>
           </a:prstGeom>
           <a:ln>
             <a:tailEnd type="triangle"/>
@@ -24066,28 +23387,26 @@
       </p:cxnSp>
       <p:cxnSp>
         <p:nvCxnSpPr>
-          <p:cNvPr id="132" name="연결선: 꺾임 131">
-            <a:extLst>
-              <a:ext uri="{FF2B5EF4-FFF2-40B4-BE49-F238E27FC236}">
-                <a16:creationId xmlns:a16="http://schemas.microsoft.com/office/drawing/2014/main" id="{AC50B4E6-9EC5-9E15-6E64-FC206B076EB3}"/>
+          <p:cNvPr id="24" name="연결선: 꺾임 23">
+            <a:extLst>
+              <a:ext uri="{FF2B5EF4-FFF2-40B4-BE49-F238E27FC236}">
+                <a16:creationId xmlns:a16="http://schemas.microsoft.com/office/drawing/2014/main" id="{C922DC91-CB2A-BBE5-C172-357DB5F5C5EE}"/>
               </a:ext>
             </a:extLst>
           </p:cNvPr>
           <p:cNvCxnSpPr>
-            <a:stCxn id="107" idx="2"/>
-            <a:endCxn id="18" idx="2"/>
+            <a:stCxn id="18" idx="3"/>
+            <a:endCxn id="19" idx="1"/>
           </p:cNvCxnSpPr>
           <p:nvPr/>
         </p:nvCxnSpPr>
         <p:spPr>
-          <a:xfrm rot="5400000" flipH="1">
-            <a:off x="2275574" y="2610318"/>
-            <a:ext cx="2299315" cy="3929696"/>
+          <a:xfrm flipV="1">
+            <a:off x="2079479" y="2736882"/>
+            <a:ext cx="275730" cy="1015386"/>
           </a:xfrm>
           <a:prstGeom prst="bentConnector3">
-            <a:avLst>
-              <a:gd name="adj1" fmla="val -39500"/>
-            </a:avLst>
+            <a:avLst/>
           </a:prstGeom>
           <a:ln>
             <a:tailEnd type="triangle"/>
@@ -24110,28 +23429,615 @@
       </p:cxnSp>
       <p:cxnSp>
         <p:nvCxnSpPr>
-          <p:cNvPr id="141" name="연결선: 꺾임 140">
-            <a:extLst>
-              <a:ext uri="{FF2B5EF4-FFF2-40B4-BE49-F238E27FC236}">
-                <a16:creationId xmlns:a16="http://schemas.microsoft.com/office/drawing/2014/main" id="{CD65FCC0-EA2A-A5AB-7228-C52F4D4963D7}"/>
+          <p:cNvPr id="26" name="직선 화살표 연결선 25">
+            <a:extLst>
+              <a:ext uri="{FF2B5EF4-FFF2-40B4-BE49-F238E27FC236}">
+                <a16:creationId xmlns:a16="http://schemas.microsoft.com/office/drawing/2014/main" id="{F0AE8A8C-E46F-3D4F-3817-272D66F9622C}"/>
               </a:ext>
             </a:extLst>
           </p:cNvPr>
           <p:cNvCxnSpPr>
-            <a:stCxn id="41" idx="0"/>
-            <a:endCxn id="18" idx="0"/>
+            <a:stCxn id="18" idx="3"/>
+            <a:endCxn id="42" idx="1"/>
           </p:cNvCxnSpPr>
           <p:nvPr/>
         </p:nvCxnSpPr>
         <p:spPr>
-          <a:xfrm rot="16200000" flipH="1" flipV="1">
-            <a:off x="1524441" y="1385500"/>
-            <a:ext cx="1531551" cy="1659666"/>
+          <a:xfrm flipV="1">
+            <a:off x="2079479" y="3733239"/>
+            <a:ext cx="257402" cy="19029"/>
+          </a:xfrm>
+          <a:prstGeom prst="straightConnector1">
+            <a:avLst/>
+          </a:prstGeom>
+          <a:ln>
+            <a:tailEnd type="triangle"/>
+          </a:ln>
+        </p:spPr>
+        <p:style>
+          <a:lnRef idx="1">
+            <a:schemeClr val="accent1"/>
+          </a:lnRef>
+          <a:fillRef idx="0">
+            <a:schemeClr val="accent1"/>
+          </a:fillRef>
+          <a:effectRef idx="0">
+            <a:schemeClr val="accent1"/>
+          </a:effectRef>
+          <a:fontRef idx="minor">
+            <a:schemeClr val="tx1"/>
+          </a:fontRef>
+        </p:style>
+      </p:cxnSp>
+      <p:cxnSp>
+        <p:nvCxnSpPr>
+          <p:cNvPr id="31" name="연결선: 꺾임 30">
+            <a:extLst>
+              <a:ext uri="{FF2B5EF4-FFF2-40B4-BE49-F238E27FC236}">
+                <a16:creationId xmlns:a16="http://schemas.microsoft.com/office/drawing/2014/main" id="{20358633-42F2-4800-E12E-64F73E7A4854}"/>
+              </a:ext>
+            </a:extLst>
+          </p:cNvPr>
+          <p:cNvCxnSpPr>
+            <a:stCxn id="18" idx="3"/>
+            <a:endCxn id="43" idx="1"/>
+          </p:cNvCxnSpPr>
+          <p:nvPr/>
+        </p:nvCxnSpPr>
+        <p:spPr>
+          <a:xfrm>
+            <a:off x="2079479" y="3752268"/>
+            <a:ext cx="262834" cy="1009914"/>
           </a:xfrm>
           <a:prstGeom prst="bentConnector3">
-            <a:avLst>
-              <a:gd name="adj1" fmla="val -8471"/>
-            </a:avLst>
+            <a:avLst/>
+          </a:prstGeom>
+          <a:ln>
+            <a:tailEnd type="triangle"/>
+          </a:ln>
+        </p:spPr>
+        <p:style>
+          <a:lnRef idx="1">
+            <a:schemeClr val="accent1"/>
+          </a:lnRef>
+          <a:fillRef idx="0">
+            <a:schemeClr val="accent1"/>
+          </a:fillRef>
+          <a:effectRef idx="0">
+            <a:schemeClr val="accent1"/>
+          </a:effectRef>
+          <a:fontRef idx="minor">
+            <a:schemeClr val="tx1"/>
+          </a:fontRef>
+        </p:style>
+      </p:cxnSp>
+      <p:cxnSp>
+        <p:nvCxnSpPr>
+          <p:cNvPr id="37" name="연결선: 꺾임 36">
+            <a:extLst>
+              <a:ext uri="{FF2B5EF4-FFF2-40B4-BE49-F238E27FC236}">
+                <a16:creationId xmlns:a16="http://schemas.microsoft.com/office/drawing/2014/main" id="{50DAB2A2-6D54-E026-BA37-8B00A9502C96}"/>
+              </a:ext>
+            </a:extLst>
+          </p:cNvPr>
+          <p:cNvCxnSpPr>
+            <a:stCxn id="18" idx="3"/>
+            <a:endCxn id="44" idx="1"/>
+          </p:cNvCxnSpPr>
+          <p:nvPr/>
+        </p:nvCxnSpPr>
+        <p:spPr>
+          <a:xfrm>
+            <a:off x="2079479" y="3752268"/>
+            <a:ext cx="275730" cy="2075065"/>
+          </a:xfrm>
+          <a:prstGeom prst="bentConnector3">
+            <a:avLst/>
+          </a:prstGeom>
+          <a:ln>
+            <a:tailEnd type="triangle"/>
+          </a:ln>
+        </p:spPr>
+        <p:style>
+          <a:lnRef idx="1">
+            <a:schemeClr val="dk1"/>
+          </a:lnRef>
+          <a:fillRef idx="0">
+            <a:schemeClr val="dk1"/>
+          </a:fillRef>
+          <a:effectRef idx="0">
+            <a:schemeClr val="dk1"/>
+          </a:effectRef>
+          <a:fontRef idx="minor">
+            <a:schemeClr val="tx1"/>
+          </a:fontRef>
+        </p:style>
+      </p:cxnSp>
+      <p:cxnSp>
+        <p:nvCxnSpPr>
+          <p:cNvPr id="48" name="직선 화살표 연결선 47">
+            <a:extLst>
+              <a:ext uri="{FF2B5EF4-FFF2-40B4-BE49-F238E27FC236}">
+                <a16:creationId xmlns:a16="http://schemas.microsoft.com/office/drawing/2014/main" id="{058009D7-3C40-43FA-4174-A0A431359E9F}"/>
+              </a:ext>
+            </a:extLst>
+          </p:cNvPr>
+          <p:cNvCxnSpPr>
+            <a:stCxn id="41" idx="3"/>
+            <a:endCxn id="34" idx="1"/>
+          </p:cNvCxnSpPr>
+          <p:nvPr/>
+        </p:nvCxnSpPr>
+        <p:spPr>
+          <a:xfrm>
+            <a:off x="3750453" y="1776732"/>
+            <a:ext cx="256300" cy="3865"/>
+          </a:xfrm>
+          <a:prstGeom prst="straightConnector1">
+            <a:avLst/>
+          </a:prstGeom>
+          <a:ln>
+            <a:tailEnd type="triangle"/>
+          </a:ln>
+        </p:spPr>
+        <p:style>
+          <a:lnRef idx="1">
+            <a:schemeClr val="dk1"/>
+          </a:lnRef>
+          <a:fillRef idx="0">
+            <a:schemeClr val="dk1"/>
+          </a:fillRef>
+          <a:effectRef idx="0">
+            <a:schemeClr val="dk1"/>
+          </a:effectRef>
+          <a:fontRef idx="minor">
+            <a:schemeClr val="tx1"/>
+          </a:fontRef>
+        </p:style>
+      </p:cxnSp>
+      <p:cxnSp>
+        <p:nvCxnSpPr>
+          <p:cNvPr id="51" name="직선 화살표 연결선 50">
+            <a:extLst>
+              <a:ext uri="{FF2B5EF4-FFF2-40B4-BE49-F238E27FC236}">
+                <a16:creationId xmlns:a16="http://schemas.microsoft.com/office/drawing/2014/main" id="{0CDF2A4A-1320-9CAD-49E4-D7E7DB06C690}"/>
+              </a:ext>
+            </a:extLst>
+          </p:cNvPr>
+          <p:cNvCxnSpPr>
+            <a:stCxn id="19" idx="3"/>
+            <a:endCxn id="33" idx="1"/>
+          </p:cNvCxnSpPr>
+          <p:nvPr/>
+        </p:nvCxnSpPr>
+        <p:spPr>
+          <a:xfrm flipV="1">
+            <a:off x="3759098" y="2718233"/>
+            <a:ext cx="262511" cy="18649"/>
+          </a:xfrm>
+          <a:prstGeom prst="straightConnector1">
+            <a:avLst/>
+          </a:prstGeom>
+          <a:ln>
+            <a:tailEnd type="triangle"/>
+          </a:ln>
+        </p:spPr>
+        <p:style>
+          <a:lnRef idx="1">
+            <a:schemeClr val="dk1"/>
+          </a:lnRef>
+          <a:fillRef idx="0">
+            <a:schemeClr val="dk1"/>
+          </a:fillRef>
+          <a:effectRef idx="0">
+            <a:schemeClr val="dk1"/>
+          </a:effectRef>
+          <a:fontRef idx="minor">
+            <a:schemeClr val="tx1"/>
+          </a:fontRef>
+        </p:style>
+      </p:cxnSp>
+      <p:cxnSp>
+        <p:nvCxnSpPr>
+          <p:cNvPr id="57" name="직선 화살표 연결선 56">
+            <a:extLst>
+              <a:ext uri="{FF2B5EF4-FFF2-40B4-BE49-F238E27FC236}">
+                <a16:creationId xmlns:a16="http://schemas.microsoft.com/office/drawing/2014/main" id="{5367551C-CA87-EDBC-3B1D-42835E062936}"/>
+              </a:ext>
+            </a:extLst>
+          </p:cNvPr>
+          <p:cNvCxnSpPr>
+            <a:stCxn id="42" idx="3"/>
+            <a:endCxn id="35" idx="1"/>
+          </p:cNvCxnSpPr>
+          <p:nvPr/>
+        </p:nvCxnSpPr>
+        <p:spPr>
+          <a:xfrm>
+            <a:off x="3740770" y="3733239"/>
+            <a:ext cx="280838" cy="8875"/>
+          </a:xfrm>
+          <a:prstGeom prst="straightConnector1">
+            <a:avLst/>
+          </a:prstGeom>
+          <a:ln>
+            <a:tailEnd type="triangle"/>
+          </a:ln>
+        </p:spPr>
+        <p:style>
+          <a:lnRef idx="1">
+            <a:schemeClr val="dk1"/>
+          </a:lnRef>
+          <a:fillRef idx="0">
+            <a:schemeClr val="dk1"/>
+          </a:fillRef>
+          <a:effectRef idx="0">
+            <a:schemeClr val="dk1"/>
+          </a:effectRef>
+          <a:fontRef idx="minor">
+            <a:schemeClr val="tx1"/>
+          </a:fontRef>
+        </p:style>
+      </p:cxnSp>
+      <p:cxnSp>
+        <p:nvCxnSpPr>
+          <p:cNvPr id="60" name="직선 화살표 연결선 59">
+            <a:extLst>
+              <a:ext uri="{FF2B5EF4-FFF2-40B4-BE49-F238E27FC236}">
+                <a16:creationId xmlns:a16="http://schemas.microsoft.com/office/drawing/2014/main" id="{20A6347A-0DD4-833A-D207-DAEBFB83AFC4}"/>
+              </a:ext>
+            </a:extLst>
+          </p:cNvPr>
+          <p:cNvCxnSpPr>
+            <a:stCxn id="43" idx="3"/>
+            <a:endCxn id="36" idx="1"/>
+          </p:cNvCxnSpPr>
+          <p:nvPr/>
+        </p:nvCxnSpPr>
+        <p:spPr>
+          <a:xfrm>
+            <a:off x="3746202" y="4762182"/>
+            <a:ext cx="368364" cy="0"/>
+          </a:xfrm>
+          <a:prstGeom prst="straightConnector1">
+            <a:avLst/>
+          </a:prstGeom>
+          <a:ln>
+            <a:tailEnd type="triangle"/>
+          </a:ln>
+        </p:spPr>
+        <p:style>
+          <a:lnRef idx="1">
+            <a:schemeClr val="dk1"/>
+          </a:lnRef>
+          <a:fillRef idx="0">
+            <a:schemeClr val="dk1"/>
+          </a:fillRef>
+          <a:effectRef idx="0">
+            <a:schemeClr val="dk1"/>
+          </a:effectRef>
+          <a:fontRef idx="minor">
+            <a:schemeClr val="tx1"/>
+          </a:fontRef>
+        </p:style>
+      </p:cxnSp>
+      <p:cxnSp>
+        <p:nvCxnSpPr>
+          <p:cNvPr id="63" name="직선 화살표 연결선 62">
+            <a:extLst>
+              <a:ext uri="{FF2B5EF4-FFF2-40B4-BE49-F238E27FC236}">
+                <a16:creationId xmlns:a16="http://schemas.microsoft.com/office/drawing/2014/main" id="{17087294-FB21-0FC6-3BCC-BFDF00D304C9}"/>
+              </a:ext>
+            </a:extLst>
+          </p:cNvPr>
+          <p:cNvCxnSpPr>
+            <a:stCxn id="36" idx="3"/>
+            <a:endCxn id="40" idx="1"/>
+          </p:cNvCxnSpPr>
+          <p:nvPr/>
+        </p:nvCxnSpPr>
+        <p:spPr>
+          <a:xfrm>
+            <a:off x="5227213" y="4762182"/>
+            <a:ext cx="319455" cy="0"/>
+          </a:xfrm>
+          <a:prstGeom prst="straightConnector1">
+            <a:avLst/>
+          </a:prstGeom>
+          <a:ln>
+            <a:tailEnd type="triangle"/>
+          </a:ln>
+        </p:spPr>
+        <p:style>
+          <a:lnRef idx="1">
+            <a:schemeClr val="dk1"/>
+          </a:lnRef>
+          <a:fillRef idx="0">
+            <a:schemeClr val="dk1"/>
+          </a:fillRef>
+          <a:effectRef idx="0">
+            <a:schemeClr val="dk1"/>
+          </a:effectRef>
+          <a:fontRef idx="minor">
+            <a:schemeClr val="tx1"/>
+          </a:fontRef>
+        </p:style>
+      </p:cxnSp>
+      <p:cxnSp>
+        <p:nvCxnSpPr>
+          <p:cNvPr id="67" name="직선 화살표 연결선 66">
+            <a:extLst>
+              <a:ext uri="{FF2B5EF4-FFF2-40B4-BE49-F238E27FC236}">
+                <a16:creationId xmlns:a16="http://schemas.microsoft.com/office/drawing/2014/main" id="{083F9719-9856-E098-D1B5-9C13C791E49F}"/>
+              </a:ext>
+            </a:extLst>
+          </p:cNvPr>
+          <p:cNvCxnSpPr>
+            <a:stCxn id="40" idx="3"/>
+            <a:endCxn id="5" idx="1"/>
+          </p:cNvCxnSpPr>
+          <p:nvPr/>
+        </p:nvCxnSpPr>
+        <p:spPr>
+          <a:xfrm>
+            <a:off x="7375622" y="4762182"/>
+            <a:ext cx="394372" cy="0"/>
+          </a:xfrm>
+          <a:prstGeom prst="straightConnector1">
+            <a:avLst/>
+          </a:prstGeom>
+          <a:ln>
+            <a:tailEnd type="triangle"/>
+          </a:ln>
+        </p:spPr>
+        <p:style>
+          <a:lnRef idx="1">
+            <a:schemeClr val="dk1"/>
+          </a:lnRef>
+          <a:fillRef idx="0">
+            <a:schemeClr val="dk1"/>
+          </a:fillRef>
+          <a:effectRef idx="0">
+            <a:schemeClr val="dk1"/>
+          </a:effectRef>
+          <a:fontRef idx="minor">
+            <a:schemeClr val="tx1"/>
+          </a:fontRef>
+        </p:style>
+      </p:cxnSp>
+      <p:cxnSp>
+        <p:nvCxnSpPr>
+          <p:cNvPr id="69" name="직선 화살표 연결선 68">
+            <a:extLst>
+              <a:ext uri="{FF2B5EF4-FFF2-40B4-BE49-F238E27FC236}">
+                <a16:creationId xmlns:a16="http://schemas.microsoft.com/office/drawing/2014/main" id="{4FA4FF29-3ED1-3919-9CDE-B5109C150A51}"/>
+              </a:ext>
+            </a:extLst>
+          </p:cNvPr>
+          <p:cNvCxnSpPr>
+            <a:stCxn id="5" idx="3"/>
+            <a:endCxn id="6" idx="1"/>
+          </p:cNvCxnSpPr>
+          <p:nvPr/>
+        </p:nvCxnSpPr>
+        <p:spPr>
+          <a:xfrm flipV="1">
+            <a:off x="8882641" y="4754103"/>
+            <a:ext cx="423870" cy="8079"/>
+          </a:xfrm>
+          <a:prstGeom prst="straightConnector1">
+            <a:avLst/>
+          </a:prstGeom>
+          <a:ln>
+            <a:tailEnd type="triangle"/>
+          </a:ln>
+        </p:spPr>
+        <p:style>
+          <a:lnRef idx="1">
+            <a:schemeClr val="dk1"/>
+          </a:lnRef>
+          <a:fillRef idx="0">
+            <a:schemeClr val="dk1"/>
+          </a:fillRef>
+          <a:effectRef idx="0">
+            <a:schemeClr val="dk1"/>
+          </a:effectRef>
+          <a:fontRef idx="minor">
+            <a:schemeClr val="tx1"/>
+          </a:fontRef>
+        </p:style>
+      </p:cxnSp>
+      <p:cxnSp>
+        <p:nvCxnSpPr>
+          <p:cNvPr id="73" name="직선 화살표 연결선 72">
+            <a:extLst>
+              <a:ext uri="{FF2B5EF4-FFF2-40B4-BE49-F238E27FC236}">
+                <a16:creationId xmlns:a16="http://schemas.microsoft.com/office/drawing/2014/main" id="{E2086EF3-2850-CE8D-1237-707783AE664D}"/>
+              </a:ext>
+            </a:extLst>
+          </p:cNvPr>
+          <p:cNvCxnSpPr>
+            <a:stCxn id="45" idx="1"/>
+            <a:endCxn id="12" idx="2"/>
+          </p:cNvCxnSpPr>
+          <p:nvPr/>
+        </p:nvCxnSpPr>
+        <p:spPr>
+          <a:xfrm flipH="1" flipV="1">
+            <a:off x="11436102" y="2645571"/>
+            <a:ext cx="17406" cy="602366"/>
+          </a:xfrm>
+          <a:prstGeom prst="straightConnector1">
+            <a:avLst/>
+          </a:prstGeom>
+          <a:ln>
+            <a:tailEnd type="triangle"/>
+          </a:ln>
+        </p:spPr>
+        <p:style>
+          <a:lnRef idx="1">
+            <a:schemeClr val="dk1"/>
+          </a:lnRef>
+          <a:fillRef idx="0">
+            <a:schemeClr val="dk1"/>
+          </a:fillRef>
+          <a:effectRef idx="0">
+            <a:schemeClr val="dk1"/>
+          </a:effectRef>
+          <a:fontRef idx="minor">
+            <a:schemeClr val="tx1"/>
+          </a:fontRef>
+        </p:style>
+      </p:cxnSp>
+      <p:cxnSp>
+        <p:nvCxnSpPr>
+          <p:cNvPr id="76" name="직선 화살표 연결선 75">
+            <a:extLst>
+              <a:ext uri="{FF2B5EF4-FFF2-40B4-BE49-F238E27FC236}">
+                <a16:creationId xmlns:a16="http://schemas.microsoft.com/office/drawing/2014/main" id="{02D306A6-0C2A-1839-DEB2-A0B91BBEB21B}"/>
+              </a:ext>
+            </a:extLst>
+          </p:cNvPr>
+          <p:cNvCxnSpPr>
+            <a:stCxn id="6" idx="2"/>
+            <a:endCxn id="8" idx="0"/>
+          </p:cNvCxnSpPr>
+          <p:nvPr/>
+        </p:nvCxnSpPr>
+        <p:spPr>
+          <a:xfrm>
+            <a:off x="10220988" y="5188932"/>
+            <a:ext cx="0" cy="999774"/>
+          </a:xfrm>
+          <a:prstGeom prst="straightConnector1">
+            <a:avLst/>
+          </a:prstGeom>
+          <a:ln>
+            <a:tailEnd type="triangle"/>
+          </a:ln>
+        </p:spPr>
+        <p:style>
+          <a:lnRef idx="1">
+            <a:schemeClr val="dk1"/>
+          </a:lnRef>
+          <a:fillRef idx="0">
+            <a:schemeClr val="dk1"/>
+          </a:fillRef>
+          <a:effectRef idx="0">
+            <a:schemeClr val="dk1"/>
+          </a:effectRef>
+          <a:fontRef idx="minor">
+            <a:schemeClr val="tx1"/>
+          </a:fontRef>
+        </p:style>
+      </p:cxnSp>
+      <p:cxnSp>
+        <p:nvCxnSpPr>
+          <p:cNvPr id="83" name="연결선: 꺾임 82">
+            <a:extLst>
+              <a:ext uri="{FF2B5EF4-FFF2-40B4-BE49-F238E27FC236}">
+                <a16:creationId xmlns:a16="http://schemas.microsoft.com/office/drawing/2014/main" id="{87FF62AC-32EA-36DD-28D6-5B89D1F89BCB}"/>
+              </a:ext>
+            </a:extLst>
+          </p:cNvPr>
+          <p:cNvCxnSpPr>
+            <a:cxnSpLocks/>
+            <a:stCxn id="8" idx="1"/>
+            <a:endCxn id="18" idx="2"/>
+          </p:cNvCxnSpPr>
+          <p:nvPr/>
+        </p:nvCxnSpPr>
+        <p:spPr>
+          <a:xfrm rot="10800000">
+            <a:off x="1444990" y="3974467"/>
+            <a:ext cx="8219674" cy="2428930"/>
+          </a:xfrm>
+          <a:prstGeom prst="bentConnector2">
+            <a:avLst/>
+          </a:prstGeom>
+          <a:ln>
+            <a:tailEnd type="triangle"/>
+          </a:ln>
+        </p:spPr>
+        <p:style>
+          <a:lnRef idx="1">
+            <a:schemeClr val="dk1"/>
+          </a:lnRef>
+          <a:fillRef idx="0">
+            <a:schemeClr val="dk1"/>
+          </a:fillRef>
+          <a:effectRef idx="0">
+            <a:schemeClr val="dk1"/>
+          </a:effectRef>
+          <a:fontRef idx="minor">
+            <a:schemeClr val="tx1"/>
+          </a:fontRef>
+        </p:style>
+      </p:cxnSp>
+      <p:cxnSp>
+        <p:nvCxnSpPr>
+          <p:cNvPr id="108" name="연결선: 꺾임 107">
+            <a:extLst>
+              <a:ext uri="{FF2B5EF4-FFF2-40B4-BE49-F238E27FC236}">
+                <a16:creationId xmlns:a16="http://schemas.microsoft.com/office/drawing/2014/main" id="{AB5F9B42-F710-9942-552A-0C2660BFA682}"/>
+              </a:ext>
+            </a:extLst>
+          </p:cNvPr>
+          <p:cNvCxnSpPr>
+            <a:stCxn id="44" idx="3"/>
+            <a:endCxn id="45" idx="4"/>
+          </p:cNvCxnSpPr>
+          <p:nvPr/>
+        </p:nvCxnSpPr>
+        <p:spPr>
+          <a:xfrm flipV="1">
+            <a:off x="3759098" y="3824001"/>
+            <a:ext cx="7622402" cy="2003332"/>
+          </a:xfrm>
+          <a:prstGeom prst="bentConnector2">
+            <a:avLst/>
+          </a:prstGeom>
+          <a:ln>
+            <a:tailEnd type="triangle"/>
+          </a:ln>
+        </p:spPr>
+        <p:style>
+          <a:lnRef idx="1">
+            <a:schemeClr val="dk1"/>
+          </a:lnRef>
+          <a:fillRef idx="0">
+            <a:schemeClr val="dk1"/>
+          </a:fillRef>
+          <a:effectRef idx="0">
+            <a:schemeClr val="dk1"/>
+          </a:effectRef>
+          <a:fontRef idx="minor">
+            <a:schemeClr val="tx1"/>
+          </a:fontRef>
+        </p:style>
+      </p:cxnSp>
+      <p:cxnSp>
+        <p:nvCxnSpPr>
+          <p:cNvPr id="113" name="연결선: 꺾임 112">
+            <a:extLst>
+              <a:ext uri="{FF2B5EF4-FFF2-40B4-BE49-F238E27FC236}">
+                <a16:creationId xmlns:a16="http://schemas.microsoft.com/office/drawing/2014/main" id="{C830A1A1-D9C8-1C6C-FB4C-F2A5D94160B7}"/>
+              </a:ext>
+            </a:extLst>
+          </p:cNvPr>
+          <p:cNvCxnSpPr>
+            <a:stCxn id="6" idx="0"/>
+            <a:endCxn id="45" idx="5"/>
+          </p:cNvCxnSpPr>
+          <p:nvPr/>
+        </p:nvCxnSpPr>
+        <p:spPr>
+          <a:xfrm rot="5400000" flipH="1" flipV="1">
+            <a:off x="10130561" y="3626397"/>
+            <a:ext cx="783305" cy="602450"/>
+          </a:xfrm>
+          <a:prstGeom prst="bentConnector2">
+            <a:avLst/>
           </a:prstGeom>
           <a:ln>
             <a:tailEnd type="triangle"/>
@@ -24155,7 +24061,7 @@
     </p:spTree>
     <p:extLst>
       <p:ext uri="{BB962C8B-B14F-4D97-AF65-F5344CB8AC3E}">
-        <p14:creationId xmlns:p14="http://schemas.microsoft.com/office/powerpoint/2010/main" val="1193668229"/>
+        <p14:creationId xmlns:p14="http://schemas.microsoft.com/office/powerpoint/2010/main" val="3877969412"/>
       </p:ext>
     </p:extLst>
   </p:cSld>
@@ -24165,7 +24071,7 @@
 </p:sld>
 </file>
 
-<file path=ppt/slides/slide7.xml><?xml version="1.0" encoding="utf-8"?>
+<file path=ppt/slides/slide8.xml><?xml version="1.0" encoding="utf-8"?>
 <p:sld xmlns:a="http://schemas.openxmlformats.org/drawingml/2006/main" xmlns:r="http://schemas.openxmlformats.org/officeDocument/2006/relationships" xmlns:p="http://schemas.openxmlformats.org/presentationml/2006/main">
   <p:cSld>
     <p:spTree>
@@ -24518,7 +24424,7 @@
                   <a:latin typeface="세방고딕 Bold" panose="00000800000000000000" pitchFamily="2" charset="-127"/>
                   <a:ea typeface="세방고딕 Bold" panose="00000800000000000000" pitchFamily="2" charset="-127"/>
                 </a:rPr>
-                <a:t>01</a:t>
+                <a:t>04</a:t>
               </a:r>
               <a:endParaRPr lang="ko-KR" altLang="en-US" sz="4400" b="1" dirty="0">
                 <a:ln>
@@ -24925,7 +24831,7 @@
 </p:sld>
 </file>
 
-<file path=ppt/slides/slide8.xml><?xml version="1.0" encoding="utf-8"?>
+<file path=ppt/slides/slide9.xml><?xml version="1.0" encoding="utf-8"?>
 <p:sld xmlns:a="http://schemas.openxmlformats.org/drawingml/2006/main" xmlns:r="http://schemas.openxmlformats.org/officeDocument/2006/relationships" xmlns:p="http://schemas.openxmlformats.org/presentationml/2006/main">
   <p:cSld>
     <p:spTree>
@@ -25308,7 +25214,7 @@
                   <a:latin typeface="세방고딕 Bold" panose="00000800000000000000" pitchFamily="2" charset="-127"/>
                   <a:ea typeface="세방고딕 Bold" panose="00000800000000000000" pitchFamily="2" charset="-127"/>
                 </a:rPr>
-                <a:t>01</a:t>
+                <a:t>04</a:t>
               </a:r>
               <a:endParaRPr lang="ko-KR" altLang="en-US" sz="4400" b="1" dirty="0">
                 <a:ln>
@@ -25972,900 +25878,6 @@
     <p:extLst>
       <p:ext uri="{BB962C8B-B14F-4D97-AF65-F5344CB8AC3E}">
         <p14:creationId xmlns:p14="http://schemas.microsoft.com/office/powerpoint/2010/main" val="2364759081"/>
-      </p:ext>
-    </p:extLst>
-  </p:cSld>
-  <p:clrMapOvr>
-    <a:masterClrMapping/>
-  </p:clrMapOvr>
-</p:sld>
-</file>
-
-<file path=ppt/slides/slide9.xml><?xml version="1.0" encoding="utf-8"?>
-<p:sld xmlns:a="http://schemas.openxmlformats.org/drawingml/2006/main" xmlns:r="http://schemas.openxmlformats.org/officeDocument/2006/relationships" xmlns:p="http://schemas.openxmlformats.org/presentationml/2006/main">
-  <p:cSld>
-    <p:spTree>
-      <p:nvGrpSpPr>
-        <p:cNvPr id="1" name=""/>
-        <p:cNvGrpSpPr/>
-        <p:nvPr/>
-      </p:nvGrpSpPr>
-      <p:grpSpPr>
-        <a:xfrm>
-          <a:off x="0" y="0"/>
-          <a:ext cx="0" cy="0"/>
-          <a:chOff x="0" y="0"/>
-          <a:chExt cx="0" cy="0"/>
-        </a:xfrm>
-      </p:grpSpPr>
-      <p:sp>
-        <p:nvSpPr>
-          <p:cNvPr id="18" name="사각형: 둥근 한쪽 모서리 17">
-            <a:extLst>
-              <a:ext uri="{FF2B5EF4-FFF2-40B4-BE49-F238E27FC236}">
-                <a16:creationId xmlns:a16="http://schemas.microsoft.com/office/drawing/2014/main" id="{2EAF6D58-084F-2DED-DF2E-AAB0DF464557}"/>
-              </a:ext>
-            </a:extLst>
-          </p:cNvPr>
-          <p:cNvSpPr/>
-          <p:nvPr/>
-        </p:nvSpPr>
-        <p:spPr>
-          <a:xfrm flipH="1" flipV="1">
-            <a:off x="174170" y="70719"/>
-            <a:ext cx="12017829" cy="1221051"/>
-          </a:xfrm>
-          <a:prstGeom prst="round1Rect">
-            <a:avLst>
-              <a:gd name="adj" fmla="val 23799"/>
-            </a:avLst>
-          </a:prstGeom>
-          <a:solidFill>
-            <a:schemeClr val="bg1">
-              <a:lumMod val="95000"/>
-              <a:alpha val="50000"/>
-            </a:schemeClr>
-          </a:solidFill>
-          <a:ln w="10818" cap="flat">
-            <a:noFill/>
-            <a:prstDash val="solid"/>
-            <a:miter/>
-          </a:ln>
-        </p:spPr>
-        <p:style>
-          <a:lnRef idx="2">
-            <a:schemeClr val="accent1">
-              <a:shade val="15000"/>
-            </a:schemeClr>
-          </a:lnRef>
-          <a:fillRef idx="1">
-            <a:schemeClr val="accent1"/>
-          </a:fillRef>
-          <a:effectRef idx="0">
-            <a:schemeClr val="accent1"/>
-          </a:effectRef>
-          <a:fontRef idx="minor">
-            <a:schemeClr val="lt1"/>
-          </a:fontRef>
-        </p:style>
-        <p:txBody>
-          <a:bodyPr rtlCol="0" anchor="ctr"/>
-          <a:lstStyle/>
-          <a:p>
-            <a:pPr algn="ctr"/>
-            <a:endParaRPr lang="ko-KR" altLang="en-US"/>
-          </a:p>
-        </p:txBody>
-      </p:sp>
-      <p:grpSp>
-        <p:nvGrpSpPr>
-          <p:cNvPr id="20" name="그룹 19">
-            <a:extLst>
-              <a:ext uri="{FF2B5EF4-FFF2-40B4-BE49-F238E27FC236}">
-                <a16:creationId xmlns:a16="http://schemas.microsoft.com/office/drawing/2014/main" id="{739452E3-2013-66BF-2EBE-F0EC960C4077}"/>
-              </a:ext>
-            </a:extLst>
-          </p:cNvPr>
-          <p:cNvGrpSpPr/>
-          <p:nvPr/>
-        </p:nvGrpSpPr>
-        <p:grpSpPr>
-          <a:xfrm>
-            <a:off x="376102" y="333243"/>
-            <a:ext cx="9932366" cy="830997"/>
-            <a:chOff x="376102" y="333243"/>
-            <a:chExt cx="9932366" cy="830997"/>
-          </a:xfrm>
-        </p:grpSpPr>
-        <p:sp>
-          <p:nvSpPr>
-            <p:cNvPr id="22" name="TextBox 21">
-              <a:extLst>
-                <a:ext uri="{FF2B5EF4-FFF2-40B4-BE49-F238E27FC236}">
-                  <a16:creationId xmlns:a16="http://schemas.microsoft.com/office/drawing/2014/main" id="{92519771-A232-D9CF-4769-EBFF2F8CFBB1}"/>
-                </a:ext>
-              </a:extLst>
-            </p:cNvPr>
-            <p:cNvSpPr txBox="1"/>
-            <p:nvPr/>
-          </p:nvSpPr>
-          <p:spPr>
-            <a:xfrm>
-              <a:off x="1461721" y="366114"/>
-              <a:ext cx="2252213" cy="276999"/>
-            </a:xfrm>
-            <a:prstGeom prst="rect">
-              <a:avLst/>
-            </a:prstGeom>
-            <a:noFill/>
-          </p:spPr>
-          <p:txBody>
-            <a:bodyPr wrap="square">
-              <a:spAutoFit/>
-            </a:bodyPr>
-            <a:lstStyle/>
-            <a:p>
-              <a:r>
-                <a:rPr lang="en-US" altLang="ko-KR" sz="1200" b="1" dirty="0">
-                  <a:ln>
-                    <a:solidFill>
-                      <a:schemeClr val="accent1">
-                        <a:shade val="15000"/>
-                        <a:alpha val="0"/>
-                      </a:schemeClr>
-                    </a:solidFill>
-                  </a:ln>
-                  <a:solidFill>
-                    <a:srgbClr val="3378C8">
-                      <a:alpha val="50000"/>
-                    </a:srgbClr>
-                  </a:solidFill>
-                  <a:latin typeface="맑은 고딕" panose="020B0503020000020004" pitchFamily="50" charset="-127"/>
-                  <a:ea typeface="맑은 고딕" panose="020B0503020000020004" pitchFamily="50" charset="-127"/>
-                </a:rPr>
-                <a:t>K-Digital Training</a:t>
-              </a:r>
-              <a:endParaRPr lang="ko-KR" altLang="en-US" sz="1200" b="1" dirty="0">
-                <a:ln>
-                  <a:solidFill>
-                    <a:schemeClr val="accent1">
-                      <a:shade val="15000"/>
-                      <a:alpha val="0"/>
-                    </a:schemeClr>
-                  </a:solidFill>
-                </a:ln>
-                <a:solidFill>
-                  <a:srgbClr val="3378C8">
-                    <a:alpha val="50000"/>
-                  </a:srgbClr>
-                </a:solidFill>
-                <a:latin typeface="맑은 고딕" panose="020B0503020000020004" pitchFamily="50" charset="-127"/>
-                <a:ea typeface="맑은 고딕" panose="020B0503020000020004" pitchFamily="50" charset="-127"/>
-              </a:endParaRPr>
-            </a:p>
-          </p:txBody>
-        </p:sp>
-        <p:sp>
-          <p:nvSpPr>
-            <p:cNvPr id="23" name="TextBox 22">
-              <a:extLst>
-                <a:ext uri="{FF2B5EF4-FFF2-40B4-BE49-F238E27FC236}">
-                  <a16:creationId xmlns:a16="http://schemas.microsoft.com/office/drawing/2014/main" id="{EE109AB5-00CA-F0E8-7FD9-645FB6E912A9}"/>
-                </a:ext>
-              </a:extLst>
-            </p:cNvPr>
-            <p:cNvSpPr txBox="1"/>
-            <p:nvPr/>
-          </p:nvSpPr>
-          <p:spPr>
-            <a:xfrm>
-              <a:off x="1461721" y="585057"/>
-              <a:ext cx="8846747" cy="523220"/>
-            </a:xfrm>
-            <a:prstGeom prst="rect">
-              <a:avLst/>
-            </a:prstGeom>
-            <a:noFill/>
-          </p:spPr>
-          <p:txBody>
-            <a:bodyPr wrap="square">
-              <a:spAutoFit/>
-            </a:bodyPr>
-            <a:lstStyle/>
-            <a:p>
-              <a:pPr>
-                <a:defRPr/>
-              </a:pPr>
-              <a:r>
-                <a:rPr lang="ko-KR" altLang="en-US" sz="2800" b="1" dirty="0">
-                  <a:ln>
-                    <a:solidFill>
-                      <a:schemeClr val="accent1">
-                        <a:shade val="15000"/>
-                        <a:alpha val="0"/>
-                      </a:schemeClr>
-                    </a:solidFill>
-                  </a:ln>
-                  <a:solidFill>
-                    <a:schemeClr val="tx1">
-                      <a:lumMod val="75000"/>
-                      <a:lumOff val="25000"/>
-                    </a:schemeClr>
-                  </a:solidFill>
-                  <a:latin typeface="맑은 고딕" panose="020B0503020000020004" pitchFamily="50" charset="-127"/>
-                  <a:ea typeface="맑은 고딕" panose="020B0503020000020004" pitchFamily="50" charset="-127"/>
-                </a:rPr>
-                <a:t>프로젝트 결과화면</a:t>
-              </a:r>
-              <a:r>
-                <a:rPr lang="en-US" altLang="ko-KR" sz="2800" b="1" dirty="0">
-                  <a:ln>
-                    <a:solidFill>
-                      <a:schemeClr val="accent1">
-                        <a:shade val="15000"/>
-                        <a:alpha val="0"/>
-                      </a:schemeClr>
-                    </a:solidFill>
-                  </a:ln>
-                  <a:solidFill>
-                    <a:schemeClr val="tx1">
-                      <a:lumMod val="75000"/>
-                      <a:lumOff val="25000"/>
-                    </a:schemeClr>
-                  </a:solidFill>
-                  <a:latin typeface="맑은 고딕" panose="020B0503020000020004" pitchFamily="50" charset="-127"/>
-                  <a:ea typeface="맑은 고딕" panose="020B0503020000020004" pitchFamily="50" charset="-127"/>
-                </a:rPr>
-                <a:t>(</a:t>
-              </a:r>
-              <a:r>
-                <a:rPr lang="ko-KR" altLang="en-US" sz="2800" b="1" dirty="0">
-                  <a:ln>
-                    <a:solidFill>
-                      <a:schemeClr val="accent1">
-                        <a:shade val="15000"/>
-                        <a:alpha val="0"/>
-                      </a:schemeClr>
-                    </a:solidFill>
-                  </a:ln>
-                  <a:solidFill>
-                    <a:schemeClr val="tx1">
-                      <a:lumMod val="75000"/>
-                      <a:lumOff val="25000"/>
-                    </a:schemeClr>
-                  </a:solidFill>
-                  <a:latin typeface="맑은 고딕" panose="020B0503020000020004" pitchFamily="50" charset="-127"/>
-                  <a:ea typeface="맑은 고딕" panose="020B0503020000020004" pitchFamily="50" charset="-127"/>
-                </a:rPr>
-                <a:t>벡터연산과 오브젝트의 클래스화</a:t>
-              </a:r>
-              <a:r>
-                <a:rPr lang="en-US" altLang="ko-KR" sz="2800" b="1" dirty="0">
-                  <a:ln>
-                    <a:solidFill>
-                      <a:schemeClr val="accent1">
-                        <a:shade val="15000"/>
-                        <a:alpha val="0"/>
-                      </a:schemeClr>
-                    </a:solidFill>
-                  </a:ln>
-                  <a:solidFill>
-                    <a:schemeClr val="tx1">
-                      <a:lumMod val="75000"/>
-                      <a:lumOff val="25000"/>
-                    </a:schemeClr>
-                  </a:solidFill>
-                  <a:latin typeface="맑은 고딕" panose="020B0503020000020004" pitchFamily="50" charset="-127"/>
-                  <a:ea typeface="맑은 고딕" panose="020B0503020000020004" pitchFamily="50" charset="-127"/>
-                </a:rPr>
-                <a:t>)</a:t>
-              </a:r>
-              <a:endParaRPr lang="ko-KR" altLang="en-US" sz="2800" b="1" dirty="0">
-                <a:ln>
-                  <a:solidFill>
-                    <a:schemeClr val="accent1">
-                      <a:shade val="15000"/>
-                      <a:alpha val="0"/>
-                    </a:schemeClr>
-                  </a:solidFill>
-                </a:ln>
-                <a:solidFill>
-                  <a:schemeClr val="tx1">
-                    <a:lumMod val="75000"/>
-                    <a:lumOff val="25000"/>
-                  </a:schemeClr>
-                </a:solidFill>
-                <a:latin typeface="맑은 고딕" panose="020B0503020000020004" pitchFamily="50" charset="-127"/>
-                <a:ea typeface="맑은 고딕" panose="020B0503020000020004" pitchFamily="50" charset="-127"/>
-              </a:endParaRPr>
-            </a:p>
-          </p:txBody>
-        </p:sp>
-        <p:sp>
-          <p:nvSpPr>
-            <p:cNvPr id="25" name="TextBox 24">
-              <a:extLst>
-                <a:ext uri="{FF2B5EF4-FFF2-40B4-BE49-F238E27FC236}">
-                  <a16:creationId xmlns:a16="http://schemas.microsoft.com/office/drawing/2014/main" id="{093CAA92-4EAE-8A8B-E8EE-0F5B51065B1A}"/>
-                </a:ext>
-              </a:extLst>
-            </p:cNvPr>
-            <p:cNvSpPr txBox="1"/>
-            <p:nvPr/>
-          </p:nvSpPr>
-          <p:spPr>
-            <a:xfrm>
-              <a:off x="376102" y="333243"/>
-              <a:ext cx="1266679" cy="830997"/>
-            </a:xfrm>
-            <a:prstGeom prst="rect">
-              <a:avLst/>
-            </a:prstGeom>
-            <a:noFill/>
-          </p:spPr>
-          <p:txBody>
-            <a:bodyPr wrap="square" tIns="0" bIns="0">
-              <a:spAutoFit/>
-            </a:bodyPr>
-            <a:lstStyle/>
-            <a:p>
-              <a:pPr eaLnBrk="1" fontAlgn="auto" latinLnBrk="1" hangingPunct="1">
-                <a:spcBef>
-                  <a:spcPts val="0"/>
-                </a:spcBef>
-                <a:spcAft>
-                  <a:spcPts val="0"/>
-                </a:spcAft>
-                <a:defRPr/>
-              </a:pPr>
-              <a:r>
-                <a:rPr lang="en-US" altLang="ko-KR" sz="5400" dirty="0">
-                  <a:ln>
-                    <a:solidFill>
-                      <a:schemeClr val="accent1">
-                        <a:shade val="15000"/>
-                        <a:alpha val="0"/>
-                      </a:schemeClr>
-                    </a:solidFill>
-                  </a:ln>
-                  <a:solidFill>
-                    <a:srgbClr val="3378C8"/>
-                  </a:solidFill>
-                  <a:latin typeface="세방고딕 Bold" panose="00000800000000000000" pitchFamily="2" charset="-127"/>
-                  <a:ea typeface="세방고딕 Bold" panose="00000800000000000000" pitchFamily="2" charset="-127"/>
-                </a:rPr>
-                <a:t>01</a:t>
-              </a:r>
-              <a:endParaRPr lang="ko-KR" altLang="en-US" sz="4400" b="1" dirty="0">
-                <a:ln>
-                  <a:solidFill>
-                    <a:schemeClr val="accent1">
-                      <a:shade val="15000"/>
-                      <a:alpha val="0"/>
-                    </a:schemeClr>
-                  </a:solidFill>
-                </a:ln>
-                <a:solidFill>
-                  <a:srgbClr val="3378C8"/>
-                </a:solidFill>
-                <a:latin typeface="세방고딕 Regular" panose="00000500000000000000" pitchFamily="2" charset="-127"/>
-                <a:ea typeface="세방고딕 Regular" panose="00000500000000000000" pitchFamily="2" charset="-127"/>
-              </a:endParaRPr>
-            </a:p>
-          </p:txBody>
-        </p:sp>
-      </p:grpSp>
-      <p:pic>
-        <p:nvPicPr>
-          <p:cNvPr id="26" name="그림 25">
-            <a:extLst>
-              <a:ext uri="{FF2B5EF4-FFF2-40B4-BE49-F238E27FC236}">
-                <a16:creationId xmlns:a16="http://schemas.microsoft.com/office/drawing/2014/main" id="{FE80A41B-F61E-4713-97AE-0B084B8425AD}"/>
-              </a:ext>
-            </a:extLst>
-          </p:cNvPr>
-          <p:cNvPicPr>
-            <a:picLocks noChangeAspect="1"/>
-          </p:cNvPicPr>
-          <p:nvPr/>
-        </p:nvPicPr>
-        <p:blipFill rotWithShape="1">
-          <a:blip r:embed="rId2" cstate="print">
-            <a:duotone>
-              <a:schemeClr val="accent5">
-                <a:shade val="45000"/>
-                <a:satMod val="135000"/>
-              </a:schemeClr>
-              <a:prstClr val="white"/>
-            </a:duotone>
-            <a:alphaModFix amt="27000"/>
-            <a:extLst>
-              <a:ext uri="{28A0092B-C50C-407E-A947-70E740481C1C}">
-                <a14:useLocalDpi xmlns:a14="http://schemas.microsoft.com/office/drawing/2010/main"/>
-              </a:ext>
-            </a:extLst>
-          </a:blip>
-          <a:srcRect/>
-          <a:stretch/>
-        </p:blipFill>
-        <p:spPr>
-          <a:xfrm rot="10800000" flipV="1">
-            <a:off x="-1" y="1673336"/>
-            <a:ext cx="12192000" cy="233580"/>
-          </a:xfrm>
-          <a:prstGeom prst="rect">
-            <a:avLst/>
-          </a:prstGeom>
-        </p:spPr>
-      </p:pic>
-      <p:sp>
-        <p:nvSpPr>
-          <p:cNvPr id="31" name="TextBox 30">
-            <a:extLst>
-              <a:ext uri="{FF2B5EF4-FFF2-40B4-BE49-F238E27FC236}">
-                <a16:creationId xmlns:a16="http://schemas.microsoft.com/office/drawing/2014/main" id="{F3F47CD5-B807-B83F-61E9-F4274413B9B9}"/>
-              </a:ext>
-            </a:extLst>
-          </p:cNvPr>
-          <p:cNvSpPr txBox="1"/>
-          <p:nvPr/>
-        </p:nvSpPr>
-        <p:spPr>
-          <a:xfrm>
-            <a:off x="0" y="0"/>
-            <a:ext cx="12192000" cy="114300"/>
-          </a:xfrm>
-          <a:prstGeom prst="rect">
-            <a:avLst/>
-          </a:prstGeom>
-          <a:solidFill>
-            <a:srgbClr val="FFD85C"/>
-          </a:solidFill>
-          <a:effectLst/>
-        </p:spPr>
-        <p:txBody>
-          <a:bodyPr wrap="square" rtlCol="0" anchor="ctr">
-            <a:noAutofit/>
-          </a:bodyPr>
-          <a:lstStyle/>
-          <a:p>
-            <a:pPr algn="ctr"/>
-            <a:endParaRPr lang="ko-KR" altLang="en-US" sz="1600" b="1" spc="600" dirty="0">
-              <a:ln>
-                <a:solidFill>
-                  <a:schemeClr val="accent1">
-                    <a:shade val="15000"/>
-                    <a:alpha val="0"/>
-                  </a:schemeClr>
-                </a:solidFill>
-              </a:ln>
-              <a:solidFill>
-                <a:srgbClr val="3378C8"/>
-              </a:solidFill>
-              <a:latin typeface="세방고딕 Regular" panose="00000500000000000000" pitchFamily="2" charset="-127"/>
-              <a:ea typeface="세방고딕 Regular" panose="00000500000000000000" pitchFamily="2" charset="-127"/>
-            </a:endParaRPr>
-          </a:p>
-        </p:txBody>
-      </p:sp>
-      <p:sp>
-        <p:nvSpPr>
-          <p:cNvPr id="32" name="TextBox 31">
-            <a:extLst>
-              <a:ext uri="{FF2B5EF4-FFF2-40B4-BE49-F238E27FC236}">
-                <a16:creationId xmlns:a16="http://schemas.microsoft.com/office/drawing/2014/main" id="{33D5EC40-66CF-4031-0B6C-BB0FF72B95AC}"/>
-              </a:ext>
-            </a:extLst>
-          </p:cNvPr>
-          <p:cNvSpPr txBox="1"/>
-          <p:nvPr/>
-        </p:nvSpPr>
-        <p:spPr>
-          <a:xfrm>
-            <a:off x="0" y="0"/>
-            <a:ext cx="1336675" cy="114300"/>
-          </a:xfrm>
-          <a:prstGeom prst="rect">
-            <a:avLst/>
-          </a:prstGeom>
-          <a:solidFill>
-            <a:srgbClr val="3378C8"/>
-          </a:solidFill>
-          <a:effectLst/>
-        </p:spPr>
-        <p:txBody>
-          <a:bodyPr wrap="square" rtlCol="0" anchor="ctr">
-            <a:noAutofit/>
-          </a:bodyPr>
-          <a:lstStyle/>
-          <a:p>
-            <a:pPr algn="ctr"/>
-            <a:endParaRPr lang="ko-KR" altLang="en-US" sz="1600" b="1" spc="600" dirty="0">
-              <a:ln>
-                <a:solidFill>
-                  <a:schemeClr val="accent1">
-                    <a:shade val="15000"/>
-                    <a:alpha val="0"/>
-                  </a:schemeClr>
-                </a:solidFill>
-              </a:ln>
-              <a:solidFill>
-                <a:srgbClr val="3378C8"/>
-              </a:solidFill>
-              <a:latin typeface="세방고딕 Regular" panose="00000500000000000000" pitchFamily="2" charset="-127"/>
-              <a:ea typeface="세방고딕 Regular" panose="00000500000000000000" pitchFamily="2" charset="-127"/>
-            </a:endParaRPr>
-          </a:p>
-        </p:txBody>
-      </p:sp>
-      <p:pic>
-        <p:nvPicPr>
-          <p:cNvPr id="38" name="그래픽 37">
-            <a:extLst>
-              <a:ext uri="{FF2B5EF4-FFF2-40B4-BE49-F238E27FC236}">
-                <a16:creationId xmlns:a16="http://schemas.microsoft.com/office/drawing/2014/main" id="{52169E4C-2799-F656-9DE1-1585D60362A7}"/>
-              </a:ext>
-            </a:extLst>
-          </p:cNvPr>
-          <p:cNvPicPr>
-            <a:picLocks noChangeAspect="1"/>
-          </p:cNvPicPr>
-          <p:nvPr/>
-        </p:nvPicPr>
-        <p:blipFill rotWithShape="1">
-          <a:blip r:embed="rId3">
-            <a:extLst>
-              <a:ext uri="{96DAC541-7B7A-43D3-8B79-37D633B846F1}">
-                <asvg:svgBlip xmlns:asvg="http://schemas.microsoft.com/office/drawing/2016/SVG/main" r:embed="rId4"/>
-              </a:ext>
-            </a:extLst>
-          </a:blip>
-          <a:srcRect l="34974"/>
-          <a:stretch/>
-        </p:blipFill>
-        <p:spPr>
-          <a:xfrm rot="14660350">
-            <a:off x="1714" y="5530566"/>
-            <a:ext cx="1452422" cy="917364"/>
-          </a:xfrm>
-          <a:prstGeom prst="rect">
-            <a:avLst/>
-          </a:prstGeom>
-        </p:spPr>
-      </p:pic>
-      <p:pic>
-        <p:nvPicPr>
-          <p:cNvPr id="5" name="그래픽 4">
-            <a:extLst>
-              <a:ext uri="{FF2B5EF4-FFF2-40B4-BE49-F238E27FC236}">
-                <a16:creationId xmlns:a16="http://schemas.microsoft.com/office/drawing/2014/main" id="{F78E59B9-5F04-49C5-1722-52369FFA7F3C}"/>
-              </a:ext>
-            </a:extLst>
-          </p:cNvPr>
-          <p:cNvPicPr>
-            <a:picLocks noChangeAspect="1"/>
-          </p:cNvPicPr>
-          <p:nvPr/>
-        </p:nvPicPr>
-        <p:blipFill rotWithShape="1">
-          <a:blip r:embed="rId5">
-            <a:extLst>
-              <a:ext uri="{96DAC541-7B7A-43D3-8B79-37D633B846F1}">
-                <asvg:svgBlip xmlns:asvg="http://schemas.microsoft.com/office/drawing/2016/SVG/main" r:embed="rId6"/>
-              </a:ext>
-            </a:extLst>
-          </a:blip>
-          <a:srcRect l="45412"/>
-          <a:stretch/>
-        </p:blipFill>
-        <p:spPr>
-          <a:xfrm>
-            <a:off x="-1" y="3018378"/>
-            <a:ext cx="2914927" cy="2847758"/>
-          </a:xfrm>
-          <a:prstGeom prst="rect">
-            <a:avLst/>
-          </a:prstGeom>
-        </p:spPr>
-      </p:pic>
-      <p:pic>
-        <p:nvPicPr>
-          <p:cNvPr id="7" name="그래픽 6">
-            <a:extLst>
-              <a:ext uri="{FF2B5EF4-FFF2-40B4-BE49-F238E27FC236}">
-                <a16:creationId xmlns:a16="http://schemas.microsoft.com/office/drawing/2014/main" id="{83FBC032-B6AF-A79B-5B30-F603859AE362}"/>
-              </a:ext>
-            </a:extLst>
-          </p:cNvPr>
-          <p:cNvPicPr>
-            <a:picLocks noChangeAspect="1"/>
-          </p:cNvPicPr>
-          <p:nvPr/>
-        </p:nvPicPr>
-        <p:blipFill>
-          <a:blip r:embed="rId7">
-            <a:extLst>
-              <a:ext uri="{96DAC541-7B7A-43D3-8B79-37D633B846F1}">
-                <asvg:svgBlip xmlns:asvg="http://schemas.microsoft.com/office/drawing/2016/SVG/main" r:embed="rId8"/>
-              </a:ext>
-            </a:extLst>
-          </a:blip>
-          <a:stretch>
-            <a:fillRect/>
-          </a:stretch>
-        </p:blipFill>
-        <p:spPr>
-          <a:xfrm>
-            <a:off x="0" y="5934670"/>
-            <a:ext cx="12192000" cy="923330"/>
-          </a:xfrm>
-          <a:prstGeom prst="rect">
-            <a:avLst/>
-          </a:prstGeom>
-        </p:spPr>
-      </p:pic>
-      <p:pic>
-        <p:nvPicPr>
-          <p:cNvPr id="3" name="그림 2">
-            <a:extLst>
-              <a:ext uri="{FF2B5EF4-FFF2-40B4-BE49-F238E27FC236}">
-                <a16:creationId xmlns:a16="http://schemas.microsoft.com/office/drawing/2014/main" id="{E7D09214-7FAC-FD07-A5B4-2B1EEFFDBA12}"/>
-              </a:ext>
-            </a:extLst>
-          </p:cNvPr>
-          <p:cNvPicPr>
-            <a:picLocks noChangeAspect="1"/>
-          </p:cNvPicPr>
-          <p:nvPr/>
-        </p:nvPicPr>
-        <p:blipFill>
-          <a:blip r:embed="rId9"/>
-          <a:stretch>
-            <a:fillRect/>
-          </a:stretch>
-        </p:blipFill>
-        <p:spPr>
-          <a:xfrm>
-            <a:off x="306171" y="1750756"/>
-            <a:ext cx="3341574" cy="3802480"/>
-          </a:xfrm>
-          <a:prstGeom prst="rect">
-            <a:avLst/>
-          </a:prstGeom>
-        </p:spPr>
-      </p:pic>
-      <p:sp>
-        <p:nvSpPr>
-          <p:cNvPr id="4" name="직사각형 3">
-            <a:extLst>
-              <a:ext uri="{FF2B5EF4-FFF2-40B4-BE49-F238E27FC236}">
-                <a16:creationId xmlns:a16="http://schemas.microsoft.com/office/drawing/2014/main" id="{F95671EB-9BF9-09E5-E345-B8D87F7EDFDC}"/>
-              </a:ext>
-            </a:extLst>
-          </p:cNvPr>
-          <p:cNvSpPr/>
-          <p:nvPr/>
-        </p:nvSpPr>
-        <p:spPr>
-          <a:xfrm>
-            <a:off x="274810" y="5595073"/>
-            <a:ext cx="3369654" cy="1015663"/>
-          </a:xfrm>
-          <a:prstGeom prst="rect">
-            <a:avLst/>
-          </a:prstGeom>
-          <a:noFill/>
-        </p:spPr>
-        <p:txBody>
-          <a:bodyPr wrap="square" lIns="91440" tIns="45720" rIns="91440" bIns="45720">
-            <a:spAutoFit/>
-          </a:bodyPr>
-          <a:lstStyle/>
-          <a:p>
-            <a:pPr algn="ctr"/>
-            <a:r>
-              <a:rPr lang="en-US" altLang="ko-KR" sz="2000" b="0" cap="none" spc="0" dirty="0">
-                <a:ln w="0"/>
-                <a:solidFill>
-                  <a:schemeClr val="tx1"/>
-                </a:solidFill>
-                <a:effectLst>
-                  <a:outerShdw blurRad="38100" dist="19050" dir="2700000" algn="tl" rotWithShape="0">
-                    <a:schemeClr val="dk1">
-                      <a:alpha val="40000"/>
-                    </a:schemeClr>
-                  </a:outerShdw>
-                </a:effectLst>
-              </a:rPr>
-              <a:t>Vector </a:t>
-            </a:r>
-            <a:r>
-              <a:rPr lang="ko-KR" altLang="en-US" sz="2000" b="0" cap="none" spc="0" dirty="0">
-                <a:ln w="0"/>
-                <a:solidFill>
-                  <a:schemeClr val="tx1"/>
-                </a:solidFill>
-                <a:effectLst>
-                  <a:outerShdw blurRad="38100" dist="19050" dir="2700000" algn="tl" rotWithShape="0">
-                    <a:schemeClr val="dk1">
-                      <a:alpha val="40000"/>
-                    </a:schemeClr>
-                  </a:outerShdw>
-                </a:effectLst>
-              </a:rPr>
-              <a:t>연산으로 직접 공의 움직임과 충돌을 구현하여 물리법칙을 적용시킴</a:t>
-            </a:r>
-            <a:endParaRPr lang="en-US" altLang="ko-KR" sz="2000" b="0" cap="none" spc="0" dirty="0">
-              <a:ln w="0"/>
-              <a:solidFill>
-                <a:schemeClr val="tx1"/>
-              </a:solidFill>
-              <a:effectLst>
-                <a:outerShdw blurRad="38100" dist="19050" dir="2700000" algn="tl" rotWithShape="0">
-                  <a:schemeClr val="dk1">
-                    <a:alpha val="40000"/>
-                  </a:schemeClr>
-                </a:outerShdw>
-              </a:effectLst>
-            </a:endParaRPr>
-          </a:p>
-        </p:txBody>
-      </p:sp>
-      <p:pic>
-        <p:nvPicPr>
-          <p:cNvPr id="8" name="그림 7">
-            <a:extLst>
-              <a:ext uri="{FF2B5EF4-FFF2-40B4-BE49-F238E27FC236}">
-                <a16:creationId xmlns:a16="http://schemas.microsoft.com/office/drawing/2014/main" id="{8D576345-58AE-00CC-97BB-5A9CDDA9B6B9}"/>
-              </a:ext>
-            </a:extLst>
-          </p:cNvPr>
-          <p:cNvPicPr>
-            <a:picLocks noChangeAspect="1"/>
-          </p:cNvPicPr>
-          <p:nvPr/>
-        </p:nvPicPr>
-        <p:blipFill>
-          <a:blip r:embed="rId10"/>
-          <a:stretch>
-            <a:fillRect/>
-          </a:stretch>
-        </p:blipFill>
-        <p:spPr>
-          <a:xfrm>
-            <a:off x="5228457" y="1816880"/>
-            <a:ext cx="3433712" cy="3367785"/>
-          </a:xfrm>
-          <a:prstGeom prst="rect">
-            <a:avLst/>
-          </a:prstGeom>
-        </p:spPr>
-      </p:pic>
-      <p:pic>
-        <p:nvPicPr>
-          <p:cNvPr id="11" name="그림 10">
-            <a:extLst>
-              <a:ext uri="{FF2B5EF4-FFF2-40B4-BE49-F238E27FC236}">
-                <a16:creationId xmlns:a16="http://schemas.microsoft.com/office/drawing/2014/main" id="{9C497904-0BA3-06A7-AB33-FEC3CF30DA6D}"/>
-              </a:ext>
-            </a:extLst>
-          </p:cNvPr>
-          <p:cNvPicPr>
-            <a:picLocks noChangeAspect="1"/>
-          </p:cNvPicPr>
-          <p:nvPr/>
-        </p:nvPicPr>
-        <p:blipFill>
-          <a:blip r:embed="rId11"/>
-          <a:stretch>
-            <a:fillRect/>
-          </a:stretch>
-        </p:blipFill>
-        <p:spPr>
-          <a:xfrm>
-            <a:off x="8794327" y="2296974"/>
-            <a:ext cx="3172003" cy="1635911"/>
-          </a:xfrm>
-          <a:prstGeom prst="rect">
-            <a:avLst/>
-          </a:prstGeom>
-        </p:spPr>
-      </p:pic>
-      <p:pic>
-        <p:nvPicPr>
-          <p:cNvPr id="13" name="그림 12">
-            <a:extLst>
-              <a:ext uri="{FF2B5EF4-FFF2-40B4-BE49-F238E27FC236}">
-                <a16:creationId xmlns:a16="http://schemas.microsoft.com/office/drawing/2014/main" id="{A62B4838-C542-5026-80FC-CFADDDF28950}"/>
-              </a:ext>
-            </a:extLst>
-          </p:cNvPr>
-          <p:cNvPicPr>
-            <a:picLocks noChangeAspect="1"/>
-          </p:cNvPicPr>
-          <p:nvPr/>
-        </p:nvPicPr>
-        <p:blipFill>
-          <a:blip r:embed="rId12"/>
-          <a:stretch>
-            <a:fillRect/>
-          </a:stretch>
-        </p:blipFill>
-        <p:spPr>
-          <a:xfrm>
-            <a:off x="6315736" y="4013576"/>
-            <a:ext cx="2700715" cy="2629267"/>
-          </a:xfrm>
-          <a:prstGeom prst="rect">
-            <a:avLst/>
-          </a:prstGeom>
-        </p:spPr>
-      </p:pic>
-      <p:sp>
-        <p:nvSpPr>
-          <p:cNvPr id="14" name="직사각형 13">
-            <a:extLst>
-              <a:ext uri="{FF2B5EF4-FFF2-40B4-BE49-F238E27FC236}">
-                <a16:creationId xmlns:a16="http://schemas.microsoft.com/office/drawing/2014/main" id="{43F3CF22-4DF2-82F4-8554-FC19B0EFB5FE}"/>
-              </a:ext>
-            </a:extLst>
-          </p:cNvPr>
-          <p:cNvSpPr/>
-          <p:nvPr/>
-        </p:nvSpPr>
-        <p:spPr>
-          <a:xfrm>
-            <a:off x="8594805" y="4635129"/>
-            <a:ext cx="3571049" cy="400110"/>
-          </a:xfrm>
-          <a:prstGeom prst="rect">
-            <a:avLst/>
-          </a:prstGeom>
-          <a:noFill/>
-        </p:spPr>
-        <p:txBody>
-          <a:bodyPr wrap="square" lIns="91440" tIns="45720" rIns="91440" bIns="45720">
-            <a:spAutoFit/>
-          </a:bodyPr>
-          <a:lstStyle/>
-          <a:p>
-            <a:pPr algn="ctr"/>
-            <a:r>
-              <a:rPr lang="ko-KR" altLang="en-US" sz="2000" b="0" cap="none" spc="0" dirty="0">
-                <a:ln w="0"/>
-                <a:solidFill>
-                  <a:schemeClr val="tx1"/>
-                </a:solidFill>
-                <a:effectLst>
-                  <a:outerShdw blurRad="38100" dist="19050" dir="2700000" algn="tl" rotWithShape="0">
-                    <a:schemeClr val="dk1">
-                      <a:alpha val="40000"/>
-                    </a:schemeClr>
-                  </a:outerShdw>
-                </a:effectLst>
-              </a:rPr>
-              <a:t>오브젝트들의 클래스화</a:t>
-            </a:r>
-            <a:endParaRPr lang="en-US" altLang="ko-KR" sz="2000" b="0" cap="none" spc="0" dirty="0">
-              <a:ln w="0"/>
-              <a:solidFill>
-                <a:schemeClr val="tx1"/>
-              </a:solidFill>
-              <a:effectLst>
-                <a:outerShdw blurRad="38100" dist="19050" dir="2700000" algn="tl" rotWithShape="0">
-                  <a:schemeClr val="dk1">
-                    <a:alpha val="40000"/>
-                  </a:schemeClr>
-                </a:outerShdw>
-              </a:effectLst>
-            </a:endParaRPr>
-          </a:p>
-        </p:txBody>
-      </p:sp>
-    </p:spTree>
-    <p:extLst>
-      <p:ext uri="{BB962C8B-B14F-4D97-AF65-F5344CB8AC3E}">
-        <p14:creationId xmlns:p14="http://schemas.microsoft.com/office/powerpoint/2010/main" val="1595474381"/>
       </p:ext>
     </p:extLst>
   </p:cSld>

--- a/보고서/PPT/결과보고서_6조(벽돌깨기게임).pptx
+++ b/보고서/PPT/결과보고서_6조(벽돌깨기게임).pptx
@@ -299,7 +299,7 @@
           <a:p>
             <a:fld id="{3FB245E4-741B-46A9-94D1-0E241DD65ACD}" type="datetimeFigureOut">
               <a:rPr lang="ko-KR" altLang="en-US" smtClean="0"/>
-              <a:t>2024-07-21</a:t>
+              <a:t>2024-07-22</a:t>
             </a:fld>
             <a:endParaRPr lang="ko-KR" altLang="en-US"/>
           </a:p>
@@ -497,7 +497,7 @@
           <a:p>
             <a:fld id="{3FB245E4-741B-46A9-94D1-0E241DD65ACD}" type="datetimeFigureOut">
               <a:rPr lang="ko-KR" altLang="en-US" smtClean="0"/>
-              <a:t>2024-07-21</a:t>
+              <a:t>2024-07-22</a:t>
             </a:fld>
             <a:endParaRPr lang="ko-KR" altLang="en-US"/>
           </a:p>
@@ -705,7 +705,7 @@
           <a:p>
             <a:fld id="{3FB245E4-741B-46A9-94D1-0E241DD65ACD}" type="datetimeFigureOut">
               <a:rPr lang="ko-KR" altLang="en-US" smtClean="0"/>
-              <a:t>2024-07-21</a:t>
+              <a:t>2024-07-22</a:t>
             </a:fld>
             <a:endParaRPr lang="ko-KR" altLang="en-US"/>
           </a:p>
@@ -1129,7 +1129,7 @@
           <a:p>
             <a:fld id="{3FB245E4-741B-46A9-94D1-0E241DD65ACD}" type="datetimeFigureOut">
               <a:rPr lang="ko-KR" altLang="en-US" smtClean="0"/>
-              <a:t>2024-07-21</a:t>
+              <a:t>2024-07-22</a:t>
             </a:fld>
             <a:endParaRPr lang="ko-KR" altLang="en-US"/>
           </a:p>
@@ -1404,7 +1404,7 @@
           <a:p>
             <a:fld id="{3FB245E4-741B-46A9-94D1-0E241DD65ACD}" type="datetimeFigureOut">
               <a:rPr lang="ko-KR" altLang="en-US" smtClean="0"/>
-              <a:t>2024-07-21</a:t>
+              <a:t>2024-07-22</a:t>
             </a:fld>
             <a:endParaRPr lang="ko-KR" altLang="en-US"/>
           </a:p>
@@ -1669,7 +1669,7 @@
           <a:p>
             <a:fld id="{3FB245E4-741B-46A9-94D1-0E241DD65ACD}" type="datetimeFigureOut">
               <a:rPr lang="ko-KR" altLang="en-US" smtClean="0"/>
-              <a:t>2024-07-21</a:t>
+              <a:t>2024-07-22</a:t>
             </a:fld>
             <a:endParaRPr lang="ko-KR" altLang="en-US"/>
           </a:p>
@@ -2081,7 +2081,7 @@
           <a:p>
             <a:fld id="{3FB245E4-741B-46A9-94D1-0E241DD65ACD}" type="datetimeFigureOut">
               <a:rPr lang="ko-KR" altLang="en-US" smtClean="0"/>
-              <a:t>2024-07-21</a:t>
+              <a:t>2024-07-22</a:t>
             </a:fld>
             <a:endParaRPr lang="ko-KR" altLang="en-US"/>
           </a:p>
@@ -2222,7 +2222,7 @@
           <a:p>
             <a:fld id="{3FB245E4-741B-46A9-94D1-0E241DD65ACD}" type="datetimeFigureOut">
               <a:rPr lang="ko-KR" altLang="en-US" smtClean="0"/>
-              <a:t>2024-07-21</a:t>
+              <a:t>2024-07-22</a:t>
             </a:fld>
             <a:endParaRPr lang="ko-KR" altLang="en-US"/>
           </a:p>
@@ -2335,7 +2335,7 @@
           <a:p>
             <a:fld id="{3FB245E4-741B-46A9-94D1-0E241DD65ACD}" type="datetimeFigureOut">
               <a:rPr lang="ko-KR" altLang="en-US" smtClean="0"/>
-              <a:t>2024-07-21</a:t>
+              <a:t>2024-07-22</a:t>
             </a:fld>
             <a:endParaRPr lang="ko-KR" altLang="en-US"/>
           </a:p>
@@ -2646,7 +2646,7 @@
           <a:p>
             <a:fld id="{3FB245E4-741B-46A9-94D1-0E241DD65ACD}" type="datetimeFigureOut">
               <a:rPr lang="ko-KR" altLang="en-US" smtClean="0"/>
-              <a:t>2024-07-21</a:t>
+              <a:t>2024-07-22</a:t>
             </a:fld>
             <a:endParaRPr lang="ko-KR" altLang="en-US"/>
           </a:p>
@@ -2934,7 +2934,7 @@
           <a:p>
             <a:fld id="{3FB245E4-741B-46A9-94D1-0E241DD65ACD}" type="datetimeFigureOut">
               <a:rPr lang="ko-KR" altLang="en-US" smtClean="0"/>
-              <a:t>2024-07-21</a:t>
+              <a:t>2024-07-22</a:t>
             </a:fld>
             <a:endParaRPr lang="ko-KR" altLang="en-US"/>
           </a:p>
@@ -3175,7 +3175,7 @@
           <a:p>
             <a:fld id="{3FB245E4-741B-46A9-94D1-0E241DD65ACD}" type="datetimeFigureOut">
               <a:rPr lang="ko-KR" altLang="en-US" smtClean="0"/>
-              <a:t>2024-07-21</a:t>
+              <a:t>2024-07-22</a:t>
             </a:fld>
             <a:endParaRPr lang="ko-KR" altLang="en-US"/>
           </a:p>
@@ -21767,7 +21767,7 @@
         </p:blipFill>
         <p:spPr>
           <a:xfrm>
-            <a:off x="1127448" y="1389822"/>
+            <a:off x="4799856" y="1287200"/>
             <a:ext cx="3472918" cy="5199102"/>
           </a:xfrm>
           <a:prstGeom prst="rect">
@@ -22776,7 +22776,27 @@
             <a:pPr algn="ctr"/>
             <a:r>
               <a:rPr lang="ko-KR" altLang="en-US" sz="1000" dirty="0"/>
-              <a:t>모든 벽돌을 부셨는가</a:t>
+              <a:t>벽돌의</a:t>
+            </a:r>
+            <a:endParaRPr lang="en-US" altLang="ko-KR" sz="1000" dirty="0"/>
+          </a:p>
+          <a:p>
+            <a:pPr algn="ctr"/>
+            <a:r>
+              <a:rPr lang="ko-KR" altLang="en-US" sz="1000" dirty="0"/>
+              <a:t>생명력이 </a:t>
+            </a:r>
+            <a:endParaRPr lang="en-US" altLang="ko-KR" sz="1000" dirty="0"/>
+          </a:p>
+          <a:p>
+            <a:pPr algn="ctr"/>
+            <a:r>
+              <a:rPr lang="en-US" altLang="ko-KR" sz="1000" dirty="0"/>
+              <a:t>0 </a:t>
+            </a:r>
+            <a:r>
+              <a:rPr lang="ko-KR" altLang="en-US" sz="1000" dirty="0"/>
+              <a:t>인가</a:t>
             </a:r>
             <a:r>
               <a:rPr lang="en-US" altLang="ko-KR" sz="1000" dirty="0"/>
